--- a/docs/competition/AgentRig-GOAI-2026-初赛方案.pptx
+++ b/docs/competition/AgentRig-GOAI-2026-初赛方案.pptx
@@ -5425,7 +5425,7 @@
                 </a:solidFill>
                 <a:latin typeface="IBM Plex Mono"/>
               </a:rPr>
-              <a:t>10</a:t>
+              <a:t>11</a:t>
             </a:r>
           </a:p>
         </p:txBody>
@@ -14848,7 +14848,7 @@
                 </a:solidFill>
                 <a:latin typeface="PingFang SC"/>
               </a:rPr>
-              <a:t>10 个 Skill + 三套最小权限 MCP 工具集</a:t>
+              <a:t>11 个 Skill + 三套最小权限 MCP 工具集</a:t>
             </a:r>
           </a:p>
         </p:txBody>
@@ -15020,7 +15020,7 @@
                 </a:solidFill>
                 <a:latin typeface="IBM Plex Mono"/>
               </a:rPr>
-              <a:t>MANAGER / 5</a:t>
+              <a:t>MANAGER / 6</a:t>
             </a:r>
           </a:p>
         </p:txBody>
@@ -15149,7 +15149,7 @@
                 </a:solidFill>
                 <a:latin typeface="IBM Plex Mono"/>
               </a:rPr>
-              <a:t>plan-evaluation</a:t>
+              <a:t>adaptive-evaluation</a:t>
             </a:r>
           </a:p>
         </p:txBody>
@@ -15278,7 +15278,7 @@
                 </a:solidFill>
                 <a:latin typeface="IBM Plex Mono"/>
               </a:rPr>
-              <a:t>execute-evaluation-plan</a:t>
+              <a:t>plan-evaluation</a:t>
             </a:r>
           </a:p>
         </p:txBody>
@@ -15407,7 +15407,7 @@
                 </a:solidFill>
                 <a:latin typeface="IBM Plex Mono"/>
               </a:rPr>
-              <a:t>diagnose-run</a:t>
+              <a:t>execute-evaluation-plan</a:t>
             </a:r>
           </a:p>
         </p:txBody>
@@ -15536,7 +15536,7 @@
                 </a:solidFill>
                 <a:latin typeface="IBM Plex Mono"/>
               </a:rPr>
-              <a:t>build-test-case-draft</a:t>
+              <a:t>diagnose-run</a:t>
             </a:r>
           </a:p>
         </p:txBody>
@@ -15665,6 +15665,135 @@
                 </a:solidFill>
                 <a:latin typeface="IBM Plex Mono"/>
               </a:rPr>
+              <a:t>build-test-case-draft</a:t>
+            </a:r>
+          </a:p>
+        </p:txBody>
+      </p:sp>
+      <p:sp>
+        <p:nvSpPr>
+          <p:cNvPr id="25" name="Rectangle 24"/>
+          <p:cNvSpPr/>
+          <p:nvPr/>
+        </p:nvSpPr>
+        <p:spPr>
+          <a:xfrm>
+            <a:off x="822959" y="5138928"/>
+            <a:ext cx="3246120" cy="365760"/>
+          </a:xfrm>
+          <a:prstGeom prst="rect">
+            <a:avLst/>
+          </a:prstGeom>
+          <a:solidFill>
+            <a:srgbClr val="F7F8F7"/>
+          </a:solidFill>
+          <a:ln w="8890">
+            <a:solidFill>
+              <a:srgbClr val="D7DDD9"/>
+            </a:solidFill>
+          </a:ln>
+        </p:spPr>
+        <p:style>
+          <a:lnRef idx="1">
+            <a:schemeClr val="accent1"/>
+          </a:lnRef>
+          <a:fillRef idx="3">
+            <a:schemeClr val="accent1"/>
+          </a:fillRef>
+          <a:effectRef idx="2">
+            <a:schemeClr val="accent1"/>
+          </a:effectRef>
+          <a:fontRef idx="minor">
+            <a:schemeClr val="lt1"/>
+          </a:fontRef>
+        </p:style>
+        <p:txBody>
+          <a:bodyPr rtlCol="0" anchor="ctr"/>
+          <a:lstStyle/>
+          <a:p>
+            <a:pPr algn="ctr"/>
+          </a:p>
+        </p:txBody>
+      </p:sp>
+      <p:sp>
+        <p:nvSpPr>
+          <p:cNvPr id="26" name="TextBox 25"/>
+          <p:cNvSpPr txBox="1"/>
+          <p:nvPr/>
+        </p:nvSpPr>
+        <p:spPr>
+          <a:xfrm>
+            <a:off x="950976" y="5248656"/>
+            <a:ext cx="292608" cy="137160"/>
+          </a:xfrm>
+          <a:prstGeom prst="rect">
+            <a:avLst/>
+          </a:prstGeom>
+          <a:noFill/>
+        </p:spPr>
+        <p:txBody>
+          <a:bodyPr wrap="none" lIns="0" rIns="0" tIns="0" bIns="0" anchor="t">
+            <a:spAutoFit/>
+          </a:bodyPr>
+          <a:lstStyle/>
+          <a:p>
+            <a:pPr algn="l">
+              <a:lnSpc>
+                <a:spcPct val="108000"/>
+              </a:lnSpc>
+              <a:spcAft>
+                <a:spcPts val="0"/>
+              </a:spcAft>
+            </a:pPr>
+            <a:r>
+              <a:rPr sz="650" b="0">
+                <a:solidFill>
+                  <a:srgbClr val="737B77"/>
+                </a:solidFill>
+                <a:latin typeface="IBM Plex Mono"/>
+              </a:rPr>
+              <a:t>06</a:t>
+            </a:r>
+          </a:p>
+        </p:txBody>
+      </p:sp>
+      <p:sp>
+        <p:nvSpPr>
+          <p:cNvPr id="27" name="TextBox 26"/>
+          <p:cNvSpPr txBox="1"/>
+          <p:nvPr/>
+        </p:nvSpPr>
+        <p:spPr>
+          <a:xfrm>
+            <a:off x="1298448" y="5221224"/>
+            <a:ext cx="2606040" cy="182880"/>
+          </a:xfrm>
+          <a:prstGeom prst="rect">
+            <a:avLst/>
+          </a:prstGeom>
+          <a:noFill/>
+        </p:spPr>
+        <p:txBody>
+          <a:bodyPr wrap="none" lIns="0" rIns="0" tIns="0" bIns="0" anchor="t">
+            <a:spAutoFit/>
+          </a:bodyPr>
+          <a:lstStyle/>
+          <a:p>
+            <a:pPr algn="l">
+              <a:lnSpc>
+                <a:spcPct val="108000"/>
+              </a:lnSpc>
+              <a:spcAft>
+                <a:spcPts val="0"/>
+              </a:spcAft>
+            </a:pPr>
+            <a:r>
+              <a:rPr sz="850" b="1">
+                <a:solidFill>
+                  <a:srgbClr val="252927"/>
+                </a:solidFill>
+                <a:latin typeface="IBM Plex Mono"/>
+              </a:rPr>
               <a:t>configure-test-target</a:t>
             </a:r>
           </a:p>
@@ -15672,7 +15801,7 @@
       </p:sp>
       <p:sp>
         <p:nvSpPr>
-          <p:cNvPr id="25" name="Rectangle 24"/>
+          <p:cNvPr id="28" name="Rectangle 27"/>
           <p:cNvSpPr/>
           <p:nvPr/>
         </p:nvSpPr>
@@ -15717,7 +15846,7 @@
       </p:sp>
       <p:sp>
         <p:nvSpPr>
-          <p:cNvPr id="26" name="TextBox 25"/>
+          <p:cNvPr id="29" name="TextBox 28"/>
           <p:cNvSpPr txBox="1"/>
           <p:nvPr/>
         </p:nvSpPr>
@@ -15759,7 +15888,7 @@
       </p:sp>
       <p:sp>
         <p:nvSpPr>
-          <p:cNvPr id="27" name="Rectangle 26"/>
+          <p:cNvPr id="30" name="Rectangle 29"/>
           <p:cNvSpPr/>
           <p:nvPr/>
         </p:nvSpPr>
@@ -15804,7 +15933,7 @@
       </p:sp>
       <p:sp>
         <p:nvSpPr>
-          <p:cNvPr id="28" name="TextBox 27"/>
+          <p:cNvPr id="31" name="TextBox 30"/>
           <p:cNvSpPr txBox="1"/>
           <p:nvPr/>
         </p:nvSpPr>
@@ -15846,7 +15975,7 @@
       </p:sp>
       <p:sp>
         <p:nvSpPr>
-          <p:cNvPr id="29" name="TextBox 28"/>
+          <p:cNvPr id="32" name="TextBox 31"/>
           <p:cNvSpPr txBox="1"/>
           <p:nvPr/>
         </p:nvSpPr>
@@ -15888,7 +16017,7 @@
       </p:sp>
       <p:sp>
         <p:nvSpPr>
-          <p:cNvPr id="30" name="Rectangle 29"/>
+          <p:cNvPr id="33" name="Rectangle 32"/>
           <p:cNvSpPr/>
           <p:nvPr/>
         </p:nvSpPr>
@@ -15933,7 +16062,7 @@
       </p:sp>
       <p:sp>
         <p:nvSpPr>
-          <p:cNvPr id="31" name="TextBox 30"/>
+          <p:cNvPr id="34" name="TextBox 33"/>
           <p:cNvSpPr txBox="1"/>
           <p:nvPr/>
         </p:nvSpPr>
@@ -15975,7 +16104,7 @@
       </p:sp>
       <p:sp>
         <p:nvSpPr>
-          <p:cNvPr id="32" name="TextBox 31"/>
+          <p:cNvPr id="35" name="TextBox 34"/>
           <p:cNvSpPr txBox="1"/>
           <p:nvPr/>
         </p:nvSpPr>
@@ -16017,7 +16146,7 @@
       </p:sp>
       <p:sp>
         <p:nvSpPr>
-          <p:cNvPr id="33" name="Rectangle 32"/>
+          <p:cNvPr id="36" name="Rectangle 35"/>
           <p:cNvSpPr/>
           <p:nvPr/>
         </p:nvSpPr>
@@ -16062,7 +16191,7 @@
       </p:sp>
       <p:sp>
         <p:nvSpPr>
-          <p:cNvPr id="34" name="TextBox 33"/>
+          <p:cNvPr id="37" name="TextBox 36"/>
           <p:cNvSpPr txBox="1"/>
           <p:nvPr/>
         </p:nvSpPr>
@@ -16104,7 +16233,7 @@
       </p:sp>
       <p:sp>
         <p:nvSpPr>
-          <p:cNvPr id="35" name="Rectangle 34"/>
+          <p:cNvPr id="38" name="Rectangle 37"/>
           <p:cNvSpPr/>
           <p:nvPr/>
         </p:nvSpPr>
@@ -16149,7 +16278,7 @@
       </p:sp>
       <p:sp>
         <p:nvSpPr>
-          <p:cNvPr id="36" name="TextBox 35"/>
+          <p:cNvPr id="39" name="TextBox 38"/>
           <p:cNvSpPr txBox="1"/>
           <p:nvPr/>
         </p:nvSpPr>
@@ -16191,7 +16320,7 @@
       </p:sp>
       <p:sp>
         <p:nvSpPr>
-          <p:cNvPr id="37" name="TextBox 36"/>
+          <p:cNvPr id="40" name="TextBox 39"/>
           <p:cNvSpPr txBox="1"/>
           <p:nvPr/>
         </p:nvSpPr>
@@ -16226,14 +16355,14 @@
                 </a:solidFill>
                 <a:latin typeface="IBM Plex Mono"/>
               </a:rPr>
-              <a:t>run-evaluations</a:t>
-            </a:r>
-          </a:p>
-        </p:txBody>
-      </p:sp>
-      <p:sp>
-        <p:nvSpPr>
-          <p:cNvPr id="38" name="Rectangle 37"/>
+              <a:t>run-test-cases</a:t>
+            </a:r>
+          </a:p>
+        </p:txBody>
+      </p:sp>
+      <p:sp>
+        <p:nvSpPr>
+          <p:cNvPr id="41" name="Rectangle 40"/>
           <p:cNvSpPr/>
           <p:nvPr/>
         </p:nvSpPr>
@@ -16278,7 +16407,7 @@
       </p:sp>
       <p:sp>
         <p:nvSpPr>
-          <p:cNvPr id="39" name="TextBox 38"/>
+          <p:cNvPr id="42" name="TextBox 41"/>
           <p:cNvSpPr txBox="1"/>
           <p:nvPr/>
         </p:nvSpPr>
@@ -16320,7 +16449,7 @@
       </p:sp>
       <p:sp>
         <p:nvSpPr>
-          <p:cNvPr id="40" name="TextBox 39"/>
+          <p:cNvPr id="43" name="TextBox 42"/>
           <p:cNvSpPr txBox="1"/>
           <p:nvPr/>
         </p:nvSpPr>
@@ -16355,14 +16484,14 @@
                 </a:solidFill>
                 <a:latin typeface="IBM Plex Mono"/>
               </a:rPr>
-              <a:t>build-test-cases</a:t>
-            </a:r>
-          </a:p>
-        </p:txBody>
-      </p:sp>
-      <p:sp>
-        <p:nvSpPr>
-          <p:cNvPr id="41" name="Rectangle 40"/>
+              <a:t>build-test-case</a:t>
+            </a:r>
+          </a:p>
+        </p:txBody>
+      </p:sp>
+      <p:sp>
+        <p:nvSpPr>
+          <p:cNvPr id="44" name="Rectangle 43"/>
           <p:cNvSpPr/>
           <p:nvPr/>
         </p:nvSpPr>
@@ -16407,7 +16536,7 @@
       </p:sp>
       <p:sp>
         <p:nvSpPr>
-          <p:cNvPr id="42" name="TextBox 41"/>
+          <p:cNvPr id="45" name="TextBox 44"/>
           <p:cNvSpPr txBox="1"/>
           <p:nvPr/>
         </p:nvSpPr>
@@ -16449,7 +16578,7 @@
       </p:sp>
       <p:sp>
         <p:nvSpPr>
-          <p:cNvPr id="43" name="TextBox 42"/>
+          <p:cNvPr id="46" name="TextBox 45"/>
           <p:cNvSpPr txBox="1"/>
           <p:nvPr/>
         </p:nvSpPr>
@@ -16484,14 +16613,14 @@
                 </a:solidFill>
                 <a:latin typeface="IBM Plex Mono"/>
               </a:rPr>
-              <a:t>collect-tool-samples</a:t>
-            </a:r>
-          </a:p>
-        </p:txBody>
-      </p:sp>
-      <p:sp>
-        <p:nvSpPr>
-          <p:cNvPr id="44" name="TextBox 43"/>
+              <a:t>harvest-tool-samples</a:t>
+            </a:r>
+          </a:p>
+        </p:txBody>
+      </p:sp>
+      <p:sp>
+        <p:nvSpPr>
+          <p:cNvPr id="47" name="TextBox 46"/>
           <p:cNvSpPr txBox="1"/>
           <p:nvPr/>
         </p:nvSpPr>

--- a/docs/competition/AgentRig-GOAI-2026-初赛方案.pptx
+++ b/docs/competition/AgentRig-GOAI-2026-初赛方案.pptx
@@ -17,6 +17,9 @@
     <p:sldId id="265" r:id="rId16"/>
     <p:sldId id="266" r:id="rId17"/>
     <p:sldId id="267" r:id="rId18"/>
+    <p:sldId id="268" r:id="rId19"/>
+    <p:sldId id="269" r:id="rId20"/>
+    <p:sldId id="270" r:id="rId21"/>
   </p:sldIdLst>
   <p:sldSz cx="12191695" cy="6858000" type="screen4x3"/>
   <p:notesSz cx="6858000" cy="9144000"/>
@@ -3229,7 +3232,7 @@
                 <a:solidFill>
                   <a:srgbClr val="FFFFFF"/>
                 </a:solidFill>
-                <a:latin typeface="IBM Plex Mono"/>
+                <a:latin typeface="Courier New"/>
               </a:rPr>
               <a:t>AGENTRIG</a:t>
             </a:r>
@@ -3318,7 +3321,7 @@
                 <a:solidFill>
                   <a:srgbClr val="BFC5C1"/>
                 </a:solidFill>
-                <a:latin typeface="IBM Plex Mono"/>
+                <a:latin typeface="Courier New"/>
               </a:rPr>
               <a:t>GOAI 2026 · AGENT INFRA</a:t>
             </a:r>
@@ -3534,7 +3537,7 @@
                 <a:solidFill>
                   <a:srgbClr val="BFC5C1"/>
                 </a:solidFill>
-                <a:latin typeface="IBM Plex Mono"/>
+                <a:latin typeface="Courier New"/>
               </a:rPr>
               <a:t>AGENTTEAMS</a:t>
             </a:r>
@@ -3623,7 +3626,7 @@
                 <a:solidFill>
                   <a:srgbClr val="BFC5C1"/>
                 </a:solidFill>
-                <a:latin typeface="IBM Plex Mono"/>
+                <a:latin typeface="Courier New"/>
               </a:rPr>
               <a:t>MCP</a:t>
             </a:r>
@@ -3712,7 +3715,7 @@
                 <a:solidFill>
                   <a:srgbClr val="BFC5C1"/>
                 </a:solidFill>
-                <a:latin typeface="IBM Plex Mono"/>
+                <a:latin typeface="Courier New"/>
               </a:rPr>
               <a:t>EVALUATION</a:t>
             </a:r>
@@ -3801,7 +3804,7 @@
                 <a:solidFill>
                   <a:srgbClr val="BFC5C1"/>
                 </a:solidFill>
-                <a:latin typeface="IBM Plex Mono"/>
+                <a:latin typeface="Courier New"/>
               </a:rPr>
               <a:t>EVIDENCE</a:t>
             </a:r>
@@ -3890,7 +3893,7 @@
                 <a:solidFill>
                   <a:srgbClr val="BFC5C1"/>
                 </a:solidFill>
-                <a:latin typeface="IBM Plex Mono"/>
+                <a:latin typeface="Courier New"/>
               </a:rPr>
               <a:t>AUDIT</a:t>
             </a:r>
@@ -3975,7 +3978,7 @@
                 <a:solidFill>
                   <a:srgbClr val="737A76"/>
                 </a:solidFill>
-                <a:latin typeface="IBM Plex Mono"/>
+                <a:latin typeface="Courier New"/>
               </a:rPr>
               <a:t>2026.08  /  v0.2.0a0</a:t>
             </a:r>
@@ -4088,7 +4091,7 @@
                 <a:solidFill>
                   <a:srgbClr val="2457F5"/>
                 </a:solidFill>
-                <a:latin typeface="IBM Plex Mono"/>
+                <a:latin typeface="Courier New"/>
               </a:rPr>
               <a:t>LIVE DEMO</a:t>
             </a:r>
@@ -4257,7 +4260,7 @@
                 <a:solidFill>
                   <a:srgbClr val="737B77"/>
                 </a:solidFill>
-                <a:latin typeface="IBM Plex Mono"/>
+                <a:latin typeface="Courier New"/>
               </a:rPr>
               <a:t>AGENTRIG / GOAI 2026                                      10 / 12</a:t>
             </a:r>
@@ -4344,7 +4347,7 @@
                 <a:solidFill>
                   <a:srgbClr val="8E9691"/>
                 </a:solidFill>
-                <a:latin typeface="IBM Plex Mono"/>
+                <a:latin typeface="Courier New"/>
               </a:rPr>
               <a:t>DEMO CONTRACT</a:t>
             </a:r>
@@ -4386,7 +4389,7 @@
                 <a:solidFill>
                   <a:srgbClr val="2457F5"/>
                 </a:solidFill>
-                <a:latin typeface="IBM Plex Mono"/>
+                <a:latin typeface="Courier New"/>
               </a:rPr>
               <a:t>01</a:t>
             </a:r>
@@ -4512,7 +4515,7 @@
                 <a:solidFill>
                   <a:srgbClr val="2457F5"/>
                 </a:solidFill>
-                <a:latin typeface="IBM Plex Mono"/>
+                <a:latin typeface="Courier New"/>
               </a:rPr>
               <a:t>02</a:t>
             </a:r>
@@ -4638,7 +4641,7 @@
                 <a:solidFill>
                   <a:srgbClr val="2457F5"/>
                 </a:solidFill>
-                <a:latin typeface="IBM Plex Mono"/>
+                <a:latin typeface="Courier New"/>
               </a:rPr>
               <a:t>03</a:t>
             </a:r>
@@ -4811,7 +4814,7 @@
                 <a:solidFill>
                   <a:srgbClr val="BFC5C1"/>
                 </a:solidFill>
-                <a:latin typeface="IBM Plex Mono"/>
+                <a:latin typeface="Courier New"/>
               </a:rPr>
               <a:t>REAL TARGET / NO FAKE DRIVER</a:t>
             </a:r>
@@ -4948,7 +4951,7 @@
                 <a:solidFill>
                   <a:srgbClr val="2457F5"/>
                 </a:solidFill>
-                <a:latin typeface="IBM Plex Mono"/>
+                <a:latin typeface="Courier New"/>
               </a:rPr>
               <a:t>ENGINEERING</a:t>
             </a:r>
@@ -5117,7 +5120,7 @@
                 <a:solidFill>
                   <a:srgbClr val="737B77"/>
                 </a:solidFill>
-                <a:latin typeface="IBM Plex Mono"/>
+                <a:latin typeface="Courier New"/>
               </a:rPr>
               <a:t>AGENTRIG / GOAI 2026                                      11 / 12</a:t>
             </a:r>
@@ -5249,7 +5252,7 @@
                 <a:solidFill>
                   <a:srgbClr val="151719"/>
                 </a:solidFill>
-                <a:latin typeface="IBM Plex Mono"/>
+                <a:latin typeface="Courier New"/>
               </a:rPr>
               <a:t>3+</a:t>
             </a:r>
@@ -5423,7 +5426,7 @@
                 <a:solidFill>
                   <a:srgbClr val="151719"/>
                 </a:solidFill>
-                <a:latin typeface="IBM Plex Mono"/>
+                <a:latin typeface="Courier New"/>
               </a:rPr>
               <a:t>11</a:t>
             </a:r>
@@ -5597,7 +5600,7 @@
                 <a:solidFill>
                   <a:srgbClr val="151719"/>
                 </a:solidFill>
-                <a:latin typeface="IBM Plex Mono"/>
+                <a:latin typeface="Courier New"/>
               </a:rPr>
               <a:t>4</a:t>
             </a:r>
@@ -5771,7 +5774,7 @@
                 <a:solidFill>
                   <a:srgbClr val="151719"/>
                 </a:solidFill>
-                <a:latin typeface="IBM Plex Mono"/>
+                <a:latin typeface="Courier New"/>
               </a:rPr>
               <a:t>3</a:t>
             </a:r>
@@ -5900,7 +5903,7 @@
                 <a:solidFill>
                   <a:srgbClr val="2457F5"/>
                 </a:solidFill>
-                <a:latin typeface="IBM Plex Mono"/>
+                <a:latin typeface="Courier New"/>
               </a:rPr>
               <a:t>STACK</a:t>
             </a:r>
@@ -6029,7 +6032,7 @@
                 <a:solidFill>
                   <a:srgbClr val="2457F5"/>
                 </a:solidFill>
-                <a:latin typeface="IBM Plex Mono"/>
+                <a:latin typeface="Courier New"/>
               </a:rPr>
               <a:t>DRIVERS</a:t>
             </a:r>
@@ -6158,7 +6161,7 @@
                 <a:solidFill>
                   <a:srgbClr val="2457F5"/>
                 </a:solidFill>
-                <a:latin typeface="IBM Plex Mono"/>
+                <a:latin typeface="Courier New"/>
               </a:rPr>
               <a:t>STORAGE</a:t>
             </a:r>
@@ -6287,7 +6290,7 @@
                 <a:solidFill>
                   <a:srgbClr val="2457F5"/>
                 </a:solidFill>
-                <a:latin typeface="IBM Plex Mono"/>
+                <a:latin typeface="Courier New"/>
               </a:rPr>
               <a:t>EXTENSION</a:t>
             </a:r>
@@ -6416,9 +6419,9 @@
                 <a:solidFill>
                   <a:srgbClr val="2457F5"/>
                 </a:solidFill>
-                <a:latin typeface="IBM Plex Mono"/>
-              </a:rPr>
-              <a:t>DELIVERY</a:t>
+                <a:latin typeface="Courier New"/>
+              </a:rPr>
+              <a:t>CONTEXT</a:t>
             </a:r>
           </a:p>
         </p:txBody>
@@ -6460,7 +6463,7 @@
                 </a:solidFill>
                 <a:latin typeface="PingFang SC"/>
               </a:rPr>
-              <a:t>一键部署 · 示例配置 · 安全文档 · 自动化测试</a:t>
+              <a:t>会话记忆 · 共享状态 · 轨迹可观测（3/4）</a:t>
             </a:r>
           </a:p>
         </p:txBody>
@@ -6545,9 +6548,9 @@
                 <a:solidFill>
                   <a:srgbClr val="2457F5"/>
                 </a:solidFill>
-                <a:latin typeface="IBM Plex Mono"/>
-              </a:rPr>
-              <a:t>LICENSE</a:t>
+                <a:latin typeface="Courier New"/>
+              </a:rPr>
+              <a:t>DELIVERY</a:t>
             </a:r>
           </a:p>
         </p:txBody>
@@ -6589,7 +6592,7 @@
                 </a:solidFill>
                 <a:latin typeface="PingFang SC"/>
               </a:rPr>
-              <a:t>MIT License · 可执行代码包 · 可重复构建角色包</a:t>
+              <a:t>MIT · 一键部署 · 确定性角色包 · 测试/安全文档</a:t>
             </a:r>
           </a:p>
         </p:txBody>
@@ -6700,7 +6703,7 @@
                 <a:solidFill>
                   <a:srgbClr val="2457F5"/>
                 </a:solidFill>
-                <a:latin typeface="IBM Plex Mono"/>
+                <a:latin typeface="Courier New"/>
               </a:rPr>
               <a:t>ROADMAP</a:t>
             </a:r>
@@ -6869,7 +6872,7 @@
                 <a:solidFill>
                   <a:srgbClr val="737B77"/>
                 </a:solidFill>
-                <a:latin typeface="IBM Plex Mono"/>
+                <a:latin typeface="Courier New"/>
               </a:rPr>
               <a:t>AGENTRIG / GOAI 2026                                      12 / 12</a:t>
             </a:r>
@@ -7001,7 +7004,7 @@
                 <a:solidFill>
                   <a:srgbClr val="2457F5"/>
                 </a:solidFill>
-                <a:latin typeface="IBM Plex Mono"/>
+                <a:latin typeface="Courier New"/>
               </a:rPr>
               <a:t>INITIAL</a:t>
             </a:r>
@@ -7043,7 +7046,7 @@
                 <a:solidFill>
                   <a:srgbClr val="151719"/>
                 </a:solidFill>
-                <a:latin typeface="IBM Plex Mono"/>
+                <a:latin typeface="Courier New"/>
               </a:rPr>
               <a:t>2026.08</a:t>
             </a:r>
@@ -7262,7 +7265,7 @@
                 <a:solidFill>
                   <a:srgbClr val="237A59"/>
                 </a:solidFill>
-                <a:latin typeface="IBM Plex Mono"/>
+                <a:latin typeface="Courier New"/>
               </a:rPr>
               <a:t>SEMIFINAL</a:t>
             </a:r>
@@ -7304,7 +7307,7 @@
                 <a:solidFill>
                   <a:srgbClr val="151719"/>
                 </a:solidFill>
-                <a:latin typeface="IBM Plex Mono"/>
+                <a:latin typeface="Courier New"/>
               </a:rPr>
               <a:t>NEXT</a:t>
             </a:r>
@@ -7523,7 +7526,7 @@
                 <a:solidFill>
                   <a:srgbClr val="955900"/>
                 </a:solidFill>
-                <a:latin typeface="IBM Plex Mono"/>
+                <a:latin typeface="Courier New"/>
               </a:rPr>
               <a:t>FINAL</a:t>
             </a:r>
@@ -7565,7 +7568,7 @@
                 <a:solidFill>
                   <a:srgbClr val="151719"/>
                 </a:solidFill>
-                <a:latin typeface="IBM Plex Mono"/>
+                <a:latin typeface="Courier New"/>
               </a:rPr>
               <a:t>SCALE</a:t>
             </a:r>
@@ -7783,9 +7786,6979 @@
                 <a:solidFill>
                   <a:srgbClr val="FFFFFF"/>
                 </a:solidFill>
-                <a:latin typeface="IBM Plex Mono"/>
+                <a:latin typeface="Courier New"/>
               </a:rPr>
               <a:t>AGENTRIG / EVIDENCE BEFORE CONFIDENCE</a:t>
+            </a:r>
+          </a:p>
+        </p:txBody>
+      </p:sp>
+    </p:spTree>
+  </p:cSld>
+  <p:clrMapOvr>
+    <a:masterClrMapping/>
+  </p:clrMapOvr>
+</p:sld>
+</file>
+
+<file path=ppt/slides/slide13.xml><?xml version="1.0" encoding="utf-8"?>
+<p:sld xmlns:a="http://schemas.openxmlformats.org/drawingml/2006/main" xmlns:p="http://schemas.openxmlformats.org/presentationml/2006/main" xmlns:r="http://schemas.openxmlformats.org/officeDocument/2006/relationships">
+  <p:cSld>
+    <p:bg>
+      <p:bgPr>
+        <a:solidFill>
+          <a:srgbClr val="F1F3F2"/>
+        </a:solidFill>
+        <a:effectLst/>
+      </p:bgPr>
+    </p:bg>
+    <p:spTree>
+      <p:nvGrpSpPr>
+        <p:cNvPr id="1" name=""/>
+        <p:cNvGrpSpPr/>
+        <p:nvPr/>
+      </p:nvGrpSpPr>
+      <p:grpSpPr/>
+      <p:sp>
+        <p:nvSpPr>
+          <p:cNvPr id="2" name="Rectangle 1"/>
+          <p:cNvSpPr/>
+          <p:nvPr/>
+        </p:nvSpPr>
+        <p:spPr>
+          <a:xfrm>
+            <a:off x="0" y="0"/>
+            <a:ext cx="109728" cy="6858000"/>
+          </a:xfrm>
+          <a:prstGeom prst="rect">
+            <a:avLst/>
+          </a:prstGeom>
+          <a:solidFill>
+            <a:srgbClr val="252927"/>
+          </a:solidFill>
+          <a:ln w="8890">
+            <a:solidFill>
+              <a:srgbClr val="252927"/>
+            </a:solidFill>
+          </a:ln>
+        </p:spPr>
+        <p:style>
+          <a:lnRef idx="1">
+            <a:schemeClr val="accent1"/>
+          </a:lnRef>
+          <a:fillRef idx="3">
+            <a:schemeClr val="accent1"/>
+          </a:fillRef>
+          <a:effectRef idx="2">
+            <a:schemeClr val="accent1"/>
+          </a:effectRef>
+          <a:fontRef idx="minor">
+            <a:schemeClr val="lt1"/>
+          </a:fontRef>
+        </p:style>
+        <p:txBody>
+          <a:bodyPr rtlCol="0" anchor="ctr"/>
+          <a:lstStyle/>
+          <a:p>
+            <a:pPr algn="ctr"/>
+          </a:p>
+        </p:txBody>
+      </p:sp>
+      <p:sp>
+        <p:nvSpPr>
+          <p:cNvPr id="3" name="TextBox 2"/>
+          <p:cNvSpPr txBox="1"/>
+          <p:nvPr/>
+        </p:nvSpPr>
+        <p:spPr>
+          <a:xfrm>
+            <a:off x="502920" y="347472"/>
+            <a:ext cx="5852160" cy="219456"/>
+          </a:xfrm>
+          <a:prstGeom prst="rect">
+            <a:avLst/>
+          </a:prstGeom>
+          <a:noFill/>
+        </p:spPr>
+        <p:txBody>
+          <a:bodyPr wrap="none" lIns="0" rIns="0" tIns="0" bIns="0" anchor="t">
+            <a:spAutoFit/>
+          </a:bodyPr>
+          <a:lstStyle/>
+          <a:p>
+            <a:pPr algn="l">
+              <a:lnSpc>
+                <a:spcPct val="108000"/>
+              </a:lnSpc>
+              <a:spcAft>
+                <a:spcPts val="0"/>
+              </a:spcAft>
+            </a:pPr>
+            <a:r>
+              <a:rPr sz="800" b="1">
+                <a:solidFill>
+                  <a:srgbClr val="252927"/>
+                </a:solidFill>
+                <a:latin typeface="Courier New"/>
+              </a:rPr>
+              <a:t>APPENDIX / AGENT IDENTITY</a:t>
+            </a:r>
+          </a:p>
+        </p:txBody>
+      </p:sp>
+      <p:sp>
+        <p:nvSpPr>
+          <p:cNvPr id="4" name="TextBox 3"/>
+          <p:cNvSpPr txBox="1"/>
+          <p:nvPr/>
+        </p:nvSpPr>
+        <p:spPr>
+          <a:xfrm>
+            <a:off x="502920" y="658368"/>
+            <a:ext cx="10881360" cy="502920"/>
+          </a:xfrm>
+          <a:prstGeom prst="rect">
+            <a:avLst/>
+          </a:prstGeom>
+          <a:noFill/>
+        </p:spPr>
+        <p:txBody>
+          <a:bodyPr wrap="none" lIns="0" rIns="0" tIns="0" bIns="0" anchor="t">
+            <a:spAutoFit/>
+          </a:bodyPr>
+          <a:lstStyle/>
+          <a:p>
+            <a:pPr algn="l">
+              <a:lnSpc>
+                <a:spcPct val="108000"/>
+              </a:lnSpc>
+              <a:spcAft>
+                <a:spcPts val="0"/>
+              </a:spcAft>
+            </a:pPr>
+            <a:r>
+              <a:rPr sz="2500" b="1">
+                <a:solidFill>
+                  <a:srgbClr val="151719"/>
+                </a:solidFill>
+                <a:latin typeface="PingFang SC"/>
+              </a:rPr>
+              <a:t>附录 A：三个 Agent 的完整身份合同</a:t>
+            </a:r>
+          </a:p>
+        </p:txBody>
+      </p:sp>
+      <p:sp>
+        <p:nvSpPr>
+          <p:cNvPr id="5" name="TextBox 4"/>
+          <p:cNvSpPr txBox="1"/>
+          <p:nvPr/>
+        </p:nvSpPr>
+        <p:spPr>
+          <a:xfrm>
+            <a:off x="521207" y="1179576"/>
+            <a:ext cx="10789920" cy="320040"/>
+          </a:xfrm>
+          <a:prstGeom prst="rect">
+            <a:avLst/>
+          </a:prstGeom>
+          <a:noFill/>
+        </p:spPr>
+        <p:txBody>
+          <a:bodyPr wrap="none" lIns="0" rIns="0" tIns="0" bIns="0" anchor="t">
+            <a:spAutoFit/>
+          </a:bodyPr>
+          <a:lstStyle/>
+          <a:p>
+            <a:pPr algn="l">
+              <a:lnSpc>
+                <a:spcPct val="108000"/>
+              </a:lnSpc>
+              <a:spcAft>
+                <a:spcPts val="0"/>
+              </a:spcAft>
+            </a:pPr>
+            <a:r>
+              <a:rPr sz="1000" b="0">
+                <a:solidFill>
+                  <a:srgbClr val="59615D"/>
+                </a:solidFill>
+                <a:latin typeface="PingFang SC"/>
+              </a:rPr>
+              <a:t>Name / Role / Capabilities / Inputs / Outputs / Dependencies / Decision Boundary / Trace</a:t>
+            </a:r>
+          </a:p>
+        </p:txBody>
+      </p:sp>
+      <p:sp>
+        <p:nvSpPr>
+          <p:cNvPr id="6" name="Rectangle 5"/>
+          <p:cNvSpPr/>
+          <p:nvPr/>
+        </p:nvSpPr>
+        <p:spPr>
+          <a:xfrm>
+            <a:off x="502920" y="1572768"/>
+            <a:ext cx="11201400" cy="12700"/>
+          </a:xfrm>
+          <a:prstGeom prst="rect">
+            <a:avLst/>
+          </a:prstGeom>
+          <a:solidFill>
+            <a:srgbClr val="D7DDD9"/>
+          </a:solidFill>
+          <a:ln>
+            <a:noFill/>
+          </a:ln>
+        </p:spPr>
+        <p:style>
+          <a:lnRef idx="1">
+            <a:schemeClr val="accent1"/>
+          </a:lnRef>
+          <a:fillRef idx="3">
+            <a:schemeClr val="accent1"/>
+          </a:fillRef>
+          <a:effectRef idx="2">
+            <a:schemeClr val="accent1"/>
+          </a:effectRef>
+          <a:fontRef idx="minor">
+            <a:schemeClr val="lt1"/>
+          </a:fontRef>
+        </p:style>
+        <p:txBody>
+          <a:bodyPr rtlCol="0" anchor="ctr"/>
+          <a:lstStyle/>
+          <a:p>
+            <a:pPr algn="ctr"/>
+          </a:p>
+        </p:txBody>
+      </p:sp>
+      <p:sp>
+        <p:nvSpPr>
+          <p:cNvPr id="7" name="TextBox 6"/>
+          <p:cNvSpPr txBox="1"/>
+          <p:nvPr/>
+        </p:nvSpPr>
+        <p:spPr>
+          <a:xfrm>
+            <a:off x="502920" y="6565392"/>
+            <a:ext cx="11064240" cy="164592"/>
+          </a:xfrm>
+          <a:prstGeom prst="rect">
+            <a:avLst/>
+          </a:prstGeom>
+          <a:noFill/>
+        </p:spPr>
+        <p:txBody>
+          <a:bodyPr wrap="none" lIns="0" rIns="0" tIns="0" bIns="0" anchor="t">
+            <a:spAutoFit/>
+          </a:bodyPr>
+          <a:lstStyle/>
+          <a:p>
+            <a:pPr algn="l">
+              <a:lnSpc>
+                <a:spcPct val="108000"/>
+              </a:lnSpc>
+              <a:spcAft>
+                <a:spcPts val="0"/>
+              </a:spcAft>
+            </a:pPr>
+            <a:r>
+              <a:rPr sz="700" b="0">
+                <a:solidFill>
+                  <a:srgbClr val="737B77"/>
+                </a:solidFill>
+                <a:latin typeface="Courier New"/>
+              </a:rPr>
+              <a:t>AGENTRIG / GOAI 2026                         APPENDIX 01 / 03</a:t>
+            </a:r>
+          </a:p>
+        </p:txBody>
+      </p:sp>
+      <p:sp>
+        <p:nvSpPr>
+          <p:cNvPr id="8" name="Rectangle 7"/>
+          <p:cNvSpPr/>
+          <p:nvPr/>
+        </p:nvSpPr>
+        <p:spPr>
+          <a:xfrm>
+            <a:off x="566928" y="1828800"/>
+            <a:ext cx="3493008" cy="4370832"/>
+          </a:xfrm>
+          <a:prstGeom prst="rect">
+            <a:avLst/>
+          </a:prstGeom>
+          <a:solidFill>
+            <a:srgbClr val="FFFFFF"/>
+          </a:solidFill>
+          <a:ln w="8890">
+            <a:solidFill>
+              <a:srgbClr val="D7DDD9"/>
+            </a:solidFill>
+          </a:ln>
+        </p:spPr>
+        <p:style>
+          <a:lnRef idx="1">
+            <a:schemeClr val="accent1"/>
+          </a:lnRef>
+          <a:fillRef idx="3">
+            <a:schemeClr val="accent1"/>
+          </a:fillRef>
+          <a:effectRef idx="2">
+            <a:schemeClr val="accent1"/>
+          </a:effectRef>
+          <a:fontRef idx="minor">
+            <a:schemeClr val="lt1"/>
+          </a:fontRef>
+        </p:style>
+        <p:txBody>
+          <a:bodyPr rtlCol="0" anchor="ctr"/>
+          <a:lstStyle/>
+          <a:p>
+            <a:pPr algn="ctr"/>
+          </a:p>
+        </p:txBody>
+      </p:sp>
+      <p:sp>
+        <p:nvSpPr>
+          <p:cNvPr id="9" name="Rectangle 8"/>
+          <p:cNvSpPr/>
+          <p:nvPr/>
+        </p:nvSpPr>
+        <p:spPr>
+          <a:xfrm>
+            <a:off x="566928" y="1828800"/>
+            <a:ext cx="3493008" cy="73152"/>
+          </a:xfrm>
+          <a:prstGeom prst="rect">
+            <a:avLst/>
+          </a:prstGeom>
+          <a:solidFill>
+            <a:srgbClr val="2457F5"/>
+          </a:solidFill>
+          <a:ln w="8890">
+            <a:solidFill>
+              <a:srgbClr val="2457F5"/>
+            </a:solidFill>
+          </a:ln>
+        </p:spPr>
+        <p:style>
+          <a:lnRef idx="1">
+            <a:schemeClr val="accent1"/>
+          </a:lnRef>
+          <a:fillRef idx="3">
+            <a:schemeClr val="accent1"/>
+          </a:fillRef>
+          <a:effectRef idx="2">
+            <a:schemeClr val="accent1"/>
+          </a:effectRef>
+          <a:fontRef idx="minor">
+            <a:schemeClr val="lt1"/>
+          </a:fontRef>
+        </p:style>
+        <p:txBody>
+          <a:bodyPr rtlCol="0" anchor="ctr"/>
+          <a:lstStyle/>
+          <a:p>
+            <a:pPr algn="ctr"/>
+          </a:p>
+        </p:txBody>
+      </p:sp>
+      <p:sp>
+        <p:nvSpPr>
+          <p:cNvPr id="10" name="TextBox 9"/>
+          <p:cNvSpPr txBox="1"/>
+          <p:nvPr/>
+        </p:nvSpPr>
+        <p:spPr>
+          <a:xfrm>
+            <a:off x="749808" y="2093976"/>
+            <a:ext cx="3108960" cy="182880"/>
+          </a:xfrm>
+          <a:prstGeom prst="rect">
+            <a:avLst/>
+          </a:prstGeom>
+          <a:noFill/>
+        </p:spPr>
+        <p:txBody>
+          <a:bodyPr wrap="none" lIns="0" rIns="0" tIns="0" bIns="0" anchor="t">
+            <a:spAutoFit/>
+          </a:bodyPr>
+          <a:lstStyle/>
+          <a:p>
+            <a:pPr algn="l">
+              <a:lnSpc>
+                <a:spcPct val="108000"/>
+              </a:lnSpc>
+              <a:spcAft>
+                <a:spcPts val="0"/>
+              </a:spcAft>
+            </a:pPr>
+            <a:r>
+              <a:rPr sz="700" b="1">
+                <a:solidFill>
+                  <a:srgbClr val="2457F5"/>
+                </a:solidFill>
+                <a:latin typeface="Courier New"/>
+              </a:rPr>
+              <a:t>evaluation-manager</a:t>
+            </a:r>
+          </a:p>
+        </p:txBody>
+      </p:sp>
+      <p:sp>
+        <p:nvSpPr>
+          <p:cNvPr id="11" name="TextBox 10"/>
+          <p:cNvSpPr txBox="1"/>
+          <p:nvPr/>
+        </p:nvSpPr>
+        <p:spPr>
+          <a:xfrm>
+            <a:off x="749808" y="2386584"/>
+            <a:ext cx="3108960" cy="274320"/>
+          </a:xfrm>
+          <a:prstGeom prst="rect">
+            <a:avLst/>
+          </a:prstGeom>
+          <a:noFill/>
+        </p:spPr>
+        <p:txBody>
+          <a:bodyPr wrap="none" lIns="0" rIns="0" tIns="0" bIns="0" anchor="t">
+            <a:spAutoFit/>
+          </a:bodyPr>
+          <a:lstStyle/>
+          <a:p>
+            <a:pPr algn="l">
+              <a:lnSpc>
+                <a:spcPct val="108000"/>
+              </a:lnSpc>
+              <a:spcAft>
+                <a:spcPts val="0"/>
+              </a:spcAft>
+            </a:pPr>
+            <a:r>
+              <a:rPr sz="1600" b="1">
+                <a:solidFill>
+                  <a:srgbClr val="151719"/>
+                </a:solidFill>
+                <a:latin typeface="PingFang SC"/>
+              </a:rPr>
+              <a:t>Evaluation Manager</a:t>
+            </a:r>
+          </a:p>
+        </p:txBody>
+      </p:sp>
+      <p:sp>
+        <p:nvSpPr>
+          <p:cNvPr id="12" name="TextBox 11"/>
+          <p:cNvSpPr txBox="1"/>
+          <p:nvPr/>
+        </p:nvSpPr>
+        <p:spPr>
+          <a:xfrm>
+            <a:off x="749808" y="2862072"/>
+            <a:ext cx="987552" cy="146304"/>
+          </a:xfrm>
+          <a:prstGeom prst="rect">
+            <a:avLst/>
+          </a:prstGeom>
+          <a:noFill/>
+        </p:spPr>
+        <p:txBody>
+          <a:bodyPr wrap="none" lIns="0" rIns="0" tIns="0" bIns="0" anchor="t">
+            <a:spAutoFit/>
+          </a:bodyPr>
+          <a:lstStyle/>
+          <a:p>
+            <a:pPr algn="l">
+              <a:lnSpc>
+                <a:spcPct val="108000"/>
+              </a:lnSpc>
+              <a:spcAft>
+                <a:spcPts val="0"/>
+              </a:spcAft>
+            </a:pPr>
+            <a:r>
+              <a:rPr sz="620" b="1">
+                <a:solidFill>
+                  <a:srgbClr val="2457F5"/>
+                </a:solidFill>
+                <a:latin typeface="Courier New"/>
+              </a:rPr>
+              <a:t>CAPABILITIES</a:t>
+            </a:r>
+          </a:p>
+        </p:txBody>
+      </p:sp>
+      <p:sp>
+        <p:nvSpPr>
+          <p:cNvPr id="13" name="TextBox 12"/>
+          <p:cNvSpPr txBox="1"/>
+          <p:nvPr/>
+        </p:nvSpPr>
+        <p:spPr>
+          <a:xfrm>
+            <a:off x="1645919" y="2843784"/>
+            <a:ext cx="2185416" cy="347472"/>
+          </a:xfrm>
+          <a:prstGeom prst="rect">
+            <a:avLst/>
+          </a:prstGeom>
+          <a:noFill/>
+        </p:spPr>
+        <p:txBody>
+          <a:bodyPr wrap="none" lIns="0" rIns="0" tIns="0" bIns="0" anchor="t">
+            <a:spAutoFit/>
+          </a:bodyPr>
+          <a:lstStyle/>
+          <a:p>
+            <a:pPr algn="l">
+              <a:lnSpc>
+                <a:spcPct val="108000"/>
+              </a:lnSpc>
+              <a:spcAft>
+                <a:spcPts val="0"/>
+              </a:spcAft>
+            </a:pPr>
+            <a:r>
+              <a:rPr sz="750" b="0">
+                <a:solidFill>
+                  <a:srgbClr val="252927"/>
+                </a:solidFill>
+                <a:latin typeface="PingFang SC"/>
+              </a:rPr>
+              <a:t>资产选择 · 计划/审批 · 诊断/用例草稿</a:t>
+            </a:r>
+          </a:p>
+        </p:txBody>
+      </p:sp>
+      <p:sp>
+        <p:nvSpPr>
+          <p:cNvPr id="14" name="TextBox 13"/>
+          <p:cNvSpPr txBox="1"/>
+          <p:nvPr/>
+        </p:nvSpPr>
+        <p:spPr>
+          <a:xfrm>
+            <a:off x="749808" y="3392424"/>
+            <a:ext cx="987552" cy="146304"/>
+          </a:xfrm>
+          <a:prstGeom prst="rect">
+            <a:avLst/>
+          </a:prstGeom>
+          <a:noFill/>
+        </p:spPr>
+        <p:txBody>
+          <a:bodyPr wrap="none" lIns="0" rIns="0" tIns="0" bIns="0" anchor="t">
+            <a:spAutoFit/>
+          </a:bodyPr>
+          <a:lstStyle/>
+          <a:p>
+            <a:pPr algn="l">
+              <a:lnSpc>
+                <a:spcPct val="108000"/>
+              </a:lnSpc>
+              <a:spcAft>
+                <a:spcPts val="0"/>
+              </a:spcAft>
+            </a:pPr>
+            <a:r>
+              <a:rPr sz="620" b="1">
+                <a:solidFill>
+                  <a:srgbClr val="2457F5"/>
+                </a:solidFill>
+                <a:latin typeface="Courier New"/>
+              </a:rPr>
+              <a:t>INPUTS</a:t>
+            </a:r>
+          </a:p>
+        </p:txBody>
+      </p:sp>
+      <p:sp>
+        <p:nvSpPr>
+          <p:cNvPr id="15" name="TextBox 14"/>
+          <p:cNvSpPr txBox="1"/>
+          <p:nvPr/>
+        </p:nvSpPr>
+        <p:spPr>
+          <a:xfrm>
+            <a:off x="1645919" y="3374136"/>
+            <a:ext cx="2185416" cy="347472"/>
+          </a:xfrm>
+          <a:prstGeom prst="rect">
+            <a:avLst/>
+          </a:prstGeom>
+          <a:noFill/>
+        </p:spPr>
+        <p:txBody>
+          <a:bodyPr wrap="none" lIns="0" rIns="0" tIns="0" bIns="0" anchor="t">
+            <a:spAutoFit/>
+          </a:bodyPr>
+          <a:lstStyle/>
+          <a:p>
+            <a:pPr algn="l">
+              <a:lnSpc>
+                <a:spcPct val="108000"/>
+              </a:lnSpc>
+              <a:spcAft>
+                <a:spcPts val="0"/>
+              </a:spcAft>
+            </a:pPr>
+            <a:r>
+              <a:rPr sz="750" b="0">
+                <a:solidFill>
+                  <a:srgbClr val="252927"/>
+                </a:solidFill>
+                <a:latin typeface="PingFang SC"/>
+              </a:rPr>
+              <a:t>Session/Turn/Event · 用户目标 · 权威资产事实</a:t>
+            </a:r>
+          </a:p>
+        </p:txBody>
+      </p:sp>
+      <p:sp>
+        <p:nvSpPr>
+          <p:cNvPr id="16" name="TextBox 15"/>
+          <p:cNvSpPr txBox="1"/>
+          <p:nvPr/>
+        </p:nvSpPr>
+        <p:spPr>
+          <a:xfrm>
+            <a:off x="749808" y="3922776"/>
+            <a:ext cx="987552" cy="146304"/>
+          </a:xfrm>
+          <a:prstGeom prst="rect">
+            <a:avLst/>
+          </a:prstGeom>
+          <a:noFill/>
+        </p:spPr>
+        <p:txBody>
+          <a:bodyPr wrap="none" lIns="0" rIns="0" tIns="0" bIns="0" anchor="t">
+            <a:spAutoFit/>
+          </a:bodyPr>
+          <a:lstStyle/>
+          <a:p>
+            <a:pPr algn="l">
+              <a:lnSpc>
+                <a:spcPct val="108000"/>
+              </a:lnSpc>
+              <a:spcAft>
+                <a:spcPts val="0"/>
+              </a:spcAft>
+            </a:pPr>
+            <a:r>
+              <a:rPr sz="620" b="1">
+                <a:solidFill>
+                  <a:srgbClr val="2457F5"/>
+                </a:solidFill>
+                <a:latin typeface="Courier New"/>
+              </a:rPr>
+              <a:t>OUTPUTS</a:t>
+            </a:r>
+          </a:p>
+        </p:txBody>
+      </p:sp>
+      <p:sp>
+        <p:nvSpPr>
+          <p:cNvPr id="17" name="TextBox 16"/>
+          <p:cNvSpPr txBox="1"/>
+          <p:nvPr/>
+        </p:nvSpPr>
+        <p:spPr>
+          <a:xfrm>
+            <a:off x="1645919" y="3904488"/>
+            <a:ext cx="2185416" cy="347472"/>
+          </a:xfrm>
+          <a:prstGeom prst="rect">
+            <a:avLst/>
+          </a:prstGeom>
+          <a:noFill/>
+        </p:spPr>
+        <p:txBody>
+          <a:bodyPr wrap="none" lIns="0" rIns="0" tIns="0" bIns="0" anchor="t">
+            <a:spAutoFit/>
+          </a:bodyPr>
+          <a:lstStyle/>
+          <a:p>
+            <a:pPr algn="l">
+              <a:lnSpc>
+                <a:spcPct val="108000"/>
+              </a:lnSpc>
+              <a:spcAft>
+                <a:spcPts val="0"/>
+              </a:spcAft>
+            </a:pPr>
+            <a:r>
+              <a:rPr sz="750" b="0">
+                <a:solidFill>
+                  <a:srgbClr val="252927"/>
+                </a:solidFill>
+                <a:latin typeface="PingFang SC"/>
+              </a:rPr>
+              <a:t>Plan/Decision/Run 引用 · 证据诊断</a:t>
+            </a:r>
+          </a:p>
+        </p:txBody>
+      </p:sp>
+      <p:sp>
+        <p:nvSpPr>
+          <p:cNvPr id="18" name="TextBox 17"/>
+          <p:cNvSpPr txBox="1"/>
+          <p:nvPr/>
+        </p:nvSpPr>
+        <p:spPr>
+          <a:xfrm>
+            <a:off x="749808" y="4453127"/>
+            <a:ext cx="987552" cy="146304"/>
+          </a:xfrm>
+          <a:prstGeom prst="rect">
+            <a:avLst/>
+          </a:prstGeom>
+          <a:noFill/>
+        </p:spPr>
+        <p:txBody>
+          <a:bodyPr wrap="none" lIns="0" rIns="0" tIns="0" bIns="0" anchor="t">
+            <a:spAutoFit/>
+          </a:bodyPr>
+          <a:lstStyle/>
+          <a:p>
+            <a:pPr algn="l">
+              <a:lnSpc>
+                <a:spcPct val="108000"/>
+              </a:lnSpc>
+              <a:spcAft>
+                <a:spcPts val="0"/>
+              </a:spcAft>
+            </a:pPr>
+            <a:r>
+              <a:rPr sz="620" b="1">
+                <a:solidFill>
+                  <a:srgbClr val="2457F5"/>
+                </a:solidFill>
+                <a:latin typeface="Courier New"/>
+              </a:rPr>
+              <a:t>DEPENDENCIES</a:t>
+            </a:r>
+          </a:p>
+        </p:txBody>
+      </p:sp>
+      <p:sp>
+        <p:nvSpPr>
+          <p:cNvPr id="19" name="TextBox 18"/>
+          <p:cNvSpPr txBox="1"/>
+          <p:nvPr/>
+        </p:nvSpPr>
+        <p:spPr>
+          <a:xfrm>
+            <a:off x="1645919" y="4434840"/>
+            <a:ext cx="2185416" cy="347472"/>
+          </a:xfrm>
+          <a:prstGeom prst="rect">
+            <a:avLst/>
+          </a:prstGeom>
+          <a:noFill/>
+        </p:spPr>
+        <p:txBody>
+          <a:bodyPr wrap="none" lIns="0" rIns="0" tIns="0" bIns="0" anchor="t">
+            <a:spAutoFit/>
+          </a:bodyPr>
+          <a:lstStyle/>
+          <a:p>
+            <a:pPr algn="l">
+              <a:lnSpc>
+                <a:spcPct val="108000"/>
+              </a:lnSpc>
+              <a:spcAft>
+                <a:spcPts val="0"/>
+              </a:spcAft>
+            </a:pPr>
+            <a:r>
+              <a:rPr sz="750" b="0">
+                <a:solidFill>
+                  <a:srgbClr val="252927"/>
+                </a:solidFill>
+                <a:latin typeface="PingFang SC"/>
+              </a:rPr>
+              <a:t>6 Manager Skills · manager MCP · Core</a:t>
+            </a:r>
+          </a:p>
+        </p:txBody>
+      </p:sp>
+      <p:sp>
+        <p:nvSpPr>
+          <p:cNvPr id="20" name="TextBox 19"/>
+          <p:cNvSpPr txBox="1"/>
+          <p:nvPr/>
+        </p:nvSpPr>
+        <p:spPr>
+          <a:xfrm>
+            <a:off x="749808" y="4983479"/>
+            <a:ext cx="987552" cy="146304"/>
+          </a:xfrm>
+          <a:prstGeom prst="rect">
+            <a:avLst/>
+          </a:prstGeom>
+          <a:noFill/>
+        </p:spPr>
+        <p:txBody>
+          <a:bodyPr wrap="none" lIns="0" rIns="0" tIns="0" bIns="0" anchor="t">
+            <a:spAutoFit/>
+          </a:bodyPr>
+          <a:lstStyle/>
+          <a:p>
+            <a:pPr algn="l">
+              <a:lnSpc>
+                <a:spcPct val="108000"/>
+              </a:lnSpc>
+              <a:spcAft>
+                <a:spcPts val="0"/>
+              </a:spcAft>
+            </a:pPr>
+            <a:r>
+              <a:rPr sz="620" b="1">
+                <a:solidFill>
+                  <a:srgbClr val="2457F5"/>
+                </a:solidFill>
+                <a:latin typeface="Courier New"/>
+              </a:rPr>
+              <a:t>DECISION BOUNDARY</a:t>
+            </a:r>
+          </a:p>
+        </p:txBody>
+      </p:sp>
+      <p:sp>
+        <p:nvSpPr>
+          <p:cNvPr id="21" name="TextBox 20"/>
+          <p:cNvSpPr txBox="1"/>
+          <p:nvPr/>
+        </p:nvSpPr>
+        <p:spPr>
+          <a:xfrm>
+            <a:off x="1645919" y="4965192"/>
+            <a:ext cx="2185416" cy="347472"/>
+          </a:xfrm>
+          <a:prstGeom prst="rect">
+            <a:avLst/>
+          </a:prstGeom>
+          <a:noFill/>
+        </p:spPr>
+        <p:txBody>
+          <a:bodyPr wrap="none" lIns="0" rIns="0" tIns="0" bIns="0" anchor="t">
+            <a:spAutoFit/>
+          </a:bodyPr>
+          <a:lstStyle/>
+          <a:p>
+            <a:pPr algn="l">
+              <a:lnSpc>
+                <a:spcPct val="108000"/>
+              </a:lnSpc>
+              <a:spcAft>
+                <a:spcPts val="0"/>
+              </a:spcAft>
+            </a:pPr>
+            <a:r>
+              <a:rPr sz="750" b="0">
+                <a:solidFill>
+                  <a:srgbClr val="252927"/>
+                </a:solidFill>
+                <a:latin typeface="PingFang SC"/>
+              </a:rPr>
+              <a:t>不能原始 run_cases；确认/提交绑定用户 event + revision</a:t>
+            </a:r>
+          </a:p>
+        </p:txBody>
+      </p:sp>
+      <p:sp>
+        <p:nvSpPr>
+          <p:cNvPr id="22" name="TextBox 21"/>
+          <p:cNvSpPr txBox="1"/>
+          <p:nvPr/>
+        </p:nvSpPr>
+        <p:spPr>
+          <a:xfrm>
+            <a:off x="749808" y="5513831"/>
+            <a:ext cx="987552" cy="146304"/>
+          </a:xfrm>
+          <a:prstGeom prst="rect">
+            <a:avLst/>
+          </a:prstGeom>
+          <a:noFill/>
+        </p:spPr>
+        <p:txBody>
+          <a:bodyPr wrap="none" lIns="0" rIns="0" tIns="0" bIns="0" anchor="t">
+            <a:spAutoFit/>
+          </a:bodyPr>
+          <a:lstStyle/>
+          <a:p>
+            <a:pPr algn="l">
+              <a:lnSpc>
+                <a:spcPct val="108000"/>
+              </a:lnSpc>
+              <a:spcAft>
+                <a:spcPts val="0"/>
+              </a:spcAft>
+            </a:pPr>
+            <a:r>
+              <a:rPr sz="620" b="1">
+                <a:solidFill>
+                  <a:srgbClr val="2457F5"/>
+                </a:solidFill>
+                <a:latin typeface="Courier New"/>
+              </a:rPr>
+              <a:t>TRACE</a:t>
+            </a:r>
+          </a:p>
+        </p:txBody>
+      </p:sp>
+      <p:sp>
+        <p:nvSpPr>
+          <p:cNvPr id="23" name="TextBox 22"/>
+          <p:cNvSpPr txBox="1"/>
+          <p:nvPr/>
+        </p:nvSpPr>
+        <p:spPr>
+          <a:xfrm>
+            <a:off x="1645919" y="5495544"/>
+            <a:ext cx="2185416" cy="347472"/>
+          </a:xfrm>
+          <a:prstGeom prst="rect">
+            <a:avLst/>
+          </a:prstGeom>
+          <a:noFill/>
+        </p:spPr>
+        <p:txBody>
+          <a:bodyPr wrap="none" lIns="0" rIns="0" tIns="0" bIns="0" anchor="t">
+            <a:spAutoFit/>
+          </a:bodyPr>
+          <a:lstStyle/>
+          <a:p>
+            <a:pPr algn="l">
+              <a:lnSpc>
+                <a:spcPct val="108000"/>
+              </a:lnSpc>
+              <a:spcAft>
+                <a:spcPts val="0"/>
+              </a:spcAft>
+            </a:pPr>
+            <a:r>
+              <a:rPr sz="750" b="0">
+                <a:solidFill>
+                  <a:srgbClr val="252927"/>
+                </a:solidFill>
+                <a:latin typeface="PingFang SC"/>
+              </a:rPr>
+              <a:t>AssistantEvent · ManagerDecision · Plan/Run · Matrix IDs</a:t>
+            </a:r>
+          </a:p>
+        </p:txBody>
+      </p:sp>
+      <p:sp>
+        <p:nvSpPr>
+          <p:cNvPr id="24" name="Rectangle 23"/>
+          <p:cNvSpPr/>
+          <p:nvPr/>
+        </p:nvSpPr>
+        <p:spPr>
+          <a:xfrm>
+            <a:off x="4334256" y="1828800"/>
+            <a:ext cx="3493008" cy="4370832"/>
+          </a:xfrm>
+          <a:prstGeom prst="rect">
+            <a:avLst/>
+          </a:prstGeom>
+          <a:solidFill>
+            <a:srgbClr val="FFFFFF"/>
+          </a:solidFill>
+          <a:ln w="8890">
+            <a:solidFill>
+              <a:srgbClr val="D7DDD9"/>
+            </a:solidFill>
+          </a:ln>
+        </p:spPr>
+        <p:style>
+          <a:lnRef idx="1">
+            <a:schemeClr val="accent1"/>
+          </a:lnRef>
+          <a:fillRef idx="3">
+            <a:schemeClr val="accent1"/>
+          </a:fillRef>
+          <a:effectRef idx="2">
+            <a:schemeClr val="accent1"/>
+          </a:effectRef>
+          <a:fontRef idx="minor">
+            <a:schemeClr val="lt1"/>
+          </a:fontRef>
+        </p:style>
+        <p:txBody>
+          <a:bodyPr rtlCol="0" anchor="ctr"/>
+          <a:lstStyle/>
+          <a:p>
+            <a:pPr algn="ctr"/>
+          </a:p>
+        </p:txBody>
+      </p:sp>
+      <p:sp>
+        <p:nvSpPr>
+          <p:cNvPr id="25" name="Rectangle 24"/>
+          <p:cNvSpPr/>
+          <p:nvPr/>
+        </p:nvSpPr>
+        <p:spPr>
+          <a:xfrm>
+            <a:off x="4334256" y="1828800"/>
+            <a:ext cx="3493008" cy="73152"/>
+          </a:xfrm>
+          <a:prstGeom prst="rect">
+            <a:avLst/>
+          </a:prstGeom>
+          <a:solidFill>
+            <a:srgbClr val="237A59"/>
+          </a:solidFill>
+          <a:ln w="8890">
+            <a:solidFill>
+              <a:srgbClr val="237A59"/>
+            </a:solidFill>
+          </a:ln>
+        </p:spPr>
+        <p:style>
+          <a:lnRef idx="1">
+            <a:schemeClr val="accent1"/>
+          </a:lnRef>
+          <a:fillRef idx="3">
+            <a:schemeClr val="accent1"/>
+          </a:fillRef>
+          <a:effectRef idx="2">
+            <a:schemeClr val="accent1"/>
+          </a:effectRef>
+          <a:fontRef idx="minor">
+            <a:schemeClr val="lt1"/>
+          </a:fontRef>
+        </p:style>
+        <p:txBody>
+          <a:bodyPr rtlCol="0" anchor="ctr"/>
+          <a:lstStyle/>
+          <a:p>
+            <a:pPr algn="ctr"/>
+          </a:p>
+        </p:txBody>
+      </p:sp>
+      <p:sp>
+        <p:nvSpPr>
+          <p:cNvPr id="26" name="TextBox 25"/>
+          <p:cNvSpPr txBox="1"/>
+          <p:nvPr/>
+        </p:nvSpPr>
+        <p:spPr>
+          <a:xfrm>
+            <a:off x="4517136" y="2093976"/>
+            <a:ext cx="3108960" cy="182880"/>
+          </a:xfrm>
+          <a:prstGeom prst="rect">
+            <a:avLst/>
+          </a:prstGeom>
+          <a:noFill/>
+        </p:spPr>
+        <p:txBody>
+          <a:bodyPr wrap="none" lIns="0" rIns="0" tIns="0" bIns="0" anchor="t">
+            <a:spAutoFit/>
+          </a:bodyPr>
+          <a:lstStyle/>
+          <a:p>
+            <a:pPr algn="l">
+              <a:lnSpc>
+                <a:spcPct val="108000"/>
+              </a:lnSpc>
+              <a:spcAft>
+                <a:spcPts val="0"/>
+              </a:spcAft>
+            </a:pPr>
+            <a:r>
+              <a:rPr sz="700" b="1">
+                <a:solidFill>
+                  <a:srgbClr val="237A59"/>
+                </a:solidFill>
+                <a:latin typeface="Courier New"/>
+              </a:rPr>
+              <a:t>simulation-curator</a:t>
+            </a:r>
+          </a:p>
+        </p:txBody>
+      </p:sp>
+      <p:sp>
+        <p:nvSpPr>
+          <p:cNvPr id="27" name="TextBox 26"/>
+          <p:cNvSpPr txBox="1"/>
+          <p:nvPr/>
+        </p:nvSpPr>
+        <p:spPr>
+          <a:xfrm>
+            <a:off x="4517136" y="2386584"/>
+            <a:ext cx="3108960" cy="274320"/>
+          </a:xfrm>
+          <a:prstGeom prst="rect">
+            <a:avLst/>
+          </a:prstGeom>
+          <a:noFill/>
+        </p:spPr>
+        <p:txBody>
+          <a:bodyPr wrap="none" lIns="0" rIns="0" tIns="0" bIns="0" anchor="t">
+            <a:spAutoFit/>
+          </a:bodyPr>
+          <a:lstStyle/>
+          <a:p>
+            <a:pPr algn="l">
+              <a:lnSpc>
+                <a:spcPct val="108000"/>
+              </a:lnSpc>
+              <a:spcAft>
+                <a:spcPts val="0"/>
+              </a:spcAft>
+            </a:pPr>
+            <a:r>
+              <a:rPr sz="1600" b="1">
+                <a:solidFill>
+                  <a:srgbClr val="151719"/>
+                </a:solidFill>
+                <a:latin typeface="PingFang SC"/>
+              </a:rPr>
+              <a:t>Simulation Curator</a:t>
+            </a:r>
+          </a:p>
+        </p:txBody>
+      </p:sp>
+      <p:sp>
+        <p:nvSpPr>
+          <p:cNvPr id="28" name="TextBox 27"/>
+          <p:cNvSpPr txBox="1"/>
+          <p:nvPr/>
+        </p:nvSpPr>
+        <p:spPr>
+          <a:xfrm>
+            <a:off x="4517136" y="2862072"/>
+            <a:ext cx="987552" cy="146304"/>
+          </a:xfrm>
+          <a:prstGeom prst="rect">
+            <a:avLst/>
+          </a:prstGeom>
+          <a:noFill/>
+        </p:spPr>
+        <p:txBody>
+          <a:bodyPr wrap="none" lIns="0" rIns="0" tIns="0" bIns="0" anchor="t">
+            <a:spAutoFit/>
+          </a:bodyPr>
+          <a:lstStyle/>
+          <a:p>
+            <a:pPr algn="l">
+              <a:lnSpc>
+                <a:spcPct val="108000"/>
+              </a:lnSpc>
+              <a:spcAft>
+                <a:spcPts val="0"/>
+              </a:spcAft>
+            </a:pPr>
+            <a:r>
+              <a:rPr sz="620" b="1">
+                <a:solidFill>
+                  <a:srgbClr val="237A59"/>
+                </a:solidFill>
+                <a:latin typeface="Courier New"/>
+              </a:rPr>
+              <a:t>CAPABILITIES</a:t>
+            </a:r>
+          </a:p>
+        </p:txBody>
+      </p:sp>
+      <p:sp>
+        <p:nvSpPr>
+          <p:cNvPr id="29" name="TextBox 28"/>
+          <p:cNvSpPr txBox="1"/>
+          <p:nvPr/>
+        </p:nvSpPr>
+        <p:spPr>
+          <a:xfrm>
+            <a:off x="5413248" y="2843784"/>
+            <a:ext cx="2185416" cy="347472"/>
+          </a:xfrm>
+          <a:prstGeom prst="rect">
+            <a:avLst/>
+          </a:prstGeom>
+          <a:noFill/>
+        </p:spPr>
+        <p:txBody>
+          <a:bodyPr wrap="none" lIns="0" rIns="0" tIns="0" bIns="0" anchor="t">
+            <a:spAutoFit/>
+          </a:bodyPr>
+          <a:lstStyle/>
+          <a:p>
+            <a:pPr algn="l">
+              <a:lnSpc>
+                <a:spcPct val="108000"/>
+              </a:lnSpc>
+              <a:spcAft>
+                <a:spcPts val="0"/>
+              </a:spcAft>
+            </a:pPr>
+            <a:r>
+              <a:rPr sz="750" b="0">
+                <a:solidFill>
+                  <a:srgbClr val="252927"/>
+                </a:solidFill>
+                <a:latin typeface="PingFang SC"/>
+              </a:rPr>
+              <a:t>生成最小合理、Schema 合法的受控结果</a:t>
+            </a:r>
+          </a:p>
+        </p:txBody>
+      </p:sp>
+      <p:sp>
+        <p:nvSpPr>
+          <p:cNvPr id="30" name="TextBox 29"/>
+          <p:cNvSpPr txBox="1"/>
+          <p:nvPr/>
+        </p:nvSpPr>
+        <p:spPr>
+          <a:xfrm>
+            <a:off x="4517136" y="3392424"/>
+            <a:ext cx="987552" cy="146304"/>
+          </a:xfrm>
+          <a:prstGeom prst="rect">
+            <a:avLst/>
+          </a:prstGeom>
+          <a:noFill/>
+        </p:spPr>
+        <p:txBody>
+          <a:bodyPr wrap="none" lIns="0" rIns="0" tIns="0" bIns="0" anchor="t">
+            <a:spAutoFit/>
+          </a:bodyPr>
+          <a:lstStyle/>
+          <a:p>
+            <a:pPr algn="l">
+              <a:lnSpc>
+                <a:spcPct val="108000"/>
+              </a:lnSpc>
+              <a:spcAft>
+                <a:spcPts val="0"/>
+              </a:spcAft>
+            </a:pPr>
+            <a:r>
+              <a:rPr sz="620" b="1">
+                <a:solidFill>
+                  <a:srgbClr val="237A59"/>
+                </a:solidFill>
+                <a:latin typeface="Courier New"/>
+              </a:rPr>
+              <a:t>INPUTS</a:t>
+            </a:r>
+          </a:p>
+        </p:txBody>
+      </p:sp>
+      <p:sp>
+        <p:nvSpPr>
+          <p:cNvPr id="31" name="TextBox 30"/>
+          <p:cNvSpPr txBox="1"/>
+          <p:nvPr/>
+        </p:nvSpPr>
+        <p:spPr>
+          <a:xfrm>
+            <a:off x="5413248" y="3374136"/>
+            <a:ext cx="2185416" cy="347472"/>
+          </a:xfrm>
+          <a:prstGeom prst="rect">
+            <a:avLst/>
+          </a:prstGeom>
+          <a:noFill/>
+        </p:spPr>
+        <p:txBody>
+          <a:bodyPr wrap="none" lIns="0" rIns="0" tIns="0" bIns="0" anchor="t">
+            <a:spAutoFit/>
+          </a:bodyPr>
+          <a:lstStyle/>
+          <a:p>
+            <a:pPr algn="l">
+              <a:lnSpc>
+                <a:spcPct val="108000"/>
+              </a:lnSpc>
+              <a:spcAft>
+                <a:spcPts val="0"/>
+              </a:spcAft>
+            </a:pPr>
+            <a:r>
+              <a:rPr sz="750" b="0">
+                <a:solidFill>
+                  <a:srgbClr val="252927"/>
+                </a:solidFill>
+                <a:latin typeface="PingFang SC"/>
+              </a:rPr>
+              <a:t>invocation/hash/deadline · tool/args/schema · 脱敏历史</a:t>
+            </a:r>
+          </a:p>
+        </p:txBody>
+      </p:sp>
+      <p:sp>
+        <p:nvSpPr>
+          <p:cNvPr id="32" name="TextBox 31"/>
+          <p:cNvSpPr txBox="1"/>
+          <p:nvPr/>
+        </p:nvSpPr>
+        <p:spPr>
+          <a:xfrm>
+            <a:off x="4517136" y="3922776"/>
+            <a:ext cx="987552" cy="146304"/>
+          </a:xfrm>
+          <a:prstGeom prst="rect">
+            <a:avLst/>
+          </a:prstGeom>
+          <a:noFill/>
+        </p:spPr>
+        <p:txBody>
+          <a:bodyPr wrap="none" lIns="0" rIns="0" tIns="0" bIns="0" anchor="t">
+            <a:spAutoFit/>
+          </a:bodyPr>
+          <a:lstStyle/>
+          <a:p>
+            <a:pPr algn="l">
+              <a:lnSpc>
+                <a:spcPct val="108000"/>
+              </a:lnSpc>
+              <a:spcAft>
+                <a:spcPts val="0"/>
+              </a:spcAft>
+            </a:pPr>
+            <a:r>
+              <a:rPr sz="620" b="1">
+                <a:solidFill>
+                  <a:srgbClr val="237A59"/>
+                </a:solidFill>
+                <a:latin typeface="Courier New"/>
+              </a:rPr>
+              <a:t>OUTPUTS</a:t>
+            </a:r>
+          </a:p>
+        </p:txBody>
+      </p:sp>
+      <p:sp>
+        <p:nvSpPr>
+          <p:cNvPr id="33" name="TextBox 32"/>
+          <p:cNvSpPr txBox="1"/>
+          <p:nvPr/>
+        </p:nvSpPr>
+        <p:spPr>
+          <a:xfrm>
+            <a:off x="5413248" y="3904488"/>
+            <a:ext cx="2185416" cy="347472"/>
+          </a:xfrm>
+          <a:prstGeom prst="rect">
+            <a:avLst/>
+          </a:prstGeom>
+          <a:noFill/>
+        </p:spPr>
+        <p:txBody>
+          <a:bodyPr wrap="none" lIns="0" rIns="0" tIns="0" bIns="0" anchor="t">
+            <a:spAutoFit/>
+          </a:bodyPr>
+          <a:lstStyle/>
+          <a:p>
+            <a:pPr algn="l">
+              <a:lnSpc>
+                <a:spcPct val="108000"/>
+              </a:lnSpc>
+              <a:spcAft>
+                <a:spcPts val="0"/>
+              </a:spcAft>
+            </a:pPr>
+            <a:r>
+              <a:rPr sz="750" b="0">
+                <a:solidFill>
+                  <a:srgbClr val="252927"/>
+                </a:solidFill>
+                <a:latin typeface="PingFang SC"/>
+              </a:rPr>
+              <a:t>CuratorGeneration 或分类结构化失败</a:t>
+            </a:r>
+          </a:p>
+        </p:txBody>
+      </p:sp>
+      <p:sp>
+        <p:nvSpPr>
+          <p:cNvPr id="34" name="TextBox 33"/>
+          <p:cNvSpPr txBox="1"/>
+          <p:nvPr/>
+        </p:nvSpPr>
+        <p:spPr>
+          <a:xfrm>
+            <a:off x="4517136" y="4453127"/>
+            <a:ext cx="987552" cy="146304"/>
+          </a:xfrm>
+          <a:prstGeom prst="rect">
+            <a:avLst/>
+          </a:prstGeom>
+          <a:noFill/>
+        </p:spPr>
+        <p:txBody>
+          <a:bodyPr wrap="none" lIns="0" rIns="0" tIns="0" bIns="0" anchor="t">
+            <a:spAutoFit/>
+          </a:bodyPr>
+          <a:lstStyle/>
+          <a:p>
+            <a:pPr algn="l">
+              <a:lnSpc>
+                <a:spcPct val="108000"/>
+              </a:lnSpc>
+              <a:spcAft>
+                <a:spcPts val="0"/>
+              </a:spcAft>
+            </a:pPr>
+            <a:r>
+              <a:rPr sz="620" b="1">
+                <a:solidFill>
+                  <a:srgbClr val="237A59"/>
+                </a:solidFill>
+                <a:latin typeface="Courier New"/>
+              </a:rPr>
+              <a:t>DEPENDENCIES</a:t>
+            </a:r>
+          </a:p>
+        </p:txBody>
+      </p:sp>
+      <p:sp>
+        <p:nvSpPr>
+          <p:cNvPr id="35" name="TextBox 34"/>
+          <p:cNvSpPr txBox="1"/>
+          <p:nvPr/>
+        </p:nvSpPr>
+        <p:spPr>
+          <a:xfrm>
+            <a:off x="5413248" y="4434840"/>
+            <a:ext cx="2185416" cy="347472"/>
+          </a:xfrm>
+          <a:prstGeom prst="rect">
+            <a:avLst/>
+          </a:prstGeom>
+          <a:noFill/>
+        </p:spPr>
+        <p:txBody>
+          <a:bodyPr wrap="none" lIns="0" rIns="0" tIns="0" bIns="0" anchor="t">
+            <a:spAutoFit/>
+          </a:bodyPr>
+          <a:lstStyle/>
+          <a:p>
+            <a:pPr algn="l">
+              <a:lnSpc>
+                <a:spcPct val="108000"/>
+              </a:lnSpc>
+              <a:spcAft>
+                <a:spcPts val="0"/>
+              </a:spcAft>
+            </a:pPr>
+            <a:r>
+              <a:rPr sz="750" b="0">
+                <a:solidFill>
+                  <a:srgbClr val="252927"/>
+                </a:solidFill>
+                <a:latin typeface="PingFang SC"/>
+              </a:rPr>
+              <a:t>simulate-tool-result · Curator 三工具 MCP</a:t>
+            </a:r>
+          </a:p>
+        </p:txBody>
+      </p:sp>
+      <p:sp>
+        <p:nvSpPr>
+          <p:cNvPr id="36" name="TextBox 35"/>
+          <p:cNvSpPr txBox="1"/>
+          <p:nvPr/>
+        </p:nvSpPr>
+        <p:spPr>
+          <a:xfrm>
+            <a:off x="4517136" y="4983479"/>
+            <a:ext cx="987552" cy="146304"/>
+          </a:xfrm>
+          <a:prstGeom prst="rect">
+            <a:avLst/>
+          </a:prstGeom>
+          <a:noFill/>
+        </p:spPr>
+        <p:txBody>
+          <a:bodyPr wrap="none" lIns="0" rIns="0" tIns="0" bIns="0" anchor="t">
+            <a:spAutoFit/>
+          </a:bodyPr>
+          <a:lstStyle/>
+          <a:p>
+            <a:pPr algn="l">
+              <a:lnSpc>
+                <a:spcPct val="108000"/>
+              </a:lnSpc>
+              <a:spcAft>
+                <a:spcPts val="0"/>
+              </a:spcAft>
+            </a:pPr>
+            <a:r>
+              <a:rPr sz="620" b="1">
+                <a:solidFill>
+                  <a:srgbClr val="237A59"/>
+                </a:solidFill>
+                <a:latin typeface="Courier New"/>
+              </a:rPr>
+              <a:t>DECISION BOUNDARY</a:t>
+            </a:r>
+          </a:p>
+        </p:txBody>
+      </p:sp>
+      <p:sp>
+        <p:nvSpPr>
+          <p:cNvPr id="37" name="TextBox 36"/>
+          <p:cNvSpPr txBox="1"/>
+          <p:nvPr/>
+        </p:nvSpPr>
+        <p:spPr>
+          <a:xfrm>
+            <a:off x="5413248" y="4965192"/>
+            <a:ext cx="2185416" cy="347472"/>
+          </a:xfrm>
+          <a:prstGeom prst="rect">
+            <a:avLst/>
+          </a:prstGeom>
+          <a:noFill/>
+        </p:spPr>
+        <p:txBody>
+          <a:bodyPr wrap="none" lIns="0" rIns="0" tIns="0" bIns="0" anchor="t">
+            <a:spAutoFit/>
+          </a:bodyPr>
+          <a:lstStyle/>
+          <a:p>
+            <a:pPr algn="l">
+              <a:lnSpc>
+                <a:spcPct val="108000"/>
+              </a:lnSpc>
+              <a:spcAft>
+                <a:spcPts val="0"/>
+              </a:spcAft>
+            </a:pPr>
+            <a:r>
+              <a:rPr sz="750" b="0">
+                <a:solidFill>
+                  <a:srgbClr val="252927"/>
+                </a:solidFill>
+                <a:latin typeface="PingFang SC"/>
+              </a:rPr>
+              <a:t>看不到 rubric/预期；不调真实工具；不枚举任务</a:t>
+            </a:r>
+          </a:p>
+        </p:txBody>
+      </p:sp>
+      <p:sp>
+        <p:nvSpPr>
+          <p:cNvPr id="38" name="TextBox 37"/>
+          <p:cNvSpPr txBox="1"/>
+          <p:nvPr/>
+        </p:nvSpPr>
+        <p:spPr>
+          <a:xfrm>
+            <a:off x="4517136" y="5513831"/>
+            <a:ext cx="987552" cy="146304"/>
+          </a:xfrm>
+          <a:prstGeom prst="rect">
+            <a:avLst/>
+          </a:prstGeom>
+          <a:noFill/>
+        </p:spPr>
+        <p:txBody>
+          <a:bodyPr wrap="none" lIns="0" rIns="0" tIns="0" bIns="0" anchor="t">
+            <a:spAutoFit/>
+          </a:bodyPr>
+          <a:lstStyle/>
+          <a:p>
+            <a:pPr algn="l">
+              <a:lnSpc>
+                <a:spcPct val="108000"/>
+              </a:lnSpc>
+              <a:spcAft>
+                <a:spcPts val="0"/>
+              </a:spcAft>
+            </a:pPr>
+            <a:r>
+              <a:rPr sz="620" b="1">
+                <a:solidFill>
+                  <a:srgbClr val="237A59"/>
+                </a:solidFill>
+                <a:latin typeface="Courier New"/>
+              </a:rPr>
+              <a:t>TRACE</a:t>
+            </a:r>
+          </a:p>
+        </p:txBody>
+      </p:sp>
+      <p:sp>
+        <p:nvSpPr>
+          <p:cNvPr id="39" name="TextBox 38"/>
+          <p:cNvSpPr txBox="1"/>
+          <p:nvPr/>
+        </p:nvSpPr>
+        <p:spPr>
+          <a:xfrm>
+            <a:off x="5413248" y="5495544"/>
+            <a:ext cx="2185416" cy="347472"/>
+          </a:xfrm>
+          <a:prstGeom prst="rect">
+            <a:avLst/>
+          </a:prstGeom>
+          <a:noFill/>
+        </p:spPr>
+        <p:txBody>
+          <a:bodyPr wrap="none" lIns="0" rIns="0" tIns="0" bIns="0" anchor="t">
+            <a:spAutoFit/>
+          </a:bodyPr>
+          <a:lstStyle/>
+          <a:p>
+            <a:pPr algn="l">
+              <a:lnSpc>
+                <a:spcPct val="108000"/>
+              </a:lnSpc>
+              <a:spcAft>
+                <a:spcPts val="0"/>
+              </a:spcAft>
+            </a:pPr>
+            <a:r>
+              <a:rPr sz="750" b="0">
+                <a:solidFill>
+                  <a:srgbClr val="252927"/>
+                </a:solidFill>
+                <a:latin typeface="PingFang SC"/>
+              </a:rPr>
+              <a:t>Invocation 状态 · hashes · Matrix IDs · RunEvent ref</a:t>
+            </a:r>
+          </a:p>
+        </p:txBody>
+      </p:sp>
+      <p:sp>
+        <p:nvSpPr>
+          <p:cNvPr id="40" name="Rectangle 39"/>
+          <p:cNvSpPr/>
+          <p:nvPr/>
+        </p:nvSpPr>
+        <p:spPr>
+          <a:xfrm>
+            <a:off x="8101583" y="1828800"/>
+            <a:ext cx="3493008" cy="4370832"/>
+          </a:xfrm>
+          <a:prstGeom prst="rect">
+            <a:avLst/>
+          </a:prstGeom>
+          <a:solidFill>
+            <a:srgbClr val="FFFFFF"/>
+          </a:solidFill>
+          <a:ln w="8890">
+            <a:solidFill>
+              <a:srgbClr val="D7DDD9"/>
+            </a:solidFill>
+          </a:ln>
+        </p:spPr>
+        <p:style>
+          <a:lnRef idx="1">
+            <a:schemeClr val="accent1"/>
+          </a:lnRef>
+          <a:fillRef idx="3">
+            <a:schemeClr val="accent1"/>
+          </a:fillRef>
+          <a:effectRef idx="2">
+            <a:schemeClr val="accent1"/>
+          </a:effectRef>
+          <a:fontRef idx="minor">
+            <a:schemeClr val="lt1"/>
+          </a:fontRef>
+        </p:style>
+        <p:txBody>
+          <a:bodyPr rtlCol="0" anchor="ctr"/>
+          <a:lstStyle/>
+          <a:p>
+            <a:pPr algn="ctr"/>
+          </a:p>
+        </p:txBody>
+      </p:sp>
+      <p:sp>
+        <p:nvSpPr>
+          <p:cNvPr id="41" name="Rectangle 40"/>
+          <p:cNvSpPr/>
+          <p:nvPr/>
+        </p:nvSpPr>
+        <p:spPr>
+          <a:xfrm>
+            <a:off x="8101583" y="1828800"/>
+            <a:ext cx="3493008" cy="73152"/>
+          </a:xfrm>
+          <a:prstGeom prst="rect">
+            <a:avLst/>
+          </a:prstGeom>
+          <a:solidFill>
+            <a:srgbClr val="955900"/>
+          </a:solidFill>
+          <a:ln w="8890">
+            <a:solidFill>
+              <a:srgbClr val="955900"/>
+            </a:solidFill>
+          </a:ln>
+        </p:spPr>
+        <p:style>
+          <a:lnRef idx="1">
+            <a:schemeClr val="accent1"/>
+          </a:lnRef>
+          <a:fillRef idx="3">
+            <a:schemeClr val="accent1"/>
+          </a:fillRef>
+          <a:effectRef idx="2">
+            <a:schemeClr val="accent1"/>
+          </a:effectRef>
+          <a:fontRef idx="minor">
+            <a:schemeClr val="lt1"/>
+          </a:fontRef>
+        </p:style>
+        <p:txBody>
+          <a:bodyPr rtlCol="0" anchor="ctr"/>
+          <a:lstStyle/>
+          <a:p>
+            <a:pPr algn="ctr"/>
+          </a:p>
+        </p:txBody>
+      </p:sp>
+      <p:sp>
+        <p:nvSpPr>
+          <p:cNvPr id="42" name="TextBox 41"/>
+          <p:cNvSpPr txBox="1"/>
+          <p:nvPr/>
+        </p:nvSpPr>
+        <p:spPr>
+          <a:xfrm>
+            <a:off x="8284463" y="2093976"/>
+            <a:ext cx="3108960" cy="182880"/>
+          </a:xfrm>
+          <a:prstGeom prst="rect">
+            <a:avLst/>
+          </a:prstGeom>
+          <a:noFill/>
+        </p:spPr>
+        <p:txBody>
+          <a:bodyPr wrap="none" lIns="0" rIns="0" tIns="0" bIns="0" anchor="t">
+            <a:spAutoFit/>
+          </a:bodyPr>
+          <a:lstStyle/>
+          <a:p>
+            <a:pPr algn="l">
+              <a:lnSpc>
+                <a:spcPct val="108000"/>
+              </a:lnSpc>
+              <a:spcAft>
+                <a:spcPts val="0"/>
+              </a:spcAft>
+            </a:pPr>
+            <a:r>
+              <a:rPr sz="700" b="1">
+                <a:solidFill>
+                  <a:srgbClr val="955900"/>
+                </a:solidFill>
+                <a:latin typeface="Courier New"/>
+              </a:rPr>
+              <a:t>evidence-judge</a:t>
+            </a:r>
+          </a:p>
+        </p:txBody>
+      </p:sp>
+      <p:sp>
+        <p:nvSpPr>
+          <p:cNvPr id="43" name="TextBox 42"/>
+          <p:cNvSpPr txBox="1"/>
+          <p:nvPr/>
+        </p:nvSpPr>
+        <p:spPr>
+          <a:xfrm>
+            <a:off x="8284463" y="2386584"/>
+            <a:ext cx="3108960" cy="274320"/>
+          </a:xfrm>
+          <a:prstGeom prst="rect">
+            <a:avLst/>
+          </a:prstGeom>
+          <a:noFill/>
+        </p:spPr>
+        <p:txBody>
+          <a:bodyPr wrap="none" lIns="0" rIns="0" tIns="0" bIns="0" anchor="t">
+            <a:spAutoFit/>
+          </a:bodyPr>
+          <a:lstStyle/>
+          <a:p>
+            <a:pPr algn="l">
+              <a:lnSpc>
+                <a:spcPct val="108000"/>
+              </a:lnSpc>
+              <a:spcAft>
+                <a:spcPts val="0"/>
+              </a:spcAft>
+            </a:pPr>
+            <a:r>
+              <a:rPr sz="1600" b="1">
+                <a:solidFill>
+                  <a:srgbClr val="151719"/>
+                </a:solidFill>
+                <a:latin typeface="PingFang SC"/>
+              </a:rPr>
+              <a:t>Evidence Judge</a:t>
+            </a:r>
+          </a:p>
+        </p:txBody>
+      </p:sp>
+      <p:sp>
+        <p:nvSpPr>
+          <p:cNvPr id="44" name="TextBox 43"/>
+          <p:cNvSpPr txBox="1"/>
+          <p:nvPr/>
+        </p:nvSpPr>
+        <p:spPr>
+          <a:xfrm>
+            <a:off x="8284463" y="2862072"/>
+            <a:ext cx="987552" cy="146304"/>
+          </a:xfrm>
+          <a:prstGeom prst="rect">
+            <a:avLst/>
+          </a:prstGeom>
+          <a:noFill/>
+        </p:spPr>
+        <p:txBody>
+          <a:bodyPr wrap="none" lIns="0" rIns="0" tIns="0" bIns="0" anchor="t">
+            <a:spAutoFit/>
+          </a:bodyPr>
+          <a:lstStyle/>
+          <a:p>
+            <a:pPr algn="l">
+              <a:lnSpc>
+                <a:spcPct val="108000"/>
+              </a:lnSpc>
+              <a:spcAft>
+                <a:spcPts val="0"/>
+              </a:spcAft>
+            </a:pPr>
+            <a:r>
+              <a:rPr sz="620" b="1">
+                <a:solidFill>
+                  <a:srgbClr val="955900"/>
+                </a:solidFill>
+                <a:latin typeface="Courier New"/>
+              </a:rPr>
+              <a:t>CAPABILITIES</a:t>
+            </a:r>
+          </a:p>
+        </p:txBody>
+      </p:sp>
+      <p:sp>
+        <p:nvSpPr>
+          <p:cNvPr id="45" name="TextBox 44"/>
+          <p:cNvSpPr txBox="1"/>
+          <p:nvPr/>
+        </p:nvSpPr>
+        <p:spPr>
+          <a:xfrm>
+            <a:off x="9180576" y="2843784"/>
+            <a:ext cx="2185416" cy="347472"/>
+          </a:xfrm>
+          <a:prstGeom prst="rect">
+            <a:avLst/>
+          </a:prstGeom>
+          <a:noFill/>
+        </p:spPr>
+        <p:txBody>
+          <a:bodyPr wrap="none" lIns="0" rIns="0" tIns="0" bIns="0" anchor="t">
+            <a:spAutoFit/>
+          </a:bodyPr>
+          <a:lstStyle/>
+          <a:p>
+            <a:pPr algn="l">
+              <a:lnSpc>
+                <a:spcPct val="108000"/>
+              </a:lnSpc>
+              <a:spcAft>
+                <a:spcPts val="0"/>
+              </a:spcAft>
+            </a:pPr>
+            <a:r>
+              <a:rPr sz="750" b="0">
+                <a:solidFill>
+                  <a:srgbClr val="252927"/>
+                </a:solidFill>
+                <a:latin typeface="PingFang SC"/>
+              </a:rPr>
+              <a:t>独立 pass/fail/inconclusive · 引用真实 event ID</a:t>
+            </a:r>
+          </a:p>
+        </p:txBody>
+      </p:sp>
+      <p:sp>
+        <p:nvSpPr>
+          <p:cNvPr id="46" name="TextBox 45"/>
+          <p:cNvSpPr txBox="1"/>
+          <p:nvPr/>
+        </p:nvSpPr>
+        <p:spPr>
+          <a:xfrm>
+            <a:off x="8284463" y="3392424"/>
+            <a:ext cx="987552" cy="146304"/>
+          </a:xfrm>
+          <a:prstGeom prst="rect">
+            <a:avLst/>
+          </a:prstGeom>
+          <a:noFill/>
+        </p:spPr>
+        <p:txBody>
+          <a:bodyPr wrap="none" lIns="0" rIns="0" tIns="0" bIns="0" anchor="t">
+            <a:spAutoFit/>
+          </a:bodyPr>
+          <a:lstStyle/>
+          <a:p>
+            <a:pPr algn="l">
+              <a:lnSpc>
+                <a:spcPct val="108000"/>
+              </a:lnSpc>
+              <a:spcAft>
+                <a:spcPts val="0"/>
+              </a:spcAft>
+            </a:pPr>
+            <a:r>
+              <a:rPr sz="620" b="1">
+                <a:solidFill>
+                  <a:srgbClr val="955900"/>
+                </a:solidFill>
+                <a:latin typeface="Courier New"/>
+              </a:rPr>
+              <a:t>INPUTS</a:t>
+            </a:r>
+          </a:p>
+        </p:txBody>
+      </p:sp>
+      <p:sp>
+        <p:nvSpPr>
+          <p:cNvPr id="47" name="TextBox 46"/>
+          <p:cNvSpPr txBox="1"/>
+          <p:nvPr/>
+        </p:nvSpPr>
+        <p:spPr>
+          <a:xfrm>
+            <a:off x="9180576" y="3374136"/>
+            <a:ext cx="2185416" cy="347472"/>
+          </a:xfrm>
+          <a:prstGeom prst="rect">
+            <a:avLst/>
+          </a:prstGeom>
+          <a:noFill/>
+        </p:spPr>
+        <p:txBody>
+          <a:bodyPr wrap="none" lIns="0" rIns="0" tIns="0" bIns="0" anchor="t">
+            <a:spAutoFit/>
+          </a:bodyPr>
+          <a:lstStyle/>
+          <a:p>
+            <a:pPr algn="l">
+              <a:lnSpc>
+                <a:spcPct val="108000"/>
+              </a:lnSpc>
+              <a:spcAft>
+                <a:spcPts val="0"/>
+              </a:spcAft>
+            </a:pPr>
+            <a:r>
+              <a:rPr sz="750" b="0">
+                <a:solidFill>
+                  <a:srgbClr val="252927"/>
+                </a:solidFill>
+                <a:latin typeface="PingFang SC"/>
+              </a:rPr>
+              <a:t>invocation/hash/deadline · 冻结 rubric · Rule · 脱敏证据</a:t>
+            </a:r>
+          </a:p>
+        </p:txBody>
+      </p:sp>
+      <p:sp>
+        <p:nvSpPr>
+          <p:cNvPr id="48" name="TextBox 47"/>
+          <p:cNvSpPr txBox="1"/>
+          <p:nvPr/>
+        </p:nvSpPr>
+        <p:spPr>
+          <a:xfrm>
+            <a:off x="8284463" y="3922776"/>
+            <a:ext cx="987552" cy="146304"/>
+          </a:xfrm>
+          <a:prstGeom prst="rect">
+            <a:avLst/>
+          </a:prstGeom>
+          <a:noFill/>
+        </p:spPr>
+        <p:txBody>
+          <a:bodyPr wrap="none" lIns="0" rIns="0" tIns="0" bIns="0" anchor="t">
+            <a:spAutoFit/>
+          </a:bodyPr>
+          <a:lstStyle/>
+          <a:p>
+            <a:pPr algn="l">
+              <a:lnSpc>
+                <a:spcPct val="108000"/>
+              </a:lnSpc>
+              <a:spcAft>
+                <a:spcPts val="0"/>
+              </a:spcAft>
+            </a:pPr>
+            <a:r>
+              <a:rPr sz="620" b="1">
+                <a:solidFill>
+                  <a:srgbClr val="955900"/>
+                </a:solidFill>
+                <a:latin typeface="Courier New"/>
+              </a:rPr>
+              <a:t>OUTPUTS</a:t>
+            </a:r>
+          </a:p>
+        </p:txBody>
+      </p:sp>
+      <p:sp>
+        <p:nvSpPr>
+          <p:cNvPr id="49" name="TextBox 48"/>
+          <p:cNvSpPr txBox="1"/>
+          <p:nvPr/>
+        </p:nvSpPr>
+        <p:spPr>
+          <a:xfrm>
+            <a:off x="9180576" y="3904488"/>
+            <a:ext cx="2185416" cy="347472"/>
+          </a:xfrm>
+          <a:prstGeom prst="rect">
+            <a:avLst/>
+          </a:prstGeom>
+          <a:noFill/>
+        </p:spPr>
+        <p:txBody>
+          <a:bodyPr wrap="none" lIns="0" rIns="0" tIns="0" bIns="0" anchor="t">
+            <a:spAutoFit/>
+          </a:bodyPr>
+          <a:lstStyle/>
+          <a:p>
+            <a:pPr algn="l">
+              <a:lnSpc>
+                <a:spcPct val="108000"/>
+              </a:lnSpc>
+              <a:spcAft>
+                <a:spcPts val="0"/>
+              </a:spcAft>
+            </a:pPr>
+            <a:r>
+              <a:rPr sz="750" b="0">
+                <a:solidFill>
+                  <a:srgbClr val="252927"/>
+                </a:solidFill>
+                <a:latin typeface="PingFang SC"/>
+              </a:rPr>
+              <a:t>JudgeOutput · criteria · summary · evidence refs</a:t>
+            </a:r>
+          </a:p>
+        </p:txBody>
+      </p:sp>
+      <p:sp>
+        <p:nvSpPr>
+          <p:cNvPr id="50" name="TextBox 49"/>
+          <p:cNvSpPr txBox="1"/>
+          <p:nvPr/>
+        </p:nvSpPr>
+        <p:spPr>
+          <a:xfrm>
+            <a:off x="8284463" y="4453127"/>
+            <a:ext cx="987552" cy="146304"/>
+          </a:xfrm>
+          <a:prstGeom prst="rect">
+            <a:avLst/>
+          </a:prstGeom>
+          <a:noFill/>
+        </p:spPr>
+        <p:txBody>
+          <a:bodyPr wrap="none" lIns="0" rIns="0" tIns="0" bIns="0" anchor="t">
+            <a:spAutoFit/>
+          </a:bodyPr>
+          <a:lstStyle/>
+          <a:p>
+            <a:pPr algn="l">
+              <a:lnSpc>
+                <a:spcPct val="108000"/>
+              </a:lnSpc>
+              <a:spcAft>
+                <a:spcPts val="0"/>
+              </a:spcAft>
+            </a:pPr>
+            <a:r>
+              <a:rPr sz="620" b="1">
+                <a:solidFill>
+                  <a:srgbClr val="955900"/>
+                </a:solidFill>
+                <a:latin typeface="Courier New"/>
+              </a:rPr>
+              <a:t>DEPENDENCIES</a:t>
+            </a:r>
+          </a:p>
+        </p:txBody>
+      </p:sp>
+      <p:sp>
+        <p:nvSpPr>
+          <p:cNvPr id="51" name="TextBox 50"/>
+          <p:cNvSpPr txBox="1"/>
+          <p:nvPr/>
+        </p:nvSpPr>
+        <p:spPr>
+          <a:xfrm>
+            <a:off x="9180576" y="4434840"/>
+            <a:ext cx="2185416" cy="347472"/>
+          </a:xfrm>
+          <a:prstGeom prst="rect">
+            <a:avLst/>
+          </a:prstGeom>
+          <a:noFill/>
+        </p:spPr>
+        <p:txBody>
+          <a:bodyPr wrap="none" lIns="0" rIns="0" tIns="0" bIns="0" anchor="t">
+            <a:spAutoFit/>
+          </a:bodyPr>
+          <a:lstStyle/>
+          <a:p>
+            <a:pPr algn="l">
+              <a:lnSpc>
+                <a:spcPct val="108000"/>
+              </a:lnSpc>
+              <a:spcAft>
+                <a:spcPts val="0"/>
+              </a:spcAft>
+            </a:pPr>
+            <a:r>
+              <a:rPr sz="750" b="0">
+                <a:solidFill>
+                  <a:srgbClr val="252927"/>
+                </a:solidFill>
+                <a:latin typeface="PingFang SC"/>
+              </a:rPr>
+              <a:t>judge-evidence · Judge 三工具 MCP</a:t>
+            </a:r>
+          </a:p>
+        </p:txBody>
+      </p:sp>
+      <p:sp>
+        <p:nvSpPr>
+          <p:cNvPr id="52" name="TextBox 51"/>
+          <p:cNvSpPr txBox="1"/>
+          <p:nvPr/>
+        </p:nvSpPr>
+        <p:spPr>
+          <a:xfrm>
+            <a:off x="8284463" y="4983479"/>
+            <a:ext cx="987552" cy="146304"/>
+          </a:xfrm>
+          <a:prstGeom prst="rect">
+            <a:avLst/>
+          </a:prstGeom>
+          <a:noFill/>
+        </p:spPr>
+        <p:txBody>
+          <a:bodyPr wrap="none" lIns="0" rIns="0" tIns="0" bIns="0" anchor="t">
+            <a:spAutoFit/>
+          </a:bodyPr>
+          <a:lstStyle/>
+          <a:p>
+            <a:pPr algn="l">
+              <a:lnSpc>
+                <a:spcPct val="108000"/>
+              </a:lnSpc>
+              <a:spcAft>
+                <a:spcPts val="0"/>
+              </a:spcAft>
+            </a:pPr>
+            <a:r>
+              <a:rPr sz="620" b="1">
+                <a:solidFill>
+                  <a:srgbClr val="955900"/>
+                </a:solidFill>
+                <a:latin typeface="Courier New"/>
+              </a:rPr>
+              <a:t>DECISION BOUNDARY</a:t>
+            </a:r>
+          </a:p>
+        </p:txBody>
+      </p:sp>
+      <p:sp>
+        <p:nvSpPr>
+          <p:cNvPr id="53" name="TextBox 52"/>
+          <p:cNvSpPr txBox="1"/>
+          <p:nvPr/>
+        </p:nvSpPr>
+        <p:spPr>
+          <a:xfrm>
+            <a:off x="9180576" y="4965192"/>
+            <a:ext cx="2185416" cy="347472"/>
+          </a:xfrm>
+          <a:prstGeom prst="rect">
+            <a:avLst/>
+          </a:prstGeom>
+          <a:noFill/>
+        </p:spPr>
+        <p:txBody>
+          <a:bodyPr wrap="none" lIns="0" rIns="0" tIns="0" bIns="0" anchor="t">
+            <a:spAutoFit/>
+          </a:bodyPr>
+          <a:lstStyle/>
+          <a:p>
+            <a:pPr algn="l">
+              <a:lnSpc>
+                <a:spcPct val="108000"/>
+              </a:lnSpc>
+              <a:spcAft>
+                <a:spcPts val="0"/>
+              </a:spcAft>
+            </a:pPr>
+            <a:r>
+              <a:rPr sz="750" b="0">
+                <a:solidFill>
+                  <a:srgbClr val="252927"/>
+                </a:solidFill>
+                <a:latin typeface="PingFang SC"/>
+              </a:rPr>
+              <a:t>不造证据/改 Rule；证据不足必须 inconclusive</a:t>
+            </a:r>
+          </a:p>
+        </p:txBody>
+      </p:sp>
+      <p:sp>
+        <p:nvSpPr>
+          <p:cNvPr id="54" name="TextBox 53"/>
+          <p:cNvSpPr txBox="1"/>
+          <p:nvPr/>
+        </p:nvSpPr>
+        <p:spPr>
+          <a:xfrm>
+            <a:off x="8284463" y="5513831"/>
+            <a:ext cx="987552" cy="146304"/>
+          </a:xfrm>
+          <a:prstGeom prst="rect">
+            <a:avLst/>
+          </a:prstGeom>
+          <a:noFill/>
+        </p:spPr>
+        <p:txBody>
+          <a:bodyPr wrap="none" lIns="0" rIns="0" tIns="0" bIns="0" anchor="t">
+            <a:spAutoFit/>
+          </a:bodyPr>
+          <a:lstStyle/>
+          <a:p>
+            <a:pPr algn="l">
+              <a:lnSpc>
+                <a:spcPct val="108000"/>
+              </a:lnSpc>
+              <a:spcAft>
+                <a:spcPts val="0"/>
+              </a:spcAft>
+            </a:pPr>
+            <a:r>
+              <a:rPr sz="620" b="1">
+                <a:solidFill>
+                  <a:srgbClr val="955900"/>
+                </a:solidFill>
+                <a:latin typeface="Courier New"/>
+              </a:rPr>
+              <a:t>TRACE</a:t>
+            </a:r>
+          </a:p>
+        </p:txBody>
+      </p:sp>
+      <p:sp>
+        <p:nvSpPr>
+          <p:cNvPr id="55" name="TextBox 54"/>
+          <p:cNvSpPr txBox="1"/>
+          <p:nvPr/>
+        </p:nvSpPr>
+        <p:spPr>
+          <a:xfrm>
+            <a:off x="9180576" y="5495544"/>
+            <a:ext cx="2185416" cy="347472"/>
+          </a:xfrm>
+          <a:prstGeom prst="rect">
+            <a:avLst/>
+          </a:prstGeom>
+          <a:noFill/>
+        </p:spPr>
+        <p:txBody>
+          <a:bodyPr wrap="none" lIns="0" rIns="0" tIns="0" bIns="0" anchor="t">
+            <a:spAutoFit/>
+          </a:bodyPr>
+          <a:lstStyle/>
+          <a:p>
+            <a:pPr algn="l">
+              <a:lnSpc>
+                <a:spcPct val="108000"/>
+              </a:lnSpc>
+              <a:spcAft>
+                <a:spcPts val="0"/>
+              </a:spcAft>
+            </a:pPr>
+            <a:r>
+              <a:rPr sz="750" b="0">
+                <a:solidFill>
+                  <a:srgbClr val="252927"/>
+                </a:solidFill>
+                <a:latin typeface="PingFang SC"/>
+              </a:rPr>
+              <a:t>Invocation 状态 · hashes · Matrix IDs · Evaluation ID</a:t>
+            </a:r>
+          </a:p>
+        </p:txBody>
+      </p:sp>
+    </p:spTree>
+  </p:cSld>
+  <p:clrMapOvr>
+    <a:masterClrMapping/>
+  </p:clrMapOvr>
+</p:sld>
+</file>
+
+<file path=ppt/slides/slide14.xml><?xml version="1.0" encoding="utf-8"?>
+<p:sld xmlns:a="http://schemas.openxmlformats.org/drawingml/2006/main" xmlns:p="http://schemas.openxmlformats.org/presentationml/2006/main" xmlns:r="http://schemas.openxmlformats.org/officeDocument/2006/relationships">
+  <p:cSld>
+    <p:bg>
+      <p:bgPr>
+        <a:solidFill>
+          <a:srgbClr val="F1F3F2"/>
+        </a:solidFill>
+        <a:effectLst/>
+      </p:bgPr>
+    </p:bg>
+    <p:spTree>
+      <p:nvGrpSpPr>
+        <p:cNvPr id="1" name=""/>
+        <p:cNvGrpSpPr/>
+        <p:nvPr/>
+      </p:nvGrpSpPr>
+      <p:grpSpPr/>
+      <p:sp>
+        <p:nvSpPr>
+          <p:cNvPr id="2" name="Rectangle 1"/>
+          <p:cNvSpPr/>
+          <p:nvPr/>
+        </p:nvSpPr>
+        <p:spPr>
+          <a:xfrm>
+            <a:off x="0" y="0"/>
+            <a:ext cx="109728" cy="6858000"/>
+          </a:xfrm>
+          <a:prstGeom prst="rect">
+            <a:avLst/>
+          </a:prstGeom>
+          <a:solidFill>
+            <a:srgbClr val="252927"/>
+          </a:solidFill>
+          <a:ln w="8890">
+            <a:solidFill>
+              <a:srgbClr val="252927"/>
+            </a:solidFill>
+          </a:ln>
+        </p:spPr>
+        <p:style>
+          <a:lnRef idx="1">
+            <a:schemeClr val="accent1"/>
+          </a:lnRef>
+          <a:fillRef idx="3">
+            <a:schemeClr val="accent1"/>
+          </a:fillRef>
+          <a:effectRef idx="2">
+            <a:schemeClr val="accent1"/>
+          </a:effectRef>
+          <a:fontRef idx="minor">
+            <a:schemeClr val="lt1"/>
+          </a:fontRef>
+        </p:style>
+        <p:txBody>
+          <a:bodyPr rtlCol="0" anchor="ctr"/>
+          <a:lstStyle/>
+          <a:p>
+            <a:pPr algn="ctr"/>
+          </a:p>
+        </p:txBody>
+      </p:sp>
+      <p:sp>
+        <p:nvSpPr>
+          <p:cNvPr id="3" name="TextBox 2"/>
+          <p:cNvSpPr txBox="1"/>
+          <p:nvPr/>
+        </p:nvSpPr>
+        <p:spPr>
+          <a:xfrm>
+            <a:off x="502920" y="347472"/>
+            <a:ext cx="5852160" cy="219456"/>
+          </a:xfrm>
+          <a:prstGeom prst="rect">
+            <a:avLst/>
+          </a:prstGeom>
+          <a:noFill/>
+        </p:spPr>
+        <p:txBody>
+          <a:bodyPr wrap="none" lIns="0" rIns="0" tIns="0" bIns="0" anchor="t">
+            <a:spAutoFit/>
+          </a:bodyPr>
+          <a:lstStyle/>
+          <a:p>
+            <a:pPr algn="l">
+              <a:lnSpc>
+                <a:spcPct val="108000"/>
+              </a:lnSpc>
+              <a:spcAft>
+                <a:spcPts val="0"/>
+              </a:spcAft>
+            </a:pPr>
+            <a:r>
+              <a:rPr sz="800" b="1">
+                <a:solidFill>
+                  <a:srgbClr val="252927"/>
+                </a:solidFill>
+                <a:latin typeface="Courier New"/>
+              </a:rPr>
+              <a:t>APPENDIX / SKILL CONTRACT</a:t>
+            </a:r>
+          </a:p>
+        </p:txBody>
+      </p:sp>
+      <p:sp>
+        <p:nvSpPr>
+          <p:cNvPr id="4" name="TextBox 3"/>
+          <p:cNvSpPr txBox="1"/>
+          <p:nvPr/>
+        </p:nvSpPr>
+        <p:spPr>
+          <a:xfrm>
+            <a:off x="502920" y="658368"/>
+            <a:ext cx="10881360" cy="502920"/>
+          </a:xfrm>
+          <a:prstGeom prst="rect">
+            <a:avLst/>
+          </a:prstGeom>
+          <a:noFill/>
+        </p:spPr>
+        <p:txBody>
+          <a:bodyPr wrap="none" lIns="0" rIns="0" tIns="0" bIns="0" anchor="t">
+            <a:spAutoFit/>
+          </a:bodyPr>
+          <a:lstStyle/>
+          <a:p>
+            <a:pPr algn="l">
+              <a:lnSpc>
+                <a:spcPct val="108000"/>
+              </a:lnSpc>
+              <a:spcAft>
+                <a:spcPts val="0"/>
+              </a:spcAft>
+            </a:pPr>
+            <a:r>
+              <a:rPr sz="2500" b="1">
+                <a:solidFill>
+                  <a:srgbClr val="151719"/>
+                </a:solidFill>
+                <a:latin typeface="PingFang SC"/>
+              </a:rPr>
+              <a:t>附录 B：11 个 Skill 如何被工程化</a:t>
+            </a:r>
+          </a:p>
+        </p:txBody>
+      </p:sp>
+      <p:sp>
+        <p:nvSpPr>
+          <p:cNvPr id="5" name="TextBox 4"/>
+          <p:cNvSpPr txBox="1"/>
+          <p:nvPr/>
+        </p:nvSpPr>
+        <p:spPr>
+          <a:xfrm>
+            <a:off x="521207" y="1179576"/>
+            <a:ext cx="10789920" cy="320040"/>
+          </a:xfrm>
+          <a:prstGeom prst="rect">
+            <a:avLst/>
+          </a:prstGeom>
+          <a:noFill/>
+        </p:spPr>
+        <p:txBody>
+          <a:bodyPr wrap="none" lIns="0" rIns="0" tIns="0" bIns="0" anchor="t">
+            <a:spAutoFit/>
+          </a:bodyPr>
+          <a:lstStyle/>
+          <a:p>
+            <a:pPr algn="l">
+              <a:lnSpc>
+                <a:spcPct val="108000"/>
+              </a:lnSpc>
+              <a:spcAft>
+                <a:spcPts val="0"/>
+              </a:spcAft>
+            </a:pPr>
+            <a:r>
+              <a:rPr sz="1000" b="0">
+                <a:solidFill>
+                  <a:srgbClr val="59615D"/>
+                </a:solidFill>
+                <a:latin typeface="PingFang SC"/>
+              </a:rPr>
+              <a:t>不只列名称：定义调用、输入输出、失败、安全、验证、版本与复用</a:t>
+            </a:r>
+          </a:p>
+        </p:txBody>
+      </p:sp>
+      <p:sp>
+        <p:nvSpPr>
+          <p:cNvPr id="6" name="Rectangle 5"/>
+          <p:cNvSpPr/>
+          <p:nvPr/>
+        </p:nvSpPr>
+        <p:spPr>
+          <a:xfrm>
+            <a:off x="502920" y="1572768"/>
+            <a:ext cx="11201400" cy="12700"/>
+          </a:xfrm>
+          <a:prstGeom prst="rect">
+            <a:avLst/>
+          </a:prstGeom>
+          <a:solidFill>
+            <a:srgbClr val="D7DDD9"/>
+          </a:solidFill>
+          <a:ln>
+            <a:noFill/>
+          </a:ln>
+        </p:spPr>
+        <p:style>
+          <a:lnRef idx="1">
+            <a:schemeClr val="accent1"/>
+          </a:lnRef>
+          <a:fillRef idx="3">
+            <a:schemeClr val="accent1"/>
+          </a:fillRef>
+          <a:effectRef idx="2">
+            <a:schemeClr val="accent1"/>
+          </a:effectRef>
+          <a:fontRef idx="minor">
+            <a:schemeClr val="lt1"/>
+          </a:fontRef>
+        </p:style>
+        <p:txBody>
+          <a:bodyPr rtlCol="0" anchor="ctr"/>
+          <a:lstStyle/>
+          <a:p>
+            <a:pPr algn="ctr"/>
+          </a:p>
+        </p:txBody>
+      </p:sp>
+      <p:sp>
+        <p:nvSpPr>
+          <p:cNvPr id="7" name="TextBox 6"/>
+          <p:cNvSpPr txBox="1"/>
+          <p:nvPr/>
+        </p:nvSpPr>
+        <p:spPr>
+          <a:xfrm>
+            <a:off x="502920" y="6565392"/>
+            <a:ext cx="11064240" cy="164592"/>
+          </a:xfrm>
+          <a:prstGeom prst="rect">
+            <a:avLst/>
+          </a:prstGeom>
+          <a:noFill/>
+        </p:spPr>
+        <p:txBody>
+          <a:bodyPr wrap="none" lIns="0" rIns="0" tIns="0" bIns="0" anchor="t">
+            <a:spAutoFit/>
+          </a:bodyPr>
+          <a:lstStyle/>
+          <a:p>
+            <a:pPr algn="l">
+              <a:lnSpc>
+                <a:spcPct val="108000"/>
+              </a:lnSpc>
+              <a:spcAft>
+                <a:spcPts val="0"/>
+              </a:spcAft>
+            </a:pPr>
+            <a:r>
+              <a:rPr sz="700" b="0">
+                <a:solidFill>
+                  <a:srgbClr val="737B77"/>
+                </a:solidFill>
+                <a:latin typeface="Courier New"/>
+              </a:rPr>
+              <a:t>AGENTRIG / GOAI 2026                         APPENDIX 02 / 03</a:t>
+            </a:r>
+          </a:p>
+        </p:txBody>
+      </p:sp>
+      <p:sp>
+        <p:nvSpPr>
+          <p:cNvPr id="8" name="Rectangle 7"/>
+          <p:cNvSpPr/>
+          <p:nvPr/>
+        </p:nvSpPr>
+        <p:spPr>
+          <a:xfrm>
+            <a:off x="594360" y="1828800"/>
+            <a:ext cx="3675887" cy="4370832"/>
+          </a:xfrm>
+          <a:prstGeom prst="rect">
+            <a:avLst/>
+          </a:prstGeom>
+          <a:solidFill>
+            <a:srgbClr val="151719"/>
+          </a:solidFill>
+          <a:ln w="8890">
+            <a:solidFill>
+              <a:srgbClr val="151719"/>
+            </a:solidFill>
+          </a:ln>
+        </p:spPr>
+        <p:style>
+          <a:lnRef idx="1">
+            <a:schemeClr val="accent1"/>
+          </a:lnRef>
+          <a:fillRef idx="3">
+            <a:schemeClr val="accent1"/>
+          </a:fillRef>
+          <a:effectRef idx="2">
+            <a:schemeClr val="accent1"/>
+          </a:effectRef>
+          <a:fontRef idx="minor">
+            <a:schemeClr val="lt1"/>
+          </a:fontRef>
+        </p:style>
+        <p:txBody>
+          <a:bodyPr rtlCol="0" anchor="ctr"/>
+          <a:lstStyle/>
+          <a:p>
+            <a:pPr algn="ctr"/>
+          </a:p>
+        </p:txBody>
+      </p:sp>
+      <p:sp>
+        <p:nvSpPr>
+          <p:cNvPr id="9" name="TextBox 8"/>
+          <p:cNvSpPr txBox="1"/>
+          <p:nvPr/>
+        </p:nvSpPr>
+        <p:spPr>
+          <a:xfrm>
+            <a:off x="841248" y="2103120"/>
+            <a:ext cx="3200400" cy="201168"/>
+          </a:xfrm>
+          <a:prstGeom prst="rect">
+            <a:avLst/>
+          </a:prstGeom>
+          <a:noFill/>
+        </p:spPr>
+        <p:txBody>
+          <a:bodyPr wrap="none" lIns="0" rIns="0" tIns="0" bIns="0" anchor="t">
+            <a:spAutoFit/>
+          </a:bodyPr>
+          <a:lstStyle/>
+          <a:p>
+            <a:pPr algn="l">
+              <a:lnSpc>
+                <a:spcPct val="108000"/>
+              </a:lnSpc>
+              <a:spcAft>
+                <a:spcPts val="0"/>
+              </a:spcAft>
+            </a:pPr>
+            <a:r>
+              <a:rPr sz="800" b="1">
+                <a:solidFill>
+                  <a:srgbClr val="8E9691"/>
+                </a:solidFill>
+                <a:latin typeface="Courier New"/>
+              </a:rPr>
+              <a:t>11 VERSIONED SKILLS</a:t>
+            </a:r>
+          </a:p>
+        </p:txBody>
+      </p:sp>
+      <p:sp>
+        <p:nvSpPr>
+          <p:cNvPr id="10" name="TextBox 9"/>
+          <p:cNvSpPr txBox="1"/>
+          <p:nvPr/>
+        </p:nvSpPr>
+        <p:spPr>
+          <a:xfrm>
+            <a:off x="841248" y="2487168"/>
+            <a:ext cx="1051560" cy="164592"/>
+          </a:xfrm>
+          <a:prstGeom prst="rect">
+            <a:avLst/>
+          </a:prstGeom>
+          <a:noFill/>
+        </p:spPr>
+        <p:txBody>
+          <a:bodyPr wrap="none" lIns="0" rIns="0" tIns="0" bIns="0" anchor="t">
+            <a:spAutoFit/>
+          </a:bodyPr>
+          <a:lstStyle/>
+          <a:p>
+            <a:pPr algn="l">
+              <a:lnSpc>
+                <a:spcPct val="108000"/>
+              </a:lnSpc>
+              <a:spcAft>
+                <a:spcPts val="0"/>
+              </a:spcAft>
+            </a:pPr>
+            <a:r>
+              <a:rPr sz="680" b="1">
+                <a:solidFill>
+                  <a:srgbClr val="2457F5"/>
+                </a:solidFill>
+                <a:latin typeface="Courier New"/>
+              </a:rPr>
+              <a:t>MANAGER / 6</a:t>
+            </a:r>
+          </a:p>
+        </p:txBody>
+      </p:sp>
+      <p:sp>
+        <p:nvSpPr>
+          <p:cNvPr id="11" name="TextBox 10"/>
+          <p:cNvSpPr txBox="1"/>
+          <p:nvPr/>
+        </p:nvSpPr>
+        <p:spPr>
+          <a:xfrm>
+            <a:off x="1847088" y="2459736"/>
+            <a:ext cx="2057400" cy="1828800"/>
+          </a:xfrm>
+          <a:prstGeom prst="rect">
+            <a:avLst/>
+          </a:prstGeom>
+          <a:noFill/>
+        </p:spPr>
+        <p:txBody>
+          <a:bodyPr wrap="none" lIns="0" rIns="0" tIns="0" bIns="0" anchor="t">
+            <a:spAutoFit/>
+          </a:bodyPr>
+          <a:lstStyle/>
+          <a:p>
+            <a:pPr algn="l">
+              <a:lnSpc>
+                <a:spcPct val="108000"/>
+              </a:lnSpc>
+              <a:spcAft>
+                <a:spcPts val="0"/>
+              </a:spcAft>
+            </a:pPr>
+            <a:r>
+              <a:rPr sz="720" b="1">
+                <a:solidFill>
+                  <a:srgbClr val="FFFFFF"/>
+                </a:solidFill>
+                <a:latin typeface="Courier New"/>
+              </a:rPr>
+              <a:t>adaptive-evaluation
+plan-evaluation
+execute-evaluation-plan
+diagnose-run
+build-test-case-draft
+configure-test-target</a:t>
+            </a:r>
+          </a:p>
+        </p:txBody>
+      </p:sp>
+      <p:sp>
+        <p:nvSpPr>
+          <p:cNvPr id="12" name="TextBox 11"/>
+          <p:cNvSpPr txBox="1"/>
+          <p:nvPr/>
+        </p:nvSpPr>
+        <p:spPr>
+          <a:xfrm>
+            <a:off x="841248" y="4526280"/>
+            <a:ext cx="1051560" cy="164592"/>
+          </a:xfrm>
+          <a:prstGeom prst="rect">
+            <a:avLst/>
+          </a:prstGeom>
+          <a:noFill/>
+        </p:spPr>
+        <p:txBody>
+          <a:bodyPr wrap="none" lIns="0" rIns="0" tIns="0" bIns="0" anchor="t">
+            <a:spAutoFit/>
+          </a:bodyPr>
+          <a:lstStyle/>
+          <a:p>
+            <a:pPr algn="l">
+              <a:lnSpc>
+                <a:spcPct val="108000"/>
+              </a:lnSpc>
+              <a:spcAft>
+                <a:spcPts val="0"/>
+              </a:spcAft>
+            </a:pPr>
+            <a:r>
+              <a:rPr sz="680" b="1">
+                <a:solidFill>
+                  <a:srgbClr val="237A59"/>
+                </a:solidFill>
+                <a:latin typeface="Courier New"/>
+              </a:rPr>
+              <a:t>WORKERS / 2</a:t>
+            </a:r>
+          </a:p>
+        </p:txBody>
+      </p:sp>
+      <p:sp>
+        <p:nvSpPr>
+          <p:cNvPr id="13" name="TextBox 12"/>
+          <p:cNvSpPr txBox="1"/>
+          <p:nvPr/>
+        </p:nvSpPr>
+        <p:spPr>
+          <a:xfrm>
+            <a:off x="1847088" y="4498848"/>
+            <a:ext cx="2057400" cy="841248"/>
+          </a:xfrm>
+          <a:prstGeom prst="rect">
+            <a:avLst/>
+          </a:prstGeom>
+          <a:noFill/>
+        </p:spPr>
+        <p:txBody>
+          <a:bodyPr wrap="none" lIns="0" rIns="0" tIns="0" bIns="0" anchor="t">
+            <a:spAutoFit/>
+          </a:bodyPr>
+          <a:lstStyle/>
+          <a:p>
+            <a:pPr algn="l">
+              <a:lnSpc>
+                <a:spcPct val="108000"/>
+              </a:lnSpc>
+              <a:spcAft>
+                <a:spcPts val="0"/>
+              </a:spcAft>
+            </a:pPr>
+            <a:r>
+              <a:rPr sz="720" b="1">
+                <a:solidFill>
+                  <a:srgbClr val="FFFFFF"/>
+                </a:solidFill>
+                <a:latin typeface="Courier New"/>
+              </a:rPr>
+              <a:t>simulate-tool-result
+judge-evidence</a:t>
+            </a:r>
+          </a:p>
+        </p:txBody>
+      </p:sp>
+      <p:sp>
+        <p:nvSpPr>
+          <p:cNvPr id="14" name="TextBox 13"/>
+          <p:cNvSpPr txBox="1"/>
+          <p:nvPr/>
+        </p:nvSpPr>
+        <p:spPr>
+          <a:xfrm>
+            <a:off x="841248" y="5577840"/>
+            <a:ext cx="1051560" cy="164592"/>
+          </a:xfrm>
+          <a:prstGeom prst="rect">
+            <a:avLst/>
+          </a:prstGeom>
+          <a:noFill/>
+        </p:spPr>
+        <p:txBody>
+          <a:bodyPr wrap="none" lIns="0" rIns="0" tIns="0" bIns="0" anchor="t">
+            <a:spAutoFit/>
+          </a:bodyPr>
+          <a:lstStyle/>
+          <a:p>
+            <a:pPr algn="l">
+              <a:lnSpc>
+                <a:spcPct val="108000"/>
+              </a:lnSpc>
+              <a:spcAft>
+                <a:spcPts val="0"/>
+              </a:spcAft>
+            </a:pPr>
+            <a:r>
+              <a:rPr sz="680" b="1">
+                <a:solidFill>
+                  <a:srgbClr val="955900"/>
+                </a:solidFill>
+                <a:latin typeface="Courier New"/>
+              </a:rPr>
+              <a:t>CORE / 3</a:t>
+            </a:r>
+          </a:p>
+        </p:txBody>
+      </p:sp>
+      <p:sp>
+        <p:nvSpPr>
+          <p:cNvPr id="15" name="TextBox 14"/>
+          <p:cNvSpPr txBox="1"/>
+          <p:nvPr/>
+        </p:nvSpPr>
+        <p:spPr>
+          <a:xfrm>
+            <a:off x="1847088" y="5550408"/>
+            <a:ext cx="2057400" cy="1088136"/>
+          </a:xfrm>
+          <a:prstGeom prst="rect">
+            <a:avLst/>
+          </a:prstGeom>
+          <a:noFill/>
+        </p:spPr>
+        <p:txBody>
+          <a:bodyPr wrap="none" lIns="0" rIns="0" tIns="0" bIns="0" anchor="t">
+            <a:spAutoFit/>
+          </a:bodyPr>
+          <a:lstStyle/>
+          <a:p>
+            <a:pPr algn="l">
+              <a:lnSpc>
+                <a:spcPct val="108000"/>
+              </a:lnSpc>
+              <a:spcAft>
+                <a:spcPts val="0"/>
+              </a:spcAft>
+            </a:pPr>
+            <a:r>
+              <a:rPr sz="720" b="1">
+                <a:solidFill>
+                  <a:srgbClr val="FFFFFF"/>
+                </a:solidFill>
+                <a:latin typeface="Courier New"/>
+              </a:rPr>
+              <a:t>run-test-cases
+build-test-case
+harvest-tool-samples</a:t>
+            </a:r>
+          </a:p>
+        </p:txBody>
+      </p:sp>
+      <p:sp>
+        <p:nvSpPr>
+          <p:cNvPr id="16" name="Rectangle 15"/>
+          <p:cNvSpPr/>
+          <p:nvPr/>
+        </p:nvSpPr>
+        <p:spPr>
+          <a:xfrm>
+            <a:off x="4553712" y="1828800"/>
+            <a:ext cx="7059168" cy="2514600"/>
+          </a:xfrm>
+          <a:prstGeom prst="rect">
+            <a:avLst/>
+          </a:prstGeom>
+          <a:solidFill>
+            <a:srgbClr val="FFFFFF"/>
+          </a:solidFill>
+          <a:ln w="8890">
+            <a:solidFill>
+              <a:srgbClr val="D7DDD9"/>
+            </a:solidFill>
+          </a:ln>
+        </p:spPr>
+        <p:style>
+          <a:lnRef idx="1">
+            <a:schemeClr val="accent1"/>
+          </a:lnRef>
+          <a:fillRef idx="3">
+            <a:schemeClr val="accent1"/>
+          </a:fillRef>
+          <a:effectRef idx="2">
+            <a:schemeClr val="accent1"/>
+          </a:effectRef>
+          <a:fontRef idx="minor">
+            <a:schemeClr val="lt1"/>
+          </a:fontRef>
+        </p:style>
+        <p:txBody>
+          <a:bodyPr rtlCol="0" anchor="ctr"/>
+          <a:lstStyle/>
+          <a:p>
+            <a:pPr algn="ctr"/>
+          </a:p>
+        </p:txBody>
+      </p:sp>
+      <p:sp>
+        <p:nvSpPr>
+          <p:cNvPr id="17" name="TextBox 16"/>
+          <p:cNvSpPr txBox="1"/>
+          <p:nvPr/>
+        </p:nvSpPr>
+        <p:spPr>
+          <a:xfrm>
+            <a:off x="4800600" y="2103120"/>
+            <a:ext cx="2926080" cy="182880"/>
+          </a:xfrm>
+          <a:prstGeom prst="rect">
+            <a:avLst/>
+          </a:prstGeom>
+          <a:noFill/>
+        </p:spPr>
+        <p:txBody>
+          <a:bodyPr wrap="none" lIns="0" rIns="0" tIns="0" bIns="0" anchor="t">
+            <a:spAutoFit/>
+          </a:bodyPr>
+          <a:lstStyle/>
+          <a:p>
+            <a:pPr algn="l">
+              <a:lnSpc>
+                <a:spcPct val="108000"/>
+              </a:lnSpc>
+              <a:spcAft>
+                <a:spcPts val="0"/>
+              </a:spcAft>
+            </a:pPr>
+            <a:r>
+              <a:rPr sz="800" b="1">
+                <a:solidFill>
+                  <a:srgbClr val="2457F5"/>
+                </a:solidFill>
+                <a:latin typeface="Courier New"/>
+              </a:rPr>
+              <a:t>OFFICIAL CONTRACT FIELDS</a:t>
+            </a:r>
+          </a:p>
+        </p:txBody>
+      </p:sp>
+      <p:sp>
+        <p:nvSpPr>
+          <p:cNvPr id="18" name="Rectangle 17"/>
+          <p:cNvSpPr/>
+          <p:nvPr/>
+        </p:nvSpPr>
+        <p:spPr>
+          <a:xfrm>
+            <a:off x="4800600" y="2523744"/>
+            <a:ext cx="2971800" cy="246888"/>
+          </a:xfrm>
+          <a:prstGeom prst="rect">
+            <a:avLst/>
+          </a:prstGeom>
+          <a:solidFill>
+            <a:srgbClr val="F7F8F7"/>
+          </a:solidFill>
+          <a:ln w="8890">
+            <a:solidFill>
+              <a:srgbClr val="D7DDD9"/>
+            </a:solidFill>
+          </a:ln>
+        </p:spPr>
+        <p:style>
+          <a:lnRef idx="1">
+            <a:schemeClr val="accent1"/>
+          </a:lnRef>
+          <a:fillRef idx="3">
+            <a:schemeClr val="accent1"/>
+          </a:fillRef>
+          <a:effectRef idx="2">
+            <a:schemeClr val="accent1"/>
+          </a:effectRef>
+          <a:fontRef idx="minor">
+            <a:schemeClr val="lt1"/>
+          </a:fontRef>
+        </p:style>
+        <p:txBody>
+          <a:bodyPr rtlCol="0" anchor="ctr"/>
+          <a:lstStyle/>
+          <a:p>
+            <a:pPr algn="ctr"/>
+          </a:p>
+        </p:txBody>
+      </p:sp>
+      <p:sp>
+        <p:nvSpPr>
+          <p:cNvPr id="19" name="TextBox 18"/>
+          <p:cNvSpPr txBox="1"/>
+          <p:nvPr/>
+        </p:nvSpPr>
+        <p:spPr>
+          <a:xfrm>
+            <a:off x="4892040" y="2596896"/>
+            <a:ext cx="256032" cy="91440"/>
+          </a:xfrm>
+          <a:prstGeom prst="rect">
+            <a:avLst/>
+          </a:prstGeom>
+          <a:noFill/>
+        </p:spPr>
+        <p:txBody>
+          <a:bodyPr wrap="none" lIns="0" rIns="0" tIns="0" bIns="0" anchor="t">
+            <a:spAutoFit/>
+          </a:bodyPr>
+          <a:lstStyle/>
+          <a:p>
+            <a:pPr algn="l">
+              <a:lnSpc>
+                <a:spcPct val="108000"/>
+              </a:lnSpc>
+              <a:spcAft>
+                <a:spcPts val="0"/>
+              </a:spcAft>
+            </a:pPr>
+            <a:r>
+              <a:rPr sz="550" b="0">
+                <a:solidFill>
+                  <a:srgbClr val="737B77"/>
+                </a:solidFill>
+                <a:latin typeface="Courier New"/>
+              </a:rPr>
+              <a:t>01</a:t>
+            </a:r>
+          </a:p>
+        </p:txBody>
+      </p:sp>
+      <p:sp>
+        <p:nvSpPr>
+          <p:cNvPr id="20" name="TextBox 19"/>
+          <p:cNvSpPr txBox="1"/>
+          <p:nvPr/>
+        </p:nvSpPr>
+        <p:spPr>
+          <a:xfrm>
+            <a:off x="5193792" y="2569463"/>
+            <a:ext cx="2395728" cy="128016"/>
+          </a:xfrm>
+          <a:prstGeom prst="rect">
+            <a:avLst/>
+          </a:prstGeom>
+          <a:noFill/>
+        </p:spPr>
+        <p:txBody>
+          <a:bodyPr wrap="none" lIns="0" rIns="0" tIns="0" bIns="0" anchor="t">
+            <a:spAutoFit/>
+          </a:bodyPr>
+          <a:lstStyle/>
+          <a:p>
+            <a:pPr algn="l">
+              <a:lnSpc>
+                <a:spcPct val="108000"/>
+              </a:lnSpc>
+              <a:spcAft>
+                <a:spcPts val="0"/>
+              </a:spcAft>
+            </a:pPr>
+            <a:r>
+              <a:rPr sz="700" b="1">
+                <a:solidFill>
+                  <a:srgbClr val="252927"/>
+                </a:solidFill>
+                <a:latin typeface="PingFang SC"/>
+              </a:rPr>
+              <a:t>名称 / 类型</a:t>
+            </a:r>
+          </a:p>
+        </p:txBody>
+      </p:sp>
+      <p:sp>
+        <p:nvSpPr>
+          <p:cNvPr id="21" name="Rectangle 20"/>
+          <p:cNvSpPr/>
+          <p:nvPr/>
+        </p:nvSpPr>
+        <p:spPr>
+          <a:xfrm>
+            <a:off x="8046720" y="2523744"/>
+            <a:ext cx="2971800" cy="246888"/>
+          </a:xfrm>
+          <a:prstGeom prst="rect">
+            <a:avLst/>
+          </a:prstGeom>
+          <a:solidFill>
+            <a:srgbClr val="F7F8F7"/>
+          </a:solidFill>
+          <a:ln w="8890">
+            <a:solidFill>
+              <a:srgbClr val="D7DDD9"/>
+            </a:solidFill>
+          </a:ln>
+        </p:spPr>
+        <p:style>
+          <a:lnRef idx="1">
+            <a:schemeClr val="accent1"/>
+          </a:lnRef>
+          <a:fillRef idx="3">
+            <a:schemeClr val="accent1"/>
+          </a:fillRef>
+          <a:effectRef idx="2">
+            <a:schemeClr val="accent1"/>
+          </a:effectRef>
+          <a:fontRef idx="minor">
+            <a:schemeClr val="lt1"/>
+          </a:fontRef>
+        </p:style>
+        <p:txBody>
+          <a:bodyPr rtlCol="0" anchor="ctr"/>
+          <a:lstStyle/>
+          <a:p>
+            <a:pPr algn="ctr"/>
+          </a:p>
+        </p:txBody>
+      </p:sp>
+      <p:sp>
+        <p:nvSpPr>
+          <p:cNvPr id="22" name="TextBox 21"/>
+          <p:cNvSpPr txBox="1"/>
+          <p:nvPr/>
+        </p:nvSpPr>
+        <p:spPr>
+          <a:xfrm>
+            <a:off x="8138160" y="2596896"/>
+            <a:ext cx="256032" cy="91440"/>
+          </a:xfrm>
+          <a:prstGeom prst="rect">
+            <a:avLst/>
+          </a:prstGeom>
+          <a:noFill/>
+        </p:spPr>
+        <p:txBody>
+          <a:bodyPr wrap="none" lIns="0" rIns="0" tIns="0" bIns="0" anchor="t">
+            <a:spAutoFit/>
+          </a:bodyPr>
+          <a:lstStyle/>
+          <a:p>
+            <a:pPr algn="l">
+              <a:lnSpc>
+                <a:spcPct val="108000"/>
+              </a:lnSpc>
+              <a:spcAft>
+                <a:spcPts val="0"/>
+              </a:spcAft>
+            </a:pPr>
+            <a:r>
+              <a:rPr sz="550" b="0">
+                <a:solidFill>
+                  <a:srgbClr val="737B77"/>
+                </a:solidFill>
+                <a:latin typeface="Courier New"/>
+              </a:rPr>
+              <a:t>02</a:t>
+            </a:r>
+          </a:p>
+        </p:txBody>
+      </p:sp>
+      <p:sp>
+        <p:nvSpPr>
+          <p:cNvPr id="23" name="TextBox 22"/>
+          <p:cNvSpPr txBox="1"/>
+          <p:nvPr/>
+        </p:nvSpPr>
+        <p:spPr>
+          <a:xfrm>
+            <a:off x="8439912" y="2569463"/>
+            <a:ext cx="2395728" cy="128016"/>
+          </a:xfrm>
+          <a:prstGeom prst="rect">
+            <a:avLst/>
+          </a:prstGeom>
+          <a:noFill/>
+        </p:spPr>
+        <p:txBody>
+          <a:bodyPr wrap="none" lIns="0" rIns="0" tIns="0" bIns="0" anchor="t">
+            <a:spAutoFit/>
+          </a:bodyPr>
+          <a:lstStyle/>
+          <a:p>
+            <a:pPr algn="l">
+              <a:lnSpc>
+                <a:spcPct val="108000"/>
+              </a:lnSpc>
+              <a:spcAft>
+                <a:spcPts val="0"/>
+              </a:spcAft>
+            </a:pPr>
+            <a:r>
+              <a:rPr sz="700" b="1">
+                <a:solidFill>
+                  <a:srgbClr val="252927"/>
+                </a:solidFill>
+                <a:latin typeface="PingFang SC"/>
+              </a:rPr>
+              <a:t>使用场景</a:t>
+            </a:r>
+          </a:p>
+        </p:txBody>
+      </p:sp>
+      <p:sp>
+        <p:nvSpPr>
+          <p:cNvPr id="24" name="Rectangle 23"/>
+          <p:cNvSpPr/>
+          <p:nvPr/>
+        </p:nvSpPr>
+        <p:spPr>
+          <a:xfrm>
+            <a:off x="4800600" y="2852927"/>
+            <a:ext cx="2971800" cy="246888"/>
+          </a:xfrm>
+          <a:prstGeom prst="rect">
+            <a:avLst/>
+          </a:prstGeom>
+          <a:solidFill>
+            <a:srgbClr val="F7F8F7"/>
+          </a:solidFill>
+          <a:ln w="8890">
+            <a:solidFill>
+              <a:srgbClr val="D7DDD9"/>
+            </a:solidFill>
+          </a:ln>
+        </p:spPr>
+        <p:style>
+          <a:lnRef idx="1">
+            <a:schemeClr val="accent1"/>
+          </a:lnRef>
+          <a:fillRef idx="3">
+            <a:schemeClr val="accent1"/>
+          </a:fillRef>
+          <a:effectRef idx="2">
+            <a:schemeClr val="accent1"/>
+          </a:effectRef>
+          <a:fontRef idx="minor">
+            <a:schemeClr val="lt1"/>
+          </a:fontRef>
+        </p:style>
+        <p:txBody>
+          <a:bodyPr rtlCol="0" anchor="ctr"/>
+          <a:lstStyle/>
+          <a:p>
+            <a:pPr algn="ctr"/>
+          </a:p>
+        </p:txBody>
+      </p:sp>
+      <p:sp>
+        <p:nvSpPr>
+          <p:cNvPr id="25" name="TextBox 24"/>
+          <p:cNvSpPr txBox="1"/>
+          <p:nvPr/>
+        </p:nvSpPr>
+        <p:spPr>
+          <a:xfrm>
+            <a:off x="4892040" y="2926079"/>
+            <a:ext cx="256032" cy="91440"/>
+          </a:xfrm>
+          <a:prstGeom prst="rect">
+            <a:avLst/>
+          </a:prstGeom>
+          <a:noFill/>
+        </p:spPr>
+        <p:txBody>
+          <a:bodyPr wrap="none" lIns="0" rIns="0" tIns="0" bIns="0" anchor="t">
+            <a:spAutoFit/>
+          </a:bodyPr>
+          <a:lstStyle/>
+          <a:p>
+            <a:pPr algn="l">
+              <a:lnSpc>
+                <a:spcPct val="108000"/>
+              </a:lnSpc>
+              <a:spcAft>
+                <a:spcPts val="0"/>
+              </a:spcAft>
+            </a:pPr>
+            <a:r>
+              <a:rPr sz="550" b="0">
+                <a:solidFill>
+                  <a:srgbClr val="737B77"/>
+                </a:solidFill>
+                <a:latin typeface="Courier New"/>
+              </a:rPr>
+              <a:t>03</a:t>
+            </a:r>
+          </a:p>
+        </p:txBody>
+      </p:sp>
+      <p:sp>
+        <p:nvSpPr>
+          <p:cNvPr id="26" name="TextBox 25"/>
+          <p:cNvSpPr txBox="1"/>
+          <p:nvPr/>
+        </p:nvSpPr>
+        <p:spPr>
+          <a:xfrm>
+            <a:off x="5193792" y="2898647"/>
+            <a:ext cx="2395728" cy="128016"/>
+          </a:xfrm>
+          <a:prstGeom prst="rect">
+            <a:avLst/>
+          </a:prstGeom>
+          <a:noFill/>
+        </p:spPr>
+        <p:txBody>
+          <a:bodyPr wrap="none" lIns="0" rIns="0" tIns="0" bIns="0" anchor="t">
+            <a:spAutoFit/>
+          </a:bodyPr>
+          <a:lstStyle/>
+          <a:p>
+            <a:pPr algn="l">
+              <a:lnSpc>
+                <a:spcPct val="108000"/>
+              </a:lnSpc>
+              <a:spcAft>
+                <a:spcPts val="0"/>
+              </a:spcAft>
+            </a:pPr>
+            <a:r>
+              <a:rPr sz="700" b="1">
+                <a:solidFill>
+                  <a:srgbClr val="252927"/>
+                </a:solidFill>
+                <a:latin typeface="PingFang SC"/>
+              </a:rPr>
+              <a:t>输入参数</a:t>
+            </a:r>
+          </a:p>
+        </p:txBody>
+      </p:sp>
+      <p:sp>
+        <p:nvSpPr>
+          <p:cNvPr id="27" name="Rectangle 26"/>
+          <p:cNvSpPr/>
+          <p:nvPr/>
+        </p:nvSpPr>
+        <p:spPr>
+          <a:xfrm>
+            <a:off x="8046720" y="2852927"/>
+            <a:ext cx="2971800" cy="246888"/>
+          </a:xfrm>
+          <a:prstGeom prst="rect">
+            <a:avLst/>
+          </a:prstGeom>
+          <a:solidFill>
+            <a:srgbClr val="F7F8F7"/>
+          </a:solidFill>
+          <a:ln w="8890">
+            <a:solidFill>
+              <a:srgbClr val="D7DDD9"/>
+            </a:solidFill>
+          </a:ln>
+        </p:spPr>
+        <p:style>
+          <a:lnRef idx="1">
+            <a:schemeClr val="accent1"/>
+          </a:lnRef>
+          <a:fillRef idx="3">
+            <a:schemeClr val="accent1"/>
+          </a:fillRef>
+          <a:effectRef idx="2">
+            <a:schemeClr val="accent1"/>
+          </a:effectRef>
+          <a:fontRef idx="minor">
+            <a:schemeClr val="lt1"/>
+          </a:fontRef>
+        </p:style>
+        <p:txBody>
+          <a:bodyPr rtlCol="0" anchor="ctr"/>
+          <a:lstStyle/>
+          <a:p>
+            <a:pPr algn="ctr"/>
+          </a:p>
+        </p:txBody>
+      </p:sp>
+      <p:sp>
+        <p:nvSpPr>
+          <p:cNvPr id="28" name="TextBox 27"/>
+          <p:cNvSpPr txBox="1"/>
+          <p:nvPr/>
+        </p:nvSpPr>
+        <p:spPr>
+          <a:xfrm>
+            <a:off x="8138160" y="2926079"/>
+            <a:ext cx="256032" cy="91440"/>
+          </a:xfrm>
+          <a:prstGeom prst="rect">
+            <a:avLst/>
+          </a:prstGeom>
+          <a:noFill/>
+        </p:spPr>
+        <p:txBody>
+          <a:bodyPr wrap="none" lIns="0" rIns="0" tIns="0" bIns="0" anchor="t">
+            <a:spAutoFit/>
+          </a:bodyPr>
+          <a:lstStyle/>
+          <a:p>
+            <a:pPr algn="l">
+              <a:lnSpc>
+                <a:spcPct val="108000"/>
+              </a:lnSpc>
+              <a:spcAft>
+                <a:spcPts val="0"/>
+              </a:spcAft>
+            </a:pPr>
+            <a:r>
+              <a:rPr sz="550" b="0">
+                <a:solidFill>
+                  <a:srgbClr val="737B77"/>
+                </a:solidFill>
+                <a:latin typeface="Courier New"/>
+              </a:rPr>
+              <a:t>04</a:t>
+            </a:r>
+          </a:p>
+        </p:txBody>
+      </p:sp>
+      <p:sp>
+        <p:nvSpPr>
+          <p:cNvPr id="29" name="TextBox 28"/>
+          <p:cNvSpPr txBox="1"/>
+          <p:nvPr/>
+        </p:nvSpPr>
+        <p:spPr>
+          <a:xfrm>
+            <a:off x="8439912" y="2898647"/>
+            <a:ext cx="2395728" cy="128016"/>
+          </a:xfrm>
+          <a:prstGeom prst="rect">
+            <a:avLst/>
+          </a:prstGeom>
+          <a:noFill/>
+        </p:spPr>
+        <p:txBody>
+          <a:bodyPr wrap="none" lIns="0" rIns="0" tIns="0" bIns="0" anchor="t">
+            <a:spAutoFit/>
+          </a:bodyPr>
+          <a:lstStyle/>
+          <a:p>
+            <a:pPr algn="l">
+              <a:lnSpc>
+                <a:spcPct val="108000"/>
+              </a:lnSpc>
+              <a:spcAft>
+                <a:spcPts val="0"/>
+              </a:spcAft>
+            </a:pPr>
+            <a:r>
+              <a:rPr sz="700" b="1">
+                <a:solidFill>
+                  <a:srgbClr val="252927"/>
+                </a:solidFill>
+                <a:latin typeface="PingFang SC"/>
+              </a:rPr>
+              <a:t>输出结果</a:t>
+            </a:r>
+          </a:p>
+        </p:txBody>
+      </p:sp>
+      <p:sp>
+        <p:nvSpPr>
+          <p:cNvPr id="30" name="Rectangle 29"/>
+          <p:cNvSpPr/>
+          <p:nvPr/>
+        </p:nvSpPr>
+        <p:spPr>
+          <a:xfrm>
+            <a:off x="4800600" y="3182111"/>
+            <a:ext cx="2971800" cy="246888"/>
+          </a:xfrm>
+          <a:prstGeom prst="rect">
+            <a:avLst/>
+          </a:prstGeom>
+          <a:solidFill>
+            <a:srgbClr val="F7F8F7"/>
+          </a:solidFill>
+          <a:ln w="8890">
+            <a:solidFill>
+              <a:srgbClr val="D7DDD9"/>
+            </a:solidFill>
+          </a:ln>
+        </p:spPr>
+        <p:style>
+          <a:lnRef idx="1">
+            <a:schemeClr val="accent1"/>
+          </a:lnRef>
+          <a:fillRef idx="3">
+            <a:schemeClr val="accent1"/>
+          </a:fillRef>
+          <a:effectRef idx="2">
+            <a:schemeClr val="accent1"/>
+          </a:effectRef>
+          <a:fontRef idx="minor">
+            <a:schemeClr val="lt1"/>
+          </a:fontRef>
+        </p:style>
+        <p:txBody>
+          <a:bodyPr rtlCol="0" anchor="ctr"/>
+          <a:lstStyle/>
+          <a:p>
+            <a:pPr algn="ctr"/>
+          </a:p>
+        </p:txBody>
+      </p:sp>
+      <p:sp>
+        <p:nvSpPr>
+          <p:cNvPr id="31" name="TextBox 30"/>
+          <p:cNvSpPr txBox="1"/>
+          <p:nvPr/>
+        </p:nvSpPr>
+        <p:spPr>
+          <a:xfrm>
+            <a:off x="4892040" y="3255263"/>
+            <a:ext cx="256032" cy="91440"/>
+          </a:xfrm>
+          <a:prstGeom prst="rect">
+            <a:avLst/>
+          </a:prstGeom>
+          <a:noFill/>
+        </p:spPr>
+        <p:txBody>
+          <a:bodyPr wrap="none" lIns="0" rIns="0" tIns="0" bIns="0" anchor="t">
+            <a:spAutoFit/>
+          </a:bodyPr>
+          <a:lstStyle/>
+          <a:p>
+            <a:pPr algn="l">
+              <a:lnSpc>
+                <a:spcPct val="108000"/>
+              </a:lnSpc>
+              <a:spcAft>
+                <a:spcPts val="0"/>
+              </a:spcAft>
+            </a:pPr>
+            <a:r>
+              <a:rPr sz="550" b="0">
+                <a:solidFill>
+                  <a:srgbClr val="737B77"/>
+                </a:solidFill>
+                <a:latin typeface="Courier New"/>
+              </a:rPr>
+              <a:t>05</a:t>
+            </a:r>
+          </a:p>
+        </p:txBody>
+      </p:sp>
+      <p:sp>
+        <p:nvSpPr>
+          <p:cNvPr id="32" name="TextBox 31"/>
+          <p:cNvSpPr txBox="1"/>
+          <p:nvPr/>
+        </p:nvSpPr>
+        <p:spPr>
+          <a:xfrm>
+            <a:off x="5193792" y="3227831"/>
+            <a:ext cx="2395728" cy="128016"/>
+          </a:xfrm>
+          <a:prstGeom prst="rect">
+            <a:avLst/>
+          </a:prstGeom>
+          <a:noFill/>
+        </p:spPr>
+        <p:txBody>
+          <a:bodyPr wrap="none" lIns="0" rIns="0" tIns="0" bIns="0" anchor="t">
+            <a:spAutoFit/>
+          </a:bodyPr>
+          <a:lstStyle/>
+          <a:p>
+            <a:pPr algn="l">
+              <a:lnSpc>
+                <a:spcPct val="108000"/>
+              </a:lnSpc>
+              <a:spcAft>
+                <a:spcPts val="0"/>
+              </a:spcAft>
+            </a:pPr>
+            <a:r>
+              <a:rPr sz="700" b="1">
+                <a:solidFill>
+                  <a:srgbClr val="252927"/>
+                </a:solidFill>
+                <a:latin typeface="PingFang SC"/>
+              </a:rPr>
+              <a:t>调用条件</a:t>
+            </a:r>
+          </a:p>
+        </p:txBody>
+      </p:sp>
+      <p:sp>
+        <p:nvSpPr>
+          <p:cNvPr id="33" name="Rectangle 32"/>
+          <p:cNvSpPr/>
+          <p:nvPr/>
+        </p:nvSpPr>
+        <p:spPr>
+          <a:xfrm>
+            <a:off x="8046720" y="3182111"/>
+            <a:ext cx="2971800" cy="246888"/>
+          </a:xfrm>
+          <a:prstGeom prst="rect">
+            <a:avLst/>
+          </a:prstGeom>
+          <a:solidFill>
+            <a:srgbClr val="F7F8F7"/>
+          </a:solidFill>
+          <a:ln w="8890">
+            <a:solidFill>
+              <a:srgbClr val="D7DDD9"/>
+            </a:solidFill>
+          </a:ln>
+        </p:spPr>
+        <p:style>
+          <a:lnRef idx="1">
+            <a:schemeClr val="accent1"/>
+          </a:lnRef>
+          <a:fillRef idx="3">
+            <a:schemeClr val="accent1"/>
+          </a:fillRef>
+          <a:effectRef idx="2">
+            <a:schemeClr val="accent1"/>
+          </a:effectRef>
+          <a:fontRef idx="minor">
+            <a:schemeClr val="lt1"/>
+          </a:fontRef>
+        </p:style>
+        <p:txBody>
+          <a:bodyPr rtlCol="0" anchor="ctr"/>
+          <a:lstStyle/>
+          <a:p>
+            <a:pPr algn="ctr"/>
+          </a:p>
+        </p:txBody>
+      </p:sp>
+      <p:sp>
+        <p:nvSpPr>
+          <p:cNvPr id="34" name="TextBox 33"/>
+          <p:cNvSpPr txBox="1"/>
+          <p:nvPr/>
+        </p:nvSpPr>
+        <p:spPr>
+          <a:xfrm>
+            <a:off x="8138160" y="3255263"/>
+            <a:ext cx="256032" cy="91440"/>
+          </a:xfrm>
+          <a:prstGeom prst="rect">
+            <a:avLst/>
+          </a:prstGeom>
+          <a:noFill/>
+        </p:spPr>
+        <p:txBody>
+          <a:bodyPr wrap="none" lIns="0" rIns="0" tIns="0" bIns="0" anchor="t">
+            <a:spAutoFit/>
+          </a:bodyPr>
+          <a:lstStyle/>
+          <a:p>
+            <a:pPr algn="l">
+              <a:lnSpc>
+                <a:spcPct val="108000"/>
+              </a:lnSpc>
+              <a:spcAft>
+                <a:spcPts val="0"/>
+              </a:spcAft>
+            </a:pPr>
+            <a:r>
+              <a:rPr sz="550" b="0">
+                <a:solidFill>
+                  <a:srgbClr val="737B77"/>
+                </a:solidFill>
+                <a:latin typeface="Courier New"/>
+              </a:rPr>
+              <a:t>06</a:t>
+            </a:r>
+          </a:p>
+        </p:txBody>
+      </p:sp>
+      <p:sp>
+        <p:nvSpPr>
+          <p:cNvPr id="35" name="TextBox 34"/>
+          <p:cNvSpPr txBox="1"/>
+          <p:nvPr/>
+        </p:nvSpPr>
+        <p:spPr>
+          <a:xfrm>
+            <a:off x="8439912" y="3227831"/>
+            <a:ext cx="2395728" cy="128016"/>
+          </a:xfrm>
+          <a:prstGeom prst="rect">
+            <a:avLst/>
+          </a:prstGeom>
+          <a:noFill/>
+        </p:spPr>
+        <p:txBody>
+          <a:bodyPr wrap="none" lIns="0" rIns="0" tIns="0" bIns="0" anchor="t">
+            <a:spAutoFit/>
+          </a:bodyPr>
+          <a:lstStyle/>
+          <a:p>
+            <a:pPr algn="l">
+              <a:lnSpc>
+                <a:spcPct val="108000"/>
+              </a:lnSpc>
+              <a:spcAft>
+                <a:spcPts val="0"/>
+              </a:spcAft>
+            </a:pPr>
+            <a:r>
+              <a:rPr sz="700" b="1">
+                <a:solidFill>
+                  <a:srgbClr val="252927"/>
+                </a:solidFill>
+                <a:latin typeface="PingFang SC"/>
+              </a:rPr>
+              <a:t>依赖工具</a:t>
+            </a:r>
+          </a:p>
+        </p:txBody>
+      </p:sp>
+      <p:sp>
+        <p:nvSpPr>
+          <p:cNvPr id="36" name="Rectangle 35"/>
+          <p:cNvSpPr/>
+          <p:nvPr/>
+        </p:nvSpPr>
+        <p:spPr>
+          <a:xfrm>
+            <a:off x="4800600" y="3511296"/>
+            <a:ext cx="2971800" cy="246888"/>
+          </a:xfrm>
+          <a:prstGeom prst="rect">
+            <a:avLst/>
+          </a:prstGeom>
+          <a:solidFill>
+            <a:srgbClr val="F7F8F7"/>
+          </a:solidFill>
+          <a:ln w="8890">
+            <a:solidFill>
+              <a:srgbClr val="D7DDD9"/>
+            </a:solidFill>
+          </a:ln>
+        </p:spPr>
+        <p:style>
+          <a:lnRef idx="1">
+            <a:schemeClr val="accent1"/>
+          </a:lnRef>
+          <a:fillRef idx="3">
+            <a:schemeClr val="accent1"/>
+          </a:fillRef>
+          <a:effectRef idx="2">
+            <a:schemeClr val="accent1"/>
+          </a:effectRef>
+          <a:fontRef idx="minor">
+            <a:schemeClr val="lt1"/>
+          </a:fontRef>
+        </p:style>
+        <p:txBody>
+          <a:bodyPr rtlCol="0" anchor="ctr"/>
+          <a:lstStyle/>
+          <a:p>
+            <a:pPr algn="ctr"/>
+          </a:p>
+        </p:txBody>
+      </p:sp>
+      <p:sp>
+        <p:nvSpPr>
+          <p:cNvPr id="37" name="TextBox 36"/>
+          <p:cNvSpPr txBox="1"/>
+          <p:nvPr/>
+        </p:nvSpPr>
+        <p:spPr>
+          <a:xfrm>
+            <a:off x="4892040" y="3584448"/>
+            <a:ext cx="256032" cy="91440"/>
+          </a:xfrm>
+          <a:prstGeom prst="rect">
+            <a:avLst/>
+          </a:prstGeom>
+          <a:noFill/>
+        </p:spPr>
+        <p:txBody>
+          <a:bodyPr wrap="none" lIns="0" rIns="0" tIns="0" bIns="0" anchor="t">
+            <a:spAutoFit/>
+          </a:bodyPr>
+          <a:lstStyle/>
+          <a:p>
+            <a:pPr algn="l">
+              <a:lnSpc>
+                <a:spcPct val="108000"/>
+              </a:lnSpc>
+              <a:spcAft>
+                <a:spcPts val="0"/>
+              </a:spcAft>
+            </a:pPr>
+            <a:r>
+              <a:rPr sz="550" b="0">
+                <a:solidFill>
+                  <a:srgbClr val="737B77"/>
+                </a:solidFill>
+                <a:latin typeface="Courier New"/>
+              </a:rPr>
+              <a:t>07</a:t>
+            </a:r>
+          </a:p>
+        </p:txBody>
+      </p:sp>
+      <p:sp>
+        <p:nvSpPr>
+          <p:cNvPr id="38" name="TextBox 37"/>
+          <p:cNvSpPr txBox="1"/>
+          <p:nvPr/>
+        </p:nvSpPr>
+        <p:spPr>
+          <a:xfrm>
+            <a:off x="5193792" y="3557015"/>
+            <a:ext cx="2395728" cy="128016"/>
+          </a:xfrm>
+          <a:prstGeom prst="rect">
+            <a:avLst/>
+          </a:prstGeom>
+          <a:noFill/>
+        </p:spPr>
+        <p:txBody>
+          <a:bodyPr wrap="none" lIns="0" rIns="0" tIns="0" bIns="0" anchor="t">
+            <a:spAutoFit/>
+          </a:bodyPr>
+          <a:lstStyle/>
+          <a:p>
+            <a:pPr algn="l">
+              <a:lnSpc>
+                <a:spcPct val="108000"/>
+              </a:lnSpc>
+              <a:spcAft>
+                <a:spcPts val="0"/>
+              </a:spcAft>
+            </a:pPr>
+            <a:r>
+              <a:rPr sz="700" b="1">
+                <a:solidFill>
+                  <a:srgbClr val="252927"/>
+                </a:solidFill>
+                <a:latin typeface="PingFang SC"/>
+              </a:rPr>
+              <a:t>失败处理</a:t>
+            </a:r>
+          </a:p>
+        </p:txBody>
+      </p:sp>
+      <p:sp>
+        <p:nvSpPr>
+          <p:cNvPr id="39" name="Rectangle 38"/>
+          <p:cNvSpPr/>
+          <p:nvPr/>
+        </p:nvSpPr>
+        <p:spPr>
+          <a:xfrm>
+            <a:off x="8046720" y="3511296"/>
+            <a:ext cx="2971800" cy="246888"/>
+          </a:xfrm>
+          <a:prstGeom prst="rect">
+            <a:avLst/>
+          </a:prstGeom>
+          <a:solidFill>
+            <a:srgbClr val="F7F8F7"/>
+          </a:solidFill>
+          <a:ln w="8890">
+            <a:solidFill>
+              <a:srgbClr val="D7DDD9"/>
+            </a:solidFill>
+          </a:ln>
+        </p:spPr>
+        <p:style>
+          <a:lnRef idx="1">
+            <a:schemeClr val="accent1"/>
+          </a:lnRef>
+          <a:fillRef idx="3">
+            <a:schemeClr val="accent1"/>
+          </a:fillRef>
+          <a:effectRef idx="2">
+            <a:schemeClr val="accent1"/>
+          </a:effectRef>
+          <a:fontRef idx="minor">
+            <a:schemeClr val="lt1"/>
+          </a:fontRef>
+        </p:style>
+        <p:txBody>
+          <a:bodyPr rtlCol="0" anchor="ctr"/>
+          <a:lstStyle/>
+          <a:p>
+            <a:pPr algn="ctr"/>
+          </a:p>
+        </p:txBody>
+      </p:sp>
+      <p:sp>
+        <p:nvSpPr>
+          <p:cNvPr id="40" name="TextBox 39"/>
+          <p:cNvSpPr txBox="1"/>
+          <p:nvPr/>
+        </p:nvSpPr>
+        <p:spPr>
+          <a:xfrm>
+            <a:off x="8138160" y="3584448"/>
+            <a:ext cx="256032" cy="91440"/>
+          </a:xfrm>
+          <a:prstGeom prst="rect">
+            <a:avLst/>
+          </a:prstGeom>
+          <a:noFill/>
+        </p:spPr>
+        <p:txBody>
+          <a:bodyPr wrap="none" lIns="0" rIns="0" tIns="0" bIns="0" anchor="t">
+            <a:spAutoFit/>
+          </a:bodyPr>
+          <a:lstStyle/>
+          <a:p>
+            <a:pPr algn="l">
+              <a:lnSpc>
+                <a:spcPct val="108000"/>
+              </a:lnSpc>
+              <a:spcAft>
+                <a:spcPts val="0"/>
+              </a:spcAft>
+            </a:pPr>
+            <a:r>
+              <a:rPr sz="550" b="0">
+                <a:solidFill>
+                  <a:srgbClr val="737B77"/>
+                </a:solidFill>
+                <a:latin typeface="Courier New"/>
+              </a:rPr>
+              <a:t>08</a:t>
+            </a:r>
+          </a:p>
+        </p:txBody>
+      </p:sp>
+      <p:sp>
+        <p:nvSpPr>
+          <p:cNvPr id="41" name="TextBox 40"/>
+          <p:cNvSpPr txBox="1"/>
+          <p:nvPr/>
+        </p:nvSpPr>
+        <p:spPr>
+          <a:xfrm>
+            <a:off x="8439912" y="3557015"/>
+            <a:ext cx="2395728" cy="128016"/>
+          </a:xfrm>
+          <a:prstGeom prst="rect">
+            <a:avLst/>
+          </a:prstGeom>
+          <a:noFill/>
+        </p:spPr>
+        <p:txBody>
+          <a:bodyPr wrap="none" lIns="0" rIns="0" tIns="0" bIns="0" anchor="t">
+            <a:spAutoFit/>
+          </a:bodyPr>
+          <a:lstStyle/>
+          <a:p>
+            <a:pPr algn="l">
+              <a:lnSpc>
+                <a:spcPct val="108000"/>
+              </a:lnSpc>
+              <a:spcAft>
+                <a:spcPts val="0"/>
+              </a:spcAft>
+            </a:pPr>
+            <a:r>
+              <a:rPr sz="700" b="1">
+                <a:solidFill>
+                  <a:srgbClr val="252927"/>
+                </a:solidFill>
+                <a:latin typeface="PingFang SC"/>
+              </a:rPr>
+              <a:t>安全边界</a:t>
+            </a:r>
+          </a:p>
+        </p:txBody>
+      </p:sp>
+      <p:sp>
+        <p:nvSpPr>
+          <p:cNvPr id="42" name="Rectangle 41"/>
+          <p:cNvSpPr/>
+          <p:nvPr/>
+        </p:nvSpPr>
+        <p:spPr>
+          <a:xfrm>
+            <a:off x="4800600" y="3840479"/>
+            <a:ext cx="2971800" cy="246888"/>
+          </a:xfrm>
+          <a:prstGeom prst="rect">
+            <a:avLst/>
+          </a:prstGeom>
+          <a:solidFill>
+            <a:srgbClr val="F7F8F7"/>
+          </a:solidFill>
+          <a:ln w="8890">
+            <a:solidFill>
+              <a:srgbClr val="D7DDD9"/>
+            </a:solidFill>
+          </a:ln>
+        </p:spPr>
+        <p:style>
+          <a:lnRef idx="1">
+            <a:schemeClr val="accent1"/>
+          </a:lnRef>
+          <a:fillRef idx="3">
+            <a:schemeClr val="accent1"/>
+          </a:fillRef>
+          <a:effectRef idx="2">
+            <a:schemeClr val="accent1"/>
+          </a:effectRef>
+          <a:fontRef idx="minor">
+            <a:schemeClr val="lt1"/>
+          </a:fontRef>
+        </p:style>
+        <p:txBody>
+          <a:bodyPr rtlCol="0" anchor="ctr"/>
+          <a:lstStyle/>
+          <a:p>
+            <a:pPr algn="ctr"/>
+          </a:p>
+        </p:txBody>
+      </p:sp>
+      <p:sp>
+        <p:nvSpPr>
+          <p:cNvPr id="43" name="TextBox 42"/>
+          <p:cNvSpPr txBox="1"/>
+          <p:nvPr/>
+        </p:nvSpPr>
+        <p:spPr>
+          <a:xfrm>
+            <a:off x="4892040" y="3913631"/>
+            <a:ext cx="256032" cy="91440"/>
+          </a:xfrm>
+          <a:prstGeom prst="rect">
+            <a:avLst/>
+          </a:prstGeom>
+          <a:noFill/>
+        </p:spPr>
+        <p:txBody>
+          <a:bodyPr wrap="none" lIns="0" rIns="0" tIns="0" bIns="0" anchor="t">
+            <a:spAutoFit/>
+          </a:bodyPr>
+          <a:lstStyle/>
+          <a:p>
+            <a:pPr algn="l">
+              <a:lnSpc>
+                <a:spcPct val="108000"/>
+              </a:lnSpc>
+              <a:spcAft>
+                <a:spcPts val="0"/>
+              </a:spcAft>
+            </a:pPr>
+            <a:r>
+              <a:rPr sz="550" b="0">
+                <a:solidFill>
+                  <a:srgbClr val="737B77"/>
+                </a:solidFill>
+                <a:latin typeface="Courier New"/>
+              </a:rPr>
+              <a:t>09</a:t>
+            </a:r>
+          </a:p>
+        </p:txBody>
+      </p:sp>
+      <p:sp>
+        <p:nvSpPr>
+          <p:cNvPr id="44" name="TextBox 43"/>
+          <p:cNvSpPr txBox="1"/>
+          <p:nvPr/>
+        </p:nvSpPr>
+        <p:spPr>
+          <a:xfrm>
+            <a:off x="5193792" y="3886199"/>
+            <a:ext cx="2395728" cy="128016"/>
+          </a:xfrm>
+          <a:prstGeom prst="rect">
+            <a:avLst/>
+          </a:prstGeom>
+          <a:noFill/>
+        </p:spPr>
+        <p:txBody>
+          <a:bodyPr wrap="none" lIns="0" rIns="0" tIns="0" bIns="0" anchor="t">
+            <a:spAutoFit/>
+          </a:bodyPr>
+          <a:lstStyle/>
+          <a:p>
+            <a:pPr algn="l">
+              <a:lnSpc>
+                <a:spcPct val="108000"/>
+              </a:lnSpc>
+              <a:spcAft>
+                <a:spcPts val="0"/>
+              </a:spcAft>
+            </a:pPr>
+            <a:r>
+              <a:rPr sz="700" b="1">
+                <a:solidFill>
+                  <a:srgbClr val="252927"/>
+                </a:solidFill>
+                <a:latin typeface="PingFang SC"/>
+              </a:rPr>
+              <a:t>验证 / 复用</a:t>
+            </a:r>
+          </a:p>
+        </p:txBody>
+      </p:sp>
+      <p:sp>
+        <p:nvSpPr>
+          <p:cNvPr id="45" name="Rectangle 44"/>
+          <p:cNvSpPr/>
+          <p:nvPr/>
+        </p:nvSpPr>
+        <p:spPr>
+          <a:xfrm>
+            <a:off x="8046720" y="3840479"/>
+            <a:ext cx="2971800" cy="246888"/>
+          </a:xfrm>
+          <a:prstGeom prst="rect">
+            <a:avLst/>
+          </a:prstGeom>
+          <a:solidFill>
+            <a:srgbClr val="F7F8F7"/>
+          </a:solidFill>
+          <a:ln w="8890">
+            <a:solidFill>
+              <a:srgbClr val="D7DDD9"/>
+            </a:solidFill>
+          </a:ln>
+        </p:spPr>
+        <p:style>
+          <a:lnRef idx="1">
+            <a:schemeClr val="accent1"/>
+          </a:lnRef>
+          <a:fillRef idx="3">
+            <a:schemeClr val="accent1"/>
+          </a:fillRef>
+          <a:effectRef idx="2">
+            <a:schemeClr val="accent1"/>
+          </a:effectRef>
+          <a:fontRef idx="minor">
+            <a:schemeClr val="lt1"/>
+          </a:fontRef>
+        </p:style>
+        <p:txBody>
+          <a:bodyPr rtlCol="0" anchor="ctr"/>
+          <a:lstStyle/>
+          <a:p>
+            <a:pPr algn="ctr"/>
+          </a:p>
+        </p:txBody>
+      </p:sp>
+      <p:sp>
+        <p:nvSpPr>
+          <p:cNvPr id="46" name="TextBox 45"/>
+          <p:cNvSpPr txBox="1"/>
+          <p:nvPr/>
+        </p:nvSpPr>
+        <p:spPr>
+          <a:xfrm>
+            <a:off x="8138160" y="3913631"/>
+            <a:ext cx="256032" cy="91440"/>
+          </a:xfrm>
+          <a:prstGeom prst="rect">
+            <a:avLst/>
+          </a:prstGeom>
+          <a:noFill/>
+        </p:spPr>
+        <p:txBody>
+          <a:bodyPr wrap="none" lIns="0" rIns="0" tIns="0" bIns="0" anchor="t">
+            <a:spAutoFit/>
+          </a:bodyPr>
+          <a:lstStyle/>
+          <a:p>
+            <a:pPr algn="l">
+              <a:lnSpc>
+                <a:spcPct val="108000"/>
+              </a:lnSpc>
+              <a:spcAft>
+                <a:spcPts val="0"/>
+              </a:spcAft>
+            </a:pPr>
+            <a:r>
+              <a:rPr sz="550" b="0">
+                <a:solidFill>
+                  <a:srgbClr val="737B77"/>
+                </a:solidFill>
+                <a:latin typeface="Courier New"/>
+              </a:rPr>
+              <a:t>10</a:t>
+            </a:r>
+          </a:p>
+        </p:txBody>
+      </p:sp>
+      <p:sp>
+        <p:nvSpPr>
+          <p:cNvPr id="47" name="TextBox 46"/>
+          <p:cNvSpPr txBox="1"/>
+          <p:nvPr/>
+        </p:nvSpPr>
+        <p:spPr>
+          <a:xfrm>
+            <a:off x="8439912" y="3886199"/>
+            <a:ext cx="2395728" cy="128016"/>
+          </a:xfrm>
+          <a:prstGeom prst="rect">
+            <a:avLst/>
+          </a:prstGeom>
+          <a:noFill/>
+        </p:spPr>
+        <p:txBody>
+          <a:bodyPr wrap="none" lIns="0" rIns="0" tIns="0" bIns="0" anchor="t">
+            <a:spAutoFit/>
+          </a:bodyPr>
+          <a:lstStyle/>
+          <a:p>
+            <a:pPr algn="l">
+              <a:lnSpc>
+                <a:spcPct val="108000"/>
+              </a:lnSpc>
+              <a:spcAft>
+                <a:spcPts val="0"/>
+              </a:spcAft>
+            </a:pPr>
+            <a:r>
+              <a:rPr sz="700" b="1">
+                <a:solidFill>
+                  <a:srgbClr val="252927"/>
+                </a:solidFill>
+                <a:latin typeface="PingFang SC"/>
+              </a:rPr>
+              <a:t>版本 / 回滚</a:t>
+            </a:r>
+          </a:p>
+        </p:txBody>
+      </p:sp>
+      <p:sp>
+        <p:nvSpPr>
+          <p:cNvPr id="48" name="Rectangle 47"/>
+          <p:cNvSpPr/>
+          <p:nvPr/>
+        </p:nvSpPr>
+        <p:spPr>
+          <a:xfrm>
+            <a:off x="4553712" y="4590288"/>
+            <a:ext cx="7059168" cy="1609344"/>
+          </a:xfrm>
+          <a:prstGeom prst="rect">
+            <a:avLst/>
+          </a:prstGeom>
+          <a:solidFill>
+            <a:srgbClr val="E9EEFF"/>
+          </a:solidFill>
+          <a:ln w="8890">
+            <a:solidFill>
+              <a:srgbClr val="C8D4FF"/>
+            </a:solidFill>
+          </a:ln>
+        </p:spPr>
+        <p:style>
+          <a:lnRef idx="1">
+            <a:schemeClr val="accent1"/>
+          </a:lnRef>
+          <a:fillRef idx="3">
+            <a:schemeClr val="accent1"/>
+          </a:fillRef>
+          <a:effectRef idx="2">
+            <a:schemeClr val="accent1"/>
+          </a:effectRef>
+          <a:fontRef idx="minor">
+            <a:schemeClr val="lt1"/>
+          </a:fontRef>
+        </p:style>
+        <p:txBody>
+          <a:bodyPr rtlCol="0" anchor="ctr"/>
+          <a:lstStyle/>
+          <a:p>
+            <a:pPr algn="ctr"/>
+          </a:p>
+        </p:txBody>
+      </p:sp>
+      <p:sp>
+        <p:nvSpPr>
+          <p:cNvPr id="49" name="TextBox 48"/>
+          <p:cNvSpPr txBox="1"/>
+          <p:nvPr/>
+        </p:nvSpPr>
+        <p:spPr>
+          <a:xfrm>
+            <a:off x="4800600" y="4837176"/>
+            <a:ext cx="3108960" cy="164592"/>
+          </a:xfrm>
+          <a:prstGeom prst="rect">
+            <a:avLst/>
+          </a:prstGeom>
+          <a:noFill/>
+        </p:spPr>
+        <p:txBody>
+          <a:bodyPr wrap="none" lIns="0" rIns="0" tIns="0" bIns="0" anchor="t">
+            <a:spAutoFit/>
+          </a:bodyPr>
+          <a:lstStyle/>
+          <a:p>
+            <a:pPr algn="l">
+              <a:lnSpc>
+                <a:spcPct val="108000"/>
+              </a:lnSpc>
+              <a:spcAft>
+                <a:spcPts val="0"/>
+              </a:spcAft>
+            </a:pPr>
+            <a:r>
+              <a:rPr sz="750" b="1">
+                <a:solidFill>
+                  <a:srgbClr val="2457F5"/>
+                </a:solidFill>
+                <a:latin typeface="Courier New"/>
+              </a:rPr>
+              <a:t>VERSION / RELEASE / ROLLBACK</a:t>
+            </a:r>
+          </a:p>
+        </p:txBody>
+      </p:sp>
+      <p:sp>
+        <p:nvSpPr>
+          <p:cNvPr id="50" name="TextBox 49"/>
+          <p:cNvSpPr txBox="1"/>
+          <p:nvPr/>
+        </p:nvSpPr>
+        <p:spPr>
+          <a:xfrm>
+            <a:off x="4800600" y="5221224"/>
+            <a:ext cx="6446520" cy="658368"/>
+          </a:xfrm>
+          <a:prstGeom prst="rect">
+            <a:avLst/>
+          </a:prstGeom>
+          <a:noFill/>
+        </p:spPr>
+        <p:txBody>
+          <a:bodyPr wrap="none" lIns="0" rIns="0" tIns="0" bIns="0" anchor="t">
+            <a:spAutoFit/>
+          </a:bodyPr>
+          <a:lstStyle/>
+          <a:p>
+            <a:pPr algn="l">
+              <a:lnSpc>
+                <a:spcPct val="108000"/>
+              </a:lnSpc>
+              <a:spcAft>
+                <a:spcPts val="0"/>
+              </a:spcAft>
+            </a:pPr>
+            <a:r>
+              <a:rPr sz="950" b="1">
+                <a:solidFill>
+                  <a:srgbClr val="252927"/>
+                </a:solidFill>
+                <a:latin typeface="PingFang SC"/>
+              </a:rPr>
+              <a:t>当前随 AgentRig 0.2.0a0 进入 Git 版本管理；确定性构建三角色包，
+AgentTeams 基线锁定 v1.1.2；回滚完整 Release + 角色包，不单独热替换 Prompt。</a:t>
+            </a:r>
+          </a:p>
+        </p:txBody>
+      </p:sp>
+      <p:sp>
+        <p:nvSpPr>
+          <p:cNvPr id="51" name="TextBox 50"/>
+          <p:cNvSpPr txBox="1"/>
+          <p:nvPr/>
+        </p:nvSpPr>
+        <p:spPr>
+          <a:xfrm>
+            <a:off x="4800600" y="5916168"/>
+            <a:ext cx="6309360" cy="164592"/>
+          </a:xfrm>
+          <a:prstGeom prst="rect">
+            <a:avLst/>
+          </a:prstGeom>
+          <a:noFill/>
+        </p:spPr>
+        <p:txBody>
+          <a:bodyPr wrap="none" lIns="0" rIns="0" tIns="0" bIns="0" anchor="t">
+            <a:spAutoFit/>
+          </a:bodyPr>
+          <a:lstStyle/>
+          <a:p>
+            <a:pPr algn="l">
+              <a:lnSpc>
+                <a:spcPct val="108000"/>
+              </a:lnSpc>
+              <a:spcAft>
+                <a:spcPts val="0"/>
+              </a:spcAft>
+            </a:pPr>
+            <a:r>
+              <a:rPr sz="700" b="0">
+                <a:solidFill>
+                  <a:srgbClr val="59615D"/>
+                </a:solidFill>
+                <a:latin typeface="Courier New"/>
+              </a:rPr>
+              <a:t>完整逐 Skill 字段表：docs/competition/08-Skill-清单.md</a:t>
+            </a:r>
+          </a:p>
+        </p:txBody>
+      </p:sp>
+    </p:spTree>
+  </p:cSld>
+  <p:clrMapOvr>
+    <a:masterClrMapping/>
+  </p:clrMapOvr>
+</p:sld>
+</file>
+
+<file path=ppt/slides/slide15.xml><?xml version="1.0" encoding="utf-8"?>
+<p:sld xmlns:a="http://schemas.openxmlformats.org/drawingml/2006/main" xmlns:p="http://schemas.openxmlformats.org/presentationml/2006/main" xmlns:r="http://schemas.openxmlformats.org/officeDocument/2006/relationships">
+  <p:cSld>
+    <p:bg>
+      <p:bgPr>
+        <a:solidFill>
+          <a:srgbClr val="F1F3F2"/>
+        </a:solidFill>
+        <a:effectLst/>
+      </p:bgPr>
+    </p:bg>
+    <p:spTree>
+      <p:nvGrpSpPr>
+        <p:cNvPr id="1" name=""/>
+        <p:cNvGrpSpPr/>
+        <p:nvPr/>
+      </p:nvGrpSpPr>
+      <p:grpSpPr/>
+      <p:sp>
+        <p:nvSpPr>
+          <p:cNvPr id="2" name="Rectangle 1"/>
+          <p:cNvSpPr/>
+          <p:nvPr/>
+        </p:nvSpPr>
+        <p:spPr>
+          <a:xfrm>
+            <a:off x="0" y="0"/>
+            <a:ext cx="109728" cy="6858000"/>
+          </a:xfrm>
+          <a:prstGeom prst="rect">
+            <a:avLst/>
+          </a:prstGeom>
+          <a:solidFill>
+            <a:srgbClr val="252927"/>
+          </a:solidFill>
+          <a:ln w="8890">
+            <a:solidFill>
+              <a:srgbClr val="252927"/>
+            </a:solidFill>
+          </a:ln>
+        </p:spPr>
+        <p:style>
+          <a:lnRef idx="1">
+            <a:schemeClr val="accent1"/>
+          </a:lnRef>
+          <a:fillRef idx="3">
+            <a:schemeClr val="accent1"/>
+          </a:fillRef>
+          <a:effectRef idx="2">
+            <a:schemeClr val="accent1"/>
+          </a:effectRef>
+          <a:fontRef idx="minor">
+            <a:schemeClr val="lt1"/>
+          </a:fontRef>
+        </p:style>
+        <p:txBody>
+          <a:bodyPr rtlCol="0" anchor="ctr"/>
+          <a:lstStyle/>
+          <a:p>
+            <a:pPr algn="ctr"/>
+          </a:p>
+        </p:txBody>
+      </p:sp>
+      <p:sp>
+        <p:nvSpPr>
+          <p:cNvPr id="3" name="TextBox 2"/>
+          <p:cNvSpPr txBox="1"/>
+          <p:nvPr/>
+        </p:nvSpPr>
+        <p:spPr>
+          <a:xfrm>
+            <a:off x="502920" y="347472"/>
+            <a:ext cx="5852160" cy="219456"/>
+          </a:xfrm>
+          <a:prstGeom prst="rect">
+            <a:avLst/>
+          </a:prstGeom>
+          <a:noFill/>
+        </p:spPr>
+        <p:txBody>
+          <a:bodyPr wrap="none" lIns="0" rIns="0" tIns="0" bIns="0" anchor="t">
+            <a:spAutoFit/>
+          </a:bodyPr>
+          <a:lstStyle/>
+          <a:p>
+            <a:pPr algn="l">
+              <a:lnSpc>
+                <a:spcPct val="108000"/>
+              </a:lnSpc>
+              <a:spcAft>
+                <a:spcPts val="0"/>
+              </a:spcAft>
+            </a:pPr>
+            <a:r>
+              <a:rPr sz="800" b="1">
+                <a:solidFill>
+                  <a:srgbClr val="252927"/>
+                </a:solidFill>
+                <a:latin typeface="Courier New"/>
+              </a:rPr>
+              <a:t>APPENDIX / VERIFICATION</a:t>
+            </a:r>
+          </a:p>
+        </p:txBody>
+      </p:sp>
+      <p:sp>
+        <p:nvSpPr>
+          <p:cNvPr id="4" name="TextBox 3"/>
+          <p:cNvSpPr txBox="1"/>
+          <p:nvPr/>
+        </p:nvSpPr>
+        <p:spPr>
+          <a:xfrm>
+            <a:off x="502920" y="658368"/>
+            <a:ext cx="10881360" cy="502920"/>
+          </a:xfrm>
+          <a:prstGeom prst="rect">
+            <a:avLst/>
+          </a:prstGeom>
+          <a:noFill/>
+        </p:spPr>
+        <p:txBody>
+          <a:bodyPr wrap="none" lIns="0" rIns="0" tIns="0" bIns="0" anchor="t">
+            <a:spAutoFit/>
+          </a:bodyPr>
+          <a:lstStyle/>
+          <a:p>
+            <a:pPr algn="l">
+              <a:lnSpc>
+                <a:spcPct val="108000"/>
+              </a:lnSpc>
+              <a:spcAft>
+                <a:spcPts val="0"/>
+              </a:spcAft>
+            </a:pPr>
+            <a:r>
+              <a:rPr sz="2500" b="1">
+                <a:solidFill>
+                  <a:srgbClr val="151719"/>
+                </a:solidFill>
+                <a:latin typeface="PingFang SC"/>
+              </a:rPr>
+              <a:t>上下文能力与当前可验证证据</a:t>
+            </a:r>
+          </a:p>
+        </p:txBody>
+      </p:sp>
+      <p:sp>
+        <p:nvSpPr>
+          <p:cNvPr id="5" name="TextBox 4"/>
+          <p:cNvSpPr txBox="1"/>
+          <p:nvPr/>
+        </p:nvSpPr>
+        <p:spPr>
+          <a:xfrm>
+            <a:off x="521207" y="1179576"/>
+            <a:ext cx="10789920" cy="320040"/>
+          </a:xfrm>
+          <a:prstGeom prst="rect">
+            <a:avLst/>
+          </a:prstGeom>
+          <a:noFill/>
+        </p:spPr>
+        <p:txBody>
+          <a:bodyPr wrap="none" lIns="0" rIns="0" tIns="0" bIns="0" anchor="t">
+            <a:spAutoFit/>
+          </a:bodyPr>
+          <a:lstStyle/>
+          <a:p>
+            <a:pPr algn="l">
+              <a:lnSpc>
+                <a:spcPct val="108000"/>
+              </a:lnSpc>
+              <a:spcAft>
+                <a:spcPts val="0"/>
+              </a:spcAft>
+            </a:pPr>
+            <a:r>
+              <a:rPr sz="1000" b="0">
+                <a:solidFill>
+                  <a:srgbClr val="59615D"/>
+                </a:solidFill>
+                <a:latin typeface="PingFang SC"/>
+              </a:rPr>
+              <a:t>赛题要求 4 选 2；AgentRig 实现记忆、共享状态和轨迹可观测 3 项</a:t>
+            </a:r>
+          </a:p>
+        </p:txBody>
+      </p:sp>
+      <p:sp>
+        <p:nvSpPr>
+          <p:cNvPr id="6" name="Rectangle 5"/>
+          <p:cNvSpPr/>
+          <p:nvPr/>
+        </p:nvSpPr>
+        <p:spPr>
+          <a:xfrm>
+            <a:off x="502920" y="1572768"/>
+            <a:ext cx="11201400" cy="12700"/>
+          </a:xfrm>
+          <a:prstGeom prst="rect">
+            <a:avLst/>
+          </a:prstGeom>
+          <a:solidFill>
+            <a:srgbClr val="D7DDD9"/>
+          </a:solidFill>
+          <a:ln>
+            <a:noFill/>
+          </a:ln>
+        </p:spPr>
+        <p:style>
+          <a:lnRef idx="1">
+            <a:schemeClr val="accent1"/>
+          </a:lnRef>
+          <a:fillRef idx="3">
+            <a:schemeClr val="accent1"/>
+          </a:fillRef>
+          <a:effectRef idx="2">
+            <a:schemeClr val="accent1"/>
+          </a:effectRef>
+          <a:fontRef idx="minor">
+            <a:schemeClr val="lt1"/>
+          </a:fontRef>
+        </p:style>
+        <p:txBody>
+          <a:bodyPr rtlCol="0" anchor="ctr"/>
+          <a:lstStyle/>
+          <a:p>
+            <a:pPr algn="ctr"/>
+          </a:p>
+        </p:txBody>
+      </p:sp>
+      <p:sp>
+        <p:nvSpPr>
+          <p:cNvPr id="7" name="TextBox 6"/>
+          <p:cNvSpPr txBox="1"/>
+          <p:nvPr/>
+        </p:nvSpPr>
+        <p:spPr>
+          <a:xfrm>
+            <a:off x="502920" y="6565392"/>
+            <a:ext cx="11064240" cy="164592"/>
+          </a:xfrm>
+          <a:prstGeom prst="rect">
+            <a:avLst/>
+          </a:prstGeom>
+          <a:noFill/>
+        </p:spPr>
+        <p:txBody>
+          <a:bodyPr wrap="none" lIns="0" rIns="0" tIns="0" bIns="0" anchor="t">
+            <a:spAutoFit/>
+          </a:bodyPr>
+          <a:lstStyle/>
+          <a:p>
+            <a:pPr algn="l">
+              <a:lnSpc>
+                <a:spcPct val="108000"/>
+              </a:lnSpc>
+              <a:spcAft>
+                <a:spcPts val="0"/>
+              </a:spcAft>
+            </a:pPr>
+            <a:r>
+              <a:rPr sz="700" b="0">
+                <a:solidFill>
+                  <a:srgbClr val="737B77"/>
+                </a:solidFill>
+                <a:latin typeface="Courier New"/>
+              </a:rPr>
+              <a:t>AGENTRIG / GOAI 2026                         APPENDIX 03 / 03</a:t>
+            </a:r>
+          </a:p>
+        </p:txBody>
+      </p:sp>
+      <p:sp>
+        <p:nvSpPr>
+          <p:cNvPr id="8" name="Rectangle 7"/>
+          <p:cNvSpPr/>
+          <p:nvPr/>
+        </p:nvSpPr>
+        <p:spPr>
+          <a:xfrm>
+            <a:off x="576072" y="1847088"/>
+            <a:ext cx="2615184" cy="1527048"/>
+          </a:xfrm>
+          <a:prstGeom prst="rect">
+            <a:avLst/>
+          </a:prstGeom>
+          <a:solidFill>
+            <a:srgbClr val="E8F5EF"/>
+          </a:solidFill>
+          <a:ln w="8890">
+            <a:solidFill>
+              <a:srgbClr val="D7DDD9"/>
+            </a:solidFill>
+          </a:ln>
+        </p:spPr>
+        <p:style>
+          <a:lnRef idx="1">
+            <a:schemeClr val="accent1"/>
+          </a:lnRef>
+          <a:fillRef idx="3">
+            <a:schemeClr val="accent1"/>
+          </a:fillRef>
+          <a:effectRef idx="2">
+            <a:schemeClr val="accent1"/>
+          </a:effectRef>
+          <a:fontRef idx="minor">
+            <a:schemeClr val="lt1"/>
+          </a:fontRef>
+        </p:style>
+        <p:txBody>
+          <a:bodyPr rtlCol="0" anchor="ctr"/>
+          <a:lstStyle/>
+          <a:p>
+            <a:pPr algn="ctr"/>
+          </a:p>
+        </p:txBody>
+      </p:sp>
+      <p:sp>
+        <p:nvSpPr>
+          <p:cNvPr id="9" name="TextBox 8"/>
+          <p:cNvSpPr txBox="1"/>
+          <p:nvPr/>
+        </p:nvSpPr>
+        <p:spPr>
+          <a:xfrm>
+            <a:off x="722376" y="2029968"/>
+            <a:ext cx="320040" cy="146304"/>
+          </a:xfrm>
+          <a:prstGeom prst="rect">
+            <a:avLst/>
+          </a:prstGeom>
+          <a:noFill/>
+        </p:spPr>
+        <p:txBody>
+          <a:bodyPr wrap="none" lIns="0" rIns="0" tIns="0" bIns="0" anchor="t">
+            <a:spAutoFit/>
+          </a:bodyPr>
+          <a:lstStyle/>
+          <a:p>
+            <a:pPr algn="l">
+              <a:lnSpc>
+                <a:spcPct val="108000"/>
+              </a:lnSpc>
+              <a:spcAft>
+                <a:spcPts val="0"/>
+              </a:spcAft>
+            </a:pPr>
+            <a:r>
+              <a:rPr sz="650" b="1">
+                <a:solidFill>
+                  <a:srgbClr val="237A59"/>
+                </a:solidFill>
+                <a:latin typeface="Courier New"/>
+              </a:rPr>
+              <a:t>01</a:t>
+            </a:r>
+          </a:p>
+        </p:txBody>
+      </p:sp>
+      <p:sp>
+        <p:nvSpPr>
+          <p:cNvPr id="10" name="TextBox 9"/>
+          <p:cNvSpPr txBox="1"/>
+          <p:nvPr/>
+        </p:nvSpPr>
+        <p:spPr>
+          <a:xfrm>
+            <a:off x="722376" y="2304288"/>
+            <a:ext cx="2249424" cy="246888"/>
+          </a:xfrm>
+          <a:prstGeom prst="rect">
+            <a:avLst/>
+          </a:prstGeom>
+          <a:noFill/>
+        </p:spPr>
+        <p:txBody>
+          <a:bodyPr wrap="none" lIns="0" rIns="0" tIns="0" bIns="0" anchor="t">
+            <a:spAutoFit/>
+          </a:bodyPr>
+          <a:lstStyle/>
+          <a:p>
+            <a:pPr algn="l">
+              <a:lnSpc>
+                <a:spcPct val="108000"/>
+              </a:lnSpc>
+              <a:spcAft>
+                <a:spcPts val="0"/>
+              </a:spcAft>
+            </a:pPr>
+            <a:r>
+              <a:rPr sz="1300" b="1">
+                <a:solidFill>
+                  <a:srgbClr val="151719"/>
+                </a:solidFill>
+                <a:latin typeface="PingFang SC"/>
+              </a:rPr>
+              <a:t>Agent 记忆</a:t>
+            </a:r>
+          </a:p>
+        </p:txBody>
+      </p:sp>
+      <p:sp>
+        <p:nvSpPr>
+          <p:cNvPr id="11" name="TextBox 10"/>
+          <p:cNvSpPr txBox="1"/>
+          <p:nvPr/>
+        </p:nvSpPr>
+        <p:spPr>
+          <a:xfrm>
+            <a:off x="722376" y="2660904"/>
+            <a:ext cx="2267712" cy="438912"/>
+          </a:xfrm>
+          <a:prstGeom prst="rect">
+            <a:avLst/>
+          </a:prstGeom>
+          <a:noFill/>
+        </p:spPr>
+        <p:txBody>
+          <a:bodyPr wrap="none" lIns="0" rIns="0" tIns="0" bIns="0" anchor="t">
+            <a:spAutoFit/>
+          </a:bodyPr>
+          <a:lstStyle/>
+          <a:p>
+            <a:pPr algn="l">
+              <a:lnSpc>
+                <a:spcPct val="108000"/>
+              </a:lnSpc>
+              <a:spcAft>
+                <a:spcPts val="0"/>
+              </a:spcAft>
+            </a:pPr>
+            <a:r>
+              <a:rPr sz="819" b="0">
+                <a:solidFill>
+                  <a:srgbClr val="59615D"/>
+                </a:solidFill>
+                <a:latin typeface="PingFang SC"/>
+              </a:rPr>
+              <a:t>Session / Turn / Event
+恢复 Plan 与 Run 上下文</a:t>
+            </a:r>
+          </a:p>
+        </p:txBody>
+      </p:sp>
+      <p:sp>
+        <p:nvSpPr>
+          <p:cNvPr id="12" name="TextBox 11"/>
+          <p:cNvSpPr txBox="1"/>
+          <p:nvPr/>
+        </p:nvSpPr>
+        <p:spPr>
+          <a:xfrm>
+            <a:off x="2130552" y="2029968"/>
+            <a:ext cx="877824" cy="128016"/>
+          </a:xfrm>
+          <a:prstGeom prst="rect">
+            <a:avLst/>
+          </a:prstGeom>
+          <a:noFill/>
+        </p:spPr>
+        <p:txBody>
+          <a:bodyPr wrap="none" lIns="0" rIns="0" tIns="0" bIns="0" anchor="t">
+            <a:spAutoFit/>
+          </a:bodyPr>
+          <a:lstStyle/>
+          <a:p>
+            <a:pPr algn="r">
+              <a:lnSpc>
+                <a:spcPct val="108000"/>
+              </a:lnSpc>
+              <a:spcAft>
+                <a:spcPts val="0"/>
+              </a:spcAft>
+            </a:pPr>
+            <a:r>
+              <a:rPr sz="580" b="1">
+                <a:solidFill>
+                  <a:srgbClr val="237A59"/>
+                </a:solidFill>
+                <a:latin typeface="Courier New"/>
+              </a:rPr>
+              <a:t>IMPLEMENTED</a:t>
+            </a:r>
+          </a:p>
+        </p:txBody>
+      </p:sp>
+      <p:sp>
+        <p:nvSpPr>
+          <p:cNvPr id="13" name="Rectangle 12"/>
+          <p:cNvSpPr/>
+          <p:nvPr/>
+        </p:nvSpPr>
+        <p:spPr>
+          <a:xfrm>
+            <a:off x="3429000" y="1847088"/>
+            <a:ext cx="2615184" cy="1527048"/>
+          </a:xfrm>
+          <a:prstGeom prst="rect">
+            <a:avLst/>
+          </a:prstGeom>
+          <a:solidFill>
+            <a:srgbClr val="F7F8F7"/>
+          </a:solidFill>
+          <a:ln w="8890">
+            <a:solidFill>
+              <a:srgbClr val="D7DDD9"/>
+            </a:solidFill>
+          </a:ln>
+        </p:spPr>
+        <p:style>
+          <a:lnRef idx="1">
+            <a:schemeClr val="accent1"/>
+          </a:lnRef>
+          <a:fillRef idx="3">
+            <a:schemeClr val="accent1"/>
+          </a:fillRef>
+          <a:effectRef idx="2">
+            <a:schemeClr val="accent1"/>
+          </a:effectRef>
+          <a:fontRef idx="minor">
+            <a:schemeClr val="lt1"/>
+          </a:fontRef>
+        </p:style>
+        <p:txBody>
+          <a:bodyPr rtlCol="0" anchor="ctr"/>
+          <a:lstStyle/>
+          <a:p>
+            <a:pPr algn="ctr"/>
+          </a:p>
+        </p:txBody>
+      </p:sp>
+      <p:sp>
+        <p:nvSpPr>
+          <p:cNvPr id="14" name="TextBox 13"/>
+          <p:cNvSpPr txBox="1"/>
+          <p:nvPr/>
+        </p:nvSpPr>
+        <p:spPr>
+          <a:xfrm>
+            <a:off x="3575304" y="2029968"/>
+            <a:ext cx="320040" cy="146304"/>
+          </a:xfrm>
+          <a:prstGeom prst="rect">
+            <a:avLst/>
+          </a:prstGeom>
+          <a:noFill/>
+        </p:spPr>
+        <p:txBody>
+          <a:bodyPr wrap="none" lIns="0" rIns="0" tIns="0" bIns="0" anchor="t">
+            <a:spAutoFit/>
+          </a:bodyPr>
+          <a:lstStyle/>
+          <a:p>
+            <a:pPr algn="l">
+              <a:lnSpc>
+                <a:spcPct val="108000"/>
+              </a:lnSpc>
+              <a:spcAft>
+                <a:spcPts val="0"/>
+              </a:spcAft>
+            </a:pPr>
+            <a:r>
+              <a:rPr sz="650" b="1">
+                <a:solidFill>
+                  <a:srgbClr val="737B77"/>
+                </a:solidFill>
+                <a:latin typeface="Courier New"/>
+              </a:rPr>
+              <a:t>02</a:t>
+            </a:r>
+          </a:p>
+        </p:txBody>
+      </p:sp>
+      <p:sp>
+        <p:nvSpPr>
+          <p:cNvPr id="15" name="TextBox 14"/>
+          <p:cNvSpPr txBox="1"/>
+          <p:nvPr/>
+        </p:nvSpPr>
+        <p:spPr>
+          <a:xfrm>
+            <a:off x="3575304" y="2304288"/>
+            <a:ext cx="2249424" cy="246888"/>
+          </a:xfrm>
+          <a:prstGeom prst="rect">
+            <a:avLst/>
+          </a:prstGeom>
+          <a:noFill/>
+        </p:spPr>
+        <p:txBody>
+          <a:bodyPr wrap="none" lIns="0" rIns="0" tIns="0" bIns="0" anchor="t">
+            <a:spAutoFit/>
+          </a:bodyPr>
+          <a:lstStyle/>
+          <a:p>
+            <a:pPr algn="l">
+              <a:lnSpc>
+                <a:spcPct val="108000"/>
+              </a:lnSpc>
+              <a:spcAft>
+                <a:spcPts val="0"/>
+              </a:spcAft>
+            </a:pPr>
+            <a:r>
+              <a:rPr sz="1300" b="1">
+                <a:solidFill>
+                  <a:srgbClr val="151719"/>
+                </a:solidFill>
+                <a:latin typeface="PingFang SC"/>
+              </a:rPr>
+              <a:t>知识库 RAG</a:t>
+            </a:r>
+          </a:p>
+        </p:txBody>
+      </p:sp>
+      <p:sp>
+        <p:nvSpPr>
+          <p:cNvPr id="16" name="TextBox 15"/>
+          <p:cNvSpPr txBox="1"/>
+          <p:nvPr/>
+        </p:nvSpPr>
+        <p:spPr>
+          <a:xfrm>
+            <a:off x="3575304" y="2660904"/>
+            <a:ext cx="2267712" cy="438912"/>
+          </a:xfrm>
+          <a:prstGeom prst="rect">
+            <a:avLst/>
+          </a:prstGeom>
+          <a:noFill/>
+        </p:spPr>
+        <p:txBody>
+          <a:bodyPr wrap="none" lIns="0" rIns="0" tIns="0" bIns="0" anchor="t">
+            <a:spAutoFit/>
+          </a:bodyPr>
+          <a:lstStyle/>
+          <a:p>
+            <a:pPr algn="l">
+              <a:lnSpc>
+                <a:spcPct val="108000"/>
+              </a:lnSpc>
+              <a:spcAft>
+                <a:spcPts val="0"/>
+              </a:spcAft>
+            </a:pPr>
+            <a:r>
+              <a:rPr sz="819" b="0">
+                <a:solidFill>
+                  <a:srgbClr val="59615D"/>
+                </a:solidFill>
+                <a:latin typeface="PingFang SC"/>
+              </a:rPr>
+              <a:t>当前场景不需要
+未为数量堆叠检索链</a:t>
+            </a:r>
+          </a:p>
+        </p:txBody>
+      </p:sp>
+      <p:sp>
+        <p:nvSpPr>
+          <p:cNvPr id="17" name="TextBox 16"/>
+          <p:cNvSpPr txBox="1"/>
+          <p:nvPr/>
+        </p:nvSpPr>
+        <p:spPr>
+          <a:xfrm>
+            <a:off x="4983480" y="2029968"/>
+            <a:ext cx="877824" cy="128016"/>
+          </a:xfrm>
+          <a:prstGeom prst="rect">
+            <a:avLst/>
+          </a:prstGeom>
+          <a:noFill/>
+        </p:spPr>
+        <p:txBody>
+          <a:bodyPr wrap="none" lIns="0" rIns="0" tIns="0" bIns="0" anchor="t">
+            <a:spAutoFit/>
+          </a:bodyPr>
+          <a:lstStyle/>
+          <a:p>
+            <a:pPr algn="r">
+              <a:lnSpc>
+                <a:spcPct val="108000"/>
+              </a:lnSpc>
+              <a:spcAft>
+                <a:spcPts val="0"/>
+              </a:spcAft>
+            </a:pPr>
+            <a:r>
+              <a:rPr sz="580" b="1">
+                <a:solidFill>
+                  <a:srgbClr val="737B77"/>
+                </a:solidFill>
+                <a:latin typeface="Courier New"/>
+              </a:rPr>
+              <a:t>NOT NEEDED</a:t>
+            </a:r>
+          </a:p>
+        </p:txBody>
+      </p:sp>
+      <p:sp>
+        <p:nvSpPr>
+          <p:cNvPr id="18" name="Rectangle 17"/>
+          <p:cNvSpPr/>
+          <p:nvPr/>
+        </p:nvSpPr>
+        <p:spPr>
+          <a:xfrm>
+            <a:off x="6281928" y="1847088"/>
+            <a:ext cx="2615184" cy="1527048"/>
+          </a:xfrm>
+          <a:prstGeom prst="rect">
+            <a:avLst/>
+          </a:prstGeom>
+          <a:solidFill>
+            <a:srgbClr val="E9EEFF"/>
+          </a:solidFill>
+          <a:ln w="8890">
+            <a:solidFill>
+              <a:srgbClr val="D7DDD9"/>
+            </a:solidFill>
+          </a:ln>
+        </p:spPr>
+        <p:style>
+          <a:lnRef idx="1">
+            <a:schemeClr val="accent1"/>
+          </a:lnRef>
+          <a:fillRef idx="3">
+            <a:schemeClr val="accent1"/>
+          </a:fillRef>
+          <a:effectRef idx="2">
+            <a:schemeClr val="accent1"/>
+          </a:effectRef>
+          <a:fontRef idx="minor">
+            <a:schemeClr val="lt1"/>
+          </a:fontRef>
+        </p:style>
+        <p:txBody>
+          <a:bodyPr rtlCol="0" anchor="ctr"/>
+          <a:lstStyle/>
+          <a:p>
+            <a:pPr algn="ctr"/>
+          </a:p>
+        </p:txBody>
+      </p:sp>
+      <p:sp>
+        <p:nvSpPr>
+          <p:cNvPr id="19" name="TextBox 18"/>
+          <p:cNvSpPr txBox="1"/>
+          <p:nvPr/>
+        </p:nvSpPr>
+        <p:spPr>
+          <a:xfrm>
+            <a:off x="6428232" y="2029968"/>
+            <a:ext cx="320040" cy="146304"/>
+          </a:xfrm>
+          <a:prstGeom prst="rect">
+            <a:avLst/>
+          </a:prstGeom>
+          <a:noFill/>
+        </p:spPr>
+        <p:txBody>
+          <a:bodyPr wrap="none" lIns="0" rIns="0" tIns="0" bIns="0" anchor="t">
+            <a:spAutoFit/>
+          </a:bodyPr>
+          <a:lstStyle/>
+          <a:p>
+            <a:pPr algn="l">
+              <a:lnSpc>
+                <a:spcPct val="108000"/>
+              </a:lnSpc>
+              <a:spcAft>
+                <a:spcPts val="0"/>
+              </a:spcAft>
+            </a:pPr>
+            <a:r>
+              <a:rPr sz="650" b="1">
+                <a:solidFill>
+                  <a:srgbClr val="2457F5"/>
+                </a:solidFill>
+                <a:latin typeface="Courier New"/>
+              </a:rPr>
+              <a:t>03</a:t>
+            </a:r>
+          </a:p>
+        </p:txBody>
+      </p:sp>
+      <p:sp>
+        <p:nvSpPr>
+          <p:cNvPr id="20" name="TextBox 19"/>
+          <p:cNvSpPr txBox="1"/>
+          <p:nvPr/>
+        </p:nvSpPr>
+        <p:spPr>
+          <a:xfrm>
+            <a:off x="6428232" y="2304288"/>
+            <a:ext cx="2249424" cy="246888"/>
+          </a:xfrm>
+          <a:prstGeom prst="rect">
+            <a:avLst/>
+          </a:prstGeom>
+          <a:noFill/>
+        </p:spPr>
+        <p:txBody>
+          <a:bodyPr wrap="none" lIns="0" rIns="0" tIns="0" bIns="0" anchor="t">
+            <a:spAutoFit/>
+          </a:bodyPr>
+          <a:lstStyle/>
+          <a:p>
+            <a:pPr algn="l">
+              <a:lnSpc>
+                <a:spcPct val="108000"/>
+              </a:lnSpc>
+              <a:spcAft>
+                <a:spcPts val="0"/>
+              </a:spcAft>
+            </a:pPr>
+            <a:r>
+              <a:rPr sz="1300" b="1">
+                <a:solidFill>
+                  <a:srgbClr val="151719"/>
+                </a:solidFill>
+                <a:latin typeface="PingFang SC"/>
+              </a:rPr>
+              <a:t>共享状态</a:t>
+            </a:r>
+          </a:p>
+        </p:txBody>
+      </p:sp>
+      <p:sp>
+        <p:nvSpPr>
+          <p:cNvPr id="21" name="TextBox 20"/>
+          <p:cNvSpPr txBox="1"/>
+          <p:nvPr/>
+        </p:nvSpPr>
+        <p:spPr>
+          <a:xfrm>
+            <a:off x="6428232" y="2660904"/>
+            <a:ext cx="2267712" cy="438912"/>
+          </a:xfrm>
+          <a:prstGeom prst="rect">
+            <a:avLst/>
+          </a:prstGeom>
+          <a:noFill/>
+        </p:spPr>
+        <p:txBody>
+          <a:bodyPr wrap="none" lIns="0" rIns="0" tIns="0" bIns="0" anchor="t">
+            <a:spAutoFit/>
+          </a:bodyPr>
+          <a:lstStyle/>
+          <a:p>
+            <a:pPr algn="l">
+              <a:lnSpc>
+                <a:spcPct val="108000"/>
+              </a:lnSpc>
+              <a:spcAft>
+                <a:spcPts val="0"/>
+              </a:spcAft>
+            </a:pPr>
+            <a:r>
+              <a:rPr sz="819" b="0">
+                <a:solidFill>
+                  <a:srgbClr val="59615D"/>
+                </a:solidFill>
+                <a:latin typeface="PingFang SC"/>
+              </a:rPr>
+              <a:t>Plan / Invocation / Run
+权威状态机</a:t>
+            </a:r>
+          </a:p>
+        </p:txBody>
+      </p:sp>
+      <p:sp>
+        <p:nvSpPr>
+          <p:cNvPr id="22" name="TextBox 21"/>
+          <p:cNvSpPr txBox="1"/>
+          <p:nvPr/>
+        </p:nvSpPr>
+        <p:spPr>
+          <a:xfrm>
+            <a:off x="7836408" y="2029968"/>
+            <a:ext cx="877824" cy="128016"/>
+          </a:xfrm>
+          <a:prstGeom prst="rect">
+            <a:avLst/>
+          </a:prstGeom>
+          <a:noFill/>
+        </p:spPr>
+        <p:txBody>
+          <a:bodyPr wrap="none" lIns="0" rIns="0" tIns="0" bIns="0" anchor="t">
+            <a:spAutoFit/>
+          </a:bodyPr>
+          <a:lstStyle/>
+          <a:p>
+            <a:pPr algn="r">
+              <a:lnSpc>
+                <a:spcPct val="108000"/>
+              </a:lnSpc>
+              <a:spcAft>
+                <a:spcPts val="0"/>
+              </a:spcAft>
+            </a:pPr>
+            <a:r>
+              <a:rPr sz="580" b="1">
+                <a:solidFill>
+                  <a:srgbClr val="2457F5"/>
+                </a:solidFill>
+                <a:latin typeface="Courier New"/>
+              </a:rPr>
+              <a:t>IMPLEMENTED</a:t>
+            </a:r>
+          </a:p>
+        </p:txBody>
+      </p:sp>
+      <p:sp>
+        <p:nvSpPr>
+          <p:cNvPr id="23" name="Rectangle 22"/>
+          <p:cNvSpPr/>
+          <p:nvPr/>
+        </p:nvSpPr>
+        <p:spPr>
+          <a:xfrm>
+            <a:off x="9134856" y="1847088"/>
+            <a:ext cx="2615184" cy="1527048"/>
+          </a:xfrm>
+          <a:prstGeom prst="rect">
+            <a:avLst/>
+          </a:prstGeom>
+          <a:solidFill>
+            <a:srgbClr val="FFF4D8"/>
+          </a:solidFill>
+          <a:ln w="8890">
+            <a:solidFill>
+              <a:srgbClr val="D7DDD9"/>
+            </a:solidFill>
+          </a:ln>
+        </p:spPr>
+        <p:style>
+          <a:lnRef idx="1">
+            <a:schemeClr val="accent1"/>
+          </a:lnRef>
+          <a:fillRef idx="3">
+            <a:schemeClr val="accent1"/>
+          </a:fillRef>
+          <a:effectRef idx="2">
+            <a:schemeClr val="accent1"/>
+          </a:effectRef>
+          <a:fontRef idx="minor">
+            <a:schemeClr val="lt1"/>
+          </a:fontRef>
+        </p:style>
+        <p:txBody>
+          <a:bodyPr rtlCol="0" anchor="ctr"/>
+          <a:lstStyle/>
+          <a:p>
+            <a:pPr algn="ctr"/>
+          </a:p>
+        </p:txBody>
+      </p:sp>
+      <p:sp>
+        <p:nvSpPr>
+          <p:cNvPr id="24" name="TextBox 23"/>
+          <p:cNvSpPr txBox="1"/>
+          <p:nvPr/>
+        </p:nvSpPr>
+        <p:spPr>
+          <a:xfrm>
+            <a:off x="9281160" y="2029968"/>
+            <a:ext cx="320040" cy="146304"/>
+          </a:xfrm>
+          <a:prstGeom prst="rect">
+            <a:avLst/>
+          </a:prstGeom>
+          <a:noFill/>
+        </p:spPr>
+        <p:txBody>
+          <a:bodyPr wrap="none" lIns="0" rIns="0" tIns="0" bIns="0" anchor="t">
+            <a:spAutoFit/>
+          </a:bodyPr>
+          <a:lstStyle/>
+          <a:p>
+            <a:pPr algn="l">
+              <a:lnSpc>
+                <a:spcPct val="108000"/>
+              </a:lnSpc>
+              <a:spcAft>
+                <a:spcPts val="0"/>
+              </a:spcAft>
+            </a:pPr>
+            <a:r>
+              <a:rPr sz="650" b="1">
+                <a:solidFill>
+                  <a:srgbClr val="955900"/>
+                </a:solidFill>
+                <a:latin typeface="Courier New"/>
+              </a:rPr>
+              <a:t>04</a:t>
+            </a:r>
+          </a:p>
+        </p:txBody>
+      </p:sp>
+      <p:sp>
+        <p:nvSpPr>
+          <p:cNvPr id="25" name="TextBox 24"/>
+          <p:cNvSpPr txBox="1"/>
+          <p:nvPr/>
+        </p:nvSpPr>
+        <p:spPr>
+          <a:xfrm>
+            <a:off x="9281160" y="2304288"/>
+            <a:ext cx="2249424" cy="246888"/>
+          </a:xfrm>
+          <a:prstGeom prst="rect">
+            <a:avLst/>
+          </a:prstGeom>
+          <a:noFill/>
+        </p:spPr>
+        <p:txBody>
+          <a:bodyPr wrap="none" lIns="0" rIns="0" tIns="0" bIns="0" anchor="t">
+            <a:spAutoFit/>
+          </a:bodyPr>
+          <a:lstStyle/>
+          <a:p>
+            <a:pPr algn="l">
+              <a:lnSpc>
+                <a:spcPct val="108000"/>
+              </a:lnSpc>
+              <a:spcAft>
+                <a:spcPts val="0"/>
+              </a:spcAft>
+            </a:pPr>
+            <a:r>
+              <a:rPr sz="1300" b="1">
+                <a:solidFill>
+                  <a:srgbClr val="151719"/>
+                </a:solidFill>
+                <a:latin typeface="PingFang SC"/>
+              </a:rPr>
+              <a:t>轨迹可观测</a:t>
+            </a:r>
+          </a:p>
+        </p:txBody>
+      </p:sp>
+      <p:sp>
+        <p:nvSpPr>
+          <p:cNvPr id="26" name="TextBox 25"/>
+          <p:cNvSpPr txBox="1"/>
+          <p:nvPr/>
+        </p:nvSpPr>
+        <p:spPr>
+          <a:xfrm>
+            <a:off x="9281160" y="2660904"/>
+            <a:ext cx="2267712" cy="438912"/>
+          </a:xfrm>
+          <a:prstGeom prst="rect">
+            <a:avLst/>
+          </a:prstGeom>
+          <a:noFill/>
+        </p:spPr>
+        <p:txBody>
+          <a:bodyPr wrap="none" lIns="0" rIns="0" tIns="0" bIns="0" anchor="t">
+            <a:spAutoFit/>
+          </a:bodyPr>
+          <a:lstStyle/>
+          <a:p>
+            <a:pPr algn="l">
+              <a:lnSpc>
+                <a:spcPct val="108000"/>
+              </a:lnSpc>
+              <a:spcAft>
+                <a:spcPts val="0"/>
+              </a:spcAft>
+            </a:pPr>
+            <a:r>
+              <a:rPr sz="819" b="0">
+                <a:solidFill>
+                  <a:srgbClr val="59615D"/>
+                </a:solidFill>
+                <a:latin typeface="PingFang SC"/>
+              </a:rPr>
+              <a:t>RunEvent / Evaluation / Decision
+Matrix IDs / hashes</a:t>
+            </a:r>
+          </a:p>
+        </p:txBody>
+      </p:sp>
+      <p:sp>
+        <p:nvSpPr>
+          <p:cNvPr id="27" name="TextBox 26"/>
+          <p:cNvSpPr txBox="1"/>
+          <p:nvPr/>
+        </p:nvSpPr>
+        <p:spPr>
+          <a:xfrm>
+            <a:off x="10689336" y="2029968"/>
+            <a:ext cx="877824" cy="128016"/>
+          </a:xfrm>
+          <a:prstGeom prst="rect">
+            <a:avLst/>
+          </a:prstGeom>
+          <a:noFill/>
+        </p:spPr>
+        <p:txBody>
+          <a:bodyPr wrap="none" lIns="0" rIns="0" tIns="0" bIns="0" anchor="t">
+            <a:spAutoFit/>
+          </a:bodyPr>
+          <a:lstStyle/>
+          <a:p>
+            <a:pPr algn="r">
+              <a:lnSpc>
+                <a:spcPct val="108000"/>
+              </a:lnSpc>
+              <a:spcAft>
+                <a:spcPts val="0"/>
+              </a:spcAft>
+            </a:pPr>
+            <a:r>
+              <a:rPr sz="580" b="1">
+                <a:solidFill>
+                  <a:srgbClr val="955900"/>
+                </a:solidFill>
+                <a:latin typeface="Courier New"/>
+              </a:rPr>
+              <a:t>IMPLEMENTED</a:t>
+            </a:r>
+          </a:p>
+        </p:txBody>
+      </p:sp>
+      <p:sp>
+        <p:nvSpPr>
+          <p:cNvPr id="28" name="Rectangle 27"/>
+          <p:cNvSpPr/>
+          <p:nvPr/>
+        </p:nvSpPr>
+        <p:spPr>
+          <a:xfrm>
+            <a:off x="576072" y="3767328"/>
+            <a:ext cx="3529584" cy="841248"/>
+          </a:xfrm>
+          <a:prstGeom prst="rect">
+            <a:avLst/>
+          </a:prstGeom>
+          <a:solidFill>
+            <a:srgbClr val="FFFFFF"/>
+          </a:solidFill>
+          <a:ln w="8890">
+            <a:solidFill>
+              <a:srgbClr val="D7DDD9"/>
+            </a:solidFill>
+          </a:ln>
+        </p:spPr>
+        <p:style>
+          <a:lnRef idx="1">
+            <a:schemeClr val="accent1"/>
+          </a:lnRef>
+          <a:fillRef idx="3">
+            <a:schemeClr val="accent1"/>
+          </a:fillRef>
+          <a:effectRef idx="2">
+            <a:schemeClr val="accent1"/>
+          </a:effectRef>
+          <a:fontRef idx="minor">
+            <a:schemeClr val="lt1"/>
+          </a:fontRef>
+        </p:style>
+        <p:txBody>
+          <a:bodyPr rtlCol="0" anchor="ctr"/>
+          <a:lstStyle/>
+          <a:p>
+            <a:pPr algn="ctr"/>
+          </a:p>
+        </p:txBody>
+      </p:sp>
+      <p:sp>
+        <p:nvSpPr>
+          <p:cNvPr id="29" name="Rectangle 28"/>
+          <p:cNvSpPr/>
+          <p:nvPr/>
+        </p:nvSpPr>
+        <p:spPr>
+          <a:xfrm>
+            <a:off x="576072" y="3767328"/>
+            <a:ext cx="45720" cy="841248"/>
+          </a:xfrm>
+          <a:prstGeom prst="rect">
+            <a:avLst/>
+          </a:prstGeom>
+          <a:solidFill>
+            <a:srgbClr val="2457F5"/>
+          </a:solidFill>
+          <a:ln w="8890">
+            <a:solidFill>
+              <a:srgbClr val="2457F5"/>
+            </a:solidFill>
+          </a:ln>
+        </p:spPr>
+        <p:style>
+          <a:lnRef idx="1">
+            <a:schemeClr val="accent1"/>
+          </a:lnRef>
+          <a:fillRef idx="3">
+            <a:schemeClr val="accent1"/>
+          </a:fillRef>
+          <a:effectRef idx="2">
+            <a:schemeClr val="accent1"/>
+          </a:effectRef>
+          <a:fontRef idx="minor">
+            <a:schemeClr val="lt1"/>
+          </a:fontRef>
+        </p:style>
+        <p:txBody>
+          <a:bodyPr rtlCol="0" anchor="ctr"/>
+          <a:lstStyle/>
+          <a:p>
+            <a:pPr algn="ctr"/>
+          </a:p>
+        </p:txBody>
+      </p:sp>
+      <p:sp>
+        <p:nvSpPr>
+          <p:cNvPr id="30" name="TextBox 29"/>
+          <p:cNvSpPr txBox="1"/>
+          <p:nvPr/>
+        </p:nvSpPr>
+        <p:spPr>
+          <a:xfrm>
+            <a:off x="740664" y="3950208"/>
+            <a:ext cx="841248" cy="310896"/>
+          </a:xfrm>
+          <a:prstGeom prst="rect">
+            <a:avLst/>
+          </a:prstGeom>
+          <a:noFill/>
+        </p:spPr>
+        <p:txBody>
+          <a:bodyPr wrap="none" lIns="0" rIns="0" tIns="0" bIns="0" anchor="t">
+            <a:spAutoFit/>
+          </a:bodyPr>
+          <a:lstStyle/>
+          <a:p>
+            <a:pPr algn="l">
+              <a:lnSpc>
+                <a:spcPct val="108000"/>
+              </a:lnSpc>
+              <a:spcAft>
+                <a:spcPts val="0"/>
+              </a:spcAft>
+            </a:pPr>
+            <a:r>
+              <a:rPr sz="2000" b="1">
+                <a:solidFill>
+                  <a:srgbClr val="151719"/>
+                </a:solidFill>
+                <a:latin typeface="Courier New"/>
+              </a:rPr>
+              <a:t>134</a:t>
+            </a:r>
+          </a:p>
+        </p:txBody>
+      </p:sp>
+      <p:sp>
+        <p:nvSpPr>
+          <p:cNvPr id="31" name="TextBox 30"/>
+          <p:cNvSpPr txBox="1"/>
+          <p:nvPr/>
+        </p:nvSpPr>
+        <p:spPr>
+          <a:xfrm>
+            <a:off x="1600200" y="3913632"/>
+            <a:ext cx="2267712" cy="201168"/>
+          </a:xfrm>
+          <a:prstGeom prst="rect">
+            <a:avLst/>
+          </a:prstGeom>
+          <a:noFill/>
+        </p:spPr>
+        <p:txBody>
+          <a:bodyPr wrap="none" lIns="0" rIns="0" tIns="0" bIns="0" anchor="t">
+            <a:spAutoFit/>
+          </a:bodyPr>
+          <a:lstStyle/>
+          <a:p>
+            <a:pPr algn="l">
+              <a:lnSpc>
+                <a:spcPct val="108000"/>
+              </a:lnSpc>
+              <a:spcAft>
+                <a:spcPts val="0"/>
+              </a:spcAft>
+            </a:pPr>
+            <a:r>
+              <a:rPr sz="950" b="1">
+                <a:solidFill>
+                  <a:srgbClr val="252927"/>
+                </a:solidFill>
+                <a:latin typeface="PingFang SC"/>
+              </a:rPr>
+              <a:t>后端测试通过</a:t>
+            </a:r>
+          </a:p>
+        </p:txBody>
+      </p:sp>
+      <p:sp>
+        <p:nvSpPr>
+          <p:cNvPr id="32" name="TextBox 31"/>
+          <p:cNvSpPr txBox="1"/>
+          <p:nvPr/>
+        </p:nvSpPr>
+        <p:spPr>
+          <a:xfrm>
+            <a:off x="1600200" y="4215384"/>
+            <a:ext cx="2267712" cy="201168"/>
+          </a:xfrm>
+          <a:prstGeom prst="rect">
+            <a:avLst/>
+          </a:prstGeom>
+          <a:noFill/>
+        </p:spPr>
+        <p:txBody>
+          <a:bodyPr wrap="none" lIns="0" rIns="0" tIns="0" bIns="0" anchor="t">
+            <a:spAutoFit/>
+          </a:bodyPr>
+          <a:lstStyle/>
+          <a:p>
+            <a:pPr algn="l">
+              <a:lnSpc>
+                <a:spcPct val="108000"/>
+              </a:lnSpc>
+              <a:spcAft>
+                <a:spcPts val="0"/>
+              </a:spcAft>
+            </a:pPr>
+            <a:r>
+              <a:rPr sz="720" b="0">
+                <a:solidFill>
+                  <a:srgbClr val="59615D"/>
+                </a:solidFill>
+                <a:latin typeface="PingFang SC"/>
+              </a:rPr>
+              <a:t>6 skipped / 1 deprecation warning</a:t>
+            </a:r>
+          </a:p>
+        </p:txBody>
+      </p:sp>
+      <p:sp>
+        <p:nvSpPr>
+          <p:cNvPr id="33" name="Rectangle 32"/>
+          <p:cNvSpPr/>
+          <p:nvPr/>
+        </p:nvSpPr>
+        <p:spPr>
+          <a:xfrm>
+            <a:off x="4361688" y="3767328"/>
+            <a:ext cx="3529584" cy="841248"/>
+          </a:xfrm>
+          <a:prstGeom prst="rect">
+            <a:avLst/>
+          </a:prstGeom>
+          <a:solidFill>
+            <a:srgbClr val="FFFFFF"/>
+          </a:solidFill>
+          <a:ln w="8890">
+            <a:solidFill>
+              <a:srgbClr val="D7DDD9"/>
+            </a:solidFill>
+          </a:ln>
+        </p:spPr>
+        <p:style>
+          <a:lnRef idx="1">
+            <a:schemeClr val="accent1"/>
+          </a:lnRef>
+          <a:fillRef idx="3">
+            <a:schemeClr val="accent1"/>
+          </a:fillRef>
+          <a:effectRef idx="2">
+            <a:schemeClr val="accent1"/>
+          </a:effectRef>
+          <a:fontRef idx="minor">
+            <a:schemeClr val="lt1"/>
+          </a:fontRef>
+        </p:style>
+        <p:txBody>
+          <a:bodyPr rtlCol="0" anchor="ctr"/>
+          <a:lstStyle/>
+          <a:p>
+            <a:pPr algn="ctr"/>
+          </a:p>
+        </p:txBody>
+      </p:sp>
+      <p:sp>
+        <p:nvSpPr>
+          <p:cNvPr id="34" name="Rectangle 33"/>
+          <p:cNvSpPr/>
+          <p:nvPr/>
+        </p:nvSpPr>
+        <p:spPr>
+          <a:xfrm>
+            <a:off x="4361688" y="3767328"/>
+            <a:ext cx="45720" cy="841248"/>
+          </a:xfrm>
+          <a:prstGeom prst="rect">
+            <a:avLst/>
+          </a:prstGeom>
+          <a:solidFill>
+            <a:srgbClr val="237A59"/>
+          </a:solidFill>
+          <a:ln w="8890">
+            <a:solidFill>
+              <a:srgbClr val="237A59"/>
+            </a:solidFill>
+          </a:ln>
+        </p:spPr>
+        <p:style>
+          <a:lnRef idx="1">
+            <a:schemeClr val="accent1"/>
+          </a:lnRef>
+          <a:fillRef idx="3">
+            <a:schemeClr val="accent1"/>
+          </a:fillRef>
+          <a:effectRef idx="2">
+            <a:schemeClr val="accent1"/>
+          </a:effectRef>
+          <a:fontRef idx="minor">
+            <a:schemeClr val="lt1"/>
+          </a:fontRef>
+        </p:style>
+        <p:txBody>
+          <a:bodyPr rtlCol="0" anchor="ctr"/>
+          <a:lstStyle/>
+          <a:p>
+            <a:pPr algn="ctr"/>
+          </a:p>
+        </p:txBody>
+      </p:sp>
+      <p:sp>
+        <p:nvSpPr>
+          <p:cNvPr id="35" name="TextBox 34"/>
+          <p:cNvSpPr txBox="1"/>
+          <p:nvPr/>
+        </p:nvSpPr>
+        <p:spPr>
+          <a:xfrm>
+            <a:off x="4526279" y="3950208"/>
+            <a:ext cx="841248" cy="310896"/>
+          </a:xfrm>
+          <a:prstGeom prst="rect">
+            <a:avLst/>
+          </a:prstGeom>
+          <a:noFill/>
+        </p:spPr>
+        <p:txBody>
+          <a:bodyPr wrap="none" lIns="0" rIns="0" tIns="0" bIns="0" anchor="t">
+            <a:spAutoFit/>
+          </a:bodyPr>
+          <a:lstStyle/>
+          <a:p>
+            <a:pPr algn="l">
+              <a:lnSpc>
+                <a:spcPct val="108000"/>
+              </a:lnSpc>
+              <a:spcAft>
+                <a:spcPts val="0"/>
+              </a:spcAft>
+            </a:pPr>
+            <a:r>
+              <a:rPr sz="2000" b="1">
+                <a:solidFill>
+                  <a:srgbClr val="151719"/>
+                </a:solidFill>
+                <a:latin typeface="Courier New"/>
+              </a:rPr>
+              <a:t>3</a:t>
+            </a:r>
+          </a:p>
+        </p:txBody>
+      </p:sp>
+      <p:sp>
+        <p:nvSpPr>
+          <p:cNvPr id="36" name="TextBox 35"/>
+          <p:cNvSpPr txBox="1"/>
+          <p:nvPr/>
+        </p:nvSpPr>
+        <p:spPr>
+          <a:xfrm>
+            <a:off x="5385816" y="3913632"/>
+            <a:ext cx="2267712" cy="201168"/>
+          </a:xfrm>
+          <a:prstGeom prst="rect">
+            <a:avLst/>
+          </a:prstGeom>
+          <a:noFill/>
+        </p:spPr>
+        <p:txBody>
+          <a:bodyPr wrap="none" lIns="0" rIns="0" tIns="0" bIns="0" anchor="t">
+            <a:spAutoFit/>
+          </a:bodyPr>
+          <a:lstStyle/>
+          <a:p>
+            <a:pPr algn="l">
+              <a:lnSpc>
+                <a:spcPct val="108000"/>
+              </a:lnSpc>
+              <a:spcAft>
+                <a:spcPts val="0"/>
+              </a:spcAft>
+            </a:pPr>
+            <a:r>
+              <a:rPr sz="950" b="1">
+                <a:solidFill>
+                  <a:srgbClr val="252927"/>
+                </a:solidFill>
+                <a:latin typeface="PingFang SC"/>
+              </a:rPr>
+              <a:t>参考场景验证</a:t>
+            </a:r>
+          </a:p>
+        </p:txBody>
+      </p:sp>
+      <p:sp>
+        <p:nvSpPr>
+          <p:cNvPr id="37" name="TextBox 36"/>
+          <p:cNvSpPr txBox="1"/>
+          <p:nvPr/>
+        </p:nvSpPr>
+        <p:spPr>
+          <a:xfrm>
+            <a:off x="5385816" y="4215384"/>
+            <a:ext cx="2267712" cy="201168"/>
+          </a:xfrm>
+          <a:prstGeom prst="rect">
+            <a:avLst/>
+          </a:prstGeom>
+          <a:noFill/>
+        </p:spPr>
+        <p:txBody>
+          <a:bodyPr wrap="none" lIns="0" rIns="0" tIns="0" bIns="0" anchor="t">
+            <a:spAutoFit/>
+          </a:bodyPr>
+          <a:lstStyle/>
+          <a:p>
+            <a:pPr algn="l">
+              <a:lnSpc>
+                <a:spcPct val="108000"/>
+              </a:lnSpc>
+              <a:spcAft>
+                <a:spcPts val="0"/>
+              </a:spcAft>
+            </a:pPr>
+            <a:r>
+              <a:rPr sz="720" b="0">
+                <a:solidFill>
+                  <a:srgbClr val="59615D"/>
+                </a:solidFill>
+                <a:latin typeface="PingFang SC"/>
+              </a:rPr>
+              <a:t>success / policy regression / recovery</a:t>
+            </a:r>
+          </a:p>
+        </p:txBody>
+      </p:sp>
+      <p:sp>
+        <p:nvSpPr>
+          <p:cNvPr id="38" name="Rectangle 37"/>
+          <p:cNvSpPr/>
+          <p:nvPr/>
+        </p:nvSpPr>
+        <p:spPr>
+          <a:xfrm>
+            <a:off x="8147304" y="3767328"/>
+            <a:ext cx="3529584" cy="841248"/>
+          </a:xfrm>
+          <a:prstGeom prst="rect">
+            <a:avLst/>
+          </a:prstGeom>
+          <a:solidFill>
+            <a:srgbClr val="FFFFFF"/>
+          </a:solidFill>
+          <a:ln w="8890">
+            <a:solidFill>
+              <a:srgbClr val="D7DDD9"/>
+            </a:solidFill>
+          </a:ln>
+        </p:spPr>
+        <p:style>
+          <a:lnRef idx="1">
+            <a:schemeClr val="accent1"/>
+          </a:lnRef>
+          <a:fillRef idx="3">
+            <a:schemeClr val="accent1"/>
+          </a:fillRef>
+          <a:effectRef idx="2">
+            <a:schemeClr val="accent1"/>
+          </a:effectRef>
+          <a:fontRef idx="minor">
+            <a:schemeClr val="lt1"/>
+          </a:fontRef>
+        </p:style>
+        <p:txBody>
+          <a:bodyPr rtlCol="0" anchor="ctr"/>
+          <a:lstStyle/>
+          <a:p>
+            <a:pPr algn="ctr"/>
+          </a:p>
+        </p:txBody>
+      </p:sp>
+      <p:sp>
+        <p:nvSpPr>
+          <p:cNvPr id="39" name="Rectangle 38"/>
+          <p:cNvSpPr/>
+          <p:nvPr/>
+        </p:nvSpPr>
+        <p:spPr>
+          <a:xfrm>
+            <a:off x="8147304" y="3767328"/>
+            <a:ext cx="45720" cy="841248"/>
+          </a:xfrm>
+          <a:prstGeom prst="rect">
+            <a:avLst/>
+          </a:prstGeom>
+          <a:solidFill>
+            <a:srgbClr val="955900"/>
+          </a:solidFill>
+          <a:ln w="8890">
+            <a:solidFill>
+              <a:srgbClr val="955900"/>
+            </a:solidFill>
+          </a:ln>
+        </p:spPr>
+        <p:style>
+          <a:lnRef idx="1">
+            <a:schemeClr val="accent1"/>
+          </a:lnRef>
+          <a:fillRef idx="3">
+            <a:schemeClr val="accent1"/>
+          </a:fillRef>
+          <a:effectRef idx="2">
+            <a:schemeClr val="accent1"/>
+          </a:effectRef>
+          <a:fontRef idx="minor">
+            <a:schemeClr val="lt1"/>
+          </a:fontRef>
+        </p:style>
+        <p:txBody>
+          <a:bodyPr rtlCol="0" anchor="ctr"/>
+          <a:lstStyle/>
+          <a:p>
+            <a:pPr algn="ctr"/>
+          </a:p>
+        </p:txBody>
+      </p:sp>
+      <p:sp>
+        <p:nvSpPr>
+          <p:cNvPr id="40" name="TextBox 39"/>
+          <p:cNvSpPr txBox="1"/>
+          <p:nvPr/>
+        </p:nvSpPr>
+        <p:spPr>
+          <a:xfrm>
+            <a:off x="8311896" y="3950208"/>
+            <a:ext cx="841248" cy="310896"/>
+          </a:xfrm>
+          <a:prstGeom prst="rect">
+            <a:avLst/>
+          </a:prstGeom>
+          <a:noFill/>
+        </p:spPr>
+        <p:txBody>
+          <a:bodyPr wrap="none" lIns="0" rIns="0" tIns="0" bIns="0" anchor="t">
+            <a:spAutoFit/>
+          </a:bodyPr>
+          <a:lstStyle/>
+          <a:p>
+            <a:pPr algn="l">
+              <a:lnSpc>
+                <a:spcPct val="108000"/>
+              </a:lnSpc>
+              <a:spcAft>
+                <a:spcPts val="0"/>
+              </a:spcAft>
+            </a:pPr>
+            <a:r>
+              <a:rPr sz="2000" b="1">
+                <a:solidFill>
+                  <a:srgbClr val="151719"/>
+                </a:solidFill>
+                <a:latin typeface="Courier New"/>
+              </a:rPr>
+              <a:t>0</a:t>
+            </a:r>
+          </a:p>
+        </p:txBody>
+      </p:sp>
+      <p:sp>
+        <p:nvSpPr>
+          <p:cNvPr id="41" name="TextBox 40"/>
+          <p:cNvSpPr txBox="1"/>
+          <p:nvPr/>
+        </p:nvSpPr>
+        <p:spPr>
+          <a:xfrm>
+            <a:off x="9171432" y="3913632"/>
+            <a:ext cx="2267712" cy="201168"/>
+          </a:xfrm>
+          <a:prstGeom prst="rect">
+            <a:avLst/>
+          </a:prstGeom>
+          <a:noFill/>
+        </p:spPr>
+        <p:txBody>
+          <a:bodyPr wrap="none" lIns="0" rIns="0" tIns="0" bIns="0" anchor="t">
+            <a:spAutoFit/>
+          </a:bodyPr>
+          <a:lstStyle/>
+          <a:p>
+            <a:pPr algn="l">
+              <a:lnSpc>
+                <a:spcPct val="108000"/>
+              </a:lnSpc>
+              <a:spcAft>
+                <a:spcPts val="0"/>
+              </a:spcAft>
+            </a:pPr>
+            <a:r>
+              <a:rPr sz="950" b="1">
+                <a:solidFill>
+                  <a:srgbClr val="252927"/>
+                </a:solidFill>
+                <a:latin typeface="PingFang SC"/>
+              </a:rPr>
+              <a:t>Git 历史密钥命中</a:t>
+            </a:r>
+          </a:p>
+        </p:txBody>
+      </p:sp>
+      <p:sp>
+        <p:nvSpPr>
+          <p:cNvPr id="42" name="TextBox 41"/>
+          <p:cNvSpPr txBox="1"/>
+          <p:nvPr/>
+        </p:nvSpPr>
+        <p:spPr>
+          <a:xfrm>
+            <a:off x="9171432" y="4215384"/>
+            <a:ext cx="2267712" cy="201168"/>
+          </a:xfrm>
+          <a:prstGeom prst="rect">
+            <a:avLst/>
+          </a:prstGeom>
+          <a:noFill/>
+        </p:spPr>
+        <p:txBody>
+          <a:bodyPr wrap="none" lIns="0" rIns="0" tIns="0" bIns="0" anchor="t">
+            <a:spAutoFit/>
+          </a:bodyPr>
+          <a:lstStyle/>
+          <a:p>
+            <a:pPr algn="l">
+              <a:lnSpc>
+                <a:spcPct val="108000"/>
+              </a:lnSpc>
+              <a:spcAft>
+                <a:spcPts val="0"/>
+              </a:spcAft>
+            </a:pPr>
+            <a:r>
+              <a:rPr sz="720" b="0">
+                <a:solidFill>
+                  <a:srgbClr val="59615D"/>
+                </a:solidFill>
+                <a:latin typeface="PingFang SC"/>
+              </a:rPr>
+              <a:t>Gitleaks 8.29.1 + official fixture sanity</a:t>
+            </a:r>
+          </a:p>
+        </p:txBody>
+      </p:sp>
+      <p:sp>
+        <p:nvSpPr>
+          <p:cNvPr id="43" name="Rectangle 42"/>
+          <p:cNvSpPr/>
+          <p:nvPr/>
+        </p:nvSpPr>
+        <p:spPr>
+          <a:xfrm>
+            <a:off x="576072" y="4837176"/>
+            <a:ext cx="3529584" cy="841248"/>
+          </a:xfrm>
+          <a:prstGeom prst="rect">
+            <a:avLst/>
+          </a:prstGeom>
+          <a:solidFill>
+            <a:srgbClr val="FFFFFF"/>
+          </a:solidFill>
+          <a:ln w="8890">
+            <a:solidFill>
+              <a:srgbClr val="D7DDD9"/>
+            </a:solidFill>
+          </a:ln>
+        </p:spPr>
+        <p:style>
+          <a:lnRef idx="1">
+            <a:schemeClr val="accent1"/>
+          </a:lnRef>
+          <a:fillRef idx="3">
+            <a:schemeClr val="accent1"/>
+          </a:fillRef>
+          <a:effectRef idx="2">
+            <a:schemeClr val="accent1"/>
+          </a:effectRef>
+          <a:fontRef idx="minor">
+            <a:schemeClr val="lt1"/>
+          </a:fontRef>
+        </p:style>
+        <p:txBody>
+          <a:bodyPr rtlCol="0" anchor="ctr"/>
+          <a:lstStyle/>
+          <a:p>
+            <a:pPr algn="ctr"/>
+          </a:p>
+        </p:txBody>
+      </p:sp>
+      <p:sp>
+        <p:nvSpPr>
+          <p:cNvPr id="44" name="Rectangle 43"/>
+          <p:cNvSpPr/>
+          <p:nvPr/>
+        </p:nvSpPr>
+        <p:spPr>
+          <a:xfrm>
+            <a:off x="576072" y="4837176"/>
+            <a:ext cx="45720" cy="841248"/>
+          </a:xfrm>
+          <a:prstGeom prst="rect">
+            <a:avLst/>
+          </a:prstGeom>
+          <a:solidFill>
+            <a:srgbClr val="2457F5"/>
+          </a:solidFill>
+          <a:ln w="8890">
+            <a:solidFill>
+              <a:srgbClr val="2457F5"/>
+            </a:solidFill>
+          </a:ln>
+        </p:spPr>
+        <p:style>
+          <a:lnRef idx="1">
+            <a:schemeClr val="accent1"/>
+          </a:lnRef>
+          <a:fillRef idx="3">
+            <a:schemeClr val="accent1"/>
+          </a:fillRef>
+          <a:effectRef idx="2">
+            <a:schemeClr val="accent1"/>
+          </a:effectRef>
+          <a:fontRef idx="minor">
+            <a:schemeClr val="lt1"/>
+          </a:fontRef>
+        </p:style>
+        <p:txBody>
+          <a:bodyPr rtlCol="0" anchor="ctr"/>
+          <a:lstStyle/>
+          <a:p>
+            <a:pPr algn="ctr"/>
+          </a:p>
+        </p:txBody>
+      </p:sp>
+      <p:sp>
+        <p:nvSpPr>
+          <p:cNvPr id="45" name="TextBox 44"/>
+          <p:cNvSpPr txBox="1"/>
+          <p:nvPr/>
+        </p:nvSpPr>
+        <p:spPr>
+          <a:xfrm>
+            <a:off x="740664" y="5020056"/>
+            <a:ext cx="841248" cy="310896"/>
+          </a:xfrm>
+          <a:prstGeom prst="rect">
+            <a:avLst/>
+          </a:prstGeom>
+          <a:noFill/>
+        </p:spPr>
+        <p:txBody>
+          <a:bodyPr wrap="none" lIns="0" rIns="0" tIns="0" bIns="0" anchor="t">
+            <a:spAutoFit/>
+          </a:bodyPr>
+          <a:lstStyle/>
+          <a:p>
+            <a:pPr algn="l">
+              <a:lnSpc>
+                <a:spcPct val="108000"/>
+              </a:lnSpc>
+              <a:spcAft>
+                <a:spcPts val="0"/>
+              </a:spcAft>
+            </a:pPr>
+            <a:r>
+              <a:rPr sz="2000" b="1">
+                <a:solidFill>
+                  <a:srgbClr val="151719"/>
+                </a:solidFill>
+                <a:latin typeface="Courier New"/>
+              </a:rPr>
+              <a:t>2</a:t>
+            </a:r>
+          </a:p>
+        </p:txBody>
+      </p:sp>
+      <p:sp>
+        <p:nvSpPr>
+          <p:cNvPr id="46" name="TextBox 45"/>
+          <p:cNvSpPr txBox="1"/>
+          <p:nvPr/>
+        </p:nvSpPr>
+        <p:spPr>
+          <a:xfrm>
+            <a:off x="1600200" y="4983480"/>
+            <a:ext cx="2267712" cy="201168"/>
+          </a:xfrm>
+          <a:prstGeom prst="rect">
+            <a:avLst/>
+          </a:prstGeom>
+          <a:noFill/>
+        </p:spPr>
+        <p:txBody>
+          <a:bodyPr wrap="none" lIns="0" rIns="0" tIns="0" bIns="0" anchor="t">
+            <a:spAutoFit/>
+          </a:bodyPr>
+          <a:lstStyle/>
+          <a:p>
+            <a:pPr algn="l">
+              <a:lnSpc>
+                <a:spcPct val="108000"/>
+              </a:lnSpc>
+              <a:spcAft>
+                <a:spcPts val="0"/>
+              </a:spcAft>
+            </a:pPr>
+            <a:r>
+              <a:rPr sz="950" b="1">
+                <a:solidFill>
+                  <a:srgbClr val="252927"/>
+                </a:solidFill>
+                <a:latin typeface="PingFang SC"/>
+              </a:rPr>
+              <a:t>Worker 双向回执</a:t>
+            </a:r>
+          </a:p>
+        </p:txBody>
+      </p:sp>
+      <p:sp>
+        <p:nvSpPr>
+          <p:cNvPr id="47" name="TextBox 46"/>
+          <p:cNvSpPr txBox="1"/>
+          <p:nvPr/>
+        </p:nvSpPr>
+        <p:spPr>
+          <a:xfrm>
+            <a:off x="1600200" y="5285232"/>
+            <a:ext cx="2267712" cy="201168"/>
+          </a:xfrm>
+          <a:prstGeom prst="rect">
+            <a:avLst/>
+          </a:prstGeom>
+          <a:noFill/>
+        </p:spPr>
+        <p:txBody>
+          <a:bodyPr wrap="none" lIns="0" rIns="0" tIns="0" bIns="0" anchor="t">
+            <a:spAutoFit/>
+          </a:bodyPr>
+          <a:lstStyle/>
+          <a:p>
+            <a:pPr algn="l">
+              <a:lnSpc>
+                <a:spcPct val="108000"/>
+              </a:lnSpc>
+              <a:spcAft>
+                <a:spcPts val="0"/>
+              </a:spcAft>
+            </a:pPr>
+            <a:r>
+              <a:rPr sz="720" b="0">
+                <a:solidFill>
+                  <a:srgbClr val="59615D"/>
+                </a:solidFill>
+                <a:latin typeface="PingFang SC"/>
+              </a:rPr>
+              <a:t>Curator + Judge / Matrix event IDs</a:t>
+            </a:r>
+          </a:p>
+        </p:txBody>
+      </p:sp>
+      <p:sp>
+        <p:nvSpPr>
+          <p:cNvPr id="48" name="Rectangle 47"/>
+          <p:cNvSpPr/>
+          <p:nvPr/>
+        </p:nvSpPr>
+        <p:spPr>
+          <a:xfrm>
+            <a:off x="4361688" y="4837176"/>
+            <a:ext cx="3529584" cy="841248"/>
+          </a:xfrm>
+          <a:prstGeom prst="rect">
+            <a:avLst/>
+          </a:prstGeom>
+          <a:solidFill>
+            <a:srgbClr val="FFFFFF"/>
+          </a:solidFill>
+          <a:ln w="8890">
+            <a:solidFill>
+              <a:srgbClr val="D7DDD9"/>
+            </a:solidFill>
+          </a:ln>
+        </p:spPr>
+        <p:style>
+          <a:lnRef idx="1">
+            <a:schemeClr val="accent1"/>
+          </a:lnRef>
+          <a:fillRef idx="3">
+            <a:schemeClr val="accent1"/>
+          </a:fillRef>
+          <a:effectRef idx="2">
+            <a:schemeClr val="accent1"/>
+          </a:effectRef>
+          <a:fontRef idx="minor">
+            <a:schemeClr val="lt1"/>
+          </a:fontRef>
+        </p:style>
+        <p:txBody>
+          <a:bodyPr rtlCol="0" anchor="ctr"/>
+          <a:lstStyle/>
+          <a:p>
+            <a:pPr algn="ctr"/>
+          </a:p>
+        </p:txBody>
+      </p:sp>
+      <p:sp>
+        <p:nvSpPr>
+          <p:cNvPr id="49" name="Rectangle 48"/>
+          <p:cNvSpPr/>
+          <p:nvPr/>
+        </p:nvSpPr>
+        <p:spPr>
+          <a:xfrm>
+            <a:off x="4361688" y="4837176"/>
+            <a:ext cx="45720" cy="841248"/>
+          </a:xfrm>
+          <a:prstGeom prst="rect">
+            <a:avLst/>
+          </a:prstGeom>
+          <a:solidFill>
+            <a:srgbClr val="237A59"/>
+          </a:solidFill>
+          <a:ln w="8890">
+            <a:solidFill>
+              <a:srgbClr val="237A59"/>
+            </a:solidFill>
+          </a:ln>
+        </p:spPr>
+        <p:style>
+          <a:lnRef idx="1">
+            <a:schemeClr val="accent1"/>
+          </a:lnRef>
+          <a:fillRef idx="3">
+            <a:schemeClr val="accent1"/>
+          </a:fillRef>
+          <a:effectRef idx="2">
+            <a:schemeClr val="accent1"/>
+          </a:effectRef>
+          <a:fontRef idx="minor">
+            <a:schemeClr val="lt1"/>
+          </a:fontRef>
+        </p:style>
+        <p:txBody>
+          <a:bodyPr rtlCol="0" anchor="ctr"/>
+          <a:lstStyle/>
+          <a:p>
+            <a:pPr algn="ctr"/>
+          </a:p>
+        </p:txBody>
+      </p:sp>
+      <p:sp>
+        <p:nvSpPr>
+          <p:cNvPr id="50" name="TextBox 49"/>
+          <p:cNvSpPr txBox="1"/>
+          <p:nvPr/>
+        </p:nvSpPr>
+        <p:spPr>
+          <a:xfrm>
+            <a:off x="4526279" y="5020056"/>
+            <a:ext cx="841248" cy="310896"/>
+          </a:xfrm>
+          <a:prstGeom prst="rect">
+            <a:avLst/>
+          </a:prstGeom>
+          <a:noFill/>
+        </p:spPr>
+        <p:txBody>
+          <a:bodyPr wrap="none" lIns="0" rIns="0" tIns="0" bIns="0" anchor="t">
+            <a:spAutoFit/>
+          </a:bodyPr>
+          <a:lstStyle/>
+          <a:p>
+            <a:pPr algn="l">
+              <a:lnSpc>
+                <a:spcPct val="108000"/>
+              </a:lnSpc>
+              <a:spcAft>
+                <a:spcPts val="0"/>
+              </a:spcAft>
+            </a:pPr>
+            <a:r>
+              <a:rPr sz="2000" b="1">
+                <a:solidFill>
+                  <a:srgbClr val="151719"/>
+                </a:solidFill>
+                <a:latin typeface="Courier New"/>
+              </a:rPr>
+              <a:t>3/3</a:t>
+            </a:r>
+          </a:p>
+        </p:txBody>
+      </p:sp>
+      <p:sp>
+        <p:nvSpPr>
+          <p:cNvPr id="51" name="TextBox 50"/>
+          <p:cNvSpPr txBox="1"/>
+          <p:nvPr/>
+        </p:nvSpPr>
+        <p:spPr>
+          <a:xfrm>
+            <a:off x="5385816" y="4983480"/>
+            <a:ext cx="2267712" cy="201168"/>
+          </a:xfrm>
+          <a:prstGeom prst="rect">
+            <a:avLst/>
+          </a:prstGeom>
+          <a:noFill/>
+        </p:spPr>
+        <p:txBody>
+          <a:bodyPr wrap="none" lIns="0" rIns="0" tIns="0" bIns="0" anchor="t">
+            <a:spAutoFit/>
+          </a:bodyPr>
+          <a:lstStyle/>
+          <a:p>
+            <a:pPr algn="l">
+              <a:lnSpc>
+                <a:spcPct val="108000"/>
+              </a:lnSpc>
+              <a:spcAft>
+                <a:spcPts val="0"/>
+              </a:spcAft>
+            </a:pPr>
+            <a:r>
+              <a:rPr sz="950" b="1">
+                <a:solidFill>
+                  <a:srgbClr val="252927"/>
+                </a:solidFill>
+                <a:latin typeface="PingFang SC"/>
+              </a:rPr>
+              <a:t>成功场景 Rule</a:t>
+            </a:r>
+          </a:p>
+        </p:txBody>
+      </p:sp>
+      <p:sp>
+        <p:nvSpPr>
+          <p:cNvPr id="52" name="TextBox 51"/>
+          <p:cNvSpPr txBox="1"/>
+          <p:nvPr/>
+        </p:nvSpPr>
+        <p:spPr>
+          <a:xfrm>
+            <a:off x="5385816" y="5285232"/>
+            <a:ext cx="2267712" cy="201168"/>
+          </a:xfrm>
+          <a:prstGeom prst="rect">
+            <a:avLst/>
+          </a:prstGeom>
+          <a:noFill/>
+        </p:spPr>
+        <p:txBody>
+          <a:bodyPr wrap="none" lIns="0" rIns="0" tIns="0" bIns="0" anchor="t">
+            <a:spAutoFit/>
+          </a:bodyPr>
+          <a:lstStyle/>
+          <a:p>
+            <a:pPr algn="l">
+              <a:lnSpc>
+                <a:spcPct val="108000"/>
+              </a:lnSpc>
+              <a:spcAft>
+                <a:spcPts val="0"/>
+              </a:spcAft>
+            </a:pPr>
+            <a:r>
+              <a:rPr sz="720" b="0">
+                <a:solidFill>
+                  <a:srgbClr val="59615D"/>
+                </a:solidFill>
+                <a:latin typeface="PingFang SC"/>
+              </a:rPr>
+              <a:t>Evidence Judge 独立 pass</a:t>
+            </a:r>
+          </a:p>
+        </p:txBody>
+      </p:sp>
+      <p:sp>
+        <p:nvSpPr>
+          <p:cNvPr id="53" name="Rectangle 52"/>
+          <p:cNvSpPr/>
+          <p:nvPr/>
+        </p:nvSpPr>
+        <p:spPr>
+          <a:xfrm>
+            <a:off x="8147304" y="4837176"/>
+            <a:ext cx="3529584" cy="841248"/>
+          </a:xfrm>
+          <a:prstGeom prst="rect">
+            <a:avLst/>
+          </a:prstGeom>
+          <a:solidFill>
+            <a:srgbClr val="FFFFFF"/>
+          </a:solidFill>
+          <a:ln w="8890">
+            <a:solidFill>
+              <a:srgbClr val="D7DDD9"/>
+            </a:solidFill>
+          </a:ln>
+        </p:spPr>
+        <p:style>
+          <a:lnRef idx="1">
+            <a:schemeClr val="accent1"/>
+          </a:lnRef>
+          <a:fillRef idx="3">
+            <a:schemeClr val="accent1"/>
+          </a:fillRef>
+          <a:effectRef idx="2">
+            <a:schemeClr val="accent1"/>
+          </a:effectRef>
+          <a:fontRef idx="minor">
+            <a:schemeClr val="lt1"/>
+          </a:fontRef>
+        </p:style>
+        <p:txBody>
+          <a:bodyPr rtlCol="0" anchor="ctr"/>
+          <a:lstStyle/>
+          <a:p>
+            <a:pPr algn="ctr"/>
+          </a:p>
+        </p:txBody>
+      </p:sp>
+      <p:sp>
+        <p:nvSpPr>
+          <p:cNvPr id="54" name="Rectangle 53"/>
+          <p:cNvSpPr/>
+          <p:nvPr/>
+        </p:nvSpPr>
+        <p:spPr>
+          <a:xfrm>
+            <a:off x="8147304" y="4837176"/>
+            <a:ext cx="45720" cy="841248"/>
+          </a:xfrm>
+          <a:prstGeom prst="rect">
+            <a:avLst/>
+          </a:prstGeom>
+          <a:solidFill>
+            <a:srgbClr val="B8403A"/>
+          </a:solidFill>
+          <a:ln w="8890">
+            <a:solidFill>
+              <a:srgbClr val="B8403A"/>
+            </a:solidFill>
+          </a:ln>
+        </p:spPr>
+        <p:style>
+          <a:lnRef idx="1">
+            <a:schemeClr val="accent1"/>
+          </a:lnRef>
+          <a:fillRef idx="3">
+            <a:schemeClr val="accent1"/>
+          </a:fillRef>
+          <a:effectRef idx="2">
+            <a:schemeClr val="accent1"/>
+          </a:effectRef>
+          <a:fontRef idx="minor">
+            <a:schemeClr val="lt1"/>
+          </a:fontRef>
+        </p:style>
+        <p:txBody>
+          <a:bodyPr rtlCol="0" anchor="ctr"/>
+          <a:lstStyle/>
+          <a:p>
+            <a:pPr algn="ctr"/>
+          </a:p>
+        </p:txBody>
+      </p:sp>
+      <p:sp>
+        <p:nvSpPr>
+          <p:cNvPr id="55" name="TextBox 54"/>
+          <p:cNvSpPr txBox="1"/>
+          <p:nvPr/>
+        </p:nvSpPr>
+        <p:spPr>
+          <a:xfrm>
+            <a:off x="8311896" y="5020056"/>
+            <a:ext cx="841248" cy="310896"/>
+          </a:xfrm>
+          <a:prstGeom prst="rect">
+            <a:avLst/>
+          </a:prstGeom>
+          <a:noFill/>
+        </p:spPr>
+        <p:txBody>
+          <a:bodyPr wrap="none" lIns="0" rIns="0" tIns="0" bIns="0" anchor="t">
+            <a:spAutoFit/>
+          </a:bodyPr>
+          <a:lstStyle/>
+          <a:p>
+            <a:pPr algn="l">
+              <a:lnSpc>
+                <a:spcPct val="108000"/>
+              </a:lnSpc>
+              <a:spcAft>
+                <a:spcPts val="0"/>
+              </a:spcAft>
+            </a:pPr>
+            <a:r>
+              <a:rPr sz="2000" b="1">
+                <a:solidFill>
+                  <a:srgbClr val="151719"/>
+                </a:solidFill>
+                <a:latin typeface="Courier New"/>
+              </a:rPr>
+              <a:t>2/3</a:t>
+            </a:r>
+          </a:p>
+        </p:txBody>
+      </p:sp>
+      <p:sp>
+        <p:nvSpPr>
+          <p:cNvPr id="56" name="TextBox 55"/>
+          <p:cNvSpPr txBox="1"/>
+          <p:nvPr/>
+        </p:nvSpPr>
+        <p:spPr>
+          <a:xfrm>
+            <a:off x="9171432" y="4983480"/>
+            <a:ext cx="2267712" cy="201168"/>
+          </a:xfrm>
+          <a:prstGeom prst="rect">
+            <a:avLst/>
+          </a:prstGeom>
+          <a:noFill/>
+        </p:spPr>
+        <p:txBody>
+          <a:bodyPr wrap="none" lIns="0" rIns="0" tIns="0" bIns="0" anchor="t">
+            <a:spAutoFit/>
+          </a:bodyPr>
+          <a:lstStyle/>
+          <a:p>
+            <a:pPr algn="l">
+              <a:lnSpc>
+                <a:spcPct val="108000"/>
+              </a:lnSpc>
+              <a:spcAft>
+                <a:spcPts val="0"/>
+              </a:spcAft>
+            </a:pPr>
+            <a:r>
+              <a:rPr sz="950" b="1">
+                <a:solidFill>
+                  <a:srgbClr val="252927"/>
+                </a:solidFill>
+                <a:latin typeface="PingFang SC"/>
+              </a:rPr>
+              <a:t>策略回归 Rule</a:t>
+            </a:r>
+          </a:p>
+        </p:txBody>
+      </p:sp>
+      <p:sp>
+        <p:nvSpPr>
+          <p:cNvPr id="57" name="TextBox 56"/>
+          <p:cNvSpPr txBox="1"/>
+          <p:nvPr/>
+        </p:nvSpPr>
+        <p:spPr>
+          <a:xfrm>
+            <a:off x="9171432" y="5285232"/>
+            <a:ext cx="2267712" cy="201168"/>
+          </a:xfrm>
+          <a:prstGeom prst="rect">
+            <a:avLst/>
+          </a:prstGeom>
+          <a:noFill/>
+        </p:spPr>
+        <p:txBody>
+          <a:bodyPr wrap="none" lIns="0" rIns="0" tIns="0" bIns="0" anchor="t">
+            <a:spAutoFit/>
+          </a:bodyPr>
+          <a:lstStyle/>
+          <a:p>
+            <a:pPr algn="l">
+              <a:lnSpc>
+                <a:spcPct val="108000"/>
+              </a:lnSpc>
+              <a:spcAft>
+                <a:spcPts val="0"/>
+              </a:spcAft>
+            </a:pPr>
+            <a:r>
+              <a:rPr sz="720" b="0">
+                <a:solidFill>
+                  <a:srgbClr val="59615D"/>
+                </a:solidFill>
+                <a:latin typeface="PingFang SC"/>
+              </a:rPr>
+              <a:t>Judge 引用同一违规事件 fail</a:t>
+            </a:r>
+          </a:p>
+        </p:txBody>
+      </p:sp>
+      <p:sp>
+        <p:nvSpPr>
+          <p:cNvPr id="58" name="TextBox 57"/>
+          <p:cNvSpPr txBox="1"/>
+          <p:nvPr/>
+        </p:nvSpPr>
+        <p:spPr>
+          <a:xfrm>
+            <a:off x="576072" y="5998464"/>
+            <a:ext cx="10972800" cy="256032"/>
+          </a:xfrm>
+          <a:prstGeom prst="rect">
+            <a:avLst/>
+          </a:prstGeom>
+          <a:noFill/>
+        </p:spPr>
+        <p:txBody>
+          <a:bodyPr wrap="none" lIns="0" rIns="0" tIns="0" bIns="0" anchor="t">
+            <a:spAutoFit/>
+          </a:bodyPr>
+          <a:lstStyle/>
+          <a:p>
+            <a:pPr algn="ctr">
+              <a:lnSpc>
+                <a:spcPct val="108000"/>
+              </a:lnSpc>
+              <a:spcAft>
+                <a:spcPts val="0"/>
+              </a:spcAft>
+            </a:pPr>
+            <a:r>
+              <a:rPr sz="950" b="1">
+                <a:solidFill>
+                  <a:srgbClr val="B8403A"/>
+                </a:solidFill>
+                <a:latin typeface="PingFang SC"/>
+              </a:rPr>
+              <a:t>边界：云端 OTel/SLS、Kubernetes、公开 Release/Tag 与最终视频仍按提交清单闭环，不伪装为已完成。</a:t>
             </a:r>
           </a:p>
         </p:txBody>
@@ -7896,7 +14869,7 @@
                 <a:solidFill>
                   <a:srgbClr val="2457F5"/>
                 </a:solidFill>
-                <a:latin typeface="IBM Plex Mono"/>
+                <a:latin typeface="Courier New"/>
               </a:rPr>
               <a:t>PROBLEM</a:t>
             </a:r>
@@ -8065,7 +15038,7 @@
                 <a:solidFill>
                   <a:srgbClr val="737B77"/>
                 </a:solidFill>
-                <a:latin typeface="IBM Plex Mono"/>
+                <a:latin typeface="Courier New"/>
               </a:rPr>
               <a:t>AGENTRIG / GOAI 2026                                      02 / 12</a:t>
             </a:r>
@@ -8197,7 +15170,7 @@
                 <a:solidFill>
                   <a:srgbClr val="B8403A"/>
                 </a:solidFill>
-                <a:latin typeface="IBM Plex Mono"/>
+                <a:latin typeface="Courier New"/>
               </a:rPr>
               <a:t>01</a:t>
             </a:r>
@@ -8413,7 +15386,7 @@
                 <a:solidFill>
                   <a:srgbClr val="955900"/>
                 </a:solidFill>
-                <a:latin typeface="IBM Plex Mono"/>
+                <a:latin typeface="Courier New"/>
               </a:rPr>
               <a:t>02</a:t>
             </a:r>
@@ -8629,7 +15602,7 @@
                 <a:solidFill>
                   <a:srgbClr val="2457F5"/>
                 </a:solidFill>
-                <a:latin typeface="IBM Plex Mono"/>
+                <a:latin typeface="Courier New"/>
               </a:rPr>
               <a:t>03</a:t>
             </a:r>
@@ -8845,7 +15818,7 @@
                 <a:solidFill>
                   <a:srgbClr val="237A59"/>
                 </a:solidFill>
-                <a:latin typeface="IBM Plex Mono"/>
+                <a:latin typeface="Courier New"/>
               </a:rPr>
               <a:t>04</a:t>
             </a:r>
@@ -9084,7 +16057,7 @@
                 <a:solidFill>
                   <a:srgbClr val="2457F5"/>
                 </a:solidFill>
-                <a:latin typeface="IBM Plex Mono"/>
+                <a:latin typeface="Courier New"/>
               </a:rPr>
               <a:t>USER JOURNEY</a:t>
             </a:r>
@@ -9253,7 +16226,7 @@
                 <a:solidFill>
                   <a:srgbClr val="737B77"/>
                 </a:solidFill>
-                <a:latin typeface="IBM Plex Mono"/>
+                <a:latin typeface="Courier New"/>
               </a:rPr>
               <a:t>AGENTRIG / GOAI 2026                                      03 / 12</a:t>
             </a:r>
@@ -9340,7 +16313,7 @@
                 <a:solidFill>
                   <a:srgbClr val="2457F5"/>
                 </a:solidFill>
-                <a:latin typeface="IBM Plex Mono"/>
+                <a:latin typeface="Courier New"/>
               </a:rPr>
               <a:t>01</a:t>
             </a:r>
@@ -9553,7 +16526,7 @@
                 <a:solidFill>
                   <a:srgbClr val="2457F5"/>
                 </a:solidFill>
-                <a:latin typeface="IBM Plex Mono"/>
+                <a:latin typeface="Courier New"/>
               </a:rPr>
               <a:t>02</a:t>
             </a:r>
@@ -9766,7 +16739,7 @@
                 <a:solidFill>
                   <a:srgbClr val="2457F5"/>
                 </a:solidFill>
-                <a:latin typeface="IBM Plex Mono"/>
+                <a:latin typeface="Courier New"/>
               </a:rPr>
               <a:t>03</a:t>
             </a:r>
@@ -9979,7 +16952,7 @@
                 <a:solidFill>
                   <a:srgbClr val="2457F5"/>
                 </a:solidFill>
-                <a:latin typeface="IBM Plex Mono"/>
+                <a:latin typeface="Courier New"/>
               </a:rPr>
               <a:t>04</a:t>
             </a:r>
@@ -10192,7 +17165,7 @@
                 <a:solidFill>
                   <a:srgbClr val="2457F5"/>
                 </a:solidFill>
-                <a:latin typeface="IBM Plex Mono"/>
+                <a:latin typeface="Courier New"/>
               </a:rPr>
               <a:t>05</a:t>
             </a:r>
@@ -10405,7 +17378,7 @@
                 <a:solidFill>
                   <a:srgbClr val="2457F5"/>
                 </a:solidFill>
-                <a:latin typeface="IBM Plex Mono"/>
+                <a:latin typeface="Courier New"/>
               </a:rPr>
               <a:t>06</a:t>
             </a:r>
@@ -10578,7 +17551,7 @@
                 <a:solidFill>
                   <a:srgbClr val="955900"/>
                 </a:solidFill>
-                <a:latin typeface="IBM Plex Mono"/>
+                <a:latin typeface="Courier New"/>
               </a:rPr>
               <a:t>NO RUN BEFORE CONFIRMATION</a:t>
             </a:r>
@@ -10733,7 +17706,7 @@
                 <a:solidFill>
                   <a:srgbClr val="2457F5"/>
                 </a:solidFill>
-                <a:latin typeface="IBM Plex Mono"/>
+                <a:latin typeface="Courier New"/>
               </a:rPr>
               <a:t>AGENT IDENTITY</a:t>
             </a:r>
@@ -10902,7 +17875,7 @@
                 <a:solidFill>
                   <a:srgbClr val="737B77"/>
                 </a:solidFill>
-                <a:latin typeface="IBM Plex Mono"/>
+                <a:latin typeface="Courier New"/>
               </a:rPr>
               <a:t>AGENTRIG / GOAI 2026                                      04 / 12</a:t>
             </a:r>
@@ -11081,7 +18054,7 @@
                 <a:solidFill>
                   <a:srgbClr val="2457F5"/>
                 </a:solidFill>
-                <a:latin typeface="IBM Plex Mono"/>
+                <a:latin typeface="Courier New"/>
               </a:rPr>
               <a:t>01</a:t>
             </a:r>
@@ -11251,7 +18224,7 @@
                 <a:solidFill>
                   <a:srgbClr val="737B77"/>
                 </a:solidFill>
-                <a:latin typeface="IBM Plex Mono"/>
+                <a:latin typeface="Courier New"/>
               </a:rPr>
               <a:t>BOUNDARY</a:t>
             </a:r>
@@ -11472,7 +18445,7 @@
                 <a:solidFill>
                   <a:srgbClr val="237A59"/>
                 </a:solidFill>
-                <a:latin typeface="IBM Plex Mono"/>
+                <a:latin typeface="Courier New"/>
               </a:rPr>
               <a:t>02</a:t>
             </a:r>
@@ -11642,7 +18615,7 @@
                 <a:solidFill>
                   <a:srgbClr val="737B77"/>
                 </a:solidFill>
-                <a:latin typeface="IBM Plex Mono"/>
+                <a:latin typeface="Courier New"/>
               </a:rPr>
               <a:t>BOUNDARY</a:t>
             </a:r>
@@ -11863,7 +18836,7 @@
                 <a:solidFill>
                   <a:srgbClr val="955900"/>
                 </a:solidFill>
-                <a:latin typeface="IBM Plex Mono"/>
+                <a:latin typeface="Courier New"/>
               </a:rPr>
               <a:t>03</a:t>
             </a:r>
@@ -12033,7 +19006,7 @@
                 <a:solidFill>
                   <a:srgbClr val="737B77"/>
                 </a:solidFill>
-                <a:latin typeface="IBM Plex Mono"/>
+                <a:latin typeface="Courier New"/>
               </a:rPr>
               <a:t>BOUNDARY</a:t>
             </a:r>
@@ -12230,7 +19203,7 @@
                 <a:solidFill>
                   <a:srgbClr val="2457F5"/>
                 </a:solidFill>
-                <a:latin typeface="IBM Plex Mono"/>
+                <a:latin typeface="Courier New"/>
               </a:rPr>
               <a:t>AGENTTEAMS</a:t>
             </a:r>
@@ -12399,7 +19372,7 @@
                 <a:solidFill>
                   <a:srgbClr val="737B77"/>
                 </a:solidFill>
-                <a:latin typeface="IBM Plex Mono"/>
+                <a:latin typeface="Courier New"/>
               </a:rPr>
               <a:t>AGENTRIG / GOAI 2026                                      05 / 12</a:t>
             </a:r>
@@ -13224,7 +20197,7 @@
                 <a:solidFill>
                   <a:srgbClr val="8E9691"/>
                 </a:solidFill>
-                <a:latin typeface="IBM Plex Mono"/>
+                <a:latin typeface="Courier New"/>
               </a:rPr>
               <a:t>AGENTRIG ADAPTER</a:t>
             </a:r>
@@ -13746,7 +20719,7 @@
                 <a:solidFill>
                   <a:srgbClr val="2457F5"/>
                 </a:solidFill>
-                <a:latin typeface="IBM Plex Mono"/>
+                <a:latin typeface="Courier New"/>
               </a:rPr>
               <a:t>ARCHITECTURE</a:t>
             </a:r>
@@ -13915,7 +20888,7 @@
                 <a:solidFill>
                   <a:srgbClr val="737B77"/>
                 </a:solidFill>
-                <a:latin typeface="IBM Plex Mono"/>
+                <a:latin typeface="Courier New"/>
               </a:rPr>
               <a:t>AGENTRIG / GOAI 2026                                      06 / 12</a:t>
             </a:r>
@@ -14002,7 +20975,7 @@
                 <a:solidFill>
                   <a:srgbClr val="2457F5"/>
                 </a:solidFill>
-                <a:latin typeface="IBM Plex Mono"/>
+                <a:latin typeface="Courier New"/>
               </a:rPr>
               <a:t>EXPERIENCE</a:t>
             </a:r>
@@ -14131,7 +21104,7 @@
                 <a:solidFill>
                   <a:srgbClr val="237A59"/>
                 </a:solidFill>
-                <a:latin typeface="IBM Plex Mono"/>
+                <a:latin typeface="Courier New"/>
               </a:rPr>
               <a:t>COLLABORATION</a:t>
             </a:r>
@@ -14260,7 +21233,7 @@
                 <a:solidFill>
                   <a:srgbClr val="955900"/>
                 </a:solidFill>
-                <a:latin typeface="IBM Plex Mono"/>
+                <a:latin typeface="Courier New"/>
               </a:rPr>
               <a:t>CONTROL</a:t>
             </a:r>
@@ -14389,7 +21362,7 @@
                 <a:solidFill>
                   <a:srgbClr val="B8403A"/>
                 </a:solidFill>
-                <a:latin typeface="IBM Plex Mono"/>
+                <a:latin typeface="Courier New"/>
               </a:rPr>
               <a:t>EXECUTION</a:t>
             </a:r>
@@ -14518,7 +21491,7 @@
                 <a:solidFill>
                   <a:srgbClr val="252927"/>
                 </a:solidFill>
-                <a:latin typeface="IBM Plex Mono"/>
+                <a:latin typeface="Courier New"/>
               </a:rPr>
               <a:t>FACTS</a:t>
             </a:r>
@@ -14560,7 +21533,7 @@
                 <a:solidFill>
                   <a:srgbClr val="151719"/>
                 </a:solidFill>
-                <a:latin typeface="IBM Plex Mono"/>
+                <a:latin typeface="Courier New"/>
               </a:rPr>
               <a:t>Case / Snapshot / RunEvent / Evaluation / Hash</a:t>
             </a:r>
@@ -14649,7 +21622,7 @@
                 <a:solidFill>
                   <a:srgbClr val="FFFFFF"/>
                 </a:solidFill>
-                <a:latin typeface="IBM Plex Mono"/>
+                <a:latin typeface="Courier New"/>
               </a:rPr>
               <a:t>IMMUTABLE EVIDENCE BOUNDARY</a:t>
             </a:r>
@@ -14762,7 +21735,7 @@
                 <a:solidFill>
                   <a:srgbClr val="2457F5"/>
                 </a:solidFill>
-                <a:latin typeface="IBM Plex Mono"/>
+                <a:latin typeface="Courier New"/>
               </a:rPr>
               <a:t>SKILL + MCP</a:t>
             </a:r>
@@ -14931,7 +21904,7 @@
                 <a:solidFill>
                   <a:srgbClr val="737B77"/>
                 </a:solidFill>
-                <a:latin typeface="IBM Plex Mono"/>
+                <a:latin typeface="Courier New"/>
               </a:rPr>
               <a:t>AGENTRIG / GOAI 2026                                      07 / 12</a:t>
             </a:r>
@@ -15018,7 +21991,7 @@
                 <a:solidFill>
                   <a:srgbClr val="2457F5"/>
                 </a:solidFill>
-                <a:latin typeface="IBM Plex Mono"/>
+                <a:latin typeface="Courier New"/>
               </a:rPr>
               <a:t>MANAGER / 6</a:t>
             </a:r>
@@ -15105,7 +22078,7 @@
                 <a:solidFill>
                   <a:srgbClr val="737B77"/>
                 </a:solidFill>
-                <a:latin typeface="IBM Plex Mono"/>
+                <a:latin typeface="Courier New"/>
               </a:rPr>
               <a:t>01</a:t>
             </a:r>
@@ -15147,7 +22120,7 @@
                 <a:solidFill>
                   <a:srgbClr val="252927"/>
                 </a:solidFill>
-                <a:latin typeface="IBM Plex Mono"/>
+                <a:latin typeface="Courier New"/>
               </a:rPr>
               <a:t>adaptive-evaluation</a:t>
             </a:r>
@@ -15234,7 +22207,7 @@
                 <a:solidFill>
                   <a:srgbClr val="737B77"/>
                 </a:solidFill>
-                <a:latin typeface="IBM Plex Mono"/>
+                <a:latin typeface="Courier New"/>
               </a:rPr>
               <a:t>02</a:t>
             </a:r>
@@ -15276,7 +22249,7 @@
                 <a:solidFill>
                   <a:srgbClr val="252927"/>
                 </a:solidFill>
-                <a:latin typeface="IBM Plex Mono"/>
+                <a:latin typeface="Courier New"/>
               </a:rPr>
               <a:t>plan-evaluation</a:t>
             </a:r>
@@ -15363,7 +22336,7 @@
                 <a:solidFill>
                   <a:srgbClr val="737B77"/>
                 </a:solidFill>
-                <a:latin typeface="IBM Plex Mono"/>
+                <a:latin typeface="Courier New"/>
               </a:rPr>
               <a:t>03</a:t>
             </a:r>
@@ -15405,7 +22378,7 @@
                 <a:solidFill>
                   <a:srgbClr val="252927"/>
                 </a:solidFill>
-                <a:latin typeface="IBM Plex Mono"/>
+                <a:latin typeface="Courier New"/>
               </a:rPr>
               <a:t>execute-evaluation-plan</a:t>
             </a:r>
@@ -15492,7 +22465,7 @@
                 <a:solidFill>
                   <a:srgbClr val="737B77"/>
                 </a:solidFill>
-                <a:latin typeface="IBM Plex Mono"/>
+                <a:latin typeface="Courier New"/>
               </a:rPr>
               <a:t>04</a:t>
             </a:r>
@@ -15534,7 +22507,7 @@
                 <a:solidFill>
                   <a:srgbClr val="252927"/>
                 </a:solidFill>
-                <a:latin typeface="IBM Plex Mono"/>
+                <a:latin typeface="Courier New"/>
               </a:rPr>
               <a:t>diagnose-run</a:t>
             </a:r>
@@ -15621,7 +22594,7 @@
                 <a:solidFill>
                   <a:srgbClr val="737B77"/>
                 </a:solidFill>
-                <a:latin typeface="IBM Plex Mono"/>
+                <a:latin typeface="Courier New"/>
               </a:rPr>
               <a:t>05</a:t>
             </a:r>
@@ -15663,7 +22636,7 @@
                 <a:solidFill>
                   <a:srgbClr val="252927"/>
                 </a:solidFill>
-                <a:latin typeface="IBM Plex Mono"/>
+                <a:latin typeface="Courier New"/>
               </a:rPr>
               <a:t>build-test-case-draft</a:t>
             </a:r>
@@ -15750,7 +22723,7 @@
                 <a:solidFill>
                   <a:srgbClr val="737B77"/>
                 </a:solidFill>
-                <a:latin typeface="IBM Plex Mono"/>
+                <a:latin typeface="Courier New"/>
               </a:rPr>
               <a:t>06</a:t>
             </a:r>
@@ -15792,7 +22765,7 @@
                 <a:solidFill>
                   <a:srgbClr val="252927"/>
                 </a:solidFill>
-                <a:latin typeface="IBM Plex Mono"/>
+                <a:latin typeface="Courier New"/>
               </a:rPr>
               <a:t>configure-test-target</a:t>
             </a:r>
@@ -15879,7 +22852,7 @@
                 <a:solidFill>
                   <a:srgbClr val="237A59"/>
                 </a:solidFill>
-                <a:latin typeface="IBM Plex Mono"/>
+                <a:latin typeface="Courier New"/>
               </a:rPr>
               <a:t>WORKERS / 2</a:t>
             </a:r>
@@ -15966,7 +22939,7 @@
                 <a:solidFill>
                   <a:srgbClr val="737B77"/>
                 </a:solidFill>
-                <a:latin typeface="IBM Plex Mono"/>
+                <a:latin typeface="Courier New"/>
               </a:rPr>
               <a:t>01</a:t>
             </a:r>
@@ -16008,7 +22981,7 @@
                 <a:solidFill>
                   <a:srgbClr val="252927"/>
                 </a:solidFill>
-                <a:latin typeface="IBM Plex Mono"/>
+                <a:latin typeface="Courier New"/>
               </a:rPr>
               <a:t>simulate-tool-result</a:t>
             </a:r>
@@ -16095,7 +23068,7 @@
                 <a:solidFill>
                   <a:srgbClr val="737B77"/>
                 </a:solidFill>
-                <a:latin typeface="IBM Plex Mono"/>
+                <a:latin typeface="Courier New"/>
               </a:rPr>
               <a:t>02</a:t>
             </a:r>
@@ -16137,7 +23110,7 @@
                 <a:solidFill>
                   <a:srgbClr val="252927"/>
                 </a:solidFill>
-                <a:latin typeface="IBM Plex Mono"/>
+                <a:latin typeface="Courier New"/>
               </a:rPr>
               <a:t>judge-evidence</a:t>
             </a:r>
@@ -16224,7 +23197,7 @@
                 <a:solidFill>
                   <a:srgbClr val="955900"/>
                 </a:solidFill>
-                <a:latin typeface="IBM Plex Mono"/>
+                <a:latin typeface="Courier New"/>
               </a:rPr>
               <a:t>CORE / 3</a:t>
             </a:r>
@@ -16311,7 +23284,7 @@
                 <a:solidFill>
                   <a:srgbClr val="737B77"/>
                 </a:solidFill>
-                <a:latin typeface="IBM Plex Mono"/>
+                <a:latin typeface="Courier New"/>
               </a:rPr>
               <a:t>01</a:t>
             </a:r>
@@ -16353,7 +23326,7 @@
                 <a:solidFill>
                   <a:srgbClr val="252927"/>
                 </a:solidFill>
-                <a:latin typeface="IBM Plex Mono"/>
+                <a:latin typeface="Courier New"/>
               </a:rPr>
               <a:t>run-test-cases</a:t>
             </a:r>
@@ -16440,7 +23413,7 @@
                 <a:solidFill>
                   <a:srgbClr val="737B77"/>
                 </a:solidFill>
-                <a:latin typeface="IBM Plex Mono"/>
+                <a:latin typeface="Courier New"/>
               </a:rPr>
               <a:t>02</a:t>
             </a:r>
@@ -16482,7 +23455,7 @@
                 <a:solidFill>
                   <a:srgbClr val="252927"/>
                 </a:solidFill>
-                <a:latin typeface="IBM Plex Mono"/>
+                <a:latin typeface="Courier New"/>
               </a:rPr>
               <a:t>build-test-case</a:t>
             </a:r>
@@ -16569,7 +23542,7 @@
                 <a:solidFill>
                   <a:srgbClr val="737B77"/>
                 </a:solidFill>
-                <a:latin typeface="IBM Plex Mono"/>
+                <a:latin typeface="Courier New"/>
               </a:rPr>
               <a:t>03</a:t>
             </a:r>
@@ -16611,7 +23584,7 @@
                 <a:solidFill>
                   <a:srgbClr val="252927"/>
                 </a:solidFill>
-                <a:latin typeface="IBM Plex Mono"/>
+                <a:latin typeface="Courier New"/>
               </a:rPr>
               <a:t>harvest-tool-samples</a:t>
             </a:r>
@@ -16655,7 +23628,7 @@
                 </a:solidFill>
                 <a:latin typeface="PingFang SC"/>
               </a:rPr>
-              <a:t>每个核心 Skill 定义：触发条件 · 输入输出 · 工具依赖 · 失败 · 重试 · 安全边界 · 版本合同</a:t>
+              <a:t>每个核心 Skill：输入输出 · 调用条件 · 依赖 · 失败 · 安全 · 验证 · 复用 · 版本/回滚</a:t>
             </a:r>
           </a:p>
         </p:txBody>
@@ -16766,7 +23739,7 @@
                 <a:solidFill>
                   <a:srgbClr val="2457F5"/>
                 </a:solidFill>
-                <a:latin typeface="IBM Plex Mono"/>
+                <a:latin typeface="Courier New"/>
               </a:rPr>
               <a:t>TRUSTED EVALUATION</a:t>
             </a:r>
@@ -16935,7 +23908,7 @@
                 <a:solidFill>
                   <a:srgbClr val="737B77"/>
                 </a:solidFill>
-                <a:latin typeface="IBM Plex Mono"/>
+                <a:latin typeface="Courier New"/>
               </a:rPr>
               <a:t>AGENTRIG / GOAI 2026                                      08 / 12</a:t>
             </a:r>
@@ -17067,7 +24040,7 @@
                 <a:solidFill>
                   <a:srgbClr val="2457F5"/>
                 </a:solidFill>
-                <a:latin typeface="IBM Plex Mono"/>
+                <a:latin typeface="Courier New"/>
               </a:rPr>
               <a:t>01</a:t>
             </a:r>
@@ -17241,7 +24214,7 @@
                 <a:solidFill>
                   <a:srgbClr val="2457F5"/>
                 </a:solidFill>
-                <a:latin typeface="IBM Plex Mono"/>
+                <a:latin typeface="Courier New"/>
               </a:rPr>
               <a:t>VERIFIED</a:t>
             </a:r>
@@ -17373,7 +24346,7 @@
                 <a:solidFill>
                   <a:srgbClr val="237A59"/>
                 </a:solidFill>
-                <a:latin typeface="IBM Plex Mono"/>
+                <a:latin typeface="Courier New"/>
               </a:rPr>
               <a:t>02</a:t>
             </a:r>
@@ -17547,7 +24520,7 @@
                 <a:solidFill>
                   <a:srgbClr val="237A59"/>
                 </a:solidFill>
-                <a:latin typeface="IBM Plex Mono"/>
+                <a:latin typeface="Courier New"/>
               </a:rPr>
               <a:t>VERIFIED</a:t>
             </a:r>
@@ -17679,7 +24652,7 @@
                 <a:solidFill>
                   <a:srgbClr val="955900"/>
                 </a:solidFill>
-                <a:latin typeface="IBM Plex Mono"/>
+                <a:latin typeface="Courier New"/>
               </a:rPr>
               <a:t>03</a:t>
             </a:r>
@@ -17853,7 +24826,7 @@
                 <a:solidFill>
                   <a:srgbClr val="955900"/>
                 </a:solidFill>
-                <a:latin typeface="IBM Plex Mono"/>
+                <a:latin typeface="Courier New"/>
               </a:rPr>
               <a:t>VERIFIED</a:t>
             </a:r>
@@ -17985,7 +24958,7 @@
                 <a:solidFill>
                   <a:srgbClr val="B8403A"/>
                 </a:solidFill>
-                <a:latin typeface="IBM Plex Mono"/>
+                <a:latin typeface="Courier New"/>
               </a:rPr>
               <a:t>04</a:t>
             </a:r>
@@ -18159,7 +25132,7 @@
                 <a:solidFill>
                   <a:srgbClr val="B8403A"/>
                 </a:solidFill>
-                <a:latin typeface="IBM Plex Mono"/>
+                <a:latin typeface="Courier New"/>
               </a:rPr>
               <a:t>VERIFIED</a:t>
             </a:r>
@@ -18291,7 +25264,7 @@
                 <a:solidFill>
                   <a:srgbClr val="252927"/>
                 </a:solidFill>
-                <a:latin typeface="IBM Plex Mono"/>
+                <a:latin typeface="Courier New"/>
               </a:rPr>
               <a:t>05</a:t>
             </a:r>
@@ -18465,7 +25438,7 @@
                 <a:solidFill>
                   <a:srgbClr val="252927"/>
                 </a:solidFill>
-                <a:latin typeface="IBM Plex Mono"/>
+                <a:latin typeface="Courier New"/>
               </a:rPr>
               <a:t>VERIFIED</a:t>
             </a:r>
@@ -18620,7 +25593,7 @@
                 <a:solidFill>
                   <a:srgbClr val="2457F5"/>
                 </a:solidFill>
-                <a:latin typeface="IBM Plex Mono"/>
+                <a:latin typeface="Courier New"/>
               </a:rPr>
               <a:t>SAFETY + RECOVERY</a:t>
             </a:r>
@@ -18789,7 +25762,7 @@
                 <a:solidFill>
                   <a:srgbClr val="737B77"/>
                 </a:solidFill>
-                <a:latin typeface="IBM Plex Mono"/>
+                <a:latin typeface="Courier New"/>
               </a:rPr>
               <a:t>AGENTRIG / GOAI 2026                                      09 / 12</a:t>
             </a:r>
@@ -18876,7 +25849,7 @@
                 <a:solidFill>
                   <a:srgbClr val="2457F5"/>
                 </a:solidFill>
-                <a:latin typeface="IBM Plex Mono"/>
+                <a:latin typeface="Courier New"/>
               </a:rPr>
               <a:t>DRAFT</a:t>
             </a:r>
@@ -19005,7 +25978,7 @@
                 <a:solidFill>
                   <a:srgbClr val="237A59"/>
                 </a:solidFill>
-                <a:latin typeface="IBM Plex Mono"/>
+                <a:latin typeface="Courier New"/>
               </a:rPr>
               <a:t>CONFIRMED</a:t>
             </a:r>
@@ -19134,7 +26107,7 @@
                 <a:solidFill>
                   <a:srgbClr val="955900"/>
                 </a:solidFill>
-                <a:latin typeface="IBM Plex Mono"/>
+                <a:latin typeface="Courier New"/>
               </a:rPr>
               <a:t>SUBMITTED</a:t>
             </a:r>
@@ -19263,7 +26236,7 @@
                 <a:solidFill>
                   <a:srgbClr val="8E9691"/>
                 </a:solidFill>
-                <a:latin typeface="IBM Plex Mono"/>
+                <a:latin typeface="Courier New"/>
               </a:rPr>
               <a:t>NO CONFIRMATION</a:t>
             </a:r>
@@ -19305,7 +26278,7 @@
                 <a:solidFill>
                   <a:srgbClr val="FFFFFF"/>
                 </a:solidFill>
-                <a:latin typeface="IBM Plex Mono"/>
+                <a:latin typeface="Courier New"/>
               </a:rPr>
               <a:t>NO RUN</a:t>
             </a:r>
@@ -19392,7 +26365,7 @@
                 <a:solidFill>
                   <a:srgbClr val="2457F5"/>
                 </a:solidFill>
-                <a:latin typeface="IBM Plex Mono"/>
+                <a:latin typeface="Courier New"/>
               </a:rPr>
               <a:t>SECRET</a:t>
             </a:r>
@@ -19521,7 +26494,7 @@
                 <a:solidFill>
                   <a:srgbClr val="2457F5"/>
                 </a:solidFill>
-                <a:latin typeface="IBM Plex Mono"/>
+                <a:latin typeface="Courier New"/>
               </a:rPr>
               <a:t>REDACTION</a:t>
             </a:r>
@@ -19650,7 +26623,7 @@
                 <a:solidFill>
                   <a:srgbClr val="2457F5"/>
                 </a:solidFill>
-                <a:latin typeface="IBM Plex Mono"/>
+                <a:latin typeface="Courier New"/>
               </a:rPr>
               <a:t>IDEMPOTENCY</a:t>
             </a:r>
@@ -19779,7 +26752,7 @@
                 <a:solidFill>
                   <a:srgbClr val="2457F5"/>
                 </a:solidFill>
-                <a:latin typeface="IBM Plex Mono"/>
+                <a:latin typeface="Courier New"/>
               </a:rPr>
               <a:t>TERMINAL</a:t>
             </a:r>
@@ -19908,7 +26881,7 @@
                 <a:solidFill>
                   <a:srgbClr val="2457F5"/>
                 </a:solidFill>
-                <a:latin typeface="IBM Plex Mono"/>
+                <a:latin typeface="Courier New"/>
               </a:rPr>
               <a:t>DEGRADE</a:t>
             </a:r>

--- a/docs/competition/AgentRig-GOAI-2026-初赛方案.pptx
+++ b/docs/competition/AgentRig-GOAI-2026-初赛方案.pptx
@@ -4665,7 +4665,7 @@
                 </a:solidFill>
                 <a:latin typeface="Menlo"/>
               </a:rPr>
-              <a:t>run_38a956…e84a</a:t>
+              <a:t>run_3afacf…4793</a:t>
             </a:r>
           </a:p>
         </p:txBody>
@@ -6354,7 +6354,7 @@
                 </a:solidFill>
                 <a:latin typeface="Menlo"/>
               </a:rPr>
-              <a:t>run_6791c…869e</a:t>
+              <a:t>run_db173d…59ef</a:t>
             </a:r>
           </a:p>
         </p:txBody>
@@ -6652,7 +6652,7 @@
                 </a:solidFill>
                 <a:latin typeface="Menlo"/>
               </a:rPr>
-              <a:t>evt_7581c…be80</a:t>
+              <a:t>evt_32fb37…f80d</a:t>
             </a:r>
           </a:p>
         </p:txBody>
@@ -7546,7 +7546,7 @@
                 </a:solidFill>
                 <a:latin typeface="Menlo"/>
               </a:rPr>
-              <a:t>run_6294d…61d1</a:t>
+              <a:t>run_1a209c…0b90</a:t>
             </a:r>
           </a:p>
         </p:txBody>
@@ -8485,7 +8485,7 @@
                 </a:solidFill>
                 <a:latin typeface="Menlo"/>
               </a:rPr>
-              <a:t>run_76307b…d28b9
+              <a:t>run_a1c88b…23fb
 3 / 3 PASS</a:t>
             </a:r>
           </a:p>
@@ -11406,7 +11406,7 @@
                 </a:solidFill>
                 <a:latin typeface="PingFang SC"/>
               </a:rPr>
-              <a:t>彩排已闭环；正式拍摄重新生成一套不可拼接的新证据</a:t>
+              <a:t>正式录制已闭环；台账中的每个 Run、Sample 与事件均来自干净录制库</a:t>
             </a:r>
           </a:p>
         </p:txBody>
@@ -11746,7 +11746,7 @@
                 </a:solidFill>
                 <a:latin typeface="Helvetica Neue"/>
               </a:rPr>
-              <a:t>3 / 5</a:t>
+              <a:t>2 / 5</a:t>
             </a:r>
           </a:p>
         </p:txBody>
@@ -11788,7 +11788,7 @@
                 </a:solidFill>
                 <a:latin typeface="PingFang SC"/>
               </a:rPr>
-              <a:t>2 次行为失败</a:t>
+              <a:t>3 次行为失败</a:t>
             </a:r>
           </a:p>
         </p:txBody>
@@ -20064,7 +20064,7 @@
                 </a:solidFill>
                 <a:latin typeface="PingFang SC"/>
               </a:rPr>
-              <a:t>同一冻结 Case 跑 5 次：3 Pass / 2 Behavior Fail</a:t>
+              <a:t>同一冻结 Case 跑 5 次：2 Pass / 3 Behavior Fail</a:t>
             </a:r>
           </a:p>
         </p:txBody>
@@ -20488,7 +20488,7 @@
                 </a:solidFill>
                 <a:latin typeface="Menlo"/>
               </a:rPr>
-              <a:t>Manifest  04c0bad3…966ec</a:t>
+              <a:t>Manifest  bb5008e6…6766aa</a:t>
             </a:r>
           </a:p>
         </p:txBody>
@@ -20572,7 +20572,7 @@
                 </a:solidFill>
                 <a:latin typeface="Helvetica Neue"/>
               </a:rPr>
-              <a:t>3</a:t>
+              <a:t>2</a:t>
             </a:r>
           </a:p>
         </p:txBody>
@@ -20656,7 +20656,7 @@
                 </a:solidFill>
                 <a:latin typeface="Helvetica Neue"/>
               </a:rPr>
-              <a:t>2</a:t>
+              <a:t>3</a:t>
             </a:r>
           </a:p>
         </p:txBody>
@@ -21036,7 +21036,7 @@
                 </a:solidFill>
                 <a:latin typeface="Menlo"/>
               </a:rPr>
-              <a:t>Run  run_4122698d…55dfa5</a:t>
+              <a:t>Run  run_61e76493…8d9c03</a:t>
             </a:r>
           </a:p>
         </p:txBody>

--- a/docs/competition/AgentRig-GOAI-2026-初赛方案.pptx
+++ b/docs/competition/AgentRig-GOAI-2026-初赛方案.pptx
@@ -4623,7 +4623,7 @@
                 <a:latin typeface="PingFang SC"/>
               </a:rPr>
               <a:t>headline
-3 / 5 → 5 / 5</a:t>
+2 / 5 → 5 / 5</a:t>
             </a:r>
           </a:p>
         </p:txBody>

--- a/docs/competition/AgentRig-GOAI-2026-初赛方案.pptx
+++ b/docs/competition/AgentRig-GOAI-2026-初赛方案.pptx
@@ -3317,8 +3317,26 @@
                 </a:solidFill>
                 <a:latin typeface="PingFang SC"/>
               </a:rPr>
-              <a:t>让 Agent 的每次变化
-都有可发布的证据</a:t>
+              <a:t>让 Agent 的每次变化</a:t>
+            </a:r>
+          </a:p>
+          <a:p>
+            <a:pPr algn="l">
+              <a:lnSpc>
+                <a:spcPct val="102000"/>
+              </a:lnSpc>
+              <a:spcAft>
+                <a:spcPts val="0"/>
+              </a:spcAft>
+            </a:pPr>
+            <a:r>
+              <a:rPr sz="3300" b="1">
+                <a:solidFill>
+                  <a:srgbClr val="FFFFFF"/>
+                </a:solidFill>
+                <a:latin typeface="PingFang SC"/>
+              </a:rPr>
+              <a:t>都有可发布的证据</a:t>
             </a:r>
           </a:p>
         </p:txBody>
@@ -3445,8 +3463,26 @@
                 </a:solidFill>
                 <a:latin typeface="PingFang SC"/>
               </a:rPr>
-              <a:t>Codex 改变 Agent，AgentRig 把改变固化成
-Case、Run、Timeline、Sample 与 Gate。</a:t>
+              <a:t>Codex 改变 Agent，AgentRig 把改变固化成</a:t>
+            </a:r>
+          </a:p>
+          <a:p>
+            <a:pPr algn="l">
+              <a:lnSpc>
+                <a:spcPct val="135000"/>
+              </a:lnSpc>
+              <a:spcAft>
+                <a:spcPts val="0"/>
+              </a:spcAft>
+            </a:pPr>
+            <a:r>
+              <a:rPr sz="1270" b="0">
+                <a:solidFill>
+                  <a:srgbClr val="A8B0AC"/>
+                </a:solidFill>
+                <a:latin typeface="PingFang SC"/>
+              </a:rPr>
+              <a:t>Case、Run、Timeline、Sample 与 Gate。</a:t>
             </a:r>
           </a:p>
         </p:txBody>
@@ -4622,8 +4658,26 @@
                 </a:solidFill>
                 <a:latin typeface="PingFang SC"/>
               </a:rPr>
-              <a:t>headline
-2 / 5 → 5 / 5</a:t>
+              <a:t>headline</a:t>
+            </a:r>
+          </a:p>
+          <a:p>
+            <a:pPr algn="ctr">
+              <a:lnSpc>
+                <a:spcPct val="120000"/>
+              </a:lnSpc>
+              <a:spcAft>
+                <a:spcPts val="0"/>
+              </a:spcAft>
+            </a:pPr>
+            <a:r>
+              <a:rPr sz="1250" b="1">
+                <a:solidFill>
+                  <a:srgbClr val="17745A"/>
+                </a:solidFill>
+                <a:latin typeface="PingFang SC"/>
+              </a:rPr>
+              <a:t>2 / 5 → 5 / 5</a:t>
             </a:r>
           </a:p>
         </p:txBody>
@@ -5775,9 +5829,45 @@
                 </a:solidFill>
                 <a:latin typeface="PingFang SC"/>
               </a:rPr>
-              <a:t>✓ asset_id 来自搜索
-✓ preserve_subject 传播
-✓ image_ref 逐步更新</a:t>
+              <a:t>✓ asset_id 来自搜索</a:t>
+            </a:r>
+          </a:p>
+          <a:p>
+            <a:pPr algn="l">
+              <a:lnSpc>
+                <a:spcPct val="130000"/>
+              </a:lnSpc>
+              <a:spcAft>
+                <a:spcPts val="0"/>
+              </a:spcAft>
+            </a:pPr>
+            <a:r>
+              <a:rPr sz="950" b="1">
+                <a:solidFill>
+                  <a:srgbClr val="17745A"/>
+                </a:solidFill>
+                <a:latin typeface="PingFang SC"/>
+              </a:rPr>
+              <a:t>✓ preserve_subject 传播</a:t>
+            </a:r>
+          </a:p>
+          <a:p>
+            <a:pPr algn="l">
+              <a:lnSpc>
+                <a:spcPct val="130000"/>
+              </a:lnSpc>
+              <a:spcAft>
+                <a:spcPts val="0"/>
+              </a:spcAft>
+            </a:pPr>
+            <a:r>
+              <a:rPr sz="950" b="1">
+                <a:solidFill>
+                  <a:srgbClr val="17745A"/>
+                </a:solidFill>
+                <a:latin typeface="PingFang SC"/>
+              </a:rPr>
+              <a:t>✓ image_ref 逐步更新</a:t>
             </a:r>
           </a:p>
         </p:txBody>
@@ -6908,7 +6998,7 @@
                 </a:solidFill>
                 <a:latin typeface="PingFang SC"/>
               </a:rPr>
-              <a:t>Codex 创建 Draft</a:t>
+              <a:t>Agent 创建 Draft</a:t>
             </a:r>
           </a:p>
         </p:txBody>
@@ -6950,7 +7040,7 @@
                 </a:solidFill>
                 <a:latin typeface="Menlo"/>
               </a:rPr>
-              <a:t>sample_editflow…0814</a:t>
+              <a:t>sample_9344…1339</a:t>
             </a:r>
           </a:p>
         </p:txBody>
@@ -8485,8 +8575,26 @@
                 </a:solidFill>
                 <a:latin typeface="Menlo"/>
               </a:rPr>
-              <a:t>run_a1c88b…23fb
-3 / 3 PASS</a:t>
+              <a:t>run_a1c88b…23fb</a:t>
+            </a:r>
+          </a:p>
+          <a:p>
+            <a:pPr algn="ctr">
+              <a:lnSpc>
+                <a:spcPct val="120000"/>
+              </a:lnSpc>
+              <a:spcAft>
+                <a:spcPts val="0"/>
+              </a:spcAft>
+            </a:pPr>
+            <a:r>
+              <a:rPr sz="980" b="1">
+                <a:solidFill>
+                  <a:srgbClr val="17745A"/>
+                </a:solidFill>
+                <a:latin typeface="Menlo"/>
+              </a:rPr>
+              <a:t>3 / 3 PASS</a:t>
             </a:r>
           </a:p>
         </p:txBody>
@@ -11406,7 +11514,7 @@
                 </a:solidFill>
                 <a:latin typeface="PingFang SC"/>
               </a:rPr>
-              <a:t>正式录制已闭环；台账中的每个 Run、Sample 与事件均来自干净录制库</a:t>
+              <a:t>正式录制已闭环；全部证据来自干净录制库</a:t>
             </a:r>
           </a:p>
         </p:txBody>
@@ -12770,8 +12878,26 @@
                 </a:solidFill>
                 <a:latin typeface="PingFang SC"/>
               </a:rPr>
-              <a:t>Sample 仅覆盖 inspect_image；动态引用等值以 Timeline 展示；正式录制必须生成新 ID；
-AgentTeams 外部 Live、目标容量与生产 SLO 不冒充本次 EditFlow 结论。</a:t>
+              <a:t>Sample 仅覆盖 inspect_image；动态引用等值以 Timeline 展示；正式录制必须生成新 ID；</a:t>
+            </a:r>
+          </a:p>
+          <a:p>
+            <a:pPr algn="l">
+              <a:lnSpc>
+                <a:spcPct val="125000"/>
+              </a:lnSpc>
+              <a:spcAft>
+                <a:spcPts val="0"/>
+              </a:spcAft>
+            </a:pPr>
+            <a:r>
+              <a:rPr sz="1019" b="1">
+                <a:solidFill>
+                  <a:srgbClr val="2B312F"/>
+                </a:solidFill>
+                <a:latin typeface="PingFang SC"/>
+              </a:rPr>
+              <a:t>AgentTeams 外部 Live、目标容量与生产 SLO 不冒充本次 EditFlow 结论。</a:t>
             </a:r>
           </a:p>
         </p:txBody>
@@ -13219,8 +13345,26 @@
                 </a:solidFill>
                 <a:latin typeface="PingFang SC"/>
               </a:rPr>
-              <a:t>一次成功 Demo，
-不足以批准一次发布。</a:t>
+              <a:t>一次成功 Demo，</a:t>
+            </a:r>
+          </a:p>
+          <a:p>
+            <a:pPr algn="l">
+              <a:lnSpc>
+                <a:spcPct val="108000"/>
+              </a:lnSpc>
+              <a:spcAft>
+                <a:spcPts val="0"/>
+              </a:spcAft>
+            </a:pPr>
+            <a:r>
+              <a:rPr sz="2500" b="1">
+                <a:solidFill>
+                  <a:srgbClr val="121617"/>
+                </a:solidFill>
+                <a:latin typeface="PingFang SC"/>
+              </a:rPr>
+              <a:t>不足以批准一次发布。</a:t>
             </a:r>
           </a:p>
         </p:txBody>
@@ -14730,9 +14874,45 @@
                 </a:solidFill>
                 <a:latin typeface="PingFang SC"/>
               </a:rPr>
-              <a:t>模型推理
-HTTP / SSE
-Session 与工具选择</a:t>
+              <a:t>模型推理</a:t>
+            </a:r>
+          </a:p>
+          <a:p>
+            <a:pPr algn="l">
+              <a:lnSpc>
+                <a:spcPct val="140000"/>
+              </a:lnSpc>
+              <a:spcAft>
+                <a:spcPts val="0"/>
+              </a:spcAft>
+            </a:pPr>
+            <a:r>
+              <a:rPr sz="1350" b="0">
+                <a:solidFill>
+                  <a:srgbClr val="67706B"/>
+                </a:solidFill>
+                <a:latin typeface="PingFang SC"/>
+              </a:rPr>
+              <a:t>HTTP / SSE</a:t>
+            </a:r>
+          </a:p>
+          <a:p>
+            <a:pPr algn="l">
+              <a:lnSpc>
+                <a:spcPct val="140000"/>
+              </a:lnSpc>
+              <a:spcAft>
+                <a:spcPts val="0"/>
+              </a:spcAft>
+            </a:pPr>
+            <a:r>
+              <a:rPr sz="1350" b="0">
+                <a:solidFill>
+                  <a:srgbClr val="67706B"/>
+                </a:solidFill>
+                <a:latin typeface="PingFang SC"/>
+              </a:rPr>
+              <a:t>Session 与工具选择</a:t>
             </a:r>
           </a:p>
         </p:txBody>
@@ -14988,9 +15168,45 @@
                 </a:solidFill>
                 <a:latin typeface="PingFang SC"/>
               </a:rPr>
-              <a:t>Fixture
-审核 Sample
-Simulator / Real Tool</a:t>
+              <a:t>Fixture</a:t>
+            </a:r>
+          </a:p>
+          <a:p>
+            <a:pPr algn="l">
+              <a:lnSpc>
+                <a:spcPct val="140000"/>
+              </a:lnSpc>
+              <a:spcAft>
+                <a:spcPts val="0"/>
+              </a:spcAft>
+            </a:pPr>
+            <a:r>
+              <a:rPr sz="1350" b="0">
+                <a:solidFill>
+                  <a:srgbClr val="67706B"/>
+                </a:solidFill>
+                <a:latin typeface="PingFang SC"/>
+              </a:rPr>
+              <a:t>审核 Sample</a:t>
+            </a:r>
+          </a:p>
+          <a:p>
+            <a:pPr algn="l">
+              <a:lnSpc>
+                <a:spcPct val="140000"/>
+              </a:lnSpc>
+              <a:spcAft>
+                <a:spcPts val="0"/>
+              </a:spcAft>
+            </a:pPr>
+            <a:r>
+              <a:rPr sz="1350" b="0">
+                <a:solidFill>
+                  <a:srgbClr val="67706B"/>
+                </a:solidFill>
+                <a:latin typeface="PingFang SC"/>
+              </a:rPr>
+              <a:t>Simulator / Real Tool</a:t>
             </a:r>
           </a:p>
         </p:txBody>
@@ -15246,9 +15462,45 @@
                 </a:solidFill>
                 <a:latin typeface="PingFang SC"/>
               </a:rPr>
-              <a:t>Manifest
-Cell / Attempt / Event
-Rule / Judge / Human</a:t>
+              <a:t>Manifest</a:t>
+            </a:r>
+          </a:p>
+          <a:p>
+            <a:pPr algn="l">
+              <a:lnSpc>
+                <a:spcPct val="140000"/>
+              </a:lnSpc>
+              <a:spcAft>
+                <a:spcPts val="0"/>
+              </a:spcAft>
+            </a:pPr>
+            <a:r>
+              <a:rPr sz="1350" b="0">
+                <a:solidFill>
+                  <a:srgbClr val="67706B"/>
+                </a:solidFill>
+                <a:latin typeface="PingFang SC"/>
+              </a:rPr>
+              <a:t>Cell / Attempt / Event</a:t>
+            </a:r>
+          </a:p>
+          <a:p>
+            <a:pPr algn="l">
+              <a:lnSpc>
+                <a:spcPct val="140000"/>
+              </a:lnSpc>
+              <a:spcAft>
+                <a:spcPts val="0"/>
+              </a:spcAft>
+            </a:pPr>
+            <a:r>
+              <a:rPr sz="1350" b="0">
+                <a:solidFill>
+                  <a:srgbClr val="67706B"/>
+                </a:solidFill>
+                <a:latin typeface="PingFang SC"/>
+              </a:rPr>
+              <a:t>Rule / Judge / Human</a:t>
             </a:r>
           </a:p>
         </p:txBody>
@@ -15868,9 +16120,45 @@
                 </a:solidFill>
                 <a:latin typeface="PingFang SC"/>
               </a:rPr>
-              <a:t>Target
-Prompt SHA
-Tool schema</a:t>
+              <a:t>Target</a:t>
+            </a:r>
+          </a:p>
+          <a:p>
+            <a:pPr algn="l">
+              <a:lnSpc>
+                <a:spcPct val="135000"/>
+              </a:lnSpc>
+              <a:spcAft>
+                <a:spcPts val="0"/>
+              </a:spcAft>
+            </a:pPr>
+            <a:r>
+              <a:rPr sz="1100" b="0">
+                <a:solidFill>
+                  <a:srgbClr val="67706B"/>
+                </a:solidFill>
+                <a:latin typeface="PingFang SC"/>
+              </a:rPr>
+              <a:t>Prompt SHA</a:t>
+            </a:r>
+          </a:p>
+          <a:p>
+            <a:pPr algn="l">
+              <a:lnSpc>
+                <a:spcPct val="135000"/>
+              </a:lnSpc>
+              <a:spcAft>
+                <a:spcPts val="0"/>
+              </a:spcAft>
+            </a:pPr>
+            <a:r>
+              <a:rPr sz="1100" b="0">
+                <a:solidFill>
+                  <a:srgbClr val="67706B"/>
+                </a:solidFill>
+                <a:latin typeface="PingFang SC"/>
+              </a:rPr>
+              <a:t>Tool schema</a:t>
             </a:r>
           </a:p>
         </p:txBody>
@@ -16126,9 +16414,45 @@
                 </a:solidFill>
                 <a:latin typeface="PingFang SC"/>
               </a:rPr>
-              <a:t>Case
-Profile
-Sample</a:t>
+              <a:t>Case</a:t>
+            </a:r>
+          </a:p>
+          <a:p>
+            <a:pPr algn="l">
+              <a:lnSpc>
+                <a:spcPct val="135000"/>
+              </a:lnSpc>
+              <a:spcAft>
+                <a:spcPts val="0"/>
+              </a:spcAft>
+            </a:pPr>
+            <a:r>
+              <a:rPr sz="1100" b="0">
+                <a:solidFill>
+                  <a:srgbClr val="67706B"/>
+                </a:solidFill>
+                <a:latin typeface="PingFang SC"/>
+              </a:rPr>
+              <a:t>Profile</a:t>
+            </a:r>
+          </a:p>
+          <a:p>
+            <a:pPr algn="l">
+              <a:lnSpc>
+                <a:spcPct val="135000"/>
+              </a:lnSpc>
+              <a:spcAft>
+                <a:spcPts val="0"/>
+              </a:spcAft>
+            </a:pPr>
+            <a:r>
+              <a:rPr sz="1100" b="0">
+                <a:solidFill>
+                  <a:srgbClr val="67706B"/>
+                </a:solidFill>
+                <a:latin typeface="PingFang SC"/>
+              </a:rPr>
+              <a:t>Sample</a:t>
             </a:r>
           </a:p>
         </p:txBody>
@@ -16384,9 +16708,45 @@
                 </a:solidFill>
                 <a:latin typeface="PingFang SC"/>
               </a:rPr>
-              <a:t>Canonical
-Preview
-Hash</a:t>
+              <a:t>Canonical</a:t>
+            </a:r>
+          </a:p>
+          <a:p>
+            <a:pPr algn="l">
+              <a:lnSpc>
+                <a:spcPct val="135000"/>
+              </a:lnSpc>
+              <a:spcAft>
+                <a:spcPts val="0"/>
+              </a:spcAft>
+            </a:pPr>
+            <a:r>
+              <a:rPr sz="1100" b="0">
+                <a:solidFill>
+                  <a:srgbClr val="67706B"/>
+                </a:solidFill>
+                <a:latin typeface="PingFang SC"/>
+              </a:rPr>
+              <a:t>Preview</a:t>
+            </a:r>
+          </a:p>
+          <a:p>
+            <a:pPr algn="l">
+              <a:lnSpc>
+                <a:spcPct val="135000"/>
+              </a:lnSpc>
+              <a:spcAft>
+                <a:spcPts val="0"/>
+              </a:spcAft>
+            </a:pPr>
+            <a:r>
+              <a:rPr sz="1100" b="0">
+                <a:solidFill>
+                  <a:srgbClr val="67706B"/>
+                </a:solidFill>
+                <a:latin typeface="PingFang SC"/>
+              </a:rPr>
+              <a:t>Hash</a:t>
             </a:r>
           </a:p>
         </p:txBody>
@@ -16642,9 +17002,45 @@
                 </a:solidFill>
                 <a:latin typeface="PingFang SC"/>
               </a:rPr>
-              <a:t>Cell
-Attempt
-Event</a:t>
+              <a:t>Cell</a:t>
+            </a:r>
+          </a:p>
+          <a:p>
+            <a:pPr algn="l">
+              <a:lnSpc>
+                <a:spcPct val="135000"/>
+              </a:lnSpc>
+              <a:spcAft>
+                <a:spcPts val="0"/>
+              </a:spcAft>
+            </a:pPr>
+            <a:r>
+              <a:rPr sz="1100" b="0">
+                <a:solidFill>
+                  <a:srgbClr val="67706B"/>
+                </a:solidFill>
+                <a:latin typeface="PingFang SC"/>
+              </a:rPr>
+              <a:t>Attempt</a:t>
+            </a:r>
+          </a:p>
+          <a:p>
+            <a:pPr algn="l">
+              <a:lnSpc>
+                <a:spcPct val="135000"/>
+              </a:lnSpc>
+              <a:spcAft>
+                <a:spcPts val="0"/>
+              </a:spcAft>
+            </a:pPr>
+            <a:r>
+              <a:rPr sz="1100" b="0">
+                <a:solidFill>
+                  <a:srgbClr val="67706B"/>
+                </a:solidFill>
+                <a:latin typeface="PingFang SC"/>
+              </a:rPr>
+              <a:t>Event</a:t>
             </a:r>
           </a:p>
         </p:txBody>
@@ -16900,9 +17296,45 @@
                 </a:solidFill>
                 <a:latin typeface="PingFang SC"/>
               </a:rPr>
-              <a:t>Rule
-Judge
-Human</a:t>
+              <a:t>Rule</a:t>
+            </a:r>
+          </a:p>
+          <a:p>
+            <a:pPr algn="l">
+              <a:lnSpc>
+                <a:spcPct val="135000"/>
+              </a:lnSpc>
+              <a:spcAft>
+                <a:spcPts val="0"/>
+              </a:spcAft>
+            </a:pPr>
+            <a:r>
+              <a:rPr sz="1100" b="0">
+                <a:solidFill>
+                  <a:srgbClr val="67706B"/>
+                </a:solidFill>
+                <a:latin typeface="PingFang SC"/>
+              </a:rPr>
+              <a:t>Judge</a:t>
+            </a:r>
+          </a:p>
+          <a:p>
+            <a:pPr algn="l">
+              <a:lnSpc>
+                <a:spcPct val="135000"/>
+              </a:lnSpc>
+              <a:spcAft>
+                <a:spcPts val="0"/>
+              </a:spcAft>
+            </a:pPr>
+            <a:r>
+              <a:rPr sz="1100" b="0">
+                <a:solidFill>
+                  <a:srgbClr val="67706B"/>
+                </a:solidFill>
+                <a:latin typeface="PingFang SC"/>
+              </a:rPr>
+              <a:t>Human</a:t>
             </a:r>
           </a:p>
         </p:txBody>
@@ -17158,9 +17590,45 @@
                 </a:solidFill>
                 <a:latin typeface="PingFang SC"/>
               </a:rPr>
-              <a:t>Report
-Gate
-Audit</a:t>
+              <a:t>Report</a:t>
+            </a:r>
+          </a:p>
+          <a:p>
+            <a:pPr algn="l">
+              <a:lnSpc>
+                <a:spcPct val="135000"/>
+              </a:lnSpc>
+              <a:spcAft>
+                <a:spcPts val="0"/>
+              </a:spcAft>
+            </a:pPr>
+            <a:r>
+              <a:rPr sz="1100" b="0">
+                <a:solidFill>
+                  <a:srgbClr val="67706B"/>
+                </a:solidFill>
+                <a:latin typeface="PingFang SC"/>
+              </a:rPr>
+              <a:t>Gate</a:t>
+            </a:r>
+          </a:p>
+          <a:p>
+            <a:pPr algn="l">
+              <a:lnSpc>
+                <a:spcPct val="135000"/>
+              </a:lnSpc>
+              <a:spcAft>
+                <a:spcPts val="0"/>
+              </a:spcAft>
+            </a:pPr>
+            <a:r>
+              <a:rPr sz="1100" b="0">
+                <a:solidFill>
+                  <a:srgbClr val="67706B"/>
+                </a:solidFill>
+                <a:latin typeface="PingFang SC"/>
+              </a:rPr>
+              <a:t>Audit</a:t>
             </a:r>
           </a:p>
         </p:txBody>
@@ -17572,23 +18040,109 @@
       </p:sp>
       <p:sp>
         <p:nvSpPr>
-          <p:cNvPr id="9" name="Rectangle 8"/>
+          <p:cNvPr id="9" name="TextBox 8"/>
+          <p:cNvSpPr txBox="1"/>
+          <p:nvPr/>
+        </p:nvSpPr>
+        <p:spPr>
+          <a:xfrm>
+            <a:off x="713232" y="1847088"/>
+            <a:ext cx="1371600" cy="201168"/>
+          </a:xfrm>
+          <a:prstGeom prst="rect">
+            <a:avLst/>
+          </a:prstGeom>
+          <a:noFill/>
+        </p:spPr>
+        <p:txBody>
+          <a:bodyPr wrap="square" lIns="0" rIns="0" tIns="0" bIns="0" anchor="t">
+            <a:spAutoFit/>
+          </a:bodyPr>
+          <a:lstStyle/>
+          <a:p>
+            <a:pPr algn="l">
+              <a:lnSpc>
+                <a:spcPct val="108000"/>
+              </a:lnSpc>
+              <a:spcAft>
+                <a:spcPts val="0"/>
+              </a:spcAft>
+            </a:pPr>
+            <a:r>
+              <a:rPr sz="850" b="1">
+                <a:solidFill>
+                  <a:srgbClr val="285CF5"/>
+                </a:solidFill>
+                <a:latin typeface="PingFang SC"/>
+              </a:rPr>
+              <a:t>DEVELOPER</a:t>
+            </a:r>
+          </a:p>
+        </p:txBody>
+      </p:sp>
+      <p:sp>
+        <p:nvSpPr>
+          <p:cNvPr id="10" name="TextBox 9"/>
+          <p:cNvSpPr txBox="1"/>
+          <p:nvPr/>
+        </p:nvSpPr>
+        <p:spPr>
+          <a:xfrm>
+            <a:off x="713232" y="2121408"/>
+            <a:ext cx="4663440" cy="329184"/>
+          </a:xfrm>
+          <a:prstGeom prst="rect">
+            <a:avLst/>
+          </a:prstGeom>
+          <a:noFill/>
+        </p:spPr>
+        <p:txBody>
+          <a:bodyPr wrap="square" lIns="0" rIns="0" tIns="0" bIns="0" anchor="t">
+            <a:spAutoFit/>
+          </a:bodyPr>
+          <a:lstStyle/>
+          <a:p>
+            <a:pPr algn="l">
+              <a:lnSpc>
+                <a:spcPct val="108000"/>
+              </a:lnSpc>
+              <a:spcAft>
+                <a:spcPts val="0"/>
+              </a:spcAft>
+            </a:pPr>
+            <a:r>
+              <a:rPr sz="1700" b="1">
+                <a:solidFill>
+                  <a:srgbClr val="121617"/>
+                </a:solidFill>
+                <a:latin typeface="PingFang SC"/>
+              </a:rPr>
+              <a:t>Codex + 项目 Skill + MCP</a:t>
+            </a:r>
+          </a:p>
+        </p:txBody>
+      </p:sp>
+      <p:sp>
+        <p:nvSpPr>
+          <p:cNvPr id="11" name="Rectangle 10"/>
           <p:cNvSpPr/>
           <p:nvPr/>
         </p:nvSpPr>
         <p:spPr>
           <a:xfrm>
-            <a:off x="685800" y="1828800"/>
-            <a:ext cx="5440680" cy="3886200"/>
+            <a:off x="694944" y="2615184"/>
+            <a:ext cx="5477256" cy="2935224"/>
           </a:xfrm>
           <a:prstGeom prst="rect">
             <a:avLst/>
           </a:prstGeom>
           <a:solidFill>
-            <a:srgbClr val="171B1F"/>
+            <a:srgbClr val="FFFFFF"/>
           </a:solidFill>
-          <a:ln>
-            <a:noFill/>
+          <a:ln w="8890">
+            <a:solidFill>
+              <a:srgbClr val="D8DDD9"/>
+            </a:solidFill>
           </a:ln>
         </p:spPr>
         <p:style>
@@ -17613,189 +18167,30 @@
           </a:p>
         </p:txBody>
       </p:sp>
-      <p:sp>
-        <p:nvSpPr>
-          <p:cNvPr id="10" name="TextBox 9"/>
-          <p:cNvSpPr txBox="1"/>
-          <p:nvPr/>
-        </p:nvSpPr>
-        <p:spPr>
-          <a:xfrm>
-            <a:off x="960120" y="2084831"/>
-            <a:ext cx="1371600" cy="201168"/>
-          </a:xfrm>
-          <a:prstGeom prst="rect">
-            <a:avLst/>
-          </a:prstGeom>
-          <a:noFill/>
-        </p:spPr>
-        <p:txBody>
-          <a:bodyPr wrap="square" lIns="0" rIns="0" tIns="0" bIns="0" anchor="t">
-            <a:spAutoFit/>
-          </a:bodyPr>
-          <a:lstStyle/>
-          <a:p>
-            <a:pPr algn="l">
-              <a:lnSpc>
-                <a:spcPct val="108000"/>
-              </a:lnSpc>
-              <a:spcAft>
-                <a:spcPts val="0"/>
-              </a:spcAft>
-            </a:pPr>
-            <a:r>
-              <a:rPr sz="850" b="1">
-                <a:solidFill>
-                  <a:srgbClr val="285CF5"/>
-                </a:solidFill>
-                <a:latin typeface="PingFang SC"/>
-              </a:rPr>
-              <a:t>DEVELOPER</a:t>
-            </a:r>
-          </a:p>
-        </p:txBody>
-      </p:sp>
-      <p:sp>
-        <p:nvSpPr>
-          <p:cNvPr id="11" name="TextBox 10"/>
-          <p:cNvSpPr txBox="1"/>
-          <p:nvPr/>
-        </p:nvSpPr>
-        <p:spPr>
-          <a:xfrm>
-            <a:off x="960120" y="2514600"/>
-            <a:ext cx="4663440" cy="365760"/>
-          </a:xfrm>
-          <a:prstGeom prst="rect">
-            <a:avLst/>
-          </a:prstGeom>
-          <a:noFill/>
-        </p:spPr>
-        <p:txBody>
-          <a:bodyPr wrap="square" lIns="0" rIns="0" tIns="0" bIns="0" anchor="t">
-            <a:spAutoFit/>
-          </a:bodyPr>
-          <a:lstStyle/>
-          <a:p>
-            <a:pPr algn="l">
-              <a:lnSpc>
-                <a:spcPct val="108000"/>
-              </a:lnSpc>
-              <a:spcAft>
-                <a:spcPts val="0"/>
-              </a:spcAft>
-            </a:pPr>
-            <a:r>
-              <a:rPr sz="2000" b="1">
-                <a:solidFill>
-                  <a:srgbClr val="FFFFFF"/>
-                </a:solidFill>
-                <a:latin typeface="PingFang SC"/>
-              </a:rPr>
-              <a:t>Codex + 项目 Skill + MCP</a:t>
-            </a:r>
-          </a:p>
-        </p:txBody>
-      </p:sp>
-      <p:sp>
-        <p:nvSpPr>
-          <p:cNvPr id="12" name="TextBox 11"/>
-          <p:cNvSpPr txBox="1"/>
-          <p:nvPr/>
-        </p:nvSpPr>
-        <p:spPr>
-          <a:xfrm>
-            <a:off x="960120" y="3172968"/>
-            <a:ext cx="4709160" cy="1600200"/>
-          </a:xfrm>
-          <a:prstGeom prst="rect">
-            <a:avLst/>
-          </a:prstGeom>
-          <a:noFill/>
-        </p:spPr>
-        <p:txBody>
-          <a:bodyPr wrap="square" lIns="0" rIns="0" tIns="0" bIns="0">
-            <a:spAutoFit/>
-          </a:bodyPr>
-          <a:lstStyle/>
-          <a:p>
-            <a:pPr>
-              <a:lnSpc>
-                <a:spcPct val="115000"/>
-              </a:lnSpc>
-              <a:spcAft>
-                <a:spcPts val="800"/>
-              </a:spcAft>
-              <a:defRPr sz="1130">
-                <a:solidFill>
-                  <a:srgbClr val="CFD4D1"/>
-                </a:solidFill>
-                <a:latin typeface="PingFang SC"/>
-              </a:defRPr>
-            </a:pPr>
-            <a:r>
-              <a:t>•  读取代码、Prompt Diff 和业务不变量</a:t>
-            </a:r>
-          </a:p>
-          <a:p>
-            <a:pPr>
-              <a:lnSpc>
-                <a:spcPct val="115000"/>
-              </a:lnSpc>
-              <a:spcAft>
-                <a:spcPts val="800"/>
-              </a:spcAft>
-              <a:defRPr sz="1130">
-                <a:solidFill>
-                  <a:srgbClr val="CFD4D1"/>
-                </a:solidFill>
-                <a:latin typeface="PingFang SC"/>
-              </a:defRPr>
-            </a:pPr>
-            <a:r>
-              <a:t>•  查询、创建并治理 Case / Sample</a:t>
-            </a:r>
-          </a:p>
-          <a:p>
-            <a:pPr>
-              <a:lnSpc>
-                <a:spcPct val="115000"/>
-              </a:lnSpc>
-              <a:spcAft>
-                <a:spcPts val="800"/>
-              </a:spcAft>
-              <a:defRPr sz="1130">
-                <a:solidFill>
-                  <a:srgbClr val="CFD4D1"/>
-                </a:solidFill>
-                <a:latin typeface="PingFang SC"/>
-              </a:defRPr>
-            </a:pPr>
-            <a:r>
-              <a:t>•  Preview 后按 Manifest 提交回归矩阵</a:t>
-            </a:r>
-          </a:p>
-          <a:p>
-            <a:pPr>
-              <a:lnSpc>
-                <a:spcPct val="115000"/>
-              </a:lnSpc>
-              <a:spcAft>
-                <a:spcPts val="800"/>
-              </a:spcAft>
-              <a:defRPr sz="1130">
-                <a:solidFill>
-                  <a:srgbClr val="CFD4D1"/>
-                </a:solidFill>
-                <a:latin typeface="PingFang SC"/>
-              </a:defRPr>
-            </a:pPr>
-            <a:r>
-              <a:t>•  基于 Timeline 修复并输出验收结论</a:t>
-            </a:r>
-          </a:p>
-        </p:txBody>
-      </p:sp>
+      <p:pic>
+        <p:nvPicPr>
+          <p:cNvPr id="12" name="Picture 11" descr="codex-02-regression-verdict.png"/>
+          <p:cNvPicPr>
+            <a:picLocks noChangeAspect="1"/>
+          </p:cNvPicPr>
+          <p:nvPr/>
+        </p:nvPicPr>
+        <p:blipFill>
+          <a:blip r:embed="rId2"/>
+          <a:stretch>
+            <a:fillRect/>
+          </a:stretch>
+        </p:blipFill>
+        <p:spPr>
+          <a:xfrm>
+            <a:off x="713232" y="2633472"/>
+            <a:ext cx="5440680" cy="2898648"/>
+          </a:xfrm>
+          <a:prstGeom prst="rect">
+            <a:avLst/>
+          </a:prstGeom>
+        </p:spPr>
+      </p:pic>
       <p:sp>
         <p:nvSpPr>
           <p:cNvPr id="13" name="Rectangle 12"/>
@@ -17804,8 +18199,8 @@
         </p:nvSpPr>
         <p:spPr>
           <a:xfrm>
-            <a:off x="960120" y="5093208"/>
-            <a:ext cx="2148840" cy="329184"/>
+            <a:off x="713232" y="5632704"/>
+            <a:ext cx="2651760" cy="329184"/>
           </a:xfrm>
           <a:prstGeom prst="rect">
             <a:avLst/>
@@ -17847,8 +18242,8 @@
         </p:nvSpPr>
         <p:spPr>
           <a:xfrm>
-            <a:off x="960120" y="5093208"/>
-            <a:ext cx="2148840" cy="329184"/>
+            <a:off x="713232" y="5632704"/>
+            <a:ext cx="2651760" cy="329184"/>
           </a:xfrm>
           <a:prstGeom prst="rect">
             <a:avLst/>
@@ -17876,7 +18271,7 @@
                 </a:solidFill>
                 <a:latin typeface="PingFang SC"/>
               </a:rPr>
-              <a:t>主入口 · 改软件 + 治回归</a:t>
+              <a:t>主入口 · 真实会话 · run_79367a…</a:t>
             </a:r>
           </a:p>
         </p:txBody>
@@ -18764,10 +19159,64 @@
                 </a:solidFill>
                 <a:latin typeface="PingFang SC"/>
               </a:rPr>
-              <a:t>PostgreSQL Session
-HTTP/SSE Target
-External tool execution
-Local deterministic MCP</a:t>
+              <a:t>PostgreSQL Session</a:t>
+            </a:r>
+          </a:p>
+          <a:p>
+            <a:pPr algn="l">
+              <a:lnSpc>
+                <a:spcPct val="145000"/>
+              </a:lnSpc>
+              <a:spcAft>
+                <a:spcPts val="0"/>
+              </a:spcAft>
+            </a:pPr>
+            <a:r>
+              <a:rPr sz="1250" b="0">
+                <a:solidFill>
+                  <a:srgbClr val="CFD4D1"/>
+                </a:solidFill>
+                <a:latin typeface="PingFang SC"/>
+              </a:rPr>
+              <a:t>HTTP/SSE Target</a:t>
+            </a:r>
+          </a:p>
+          <a:p>
+            <a:pPr algn="l">
+              <a:lnSpc>
+                <a:spcPct val="145000"/>
+              </a:lnSpc>
+              <a:spcAft>
+                <a:spcPts val="0"/>
+              </a:spcAft>
+            </a:pPr>
+            <a:r>
+              <a:rPr sz="1250" b="0">
+                <a:solidFill>
+                  <a:srgbClr val="CFD4D1"/>
+                </a:solidFill>
+                <a:latin typeface="PingFang SC"/>
+              </a:rPr>
+              <a:t>External tool execution</a:t>
+            </a:r>
+          </a:p>
+          <a:p>
+            <a:pPr algn="l">
+              <a:lnSpc>
+                <a:spcPct val="145000"/>
+              </a:lnSpc>
+              <a:spcAft>
+                <a:spcPts val="0"/>
+              </a:spcAft>
+            </a:pPr>
+            <a:r>
+              <a:rPr sz="1250" b="0">
+                <a:solidFill>
+                  <a:srgbClr val="CFD4D1"/>
+                </a:solidFill>
+                <a:latin typeface="PingFang SC"/>
+              </a:rPr>
+              <a:t>Local deterministic MCP</a:t>
             </a:r>
           </a:p>
         </p:txBody>
@@ -20402,9 +20851,45 @@
                 </a:solidFill>
                 <a:latin typeface="PingFang SC"/>
               </a:rPr>
-              <a:t>一步完成调亮、
-雪山背景与 4:5 裁剪，
-并保持人物。</a:t>
+              <a:t>一步完成调亮、</a:t>
+            </a:r>
+          </a:p>
+          <a:p>
+            <a:pPr algn="l">
+              <a:lnSpc>
+                <a:spcPct val="122000"/>
+              </a:lnSpc>
+              <a:spcAft>
+                <a:spcPts val="0"/>
+              </a:spcAft>
+            </a:pPr>
+            <a:r>
+              <a:rPr sz="2000" b="1">
+                <a:solidFill>
+                  <a:srgbClr val="FFFFFF"/>
+                </a:solidFill>
+                <a:latin typeface="PingFang SC"/>
+              </a:rPr>
+              <a:t>雪山背景与 4:5 裁剪，</a:t>
+            </a:r>
+          </a:p>
+          <a:p>
+            <a:pPr algn="l">
+              <a:lnSpc>
+                <a:spcPct val="122000"/>
+              </a:lnSpc>
+              <a:spcAft>
+                <a:spcPts val="0"/>
+              </a:spcAft>
+            </a:pPr>
+            <a:r>
+              <a:rPr sz="2000" b="1">
+                <a:solidFill>
+                  <a:srgbClr val="FFFFFF"/>
+                </a:solidFill>
+                <a:latin typeface="PingFang SC"/>
+              </a:rPr>
+              <a:t>并保持人物。</a:t>
             </a:r>
           </a:p>
         </p:txBody>
@@ -23135,17 +23620,19 @@
         </p:nvSpPr>
         <p:spPr>
           <a:xfrm>
-            <a:off x="713232" y="1856231"/>
-            <a:ext cx="6629400" cy="4114800"/>
+            <a:off x="694944" y="1837943"/>
+            <a:ext cx="6665976" cy="3566160"/>
           </a:xfrm>
           <a:prstGeom prst="rect">
             <a:avLst/>
           </a:prstGeom>
           <a:solidFill>
-            <a:srgbClr val="0E1418"/>
+            <a:srgbClr val="FFFFFF"/>
           </a:solidFill>
-          <a:ln>
-            <a:noFill/>
+          <a:ln w="8890">
+            <a:solidFill>
+              <a:srgbClr val="D8DDD9"/>
+            </a:solidFill>
           </a:ln>
         </p:spPr>
         <p:style>
@@ -23170,49 +23657,30 @@
           </a:p>
         </p:txBody>
       </p:sp>
-      <p:sp>
-        <p:nvSpPr>
-          <p:cNvPr id="10" name="Rectangle 9"/>
-          <p:cNvSpPr/>
-          <p:nvPr/>
-        </p:nvSpPr>
-        <p:spPr>
-          <a:xfrm>
-            <a:off x="969264" y="2103120"/>
-            <a:ext cx="1097280" cy="329184"/>
-          </a:xfrm>
-          <a:prstGeom prst="rect">
-            <a:avLst/>
-          </a:prstGeom>
-          <a:solidFill>
-            <a:srgbClr val="1D2B34"/>
-          </a:solidFill>
-          <a:ln>
-            <a:noFill/>
-          </a:ln>
-        </p:spPr>
-        <p:style>
-          <a:lnRef idx="1">
-            <a:schemeClr val="accent1"/>
-          </a:lnRef>
-          <a:fillRef idx="3">
-            <a:schemeClr val="accent1"/>
-          </a:fillRef>
-          <a:effectRef idx="2">
-            <a:schemeClr val="accent1"/>
-          </a:effectRef>
-          <a:fontRef idx="minor">
-            <a:schemeClr val="lt1"/>
-          </a:fontRef>
-        </p:style>
-        <p:txBody>
-          <a:bodyPr rtlCol="0" anchor="ctr"/>
-          <a:lstStyle/>
-          <a:p>
-            <a:pPr algn="ctr"/>
-          </a:p>
-        </p:txBody>
-      </p:sp>
+      <p:pic>
+        <p:nvPicPr>
+          <p:cNvPr id="10" name="Picture 9" descr="codex-01-skill-session.png"/>
+          <p:cNvPicPr>
+            <a:picLocks noChangeAspect="1"/>
+          </p:cNvPicPr>
+          <p:nvPr/>
+        </p:nvPicPr>
+        <p:blipFill>
+          <a:blip r:embed="rId2"/>
+          <a:stretch>
+            <a:fillRect/>
+          </a:stretch>
+        </p:blipFill>
+        <p:spPr>
+          <a:xfrm>
+            <a:off x="713232" y="1856231"/>
+            <a:ext cx="6629400" cy="3529584"/>
+          </a:xfrm>
+          <a:prstGeom prst="rect">
+            <a:avLst/>
+          </a:prstGeom>
+        </p:spPr>
+      </p:pic>
       <p:sp>
         <p:nvSpPr>
           <p:cNvPr id="11" name="TextBox 10"/>
@@ -23221,36 +23689,36 @@
         </p:nvSpPr>
         <p:spPr>
           <a:xfrm>
-            <a:off x="969264" y="2103120"/>
-            <a:ext cx="1097280" cy="329184"/>
-          </a:xfrm>
-          <a:prstGeom prst="rect">
-            <a:avLst/>
-          </a:prstGeom>
-          <a:noFill/>
-        </p:spPr>
-        <p:txBody>
-          <a:bodyPr wrap="square" lIns="0" rIns="0" tIns="0" bIns="0" anchor="ctr">
-            <a:spAutoFit/>
-          </a:bodyPr>
-          <a:lstStyle/>
-          <a:p>
-            <a:pPr algn="ctr">
-              <a:lnSpc>
-                <a:spcPct val="108000"/>
-              </a:lnSpc>
-              <a:spcAft>
-                <a:spcPts val="0"/>
-              </a:spcAft>
-            </a:pPr>
-            <a:r>
-              <a:rPr sz="840" b="1">
-                <a:solidFill>
-                  <a:srgbClr val="80A9FF"/>
-                </a:solidFill>
-                <a:latin typeface="PingFang SC"/>
-              </a:rPr>
-              <a:t>PROMPT DIFF</a:t>
+            <a:off x="713232" y="5541264"/>
+            <a:ext cx="6629400" cy="457200"/>
+          </a:xfrm>
+          <a:prstGeom prst="rect">
+            <a:avLst/>
+          </a:prstGeom>
+          <a:noFill/>
+        </p:spPr>
+        <p:txBody>
+          <a:bodyPr wrap="square" lIns="0" rIns="0" tIns="0" bIns="0" anchor="t">
+            <a:spAutoFit/>
+          </a:bodyPr>
+          <a:lstStyle/>
+          <a:p>
+            <a:pPr algn="l">
+              <a:lnSpc>
+                <a:spcPct val="108000"/>
+              </a:lnSpc>
+              <a:spcAft>
+                <a:spcPts val="0"/>
+              </a:spcAft>
+            </a:pPr>
+            <a:r>
+              <a:rPr sz="950" b="0">
+                <a:solidFill>
+                  <a:srgbClr val="67706B"/>
+                </a:solidFill>
+                <a:latin typeface="Menlo"/>
+              </a:rPr>
+              <a:t>真实 Codex 会话：读取 Skill → MCP 冻结身份 → 最小 Prompt Diff（修改范围：system.md + tool description）</a:t>
             </a:r>
           </a:p>
         </p:txBody>
@@ -23258,95 +23726,6 @@
       <p:sp>
         <p:nvSpPr>
           <p:cNvPr id="12" name="TextBox 11"/>
-          <p:cNvSpPr txBox="1"/>
-          <p:nvPr/>
-        </p:nvSpPr>
-        <p:spPr>
-          <a:xfrm>
-            <a:off x="969264" y="2688336"/>
-            <a:ext cx="5943600" cy="2468880"/>
-          </a:xfrm>
-          <a:prstGeom prst="rect">
-            <a:avLst/>
-          </a:prstGeom>
-          <a:noFill/>
-        </p:spPr>
-        <p:txBody>
-          <a:bodyPr wrap="square" lIns="0" rIns="0" tIns="0" bIns="0" anchor="t">
-            <a:spAutoFit/>
-          </a:bodyPr>
-          <a:lstStyle/>
-          <a:p>
-            <a:pPr algn="l">
-              <a:lnSpc>
-                <a:spcPct val="130000"/>
-              </a:lnSpc>
-              <a:spcAft>
-                <a:spcPts val="0"/>
-              </a:spcAft>
-            </a:pPr>
-            <a:r>
-              <a:rPr sz="1120" b="0">
-                <a:solidFill>
-                  <a:srgbClr val="D7E0E4"/>
-                </a:solidFill>
-                <a:latin typeface="Menlo"/>
-              </a:rPr>
-              <a:t>- retouch_photo 可完成复合图片编辑
-+ retouch_photo 仅处理亮度、对比度等像素调整
-+ 背景/素材必须 search_assets → apply_asset
-+ 比例必须 crop_photo
-+ 下一工具消费最新 output_image_ref
-+ preserve_subject 传播到相关工具</a:t>
-            </a:r>
-          </a:p>
-        </p:txBody>
-      </p:sp>
-      <p:sp>
-        <p:nvSpPr>
-          <p:cNvPr id="13" name="TextBox 12"/>
-          <p:cNvSpPr txBox="1"/>
-          <p:nvPr/>
-        </p:nvSpPr>
-        <p:spPr>
-          <a:xfrm>
-            <a:off x="969264" y="5422392"/>
-            <a:ext cx="5303520" cy="246888"/>
-          </a:xfrm>
-          <a:prstGeom prst="rect">
-            <a:avLst/>
-          </a:prstGeom>
-          <a:noFill/>
-        </p:spPr>
-        <p:txBody>
-          <a:bodyPr wrap="square" lIns="0" rIns="0" tIns="0" bIns="0" anchor="t">
-            <a:spAutoFit/>
-          </a:bodyPr>
-          <a:lstStyle/>
-          <a:p>
-            <a:pPr algn="l">
-              <a:lnSpc>
-                <a:spcPct val="108000"/>
-              </a:lnSpc>
-              <a:spcAft>
-                <a:spcPts val="0"/>
-              </a:spcAft>
-            </a:pPr>
-            <a:r>
-              <a:rPr sz="950" b="0">
-                <a:solidFill>
-                  <a:srgbClr val="8EA5FF"/>
-                </a:solidFill>
-                <a:latin typeface="Menlo"/>
-              </a:rPr>
-              <a:t>修改范围：system.md + tool description</a:t>
-            </a:r>
-          </a:p>
-        </p:txBody>
-      </p:sp>
-      <p:sp>
-        <p:nvSpPr>
-          <p:cNvPr id="14" name="TextBox 13"/>
           <p:cNvSpPr txBox="1"/>
           <p:nvPr/>
         </p:nvSpPr>
@@ -23388,7 +23767,7 @@
       </p:sp>
       <p:sp>
         <p:nvSpPr>
-          <p:cNvPr id="15" name="TextBox 14"/>
+          <p:cNvPr id="13" name="TextBox 12"/>
           <p:cNvSpPr txBox="1"/>
           <p:nvPr/>
         </p:nvSpPr>
@@ -23430,7 +23809,7 @@
       </p:sp>
       <p:sp>
         <p:nvSpPr>
-          <p:cNvPr id="16" name="Rectangle 15"/>
+          <p:cNvPr id="14" name="Rectangle 13"/>
           <p:cNvSpPr/>
           <p:nvPr/>
         </p:nvSpPr>
@@ -23473,7 +23852,7 @@
       </p:sp>
       <p:sp>
         <p:nvSpPr>
-          <p:cNvPr id="17" name="TextBox 16"/>
+          <p:cNvPr id="15" name="TextBox 14"/>
           <p:cNvSpPr txBox="1"/>
           <p:nvPr/>
         </p:nvSpPr>
@@ -23515,7 +23894,7 @@
       </p:sp>
       <p:sp>
         <p:nvSpPr>
-          <p:cNvPr id="18" name="TextBox 17"/>
+          <p:cNvPr id="16" name="TextBox 15"/>
           <p:cNvSpPr txBox="1"/>
           <p:nvPr/>
         </p:nvSpPr>
@@ -23557,7 +23936,7 @@
       </p:sp>
       <p:sp>
         <p:nvSpPr>
-          <p:cNvPr id="19" name="Rectangle 18"/>
+          <p:cNvPr id="17" name="Rectangle 16"/>
           <p:cNvSpPr/>
           <p:nvPr/>
         </p:nvSpPr>
@@ -23600,7 +23979,7 @@
       </p:sp>
       <p:sp>
         <p:nvSpPr>
-          <p:cNvPr id="20" name="TextBox 19"/>
+          <p:cNvPr id="18" name="TextBox 17"/>
           <p:cNvSpPr txBox="1"/>
           <p:nvPr/>
         </p:nvSpPr>
@@ -23635,15 +24014,33 @@
                 </a:solidFill>
                 <a:latin typeface="PingFang SC"/>
               </a:rPr>
-              <a:t>SHA 不变，Candidate
-就没有验收资格</a:t>
-            </a:r>
-          </a:p>
-        </p:txBody>
-      </p:sp>
-      <p:sp>
-        <p:nvSpPr>
-          <p:cNvPr id="21" name="TextBox 20"/>
+              <a:t>SHA 不变，Candidate</a:t>
+            </a:r>
+          </a:p>
+          <a:p>
+            <a:pPr algn="ctr">
+              <a:lnSpc>
+                <a:spcPct val="120000"/>
+              </a:lnSpc>
+              <a:spcAft>
+                <a:spcPts val="0"/>
+              </a:spcAft>
+            </a:pPr>
+            <a:r>
+              <a:rPr sz="1100" b="1">
+                <a:solidFill>
+                  <a:srgbClr val="17745A"/>
+                </a:solidFill>
+                <a:latin typeface="PingFang SC"/>
+              </a:rPr>
+              <a:t>就没有验收资格</a:t>
+            </a:r>
+          </a:p>
+        </p:txBody>
+      </p:sp>
+      <p:sp>
+        <p:nvSpPr>
+          <p:cNvPr id="19" name="TextBox 18"/>
           <p:cNvSpPr txBox="1"/>
           <p:nvPr/>
         </p:nvSpPr>

--- a/docs/competition/AgentRig-GOAI-2026-初赛方案.pptx
+++ b/docs/competition/AgentRig-GOAI-2026-初赛方案.pptx
@@ -10576,8 +10576,8 @@
         </p:nvSpPr>
         <p:spPr>
           <a:xfrm>
-            <a:off x="713232" y="1865376"/>
-            <a:ext cx="3401568" cy="3566160"/>
+            <a:off x="694944" y="1847088"/>
+            <a:ext cx="6757416" cy="3621024"/>
           </a:xfrm>
           <a:prstGeom prst="rect">
             <a:avLst/>
@@ -10613,223 +10613,82 @@
           </a:p>
         </p:txBody>
       </p:sp>
-      <p:sp>
-        <p:nvSpPr>
-          <p:cNvPr id="10" name="Rectangle 9"/>
+      <p:pic>
+        <p:nvPicPr>
+          <p:cNvPr id="10" name="Picture 9" descr="skill-ecosystem.png"/>
+          <p:cNvPicPr>
+            <a:picLocks noChangeAspect="1"/>
+          </p:cNvPicPr>
+          <p:nvPr/>
+        </p:nvPicPr>
+        <p:blipFill>
+          <a:blip r:embed="rId2"/>
+          <a:stretch>
+            <a:fillRect/>
+          </a:stretch>
+        </p:blipFill>
+        <p:spPr>
+          <a:xfrm>
+            <a:off x="713232" y="1865376"/>
+            <a:ext cx="6720840" cy="3584448"/>
+          </a:xfrm>
+          <a:prstGeom prst="rect">
+            <a:avLst/>
+          </a:prstGeom>
+        </p:spPr>
+      </p:pic>
+      <p:sp>
+        <p:nvSpPr>
+          <p:cNvPr id="11" name="TextBox 10"/>
+          <p:cNvSpPr txBox="1"/>
+          <p:nvPr/>
+        </p:nvSpPr>
+        <p:spPr>
+          <a:xfrm>
+            <a:off x="713232" y="5559552"/>
+            <a:ext cx="6675120" cy="219456"/>
+          </a:xfrm>
+          <a:prstGeom prst="rect">
+            <a:avLst/>
+          </a:prstGeom>
+          <a:noFill/>
+        </p:spPr>
+        <p:txBody>
+          <a:bodyPr wrap="square" lIns="0" rIns="0" tIns="0" bIns="0" anchor="t">
+            <a:spAutoFit/>
+          </a:bodyPr>
+          <a:lstStyle/>
+          <a:p>
+            <a:pPr algn="l">
+              <a:lnSpc>
+                <a:spcPct val="108000"/>
+              </a:lnSpc>
+              <a:spcAft>
+                <a:spcPts val="0"/>
+              </a:spcAft>
+            </a:pPr>
+            <a:r>
+              <a:rPr sz="919" b="0">
+                <a:solidFill>
+                  <a:srgbClr val="67706B"/>
+                </a:solidFill>
+                <a:latin typeface="Menlo"/>
+              </a:rPr>
+              <a:t>真实工程 Skill 生态（lassist · 已脱敏）</a:t>
+            </a:r>
+          </a:p>
+        </p:txBody>
+      </p:sp>
+      <p:sp>
+        <p:nvSpPr>
+          <p:cNvPr id="12" name="Rectangle 11"/>
           <p:cNvSpPr/>
           <p:nvPr/>
         </p:nvSpPr>
         <p:spPr>
           <a:xfrm>
-            <a:off x="987552" y="2130552"/>
-            <a:ext cx="457200" cy="329184"/>
-          </a:xfrm>
-          <a:prstGeom prst="rect">
-            <a:avLst/>
-          </a:prstGeom>
-          <a:solidFill>
-            <a:srgbClr val="E9EFFF"/>
-          </a:solidFill>
-          <a:ln>
-            <a:noFill/>
-          </a:ln>
-        </p:spPr>
-        <p:style>
-          <a:lnRef idx="1">
-            <a:schemeClr val="accent1"/>
-          </a:lnRef>
-          <a:fillRef idx="3">
-            <a:schemeClr val="accent1"/>
-          </a:fillRef>
-          <a:effectRef idx="2">
-            <a:schemeClr val="accent1"/>
-          </a:effectRef>
-          <a:fontRef idx="minor">
-            <a:schemeClr val="lt1"/>
-          </a:fontRef>
-        </p:style>
-        <p:txBody>
-          <a:bodyPr rtlCol="0" anchor="ctr"/>
-          <a:lstStyle/>
-          <a:p>
-            <a:pPr algn="ctr"/>
-          </a:p>
-        </p:txBody>
-      </p:sp>
-      <p:sp>
-        <p:nvSpPr>
-          <p:cNvPr id="11" name="TextBox 10"/>
-          <p:cNvSpPr txBox="1"/>
-          <p:nvPr/>
-        </p:nvSpPr>
-        <p:spPr>
-          <a:xfrm>
-            <a:off x="987552" y="2130552"/>
-            <a:ext cx="457200" cy="329184"/>
-          </a:xfrm>
-          <a:prstGeom prst="rect">
-            <a:avLst/>
-          </a:prstGeom>
-          <a:noFill/>
-        </p:spPr>
-        <p:txBody>
-          <a:bodyPr wrap="square" lIns="0" rIns="0" tIns="0" bIns="0" anchor="ctr">
-            <a:spAutoFit/>
-          </a:bodyPr>
-          <a:lstStyle/>
-          <a:p>
-            <a:pPr algn="ctr">
-              <a:lnSpc>
-                <a:spcPct val="108000"/>
-              </a:lnSpc>
-              <a:spcAft>
-                <a:spcPts val="0"/>
-              </a:spcAft>
-            </a:pPr>
-            <a:r>
-              <a:rPr sz="840" b="1">
-                <a:solidFill>
-                  <a:srgbClr val="285CF5"/>
-                </a:solidFill>
-                <a:latin typeface="PingFang SC"/>
-              </a:rPr>
-              <a:t>01</a:t>
-            </a:r>
-          </a:p>
-        </p:txBody>
-      </p:sp>
-      <p:sp>
-        <p:nvSpPr>
-          <p:cNvPr id="12" name="TextBox 11"/>
-          <p:cNvSpPr txBox="1"/>
-          <p:nvPr/>
-        </p:nvSpPr>
-        <p:spPr>
-          <a:xfrm>
-            <a:off x="987552" y="2706624"/>
-            <a:ext cx="2788920" cy="320040"/>
-          </a:xfrm>
-          <a:prstGeom prst="rect">
-            <a:avLst/>
-          </a:prstGeom>
-          <a:noFill/>
-        </p:spPr>
-        <p:txBody>
-          <a:bodyPr wrap="square" lIns="0" rIns="0" tIns="0" bIns="0" anchor="t">
-            <a:spAutoFit/>
-          </a:bodyPr>
-          <a:lstStyle/>
-          <a:p>
-            <a:pPr algn="l">
-              <a:lnSpc>
-                <a:spcPct val="108000"/>
-              </a:lnSpc>
-              <a:spcAft>
-                <a:spcPts val="0"/>
-              </a:spcAft>
-            </a:pPr>
-            <a:r>
-              <a:rPr sz="1700" b="1">
-                <a:solidFill>
-                  <a:srgbClr val="121617"/>
-                </a:solidFill>
-                <a:latin typeface="PingFang SC"/>
-              </a:rPr>
-              <a:t>AgentScope 实践</a:t>
-            </a:r>
-          </a:p>
-        </p:txBody>
-      </p:sp>
-      <p:sp>
-        <p:nvSpPr>
-          <p:cNvPr id="13" name="TextBox 12"/>
-          <p:cNvSpPr txBox="1"/>
-          <p:nvPr/>
-        </p:nvSpPr>
-        <p:spPr>
-          <a:xfrm>
-            <a:off x="987552" y="3346704"/>
-            <a:ext cx="2761488" cy="1316736"/>
-          </a:xfrm>
-          <a:prstGeom prst="rect">
-            <a:avLst/>
-          </a:prstGeom>
-          <a:noFill/>
-        </p:spPr>
-        <p:txBody>
-          <a:bodyPr wrap="square" lIns="0" rIns="0" tIns="0" bIns="0">
-            <a:spAutoFit/>
-          </a:bodyPr>
-          <a:lstStyle/>
-          <a:p>
-            <a:pPr>
-              <a:lnSpc>
-                <a:spcPct val="115000"/>
-              </a:lnSpc>
-              <a:spcAft>
-                <a:spcPts val="1000"/>
-              </a:spcAft>
-              <a:defRPr sz="1100">
-                <a:solidFill>
-                  <a:srgbClr val="67706B"/>
-                </a:solidFill>
-                <a:latin typeface="PingFang SC"/>
-              </a:defRPr>
-            </a:pPr>
-            <a:r>
-              <a:t>•  真实业务评测闭环</a:t>
-            </a:r>
-          </a:p>
-          <a:p>
-            <a:pPr>
-              <a:lnSpc>
-                <a:spcPct val="115000"/>
-              </a:lnSpc>
-              <a:spcAft>
-                <a:spcPts val="1000"/>
-              </a:spcAft>
-              <a:defRPr sz="1100">
-                <a:solidFill>
-                  <a:srgbClr val="67706B"/>
-                </a:solidFill>
-                <a:latin typeface="PingFang SC"/>
-              </a:defRPr>
-            </a:pPr>
-            <a:r>
-              <a:t>•  工作台交互经验</a:t>
-            </a:r>
-          </a:p>
-          <a:p>
-            <a:pPr>
-              <a:lnSpc>
-                <a:spcPct val="115000"/>
-              </a:lnSpc>
-              <a:spcAft>
-                <a:spcPts val="1000"/>
-              </a:spcAft>
-              <a:defRPr sz="1100">
-                <a:solidFill>
-                  <a:srgbClr val="67706B"/>
-                </a:solidFill>
-                <a:latin typeface="PingFang SC"/>
-              </a:defRPr>
-            </a:pPr>
-            <a:r>
-              <a:t>•  AgentTeams 协作范式</a:t>
-            </a:r>
-          </a:p>
-        </p:txBody>
-      </p:sp>
-      <p:sp>
-        <p:nvSpPr>
-          <p:cNvPr id="14" name="Rectangle 13"/>
-          <p:cNvSpPr/>
-          <p:nvPr/>
-        </p:nvSpPr>
-        <p:spPr>
-          <a:xfrm>
-            <a:off x="4489704" y="1865376"/>
-            <a:ext cx="3401568" cy="3566160"/>
+            <a:off x="7680960" y="1865376"/>
+            <a:ext cx="3794760" cy="1097280"/>
           </a:xfrm>
           <a:prstGeom prst="rect">
             <a:avLst/>
@@ -10867,20 +10726,20 @@
       </p:sp>
       <p:sp>
         <p:nvSpPr>
-          <p:cNvPr id="15" name="Rectangle 14"/>
+          <p:cNvPr id="13" name="Rectangle 12"/>
           <p:cNvSpPr/>
           <p:nvPr/>
         </p:nvSpPr>
         <p:spPr>
           <a:xfrm>
-            <a:off x="4764024" y="2130552"/>
+            <a:off x="7882127" y="2011680"/>
             <a:ext cx="457200" cy="329184"/>
           </a:xfrm>
           <a:prstGeom prst="rect">
             <a:avLst/>
           </a:prstGeom>
           <a:solidFill>
-            <a:srgbClr val="E7F3EE"/>
+            <a:srgbClr val="E9EFFF"/>
           </a:solidFill>
           <a:ln>
             <a:noFill/>
@@ -10910,178 +10769,140 @@
       </p:sp>
       <p:sp>
         <p:nvSpPr>
+          <p:cNvPr id="14" name="TextBox 13"/>
+          <p:cNvSpPr txBox="1"/>
+          <p:nvPr/>
+        </p:nvSpPr>
+        <p:spPr>
+          <a:xfrm>
+            <a:off x="7882127" y="2011680"/>
+            <a:ext cx="457200" cy="329184"/>
+          </a:xfrm>
+          <a:prstGeom prst="rect">
+            <a:avLst/>
+          </a:prstGeom>
+          <a:noFill/>
+        </p:spPr>
+        <p:txBody>
+          <a:bodyPr wrap="square" lIns="0" rIns="0" tIns="0" bIns="0" anchor="ctr">
+            <a:spAutoFit/>
+          </a:bodyPr>
+          <a:lstStyle/>
+          <a:p>
+            <a:pPr algn="ctr">
+              <a:lnSpc>
+                <a:spcPct val="108000"/>
+              </a:lnSpc>
+              <a:spcAft>
+                <a:spcPts val="0"/>
+              </a:spcAft>
+            </a:pPr>
+            <a:r>
+              <a:rPr sz="840" b="1">
+                <a:solidFill>
+                  <a:srgbClr val="285CF5"/>
+                </a:solidFill>
+                <a:latin typeface="PingFang SC"/>
+              </a:rPr>
+              <a:t>01</a:t>
+            </a:r>
+          </a:p>
+        </p:txBody>
+      </p:sp>
+      <p:sp>
+        <p:nvSpPr>
+          <p:cNvPr id="15" name="TextBox 14"/>
+          <p:cNvSpPr txBox="1"/>
+          <p:nvPr/>
+        </p:nvSpPr>
+        <p:spPr>
+          <a:xfrm>
+            <a:off x="8503920" y="1993392"/>
+            <a:ext cx="2926080" cy="256032"/>
+          </a:xfrm>
+          <a:prstGeom prst="rect">
+            <a:avLst/>
+          </a:prstGeom>
+          <a:noFill/>
+        </p:spPr>
+        <p:txBody>
+          <a:bodyPr wrap="square" lIns="0" rIns="0" tIns="0" bIns="0" anchor="t">
+            <a:spAutoFit/>
+          </a:bodyPr>
+          <a:lstStyle/>
+          <a:p>
+            <a:pPr algn="l">
+              <a:lnSpc>
+                <a:spcPct val="108000"/>
+              </a:lnSpc>
+              <a:spcAft>
+                <a:spcPts val="0"/>
+              </a:spcAft>
+            </a:pPr>
+            <a:r>
+              <a:rPr sz="1300" b="1">
+                <a:solidFill>
+                  <a:srgbClr val="121617"/>
+                </a:solidFill>
+                <a:latin typeface="PingFang SC"/>
+              </a:rPr>
+              <a:t>AgentScope 实践</a:t>
+            </a:r>
+          </a:p>
+        </p:txBody>
+      </p:sp>
+      <p:sp>
+        <p:nvSpPr>
           <p:cNvPr id="16" name="TextBox 15"/>
           <p:cNvSpPr txBox="1"/>
           <p:nvPr/>
         </p:nvSpPr>
         <p:spPr>
           <a:xfrm>
-            <a:off x="4764024" y="2130552"/>
-            <a:ext cx="457200" cy="329184"/>
-          </a:xfrm>
-          <a:prstGeom prst="rect">
-            <a:avLst/>
-          </a:prstGeom>
-          <a:noFill/>
-        </p:spPr>
-        <p:txBody>
-          <a:bodyPr wrap="square" lIns="0" rIns="0" tIns="0" bIns="0" anchor="ctr">
-            <a:spAutoFit/>
-          </a:bodyPr>
-          <a:lstStyle/>
-          <a:p>
-            <a:pPr algn="ctr">
-              <a:lnSpc>
-                <a:spcPct val="108000"/>
-              </a:lnSpc>
-              <a:spcAft>
-                <a:spcPts val="0"/>
-              </a:spcAft>
-            </a:pPr>
-            <a:r>
-              <a:rPr sz="840" b="1">
-                <a:solidFill>
-                  <a:srgbClr val="17745A"/>
-                </a:solidFill>
-                <a:latin typeface="PingFang SC"/>
-              </a:rPr>
-              <a:t>02</a:t>
-            </a:r>
-          </a:p>
-        </p:txBody>
-      </p:sp>
-      <p:sp>
-        <p:nvSpPr>
-          <p:cNvPr id="17" name="TextBox 16"/>
-          <p:cNvSpPr txBox="1"/>
-          <p:nvPr/>
-        </p:nvSpPr>
-        <p:spPr>
-          <a:xfrm>
-            <a:off x="4764024" y="2706624"/>
-            <a:ext cx="2788920" cy="320040"/>
-          </a:xfrm>
-          <a:prstGeom prst="rect">
-            <a:avLst/>
-          </a:prstGeom>
-          <a:noFill/>
-        </p:spPr>
-        <p:txBody>
-          <a:bodyPr wrap="square" lIns="0" rIns="0" tIns="0" bIns="0" anchor="t">
-            <a:spAutoFit/>
-          </a:bodyPr>
-          <a:lstStyle/>
-          <a:p>
-            <a:pPr algn="l">
-              <a:lnSpc>
-                <a:spcPct val="108000"/>
-              </a:lnSpc>
-              <a:spcAft>
-                <a:spcPts val="0"/>
-              </a:spcAft>
-            </a:pPr>
-            <a:r>
-              <a:rPr sz="1700" b="1">
-                <a:solidFill>
-                  <a:srgbClr val="121617"/>
-                </a:solidFill>
-                <a:latin typeface="PingFang SC"/>
-              </a:rPr>
-              <a:t>AgentRig 开源内核</a:t>
-            </a:r>
-          </a:p>
-        </p:txBody>
-      </p:sp>
-      <p:sp>
-        <p:nvSpPr>
-          <p:cNvPr id="18" name="TextBox 17"/>
-          <p:cNvSpPr txBox="1"/>
-          <p:nvPr/>
-        </p:nvSpPr>
-        <p:spPr>
-          <a:xfrm>
-            <a:off x="4764024" y="3346704"/>
-            <a:ext cx="2761488" cy="1316736"/>
-          </a:xfrm>
-          <a:prstGeom prst="rect">
-            <a:avLst/>
-          </a:prstGeom>
-          <a:noFill/>
-        </p:spPr>
-        <p:txBody>
-          <a:bodyPr wrap="square" lIns="0" rIns="0" tIns="0" bIns="0">
-            <a:spAutoFit/>
-          </a:bodyPr>
-          <a:lstStyle/>
-          <a:p>
-            <a:pPr>
-              <a:lnSpc>
-                <a:spcPct val="115000"/>
-              </a:lnSpc>
-              <a:spcAft>
-                <a:spcPts val="1000"/>
-              </a:spcAft>
-              <a:defRPr sz="1100">
+            <a:off x="7882127" y="2395728"/>
+            <a:ext cx="3429000" cy="502920"/>
+          </a:xfrm>
+          <a:prstGeom prst="rect">
+            <a:avLst/>
+          </a:prstGeom>
+          <a:noFill/>
+        </p:spPr>
+        <p:txBody>
+          <a:bodyPr wrap="square" lIns="0" rIns="0" tIns="0" bIns="0" anchor="t">
+            <a:spAutoFit/>
+          </a:bodyPr>
+          <a:lstStyle/>
+          <a:p>
+            <a:pPr algn="l">
+              <a:lnSpc>
+                <a:spcPct val="125000"/>
+              </a:lnSpc>
+              <a:spcAft>
+                <a:spcPts val="0"/>
+              </a:spcAft>
+            </a:pPr>
+            <a:r>
+              <a:rPr sz="880" b="0">
                 <a:solidFill>
                   <a:srgbClr val="67706B"/>
                 </a:solidFill>
                 <a:latin typeface="PingFang SC"/>
-              </a:defRPr>
-            </a:pPr>
-            <a:r>
-              <a:t>•  协议无关 Driver</a:t>
-            </a:r>
-          </a:p>
-          <a:p>
-            <a:pPr>
-              <a:lnSpc>
-                <a:spcPct val="115000"/>
-              </a:lnSpc>
-              <a:spcAft>
-                <a:spcPts val="1000"/>
-              </a:spcAft>
-              <a:defRPr sz="1100">
-                <a:solidFill>
-                  <a:srgbClr val="67706B"/>
-                </a:solidFill>
-                <a:latin typeface="PingFang SC"/>
-              </a:defRPr>
-            </a:pPr>
-            <a:r>
-              <a:t>•  低副作用 Provider</a:t>
-            </a:r>
-          </a:p>
-          <a:p>
-            <a:pPr>
-              <a:lnSpc>
-                <a:spcPct val="115000"/>
-              </a:lnSpc>
-              <a:spcAft>
-                <a:spcPts val="1000"/>
-              </a:spcAft>
-              <a:defRPr sz="1100">
-                <a:solidFill>
-                  <a:srgbClr val="67706B"/>
-                </a:solidFill>
-                <a:latin typeface="PingFang SC"/>
-              </a:defRPr>
-            </a:pPr>
-            <a:r>
-              <a:t>•  Canonical Evidence</a:t>
-            </a:r>
-          </a:p>
-        </p:txBody>
-      </p:sp>
-      <p:sp>
-        <p:nvSpPr>
-          <p:cNvPr id="19" name="Rectangle 18"/>
+              </a:rPr>
+              <a:t>真实业务评测闭环 · 11 个评测/治理 Skill 常态使用 · AgentTeams 协作范式</a:t>
+            </a:r>
+          </a:p>
+        </p:txBody>
+      </p:sp>
+      <p:sp>
+        <p:nvSpPr>
+          <p:cNvPr id="17" name="Rectangle 16"/>
           <p:cNvSpPr/>
           <p:nvPr/>
         </p:nvSpPr>
         <p:spPr>
           <a:xfrm>
-            <a:off x="8266175" y="1865376"/>
-            <a:ext cx="3401568" cy="3566160"/>
+            <a:off x="7680960" y="3090672"/>
+            <a:ext cx="3794760" cy="1097280"/>
           </a:xfrm>
           <a:prstGeom prst="rect">
             <a:avLst/>
@@ -11119,13 +10940,227 @@
       </p:sp>
       <p:sp>
         <p:nvSpPr>
-          <p:cNvPr id="20" name="Rectangle 19"/>
+          <p:cNvPr id="18" name="Rectangle 17"/>
           <p:cNvSpPr/>
           <p:nvPr/>
         </p:nvSpPr>
         <p:spPr>
           <a:xfrm>
-            <a:off x="8540496" y="2130552"/>
+            <a:off x="7882127" y="3236976"/>
+            <a:ext cx="457200" cy="329184"/>
+          </a:xfrm>
+          <a:prstGeom prst="rect">
+            <a:avLst/>
+          </a:prstGeom>
+          <a:solidFill>
+            <a:srgbClr val="E7F3EE"/>
+          </a:solidFill>
+          <a:ln>
+            <a:noFill/>
+          </a:ln>
+        </p:spPr>
+        <p:style>
+          <a:lnRef idx="1">
+            <a:schemeClr val="accent1"/>
+          </a:lnRef>
+          <a:fillRef idx="3">
+            <a:schemeClr val="accent1"/>
+          </a:fillRef>
+          <a:effectRef idx="2">
+            <a:schemeClr val="accent1"/>
+          </a:effectRef>
+          <a:fontRef idx="minor">
+            <a:schemeClr val="lt1"/>
+          </a:fontRef>
+        </p:style>
+        <p:txBody>
+          <a:bodyPr rtlCol="0" anchor="ctr"/>
+          <a:lstStyle/>
+          <a:p>
+            <a:pPr algn="ctr"/>
+          </a:p>
+        </p:txBody>
+      </p:sp>
+      <p:sp>
+        <p:nvSpPr>
+          <p:cNvPr id="19" name="TextBox 18"/>
+          <p:cNvSpPr txBox="1"/>
+          <p:nvPr/>
+        </p:nvSpPr>
+        <p:spPr>
+          <a:xfrm>
+            <a:off x="7882127" y="3236976"/>
+            <a:ext cx="457200" cy="329184"/>
+          </a:xfrm>
+          <a:prstGeom prst="rect">
+            <a:avLst/>
+          </a:prstGeom>
+          <a:noFill/>
+        </p:spPr>
+        <p:txBody>
+          <a:bodyPr wrap="square" lIns="0" rIns="0" tIns="0" bIns="0" anchor="ctr">
+            <a:spAutoFit/>
+          </a:bodyPr>
+          <a:lstStyle/>
+          <a:p>
+            <a:pPr algn="ctr">
+              <a:lnSpc>
+                <a:spcPct val="108000"/>
+              </a:lnSpc>
+              <a:spcAft>
+                <a:spcPts val="0"/>
+              </a:spcAft>
+            </a:pPr>
+            <a:r>
+              <a:rPr sz="840" b="1">
+                <a:solidFill>
+                  <a:srgbClr val="17745A"/>
+                </a:solidFill>
+                <a:latin typeface="PingFang SC"/>
+              </a:rPr>
+              <a:t>02</a:t>
+            </a:r>
+          </a:p>
+        </p:txBody>
+      </p:sp>
+      <p:sp>
+        <p:nvSpPr>
+          <p:cNvPr id="20" name="TextBox 19"/>
+          <p:cNvSpPr txBox="1"/>
+          <p:nvPr/>
+        </p:nvSpPr>
+        <p:spPr>
+          <a:xfrm>
+            <a:off x="8503920" y="3218688"/>
+            <a:ext cx="2926080" cy="256032"/>
+          </a:xfrm>
+          <a:prstGeom prst="rect">
+            <a:avLst/>
+          </a:prstGeom>
+          <a:noFill/>
+        </p:spPr>
+        <p:txBody>
+          <a:bodyPr wrap="square" lIns="0" rIns="0" tIns="0" bIns="0" anchor="t">
+            <a:spAutoFit/>
+          </a:bodyPr>
+          <a:lstStyle/>
+          <a:p>
+            <a:pPr algn="l">
+              <a:lnSpc>
+                <a:spcPct val="108000"/>
+              </a:lnSpc>
+              <a:spcAft>
+                <a:spcPts val="0"/>
+              </a:spcAft>
+            </a:pPr>
+            <a:r>
+              <a:rPr sz="1300" b="1">
+                <a:solidFill>
+                  <a:srgbClr val="121617"/>
+                </a:solidFill>
+                <a:latin typeface="PingFang SC"/>
+              </a:rPr>
+              <a:t>AgentRig 开源内核</a:t>
+            </a:r>
+          </a:p>
+        </p:txBody>
+      </p:sp>
+      <p:sp>
+        <p:nvSpPr>
+          <p:cNvPr id="21" name="TextBox 20"/>
+          <p:cNvSpPr txBox="1"/>
+          <p:nvPr/>
+        </p:nvSpPr>
+        <p:spPr>
+          <a:xfrm>
+            <a:off x="7882127" y="3621024"/>
+            <a:ext cx="3429000" cy="502920"/>
+          </a:xfrm>
+          <a:prstGeom prst="rect">
+            <a:avLst/>
+          </a:prstGeom>
+          <a:noFill/>
+        </p:spPr>
+        <p:txBody>
+          <a:bodyPr wrap="square" lIns="0" rIns="0" tIns="0" bIns="0" anchor="t">
+            <a:spAutoFit/>
+          </a:bodyPr>
+          <a:lstStyle/>
+          <a:p>
+            <a:pPr algn="l">
+              <a:lnSpc>
+                <a:spcPct val="125000"/>
+              </a:lnSpc>
+              <a:spcAft>
+                <a:spcPts val="0"/>
+              </a:spcAft>
+            </a:pPr>
+            <a:r>
+              <a:rPr sz="880" b="0">
+                <a:solidFill>
+                  <a:srgbClr val="67706B"/>
+                </a:solidFill>
+                <a:latin typeface="PingFang SC"/>
+              </a:rPr>
+              <a:t>协议无关 Driver · 低副作用 Provider · Canonical Evidence</a:t>
+            </a:r>
+          </a:p>
+        </p:txBody>
+      </p:sp>
+      <p:sp>
+        <p:nvSpPr>
+          <p:cNvPr id="22" name="Rectangle 21"/>
+          <p:cNvSpPr/>
+          <p:nvPr/>
+        </p:nvSpPr>
+        <p:spPr>
+          <a:xfrm>
+            <a:off x="7680960" y="4315968"/>
+            <a:ext cx="3794760" cy="1097280"/>
+          </a:xfrm>
+          <a:prstGeom prst="rect">
+            <a:avLst/>
+          </a:prstGeom>
+          <a:solidFill>
+            <a:srgbClr val="FFFFFF"/>
+          </a:solidFill>
+          <a:ln w="8890">
+            <a:solidFill>
+              <a:srgbClr val="D8DDD9"/>
+            </a:solidFill>
+          </a:ln>
+        </p:spPr>
+        <p:style>
+          <a:lnRef idx="1">
+            <a:schemeClr val="accent1"/>
+          </a:lnRef>
+          <a:fillRef idx="3">
+            <a:schemeClr val="accent1"/>
+          </a:fillRef>
+          <a:effectRef idx="2">
+            <a:schemeClr val="accent1"/>
+          </a:effectRef>
+          <a:fontRef idx="minor">
+            <a:schemeClr val="lt1"/>
+          </a:fontRef>
+        </p:style>
+        <p:txBody>
+          <a:bodyPr rtlCol="0" anchor="ctr"/>
+          <a:lstStyle/>
+          <a:p>
+            <a:pPr algn="ctr"/>
+          </a:p>
+        </p:txBody>
+      </p:sp>
+      <p:sp>
+        <p:nvSpPr>
+          <p:cNvPr id="23" name="Rectangle 22"/>
+          <p:cNvSpPr/>
+          <p:nvPr/>
+        </p:nvSpPr>
+        <p:spPr>
+          <a:xfrm>
+            <a:off x="7882127" y="4462272"/>
             <a:ext cx="457200" cy="329184"/>
           </a:xfrm>
           <a:prstGeom prst="rect">
@@ -11162,13 +11197,13 @@
       </p:sp>
       <p:sp>
         <p:nvSpPr>
-          <p:cNvPr id="21" name="TextBox 20"/>
-          <p:cNvSpPr txBox="1"/>
-          <p:nvPr/>
-        </p:nvSpPr>
-        <p:spPr>
-          <a:xfrm>
-            <a:off x="8540496" y="2130552"/>
+          <p:cNvPr id="24" name="TextBox 23"/>
+          <p:cNvSpPr txBox="1"/>
+          <p:nvPr/>
+        </p:nvSpPr>
+        <p:spPr>
+          <a:xfrm>
+            <a:off x="7882127" y="4462272"/>
             <a:ext cx="457200" cy="329184"/>
           </a:xfrm>
           <a:prstGeom prst="rect">
@@ -11204,36 +11239,36 @@
       </p:sp>
       <p:sp>
         <p:nvSpPr>
-          <p:cNvPr id="22" name="TextBox 21"/>
-          <p:cNvSpPr txBox="1"/>
-          <p:nvPr/>
-        </p:nvSpPr>
-        <p:spPr>
-          <a:xfrm>
-            <a:off x="8540496" y="2706624"/>
-            <a:ext cx="2788920" cy="320040"/>
-          </a:xfrm>
-          <a:prstGeom prst="rect">
-            <a:avLst/>
-          </a:prstGeom>
-          <a:noFill/>
-        </p:spPr>
-        <p:txBody>
-          <a:bodyPr wrap="square" lIns="0" rIns="0" tIns="0" bIns="0" anchor="t">
-            <a:spAutoFit/>
-          </a:bodyPr>
-          <a:lstStyle/>
-          <a:p>
-            <a:pPr algn="l">
-              <a:lnSpc>
-                <a:spcPct val="108000"/>
-              </a:lnSpc>
-              <a:spcAft>
-                <a:spcPts val="0"/>
-              </a:spcAft>
-            </a:pPr>
-            <a:r>
-              <a:rPr sz="1700" b="1">
+          <p:cNvPr id="25" name="TextBox 24"/>
+          <p:cNvSpPr txBox="1"/>
+          <p:nvPr/>
+        </p:nvSpPr>
+        <p:spPr>
+          <a:xfrm>
+            <a:off x="8503920" y="4443984"/>
+            <a:ext cx="2926080" cy="256032"/>
+          </a:xfrm>
+          <a:prstGeom prst="rect">
+            <a:avLst/>
+          </a:prstGeom>
+          <a:noFill/>
+        </p:spPr>
+        <p:txBody>
+          <a:bodyPr wrap="square" lIns="0" rIns="0" tIns="0" bIns="0" anchor="t">
+            <a:spAutoFit/>
+          </a:bodyPr>
+          <a:lstStyle/>
+          <a:p>
+            <a:pPr algn="l">
+              <a:lnSpc>
+                <a:spcPct val="108000"/>
+              </a:lnSpc>
+              <a:spcAft>
+                <a:spcPts val="0"/>
+              </a:spcAft>
+            </a:pPr>
+            <a:r>
+              <a:rPr sz="1300" b="1">
                 <a:solidFill>
                   <a:srgbClr val="121617"/>
                 </a:solidFill>
@@ -11246,87 +11281,49 @@
       </p:sp>
       <p:sp>
         <p:nvSpPr>
-          <p:cNvPr id="23" name="TextBox 22"/>
-          <p:cNvSpPr txBox="1"/>
-          <p:nvPr/>
-        </p:nvSpPr>
-        <p:spPr>
-          <a:xfrm>
-            <a:off x="8540496" y="3346704"/>
-            <a:ext cx="2761488" cy="1316736"/>
-          </a:xfrm>
-          <a:prstGeom prst="rect">
-            <a:avLst/>
-          </a:prstGeom>
-          <a:noFill/>
-        </p:spPr>
-        <p:txBody>
-          <a:bodyPr wrap="square" lIns="0" rIns="0" tIns="0" bIns="0">
-            <a:spAutoFit/>
-          </a:bodyPr>
-          <a:lstStyle/>
-          <a:p>
-            <a:pPr>
-              <a:lnSpc>
-                <a:spcPct val="115000"/>
-              </a:lnSpc>
-              <a:spcAft>
-                <a:spcPts val="1000"/>
-              </a:spcAft>
-              <a:defRPr sz="1100">
+          <p:cNvPr id="26" name="TextBox 25"/>
+          <p:cNvSpPr txBox="1"/>
+          <p:nvPr/>
+        </p:nvSpPr>
+        <p:spPr>
+          <a:xfrm>
+            <a:off x="7882127" y="4846320"/>
+            <a:ext cx="3429000" cy="502920"/>
+          </a:xfrm>
+          <a:prstGeom prst="rect">
+            <a:avLst/>
+          </a:prstGeom>
+          <a:noFill/>
+        </p:spPr>
+        <p:txBody>
+          <a:bodyPr wrap="square" lIns="0" rIns="0" tIns="0" bIns="0" anchor="t">
+            <a:spAutoFit/>
+          </a:bodyPr>
+          <a:lstStyle/>
+          <a:p>
+            <a:pPr algn="l">
+              <a:lnSpc>
+                <a:spcPct val="125000"/>
+              </a:lnSpc>
+              <a:spcAft>
+                <a:spcPts val="0"/>
+              </a:spcAft>
+            </a:pPr>
+            <a:r>
+              <a:rPr sz="880" b="0">
                 <a:solidFill>
                   <a:srgbClr val="67706B"/>
                 </a:solidFill>
                 <a:latin typeface="PingFang SC"/>
-              </a:defRPr>
-            </a:pPr>
-            <a:r>
-              <a:t>•  Codex + 项目 Skill</a:t>
-            </a:r>
-          </a:p>
-          <a:p>
-            <a:pPr>
-              <a:lnSpc>
-                <a:spcPct val="115000"/>
-              </a:lnSpc>
-              <a:spcAft>
-                <a:spcPts val="1000"/>
-              </a:spcAft>
-              <a:defRPr sz="1100">
-                <a:solidFill>
-                  <a:srgbClr val="67706B"/>
-                </a:solidFill>
-                <a:latin typeface="PingFang SC"/>
-              </a:defRPr>
-            </a:pPr>
-            <a:r>
-              <a:t>•  普通用户 Web Assistant</a:t>
-            </a:r>
-          </a:p>
-          <a:p>
-            <a:pPr>
-              <a:lnSpc>
-                <a:spcPct val="115000"/>
-              </a:lnSpc>
-              <a:spcAft>
-                <a:spcPts val="1000"/>
-              </a:spcAft>
-              <a:defRPr sz="1100">
-                <a:solidFill>
-                  <a:srgbClr val="67706B"/>
-                </a:solidFill>
-                <a:latin typeface="PingFang SC"/>
-              </a:defRPr>
-            </a:pPr>
-            <a:r>
-              <a:t>•  CI / 发布 Gate</a:t>
-            </a:r>
-          </a:p>
-        </p:txBody>
-      </p:sp>
-      <p:sp>
-        <p:nvSpPr>
-          <p:cNvPr id="24" name="Rectangle 23"/>
+              </a:rPr>
+              <a:t>Codex + 项目 Skill + PI 存档 · 普通用户 Web Assistant · CI / 发布 Gate</a:t>
+            </a:r>
+          </a:p>
+        </p:txBody>
+      </p:sp>
+      <p:sp>
+        <p:nvSpPr>
+          <p:cNvPr id="27" name="Rectangle 26"/>
           <p:cNvSpPr/>
           <p:nvPr/>
         </p:nvSpPr>
@@ -11369,7 +11366,7 @@
       </p:sp>
       <p:sp>
         <p:nvSpPr>
-          <p:cNvPr id="25" name="TextBox 24"/>
+          <p:cNvPr id="28" name="TextBox 27"/>
           <p:cNvSpPr txBox="1"/>
           <p:nvPr/>
         </p:nvSpPr>
@@ -18271,7 +18268,7 @@
                 </a:solidFill>
                 <a:latin typeface="PingFang SC"/>
               </a:rPr>
-              <a:t>主入口 · 真实会话 · run_79367a…</a:t>
+              <a:t>主入口 · 真实会话 · run_33efe8…</a:t>
             </a:r>
           </a:p>
         </p:txBody>
@@ -21631,7 +21628,7 @@
                 </a:solidFill>
                 <a:latin typeface="PingFang SC"/>
               </a:rPr>
-              <a:t>不是盲目增加用例，而是按 Prompt Diff 治理风险</a:t>
+              <a:t>不是盲目增加用例，而是按 Prompt Diff 治理风险并沉淀存档</a:t>
             </a:r>
           </a:p>
         </p:txBody>
@@ -21673,7 +21670,7 @@
                 </a:solidFill>
                 <a:latin typeface="PingFang SC"/>
               </a:rPr>
-              <a:t>项目 Skill 先冻结身份与不变量，再查询 AgentRig 资产并分类。</a:t>
+              <a:t>项目 Skill 先冻结身份与不变量、分类资产，最终把整次迭代固化为 PI 存档。</a:t>
             </a:r>
           </a:p>
         </p:txBody>
@@ -22705,36 +22702,105 @@
       </p:sp>
       <p:sp>
         <p:nvSpPr>
-          <p:cNvPr id="29" name="TextBox 28"/>
-          <p:cNvSpPr txBox="1"/>
-          <p:nvPr/>
-        </p:nvSpPr>
-        <p:spPr>
-          <a:xfrm>
-            <a:off x="731520" y="4306824"/>
-            <a:ext cx="2011680" cy="274320"/>
-          </a:xfrm>
-          <a:prstGeom prst="rect">
-            <a:avLst/>
-          </a:prstGeom>
-          <a:noFill/>
-        </p:spPr>
-        <p:txBody>
-          <a:bodyPr wrap="square" lIns="0" rIns="0" tIns="0" bIns="0" anchor="t">
-            <a:spAutoFit/>
-          </a:bodyPr>
-          <a:lstStyle/>
-          <a:p>
-            <a:pPr algn="l">
-              <a:lnSpc>
-                <a:spcPct val="108000"/>
-              </a:lnSpc>
-              <a:spcAft>
-                <a:spcPts val="0"/>
-              </a:spcAft>
-            </a:pPr>
-            <a:r>
-              <a:rPr sz="1500" b="1">
+          <p:cNvPr id="29" name="Rectangle 28"/>
+          <p:cNvSpPr/>
+          <p:nvPr/>
+        </p:nvSpPr>
+        <p:spPr>
+          <a:xfrm>
+            <a:off x="694944" y="4078224"/>
+            <a:ext cx="6025896" cy="2130552"/>
+          </a:xfrm>
+          <a:prstGeom prst="rect">
+            <a:avLst/>
+          </a:prstGeom>
+          <a:solidFill>
+            <a:srgbClr val="FFFFFF"/>
+          </a:solidFill>
+          <a:ln w="8890">
+            <a:solidFill>
+              <a:srgbClr val="D8DDD9"/>
+            </a:solidFill>
+          </a:ln>
+        </p:spPr>
+        <p:style>
+          <a:lnRef idx="1">
+            <a:schemeClr val="accent1"/>
+          </a:lnRef>
+          <a:fillRef idx="3">
+            <a:schemeClr val="accent1"/>
+          </a:fillRef>
+          <a:effectRef idx="2">
+            <a:schemeClr val="accent1"/>
+          </a:effectRef>
+          <a:fontRef idx="minor">
+            <a:schemeClr val="lt1"/>
+          </a:fontRef>
+        </p:style>
+        <p:txBody>
+          <a:bodyPr rtlCol="0" anchor="ctr"/>
+          <a:lstStyle/>
+          <a:p>
+            <a:pPr algn="ctr"/>
+          </a:p>
+        </p:txBody>
+      </p:sp>
+      <p:pic>
+        <p:nvPicPr>
+          <p:cNvPr id="30" name="Picture 29" descr="skill-pi-archive.png"/>
+          <p:cNvPicPr>
+            <a:picLocks noChangeAspect="1"/>
+          </p:cNvPicPr>
+          <p:nvPr/>
+        </p:nvPicPr>
+        <p:blipFill>
+          <a:blip r:embed="rId2"/>
+          <a:stretch>
+            <a:fillRect/>
+          </a:stretch>
+        </p:blipFill>
+        <p:spPr>
+          <a:xfrm>
+            <a:off x="713232" y="4096512"/>
+            <a:ext cx="5989320" cy="2093976"/>
+          </a:xfrm>
+          <a:prstGeom prst="rect">
+            <a:avLst/>
+          </a:prstGeom>
+        </p:spPr>
+      </p:pic>
+      <p:sp>
+        <p:nvSpPr>
+          <p:cNvPr id="31" name="TextBox 30"/>
+          <p:cNvSpPr txBox="1"/>
+          <p:nvPr/>
+        </p:nvSpPr>
+        <p:spPr>
+          <a:xfrm>
+            <a:off x="7086600" y="4096512"/>
+            <a:ext cx="2194560" cy="256032"/>
+          </a:xfrm>
+          <a:prstGeom prst="rect">
+            <a:avLst/>
+          </a:prstGeom>
+          <a:noFill/>
+        </p:spPr>
+        <p:txBody>
+          <a:bodyPr wrap="square" lIns="0" rIns="0" tIns="0" bIns="0" anchor="t">
+            <a:spAutoFit/>
+          </a:bodyPr>
+          <a:lstStyle/>
+          <a:p>
+            <a:pPr algn="l">
+              <a:lnSpc>
+                <a:spcPct val="108000"/>
+              </a:lnSpc>
+              <a:spcAft>
+                <a:spcPts val="0"/>
+              </a:spcAft>
+            </a:pPr>
+            <a:r>
+              <a:rPr sz="1350" b="1">
                 <a:solidFill>
                   <a:srgbClr val="121617"/>
                 </a:solidFill>
@@ -22747,13 +22813,13 @@
       </p:sp>
       <p:sp>
         <p:nvSpPr>
-          <p:cNvPr id="30" name="TextBox 29"/>
-          <p:cNvSpPr txBox="1"/>
-          <p:nvPr/>
-        </p:nvSpPr>
-        <p:spPr>
-          <a:xfrm>
-            <a:off x="749808" y="4736592"/>
+          <p:cNvPr id="32" name="TextBox 31"/>
+          <p:cNvSpPr txBox="1"/>
+          <p:nvPr/>
+        </p:nvSpPr>
+        <p:spPr>
+          <a:xfrm>
+            <a:off x="7104888" y="4498848"/>
             <a:ext cx="713232" cy="201168"/>
           </a:xfrm>
           <a:prstGeom prst="rect">
@@ -22776,7 +22842,7 @@
               </a:spcAft>
             </a:pPr>
             <a:r>
-              <a:rPr sz="860" b="1">
+              <a:rPr sz="840" b="1">
                 <a:solidFill>
                   <a:srgbClr val="A76509"/>
                 </a:solidFill>
@@ -22789,504 +22855,440 @@
       </p:sp>
       <p:sp>
         <p:nvSpPr>
-          <p:cNvPr id="31" name="TextBox 30"/>
-          <p:cNvSpPr txBox="1"/>
-          <p:nvPr/>
-        </p:nvSpPr>
-        <p:spPr>
-          <a:xfrm>
-            <a:off x="1554480" y="4736592"/>
-            <a:ext cx="3246120" cy="201168"/>
-          </a:xfrm>
-          <a:prstGeom prst="rect">
-            <a:avLst/>
-          </a:prstGeom>
-          <a:noFill/>
-        </p:spPr>
-        <p:txBody>
-          <a:bodyPr wrap="square" lIns="0" rIns="0" tIns="0" bIns="0" anchor="t">
-            <a:spAutoFit/>
-          </a:bodyPr>
-          <a:lstStyle/>
-          <a:p>
-            <a:pPr algn="l">
-              <a:lnSpc>
-                <a:spcPct val="108000"/>
-              </a:lnSpc>
-              <a:spcAft>
-                <a:spcPts val="0"/>
-              </a:spcAft>
-            </a:pPr>
-            <a:r>
-              <a:rPr sz="960" b="1">
+          <p:cNvPr id="33" name="TextBox 32"/>
+          <p:cNvSpPr txBox="1"/>
+          <p:nvPr/>
+        </p:nvSpPr>
+        <p:spPr>
+          <a:xfrm>
+            <a:off x="7863840" y="4498848"/>
+            <a:ext cx="3566160" cy="201168"/>
+          </a:xfrm>
+          <a:prstGeom prst="rect">
+            <a:avLst/>
+          </a:prstGeom>
+          <a:noFill/>
+        </p:spPr>
+        <p:txBody>
+          <a:bodyPr wrap="square" lIns="0" rIns="0" tIns="0" bIns="0" anchor="t">
+            <a:spAutoFit/>
+          </a:bodyPr>
+          <a:lstStyle/>
+          <a:p>
+            <a:pPr algn="l">
+              <a:lnSpc>
+                <a:spcPct val="108000"/>
+              </a:lnSpc>
+              <a:spcAft>
+                <a:spcPts val="0"/>
+              </a:spcAft>
+            </a:pPr>
+            <a:r>
+              <a:rPr sz="960" b="0">
                 <a:solidFill>
                   <a:srgbClr val="2B312F"/>
                 </a:solidFill>
+                <a:latin typeface="PingFang SC"/>
+              </a:rPr>
+              <a:t>brighten_only 不过度路由</a:t>
+            </a:r>
+          </a:p>
+        </p:txBody>
+      </p:sp>
+      <p:sp>
+        <p:nvSpPr>
+          <p:cNvPr id="34" name="TextBox 33"/>
+          <p:cNvSpPr txBox="1"/>
+          <p:nvPr/>
+        </p:nvSpPr>
+        <p:spPr>
+          <a:xfrm>
+            <a:off x="7104888" y="4818888"/>
+            <a:ext cx="713232" cy="201168"/>
+          </a:xfrm>
+          <a:prstGeom prst="rect">
+            <a:avLst/>
+          </a:prstGeom>
+          <a:noFill/>
+        </p:spPr>
+        <p:txBody>
+          <a:bodyPr wrap="square" lIns="0" rIns="0" tIns="0" bIns="0" anchor="t">
+            <a:spAutoFit/>
+          </a:bodyPr>
+          <a:lstStyle/>
+          <a:p>
+            <a:pPr algn="l">
+              <a:lnSpc>
+                <a:spcPct val="108000"/>
+              </a:lnSpc>
+              <a:spcAft>
+                <a:spcPts val="0"/>
+              </a:spcAft>
+            </a:pPr>
+            <a:r>
+              <a:rPr sz="840" b="1">
+                <a:solidFill>
+                  <a:srgbClr val="A76509"/>
+                </a:solidFill>
+                <a:latin typeface="PingFang SC"/>
+              </a:rPr>
+              <a:t>Change</a:t>
+            </a:r>
+          </a:p>
+        </p:txBody>
+      </p:sp>
+      <p:sp>
+        <p:nvSpPr>
+          <p:cNvPr id="35" name="TextBox 34"/>
+          <p:cNvSpPr txBox="1"/>
+          <p:nvPr/>
+        </p:nvSpPr>
+        <p:spPr>
+          <a:xfrm>
+            <a:off x="7863840" y="4818888"/>
+            <a:ext cx="3566160" cy="201168"/>
+          </a:xfrm>
+          <a:prstGeom prst="rect">
+            <a:avLst/>
+          </a:prstGeom>
+          <a:noFill/>
+        </p:spPr>
+        <p:txBody>
+          <a:bodyPr wrap="square" lIns="0" rIns="0" tIns="0" bIns="0" anchor="t">
+            <a:spAutoFit/>
+          </a:bodyPr>
+          <a:lstStyle/>
+          <a:p>
+            <a:pPr algn="l">
+              <a:lnSpc>
+                <a:spcPct val="108000"/>
+              </a:lnSpc>
+              <a:spcAft>
+                <a:spcPts val="0"/>
+              </a:spcAft>
+            </a:pPr>
+            <a:r>
+              <a:rPr sz="960" b="0">
+                <a:solidFill>
+                  <a:srgbClr val="2B312F"/>
+                </a:solidFill>
+                <a:latin typeface="PingFang SC"/>
+              </a:rPr>
+              <a:t>asset miss 不编造 asset_id</a:t>
+            </a:r>
+          </a:p>
+        </p:txBody>
+      </p:sp>
+      <p:sp>
+        <p:nvSpPr>
+          <p:cNvPr id="36" name="TextBox 35"/>
+          <p:cNvSpPr txBox="1"/>
+          <p:nvPr/>
+        </p:nvSpPr>
+        <p:spPr>
+          <a:xfrm>
+            <a:off x="7104888" y="5138928"/>
+            <a:ext cx="713232" cy="201168"/>
+          </a:xfrm>
+          <a:prstGeom prst="rect">
+            <a:avLst/>
+          </a:prstGeom>
+          <a:noFill/>
+        </p:spPr>
+        <p:txBody>
+          <a:bodyPr wrap="square" lIns="0" rIns="0" tIns="0" bIns="0" anchor="t">
+            <a:spAutoFit/>
+          </a:bodyPr>
+          <a:lstStyle/>
+          <a:p>
+            <a:pPr algn="l">
+              <a:lnSpc>
+                <a:spcPct val="108000"/>
+              </a:lnSpc>
+              <a:spcAft>
+                <a:spcPts val="0"/>
+              </a:spcAft>
+            </a:pPr>
+            <a:r>
+              <a:rPr sz="840" b="1">
+                <a:solidFill>
+                  <a:srgbClr val="A76509"/>
+                </a:solidFill>
+                <a:latin typeface="PingFang SC"/>
+              </a:rPr>
+              <a:t>Change</a:t>
+            </a:r>
+          </a:p>
+        </p:txBody>
+      </p:sp>
+      <p:sp>
+        <p:nvSpPr>
+          <p:cNvPr id="37" name="TextBox 36"/>
+          <p:cNvSpPr txBox="1"/>
+          <p:nvPr/>
+        </p:nvSpPr>
+        <p:spPr>
+          <a:xfrm>
+            <a:off x="7863840" y="5138928"/>
+            <a:ext cx="3566160" cy="201168"/>
+          </a:xfrm>
+          <a:prstGeom prst="rect">
+            <a:avLst/>
+          </a:prstGeom>
+          <a:noFill/>
+        </p:spPr>
+        <p:txBody>
+          <a:bodyPr wrap="square" lIns="0" rIns="0" tIns="0" bIns="0" anchor="t">
+            <a:spAutoFit/>
+          </a:bodyPr>
+          <a:lstStyle/>
+          <a:p>
+            <a:pPr algn="l">
+              <a:lnSpc>
+                <a:spcPct val="108000"/>
+              </a:lnSpc>
+              <a:spcAft>
+                <a:spcPts val="0"/>
+              </a:spcAft>
+            </a:pPr>
+            <a:r>
+              <a:rPr sz="960" b="0">
+                <a:solidFill>
+                  <a:srgbClr val="2B312F"/>
+                </a:solidFill>
+                <a:latin typeface="PingFang SC"/>
+              </a:rPr>
+              <a:t>preserve_subject 跨工具传播</a:t>
+            </a:r>
+          </a:p>
+        </p:txBody>
+      </p:sp>
+      <p:sp>
+        <p:nvSpPr>
+          <p:cNvPr id="38" name="TextBox 37"/>
+          <p:cNvSpPr txBox="1"/>
+          <p:nvPr/>
+        </p:nvSpPr>
+        <p:spPr>
+          <a:xfrm>
+            <a:off x="7104888" y="5458968"/>
+            <a:ext cx="713232" cy="201168"/>
+          </a:xfrm>
+          <a:prstGeom prst="rect">
+            <a:avLst/>
+          </a:prstGeom>
+          <a:noFill/>
+        </p:spPr>
+        <p:txBody>
+          <a:bodyPr wrap="square" lIns="0" rIns="0" tIns="0" bIns="0" anchor="t">
+            <a:spAutoFit/>
+          </a:bodyPr>
+          <a:lstStyle/>
+          <a:p>
+            <a:pPr algn="l">
+              <a:lnSpc>
+                <a:spcPct val="108000"/>
+              </a:lnSpc>
+              <a:spcAft>
+                <a:spcPts val="0"/>
+              </a:spcAft>
+            </a:pPr>
+            <a:r>
+              <a:rPr sz="840" b="1">
+                <a:solidFill>
+                  <a:srgbClr val="285CF5"/>
+                </a:solidFill>
+                <a:latin typeface="PingFang SC"/>
+              </a:rPr>
+              <a:t>New</a:t>
+            </a:r>
+          </a:p>
+        </p:txBody>
+      </p:sp>
+      <p:sp>
+        <p:nvSpPr>
+          <p:cNvPr id="39" name="TextBox 38"/>
+          <p:cNvSpPr txBox="1"/>
+          <p:nvPr/>
+        </p:nvSpPr>
+        <p:spPr>
+          <a:xfrm>
+            <a:off x="7863840" y="5458968"/>
+            <a:ext cx="3566160" cy="201168"/>
+          </a:xfrm>
+          <a:prstGeom prst="rect">
+            <a:avLst/>
+          </a:prstGeom>
+          <a:noFill/>
+        </p:spPr>
+        <p:txBody>
+          <a:bodyPr wrap="square" lIns="0" rIns="0" tIns="0" bIns="0" anchor="t">
+            <a:spAutoFit/>
+          </a:bodyPr>
+          <a:lstStyle/>
+          <a:p>
+            <a:pPr algn="l">
+              <a:lnSpc>
+                <a:spcPct val="108000"/>
+              </a:lnSpc>
+              <a:spcAft>
+                <a:spcPts val="0"/>
+              </a:spcAft>
+            </a:pPr>
+            <a:r>
+              <a:rPr sz="960" b="0">
+                <a:solidFill>
+                  <a:srgbClr val="2B312F"/>
+                </a:solidFill>
+                <a:latin typeface="PingFang SC"/>
+              </a:rPr>
+              <a:t>一步完成不破坏专用工具边界</a:t>
+            </a:r>
+          </a:p>
+        </p:txBody>
+      </p:sp>
+      <p:sp>
+        <p:nvSpPr>
+          <p:cNvPr id="40" name="Rectangle 39"/>
+          <p:cNvSpPr/>
+          <p:nvPr/>
+        </p:nvSpPr>
+        <p:spPr>
+          <a:xfrm>
+            <a:off x="7086600" y="5833872"/>
+            <a:ext cx="4389120" cy="457200"/>
+          </a:xfrm>
+          <a:prstGeom prst="rect">
+            <a:avLst/>
+          </a:prstGeom>
+          <a:solidFill>
+            <a:srgbClr val="F8E7E4"/>
+          </a:solidFill>
+          <a:ln>
+            <a:noFill/>
+          </a:ln>
+        </p:spPr>
+        <p:style>
+          <a:lnRef idx="1">
+            <a:schemeClr val="accent1"/>
+          </a:lnRef>
+          <a:fillRef idx="3">
+            <a:schemeClr val="accent1"/>
+          </a:fillRef>
+          <a:effectRef idx="2">
+            <a:schemeClr val="accent1"/>
+          </a:effectRef>
+          <a:fontRef idx="minor">
+            <a:schemeClr val="lt1"/>
+          </a:fontRef>
+        </p:style>
+        <p:txBody>
+          <a:bodyPr rtlCol="0" anchor="ctr"/>
+          <a:lstStyle/>
+          <a:p>
+            <a:pPr algn="ctr"/>
+          </a:p>
+        </p:txBody>
+      </p:sp>
+      <p:sp>
+        <p:nvSpPr>
+          <p:cNvPr id="41" name="TextBox 40"/>
+          <p:cNvSpPr txBox="1"/>
+          <p:nvPr/>
+        </p:nvSpPr>
+        <p:spPr>
+          <a:xfrm>
+            <a:off x="7269480" y="5888736"/>
+            <a:ext cx="4069080" cy="365760"/>
+          </a:xfrm>
+          <a:prstGeom prst="rect">
+            <a:avLst/>
+          </a:prstGeom>
+          <a:noFill/>
+        </p:spPr>
+        <p:txBody>
+          <a:bodyPr wrap="square" lIns="0" rIns="0" tIns="0" bIns="0" anchor="t">
+            <a:spAutoFit/>
+          </a:bodyPr>
+          <a:lstStyle/>
+          <a:p>
+            <a:pPr algn="l">
+              <a:lnSpc>
+                <a:spcPct val="115000"/>
+              </a:lnSpc>
+              <a:spcAft>
+                <a:spcPts val="0"/>
+              </a:spcAft>
+            </a:pPr>
+            <a:r>
+              <a:rPr sz="880" b="1">
+                <a:solidFill>
+                  <a:srgbClr val="C84438"/>
+                </a:solidFill>
+                <a:latin typeface="PingFang SC"/>
+              </a:rPr>
+              <a:t>Draft → 人工审核 → approved；</a:t>
+            </a:r>
+          </a:p>
+          <a:p>
+            <a:pPr algn="l">
+              <a:lnSpc>
+                <a:spcPct val="115000"/>
+              </a:lnSpc>
+              <a:spcAft>
+                <a:spcPts val="0"/>
+              </a:spcAft>
+            </a:pPr>
+            <a:r>
+              <a:rPr sz="880" b="1">
+                <a:solidFill>
+                  <a:srgbClr val="C84438"/>
+                </a:solidFill>
+                <a:latin typeface="PingFang SC"/>
+              </a:rPr>
+              <a:t>创建者不能批准自己创建的资产</a:t>
+            </a:r>
+          </a:p>
+        </p:txBody>
+      </p:sp>
+      <p:sp>
+        <p:nvSpPr>
+          <p:cNvPr id="42" name="TextBox 41"/>
+          <p:cNvSpPr txBox="1"/>
+          <p:nvPr/>
+        </p:nvSpPr>
+        <p:spPr>
+          <a:xfrm>
+            <a:off x="713232" y="6272784"/>
+            <a:ext cx="6035040" cy="219456"/>
+          </a:xfrm>
+          <a:prstGeom prst="rect">
+            <a:avLst/>
+          </a:prstGeom>
+          <a:noFill/>
+        </p:spPr>
+        <p:txBody>
+          <a:bodyPr wrap="square" lIns="0" rIns="0" tIns="0" bIns="0" anchor="t">
+            <a:spAutoFit/>
+          </a:bodyPr>
+          <a:lstStyle/>
+          <a:p>
+            <a:pPr algn="l">
+              <a:lnSpc>
+                <a:spcPct val="108000"/>
+              </a:lnSpc>
+              <a:spcAft>
+                <a:spcPts val="0"/>
+              </a:spcAft>
+            </a:pPr>
+            <a:r>
+              <a:rPr sz="860" b="0">
+                <a:solidFill>
+                  <a:srgbClr val="67706B"/>
+                </a:solidFill>
                 <a:latin typeface="Menlo"/>
               </a:rPr>
-              <a:t>brighten_only_no_over_routing</a:t>
-            </a:r>
-          </a:p>
-        </p:txBody>
-      </p:sp>
-      <p:sp>
-        <p:nvSpPr>
-          <p:cNvPr id="32" name="TextBox 31"/>
-          <p:cNvSpPr txBox="1"/>
-          <p:nvPr/>
-        </p:nvSpPr>
-        <p:spPr>
-          <a:xfrm>
-            <a:off x="4983480" y="4736592"/>
-            <a:ext cx="5897880" cy="201168"/>
-          </a:xfrm>
-          <a:prstGeom prst="rect">
-            <a:avLst/>
-          </a:prstGeom>
-          <a:noFill/>
-        </p:spPr>
-        <p:txBody>
-          <a:bodyPr wrap="square" lIns="0" rIns="0" tIns="0" bIns="0" anchor="t">
-            <a:spAutoFit/>
-          </a:bodyPr>
-          <a:lstStyle/>
-          <a:p>
-            <a:pPr algn="l">
-              <a:lnSpc>
-                <a:spcPct val="108000"/>
-              </a:lnSpc>
-              <a:spcAft>
-                <a:spcPts val="0"/>
-              </a:spcAft>
-            </a:pPr>
-            <a:r>
-              <a:rPr sz="960" b="0">
-                <a:solidFill>
-                  <a:srgbClr val="67706B"/>
-                </a:solidFill>
-                <a:latin typeface="PingFang SC"/>
-              </a:rPr>
-              <a:t>简单调亮不能拆成素材或裁剪</a:t>
-            </a:r>
-          </a:p>
-        </p:txBody>
-      </p:sp>
-      <p:sp>
-        <p:nvSpPr>
-          <p:cNvPr id="33" name="TextBox 32"/>
-          <p:cNvSpPr txBox="1"/>
-          <p:nvPr/>
-        </p:nvSpPr>
-        <p:spPr>
-          <a:xfrm>
-            <a:off x="749808" y="5102352"/>
-            <a:ext cx="713232" cy="201168"/>
-          </a:xfrm>
-          <a:prstGeom prst="rect">
-            <a:avLst/>
-          </a:prstGeom>
-          <a:noFill/>
-        </p:spPr>
-        <p:txBody>
-          <a:bodyPr wrap="square" lIns="0" rIns="0" tIns="0" bIns="0" anchor="t">
-            <a:spAutoFit/>
-          </a:bodyPr>
-          <a:lstStyle/>
-          <a:p>
-            <a:pPr algn="l">
-              <a:lnSpc>
-                <a:spcPct val="108000"/>
-              </a:lnSpc>
-              <a:spcAft>
-                <a:spcPts val="0"/>
-              </a:spcAft>
-            </a:pPr>
-            <a:r>
-              <a:rPr sz="860" b="1">
-                <a:solidFill>
-                  <a:srgbClr val="A76509"/>
-                </a:solidFill>
-                <a:latin typeface="PingFang SC"/>
-              </a:rPr>
-              <a:t>Change</a:t>
-            </a:r>
-          </a:p>
-        </p:txBody>
-      </p:sp>
-      <p:sp>
-        <p:nvSpPr>
-          <p:cNvPr id="34" name="TextBox 33"/>
-          <p:cNvSpPr txBox="1"/>
-          <p:nvPr/>
-        </p:nvSpPr>
-        <p:spPr>
-          <a:xfrm>
-            <a:off x="1554480" y="5102352"/>
-            <a:ext cx="3246120" cy="201168"/>
-          </a:xfrm>
-          <a:prstGeom prst="rect">
-            <a:avLst/>
-          </a:prstGeom>
-          <a:noFill/>
-        </p:spPr>
-        <p:txBody>
-          <a:bodyPr wrap="square" lIns="0" rIns="0" tIns="0" bIns="0" anchor="t">
-            <a:spAutoFit/>
-          </a:bodyPr>
-          <a:lstStyle/>
-          <a:p>
-            <a:pPr algn="l">
-              <a:lnSpc>
-                <a:spcPct val="108000"/>
-              </a:lnSpc>
-              <a:spcAft>
-                <a:spcPts val="0"/>
-              </a:spcAft>
-            </a:pPr>
-            <a:r>
-              <a:rPr sz="960" b="1">
-                <a:solidFill>
-                  <a:srgbClr val="2B312F"/>
-                </a:solidFill>
-                <a:latin typeface="Menlo"/>
-              </a:rPr>
-              <a:t>asset_search_miss_no_invention</a:t>
-            </a:r>
-          </a:p>
-        </p:txBody>
-      </p:sp>
-      <p:sp>
-        <p:nvSpPr>
-          <p:cNvPr id="35" name="TextBox 34"/>
-          <p:cNvSpPr txBox="1"/>
-          <p:nvPr/>
-        </p:nvSpPr>
-        <p:spPr>
-          <a:xfrm>
-            <a:off x="4983480" y="5102352"/>
-            <a:ext cx="5897880" cy="201168"/>
-          </a:xfrm>
-          <a:prstGeom prst="rect">
-            <a:avLst/>
-          </a:prstGeom>
-          <a:noFill/>
-        </p:spPr>
-        <p:txBody>
-          <a:bodyPr wrap="square" lIns="0" rIns="0" tIns="0" bIns="0" anchor="t">
-            <a:spAutoFit/>
-          </a:bodyPr>
-          <a:lstStyle/>
-          <a:p>
-            <a:pPr algn="l">
-              <a:lnSpc>
-                <a:spcPct val="108000"/>
-              </a:lnSpc>
-              <a:spcAft>
-                <a:spcPts val="0"/>
-              </a:spcAft>
-            </a:pPr>
-            <a:r>
-              <a:rPr sz="960" b="0">
-                <a:solidFill>
-                  <a:srgbClr val="67706B"/>
-                </a:solidFill>
-                <a:latin typeface="PingFang SC"/>
-              </a:rPr>
-              <a:t>搜索为空不能编造 asset_id</a:t>
-            </a:r>
-          </a:p>
-        </p:txBody>
-      </p:sp>
-      <p:sp>
-        <p:nvSpPr>
-          <p:cNvPr id="36" name="TextBox 35"/>
-          <p:cNvSpPr txBox="1"/>
-          <p:nvPr/>
-        </p:nvSpPr>
-        <p:spPr>
-          <a:xfrm>
-            <a:off x="749808" y="5468112"/>
-            <a:ext cx="713232" cy="201168"/>
-          </a:xfrm>
-          <a:prstGeom prst="rect">
-            <a:avLst/>
-          </a:prstGeom>
-          <a:noFill/>
-        </p:spPr>
-        <p:txBody>
-          <a:bodyPr wrap="square" lIns="0" rIns="0" tIns="0" bIns="0" anchor="t">
-            <a:spAutoFit/>
-          </a:bodyPr>
-          <a:lstStyle/>
-          <a:p>
-            <a:pPr algn="l">
-              <a:lnSpc>
-                <a:spcPct val="108000"/>
-              </a:lnSpc>
-              <a:spcAft>
-                <a:spcPts val="0"/>
-              </a:spcAft>
-            </a:pPr>
-            <a:r>
-              <a:rPr sz="860" b="1">
-                <a:solidFill>
-                  <a:srgbClr val="A76509"/>
-                </a:solidFill>
-                <a:latin typeface="PingFang SC"/>
-              </a:rPr>
-              <a:t>Change</a:t>
-            </a:r>
-          </a:p>
-        </p:txBody>
-      </p:sp>
-      <p:sp>
-        <p:nvSpPr>
-          <p:cNvPr id="37" name="TextBox 36"/>
-          <p:cNvSpPr txBox="1"/>
-          <p:nvPr/>
-        </p:nvSpPr>
-        <p:spPr>
-          <a:xfrm>
-            <a:off x="1554480" y="5468112"/>
-            <a:ext cx="3246120" cy="201168"/>
-          </a:xfrm>
-          <a:prstGeom prst="rect">
-            <a:avLst/>
-          </a:prstGeom>
-          <a:noFill/>
-        </p:spPr>
-        <p:txBody>
-          <a:bodyPr wrap="square" lIns="0" rIns="0" tIns="0" bIns="0" anchor="t">
-            <a:spAutoFit/>
-          </a:bodyPr>
-          <a:lstStyle/>
-          <a:p>
-            <a:pPr algn="l">
-              <a:lnSpc>
-                <a:spcPct val="108000"/>
-              </a:lnSpc>
-              <a:spcAft>
-                <a:spcPts val="0"/>
-              </a:spcAft>
-            </a:pPr>
-            <a:r>
-              <a:rPr sz="960" b="1">
-                <a:solidFill>
-                  <a:srgbClr val="2B312F"/>
-                </a:solidFill>
-                <a:latin typeface="Menlo"/>
-              </a:rPr>
-              <a:t>preserve_subject_propagation</a:t>
-            </a:r>
-          </a:p>
-        </p:txBody>
-      </p:sp>
-      <p:sp>
-        <p:nvSpPr>
-          <p:cNvPr id="38" name="TextBox 37"/>
-          <p:cNvSpPr txBox="1"/>
-          <p:nvPr/>
-        </p:nvSpPr>
-        <p:spPr>
-          <a:xfrm>
-            <a:off x="4983480" y="5468112"/>
-            <a:ext cx="5897880" cy="201168"/>
-          </a:xfrm>
-          <a:prstGeom prst="rect">
-            <a:avLst/>
-          </a:prstGeom>
-          <a:noFill/>
-        </p:spPr>
-        <p:txBody>
-          <a:bodyPr wrap="square" lIns="0" rIns="0" tIns="0" bIns="0" anchor="t">
-            <a:spAutoFit/>
-          </a:bodyPr>
-          <a:lstStyle/>
-          <a:p>
-            <a:pPr algn="l">
-              <a:lnSpc>
-                <a:spcPct val="108000"/>
-              </a:lnSpc>
-              <a:spcAft>
-                <a:spcPts val="0"/>
-              </a:spcAft>
-            </a:pPr>
-            <a:r>
-              <a:rPr sz="960" b="0">
-                <a:solidFill>
-                  <a:srgbClr val="67706B"/>
-                </a:solidFill>
-                <a:latin typeface="PingFang SC"/>
-              </a:rPr>
-              <a:t>人物保护必须跨工具传播</a:t>
-            </a:r>
-          </a:p>
-        </p:txBody>
-      </p:sp>
-      <p:sp>
-        <p:nvSpPr>
-          <p:cNvPr id="39" name="TextBox 38"/>
-          <p:cNvSpPr txBox="1"/>
-          <p:nvPr/>
-        </p:nvSpPr>
-        <p:spPr>
-          <a:xfrm>
-            <a:off x="749808" y="5833872"/>
-            <a:ext cx="713232" cy="201168"/>
-          </a:xfrm>
-          <a:prstGeom prst="rect">
-            <a:avLst/>
-          </a:prstGeom>
-          <a:noFill/>
-        </p:spPr>
-        <p:txBody>
-          <a:bodyPr wrap="square" lIns="0" rIns="0" tIns="0" bIns="0" anchor="t">
-            <a:spAutoFit/>
-          </a:bodyPr>
-          <a:lstStyle/>
-          <a:p>
-            <a:pPr algn="l">
-              <a:lnSpc>
-                <a:spcPct val="108000"/>
-              </a:lnSpc>
-              <a:spcAft>
-                <a:spcPts val="0"/>
-              </a:spcAft>
-            </a:pPr>
-            <a:r>
-              <a:rPr sz="860" b="1">
-                <a:solidFill>
-                  <a:srgbClr val="285CF5"/>
-                </a:solidFill>
-                <a:latin typeface="PingFang SC"/>
-              </a:rPr>
-              <a:t>New</a:t>
-            </a:r>
-          </a:p>
-        </p:txBody>
-      </p:sp>
-      <p:sp>
-        <p:nvSpPr>
-          <p:cNvPr id="40" name="TextBox 39"/>
-          <p:cNvSpPr txBox="1"/>
-          <p:nvPr/>
-        </p:nvSpPr>
-        <p:spPr>
-          <a:xfrm>
-            <a:off x="1554480" y="5833872"/>
-            <a:ext cx="3246120" cy="201168"/>
-          </a:xfrm>
-          <a:prstGeom prst="rect">
-            <a:avLst/>
-          </a:prstGeom>
-          <a:noFill/>
-        </p:spPr>
-        <p:txBody>
-          <a:bodyPr wrap="square" lIns="0" rIns="0" tIns="0" bIns="0" anchor="t">
-            <a:spAutoFit/>
-          </a:bodyPr>
-          <a:lstStyle/>
-          <a:p>
-            <a:pPr algn="l">
-              <a:lnSpc>
-                <a:spcPct val="108000"/>
-              </a:lnSpc>
-              <a:spcAft>
-                <a:spcPts val="0"/>
-              </a:spcAft>
-            </a:pPr>
-            <a:r>
-              <a:rPr sz="960" b="1">
-                <a:solidFill>
-                  <a:srgbClr val="2B312F"/>
-                </a:solidFill>
-                <a:latin typeface="Menlo"/>
-              </a:rPr>
-              <a:t>one_step_mixed_chain_boundary</a:t>
-            </a:r>
-          </a:p>
-        </p:txBody>
-      </p:sp>
-      <p:sp>
-        <p:nvSpPr>
-          <p:cNvPr id="41" name="TextBox 40"/>
-          <p:cNvSpPr txBox="1"/>
-          <p:nvPr/>
-        </p:nvSpPr>
-        <p:spPr>
-          <a:xfrm>
-            <a:off x="4983480" y="5833872"/>
-            <a:ext cx="5897880" cy="201168"/>
-          </a:xfrm>
-          <a:prstGeom prst="rect">
-            <a:avLst/>
-          </a:prstGeom>
-          <a:noFill/>
-        </p:spPr>
-        <p:txBody>
-          <a:bodyPr wrap="square" lIns="0" rIns="0" tIns="0" bIns="0" anchor="t">
-            <a:spAutoFit/>
-          </a:bodyPr>
-          <a:lstStyle/>
-          <a:p>
-            <a:pPr algn="l">
-              <a:lnSpc>
-                <a:spcPct val="108000"/>
-              </a:lnSpc>
-              <a:spcAft>
-                <a:spcPts val="0"/>
-              </a:spcAft>
-            </a:pPr>
-            <a:r>
-              <a:rPr sz="960" b="0">
-                <a:solidFill>
-                  <a:srgbClr val="67706B"/>
-                </a:solidFill>
-                <a:latin typeface="PingFang SC"/>
-              </a:rPr>
-              <a:t>一步完成也不能绕过专用工具边界</a:t>
-            </a:r>
-          </a:p>
-        </p:txBody>
-      </p:sp>
-      <p:sp>
-        <p:nvSpPr>
-          <p:cNvPr id="42" name="TextBox 41"/>
-          <p:cNvSpPr txBox="1"/>
-          <p:nvPr/>
-        </p:nvSpPr>
-        <p:spPr>
-          <a:xfrm>
-            <a:off x="1920240" y="6190488"/>
-            <a:ext cx="8321040" cy="201168"/>
-          </a:xfrm>
-          <a:prstGeom prst="rect">
-            <a:avLst/>
-          </a:prstGeom>
-          <a:noFill/>
-        </p:spPr>
-        <p:txBody>
-          <a:bodyPr wrap="square" lIns="0" rIns="0" tIns="0" bIns="0" anchor="t">
-            <a:spAutoFit/>
-          </a:bodyPr>
-          <a:lstStyle/>
-          <a:p>
-            <a:pPr algn="ctr">
-              <a:lnSpc>
-                <a:spcPct val="108000"/>
-              </a:lnSpc>
-              <a:spcAft>
-                <a:spcPts val="0"/>
-              </a:spcAft>
-            </a:pPr>
-            <a:r>
-              <a:rPr sz="980" b="1">
-                <a:solidFill>
-                  <a:srgbClr val="C84438"/>
-                </a:solidFill>
-                <a:latin typeface="PingFang SC"/>
-              </a:rPr>
-              <a:t>Draft → 人工审核 → approved；创建者不能批准自己创建的资产。</a:t>
+              <a:t>迭代存档 docs/prompt-iterations/PI-20260814-01：before/after Prompt · 身份 · 用例 · Run · 指标 · 报告</a:t>
             </a:r>
           </a:p>
         </p:txBody>

--- a/docs/competition/AgentRig-GOAI-2026-初赛方案.pptx
+++ b/docs/competition/AgentRig-GOAI-2026-初赛方案.pptx
@@ -3678,7 +3678,7 @@
                 </a:solidFill>
                 <a:latin typeface="PingFang SC"/>
               </a:rPr>
-              <a:t>公开脱敏 Agent · 真实 Agno + DeepSeek · 本地可复现</a:t>
+              <a:t>公开 Agent · 真实 Agno + DeepSeek · 本地可复现</a:t>
             </a:r>
           </a:p>
         </p:txBody>
@@ -10674,7 +10674,7 @@
                 </a:solidFill>
                 <a:latin typeface="Menlo"/>
               </a:rPr>
-              <a:t>真实工程 Skill 生态（lassist · 已脱敏）</a:t>
+              <a:t>真实工程 Skill 生态（lassist 生产 Agent 工程）</a:t>
             </a:r>
           </a:p>
         </p:txBody>
@@ -18733,7 +18733,7 @@
                 </a:solidFill>
                 <a:latin typeface="PingFang SC"/>
               </a:rPr>
-              <a:t>EditFlow：可复现、可脱敏、仍然足够真实</a:t>
+              <a:t>EditFlow：可公开、可复现、仍然足够真实</a:t>
             </a:r>
           </a:p>
         </p:txBody>

--- a/docs/competition/AgentRig-GOAI-2026-初赛方案.pptx
+++ b/docs/competition/AgentRig-GOAI-2026-初赛方案.pptx
@@ -21,6 +21,8 @@
     <p:sldId id="269" r:id="rId20"/>
     <p:sldId id="270" r:id="rId21"/>
     <p:sldId id="271" r:id="rId22"/>
+    <p:sldId id="272" r:id="rId23"/>
+    <p:sldId id="273" r:id="rId24"/>
   </p:sldIdLst>
   <p:sldSz cx="12191695" cy="6858000" type="screen4x3"/>
   <p:notesSz cx="6858000" cy="9144000"/>
@@ -3804,7 +3806,7 @@
                 </a:solidFill>
                 <a:latin typeface="Helvetica Neue"/>
               </a:rPr>
-              <a:t>01 / 16</a:t>
+              <a:t>01 / 18</a:t>
             </a:r>
           </a:p>
         </p:txBody>
@@ -4125,7 +4127,7 @@
                 </a:solidFill>
                 <a:latin typeface="Helvetica Neue"/>
               </a:rPr>
-              <a:t>10 / 16</a:t>
+              <a:t>10 / 18</a:t>
             </a:r>
           </a:p>
         </p:txBody>
@@ -5040,7 +5042,7 @@
                 </a:solidFill>
                 <a:latin typeface="Helvetica Neue"/>
               </a:rPr>
-              <a:t>11 / 16</a:t>
+              <a:t>11 / 18</a:t>
             </a:r>
           </a:p>
         </p:txBody>
@@ -6188,7 +6190,7 @@
                 </a:solidFill>
                 <a:latin typeface="Helvetica Neue"/>
               </a:rPr>
-              <a:t>12 / 16</a:t>
+              <a:t>12 / 18</a:t>
             </a:r>
           </a:p>
         </p:txBody>
@@ -8042,7 +8044,7 @@
                 </a:solidFill>
                 <a:latin typeface="Helvetica Neue"/>
               </a:rPr>
-              <a:t>13 / 16</a:t>
+              <a:t>13 / 18</a:t>
             </a:r>
           </a:p>
         </p:txBody>
@@ -8915,7 +8917,7 @@
                 </a:solidFill>
                 <a:latin typeface="Helvetica Neue"/>
               </a:rPr>
-              <a:t>14 / 16</a:t>
+              <a:t>14 / 18</a:t>
             </a:r>
           </a:p>
         </p:txBody>
@@ -10563,7 +10565,7 @@
                 </a:solidFill>
                 <a:latin typeface="Helvetica Neue"/>
               </a:rPr>
-              <a:t>15 / 16</a:t>
+              <a:t>15 / 18</a:t>
             </a:r>
           </a:p>
         </p:txBody>
@@ -11469,7 +11471,7 @@
                 </a:solidFill>
                 <a:latin typeface="PingFang SC"/>
               </a:rPr>
-              <a:t>证据台账</a:t>
+              <a:t>真实生产使用</a:t>
             </a:r>
           </a:p>
         </p:txBody>
@@ -11511,7 +11513,7 @@
                 </a:solidFill>
                 <a:latin typeface="PingFang SC"/>
               </a:rPr>
-              <a:t>正式录制已闭环；全部证据来自干净录制库</a:t>
+              <a:t>同一个 Skill，在真实生产 Agent 工程里天天在跑</a:t>
             </a:r>
           </a:p>
         </p:txBody>
@@ -11553,7 +11555,7 @@
                 </a:solidFill>
                 <a:latin typeface="PingFang SC"/>
               </a:rPr>
-              <a:t>已证明的事实与尚未证明的边界必须同时出现在结论里。</a:t>
+              <a:t>Claude Code / Codex 按 prompt-regression-governance 驱动真实项目的提示词优化与回归验收。</a:t>
             </a:r>
           </a:p>
         </p:txBody>
@@ -11722,7 +11724,7 @@
                 </a:solidFill>
                 <a:latin typeface="Helvetica Neue"/>
               </a:rPr>
-              <a:t>16 / 16</a:t>
+              <a:t>16 / 18</a:t>
             </a:r>
           </a:p>
         </p:txBody>
@@ -11735,8 +11737,8 @@
         </p:nvSpPr>
         <p:spPr>
           <a:xfrm>
-            <a:off x="713232" y="1847088"/>
-            <a:ext cx="3364992" cy="841248"/>
+            <a:off x="640080" y="1810512"/>
+            <a:ext cx="6620256" cy="3685032"/>
           </a:xfrm>
           <a:prstGeom prst="rect">
             <a:avLst/>
@@ -11772,142 +11774,82 @@
           </a:p>
         </p:txBody>
       </p:sp>
-      <p:sp>
-        <p:nvSpPr>
-          <p:cNvPr id="10" name="TextBox 9"/>
-          <p:cNvSpPr txBox="1"/>
-          <p:nvPr/>
-        </p:nvSpPr>
-        <p:spPr>
-          <a:xfrm>
-            <a:off x="932688" y="1993392"/>
-            <a:ext cx="1234440" cy="201168"/>
-          </a:xfrm>
-          <a:prstGeom prst="rect">
-            <a:avLst/>
-          </a:prstGeom>
-          <a:noFill/>
-        </p:spPr>
-        <p:txBody>
-          <a:bodyPr wrap="square" lIns="0" rIns="0" tIns="0" bIns="0" anchor="t">
-            <a:spAutoFit/>
-          </a:bodyPr>
-          <a:lstStyle/>
-          <a:p>
-            <a:pPr algn="l">
-              <a:lnSpc>
-                <a:spcPct val="108000"/>
-              </a:lnSpc>
-              <a:spcAft>
-                <a:spcPts val="0"/>
-              </a:spcAft>
-            </a:pPr>
-            <a:r>
-              <a:rPr sz="950" b="1">
+      <p:pic>
+        <p:nvPicPr>
+          <p:cNvPr id="10" name="Picture 9" descr="prod-live-01-session.png"/>
+          <p:cNvPicPr>
+            <a:picLocks noChangeAspect="1"/>
+          </p:cNvPicPr>
+          <p:nvPr/>
+        </p:nvPicPr>
+        <p:blipFill>
+          <a:blip r:embed="rId2"/>
+          <a:stretch>
+            <a:fillRect/>
+          </a:stretch>
+        </p:blipFill>
+        <p:spPr>
+          <a:xfrm>
+            <a:off x="658368" y="1828800"/>
+            <a:ext cx="6583680" cy="3648456"/>
+          </a:xfrm>
+          <a:prstGeom prst="rect">
+            <a:avLst/>
+          </a:prstGeom>
+        </p:spPr>
+      </p:pic>
+      <p:sp>
+        <p:nvSpPr>
+          <p:cNvPr id="11" name="TextBox 10"/>
+          <p:cNvSpPr txBox="1"/>
+          <p:nvPr/>
+        </p:nvSpPr>
+        <p:spPr>
+          <a:xfrm>
+            <a:off x="658368" y="5596128"/>
+            <a:ext cx="6583680" cy="219456"/>
+          </a:xfrm>
+          <a:prstGeom prst="rect">
+            <a:avLst/>
+          </a:prstGeom>
+          <a:noFill/>
+        </p:spPr>
+        <p:txBody>
+          <a:bodyPr wrap="square" lIns="0" rIns="0" tIns="0" bIns="0" anchor="t">
+            <a:spAutoFit/>
+          </a:bodyPr>
+          <a:lstStyle/>
+          <a:p>
+            <a:pPr algn="l">
+              <a:lnSpc>
+                <a:spcPct val="108000"/>
+              </a:lnSpc>
+              <a:spcAft>
+                <a:spcPts val="0"/>
+              </a:spcAft>
+            </a:pPr>
+            <a:r>
+              <a:rPr sz="919" b="0">
                 <a:solidFill>
                   <a:srgbClr val="67706B"/>
                 </a:solidFill>
-                <a:latin typeface="PingFang SC"/>
-              </a:rPr>
-              <a:t>Before</a:t>
-            </a:r>
-          </a:p>
-        </p:txBody>
-      </p:sp>
-      <p:sp>
-        <p:nvSpPr>
-          <p:cNvPr id="11" name="TextBox 10"/>
-          <p:cNvSpPr txBox="1"/>
-          <p:nvPr/>
-        </p:nvSpPr>
-        <p:spPr>
-          <a:xfrm>
-            <a:off x="2066543" y="1965960"/>
-            <a:ext cx="960120" cy="274320"/>
-          </a:xfrm>
-          <a:prstGeom prst="rect">
-            <a:avLst/>
-          </a:prstGeom>
-          <a:noFill/>
-        </p:spPr>
-        <p:txBody>
-          <a:bodyPr wrap="square" lIns="0" rIns="0" tIns="0" bIns="0" anchor="t">
-            <a:spAutoFit/>
-          </a:bodyPr>
-          <a:lstStyle/>
-          <a:p>
-            <a:pPr algn="l">
-              <a:lnSpc>
-                <a:spcPct val="108000"/>
-              </a:lnSpc>
-              <a:spcAft>
-                <a:spcPts val="0"/>
-              </a:spcAft>
-            </a:pPr>
-            <a:r>
-              <a:rPr sz="1400" b="1">
-                <a:solidFill>
-                  <a:srgbClr val="C84438"/>
-                </a:solidFill>
-                <a:latin typeface="Helvetica Neue"/>
-              </a:rPr>
-              <a:t>2 / 5</a:t>
-            </a:r>
-          </a:p>
-        </p:txBody>
-      </p:sp>
-      <p:sp>
-        <p:nvSpPr>
-          <p:cNvPr id="12" name="TextBox 11"/>
-          <p:cNvSpPr txBox="1"/>
-          <p:nvPr/>
-        </p:nvSpPr>
-        <p:spPr>
-          <a:xfrm>
-            <a:off x="2953512" y="2002536"/>
-            <a:ext cx="914400" cy="256032"/>
-          </a:xfrm>
-          <a:prstGeom prst="rect">
-            <a:avLst/>
-          </a:prstGeom>
-          <a:noFill/>
-        </p:spPr>
-        <p:txBody>
-          <a:bodyPr wrap="square" lIns="0" rIns="0" tIns="0" bIns="0" anchor="t">
-            <a:spAutoFit/>
-          </a:bodyPr>
-          <a:lstStyle/>
-          <a:p>
-            <a:pPr algn="l">
-              <a:lnSpc>
-                <a:spcPct val="108000"/>
-              </a:lnSpc>
-              <a:spcAft>
-                <a:spcPts val="0"/>
-              </a:spcAft>
-            </a:pPr>
-            <a:r>
-              <a:rPr sz="860" b="0">
-                <a:solidFill>
-                  <a:srgbClr val="67706B"/>
-                </a:solidFill>
-                <a:latin typeface="PingFang SC"/>
-              </a:rPr>
-              <a:t>3 次行为失败</a:t>
-            </a:r>
-          </a:p>
-        </p:txBody>
-      </p:sp>
-      <p:sp>
-        <p:nvSpPr>
-          <p:cNvPr id="13" name="Rectangle 12"/>
+                <a:latin typeface="Menlo"/>
+              </a:rPr>
+              <a:t>goal 模式整段执行：建 PI 档案 → 冻结基线 → 精读能力路由 → 手术级 diff 瘦身</a:t>
+            </a:r>
+          </a:p>
+        </p:txBody>
+      </p:sp>
+      <p:sp>
+        <p:nvSpPr>
+          <p:cNvPr id="12" name="Rectangle 11"/>
           <p:cNvSpPr/>
           <p:nvPr/>
         </p:nvSpPr>
         <p:spPr>
           <a:xfrm>
-            <a:off x="4398264" y="1847088"/>
-            <a:ext cx="3364992" cy="841248"/>
+            <a:off x="7406640" y="1810512"/>
+            <a:ext cx="4078224" cy="2276856"/>
           </a:xfrm>
           <a:prstGeom prst="rect">
             <a:avLst/>
@@ -11943,142 +11885,40 @@
           </a:p>
         </p:txBody>
       </p:sp>
-      <p:sp>
-        <p:nvSpPr>
-          <p:cNvPr id="14" name="TextBox 13"/>
-          <p:cNvSpPr txBox="1"/>
-          <p:nvPr/>
-        </p:nvSpPr>
-        <p:spPr>
-          <a:xfrm>
-            <a:off x="4617720" y="1993392"/>
-            <a:ext cx="1234440" cy="201168"/>
-          </a:xfrm>
-          <a:prstGeom prst="rect">
-            <a:avLst/>
-          </a:prstGeom>
-          <a:noFill/>
-        </p:spPr>
-        <p:txBody>
-          <a:bodyPr wrap="square" lIns="0" rIns="0" tIns="0" bIns="0" anchor="t">
-            <a:spAutoFit/>
-          </a:bodyPr>
-          <a:lstStyle/>
-          <a:p>
-            <a:pPr algn="l">
-              <a:lnSpc>
-                <a:spcPct val="108000"/>
-              </a:lnSpc>
-              <a:spcAft>
-                <a:spcPts val="0"/>
-              </a:spcAft>
-            </a:pPr>
-            <a:r>
-              <a:rPr sz="950" b="1">
-                <a:solidFill>
-                  <a:srgbClr val="67706B"/>
-                </a:solidFill>
-                <a:latin typeface="PingFang SC"/>
-              </a:rPr>
-              <a:t>Headline</a:t>
-            </a:r>
-          </a:p>
-        </p:txBody>
-      </p:sp>
-      <p:sp>
-        <p:nvSpPr>
-          <p:cNvPr id="15" name="TextBox 14"/>
-          <p:cNvSpPr txBox="1"/>
-          <p:nvPr/>
-        </p:nvSpPr>
-        <p:spPr>
-          <a:xfrm>
-            <a:off x="5751576" y="1965960"/>
-            <a:ext cx="960120" cy="274320"/>
-          </a:xfrm>
-          <a:prstGeom prst="rect">
-            <a:avLst/>
-          </a:prstGeom>
-          <a:noFill/>
-        </p:spPr>
-        <p:txBody>
-          <a:bodyPr wrap="square" lIns="0" rIns="0" tIns="0" bIns="0" anchor="t">
-            <a:spAutoFit/>
-          </a:bodyPr>
-          <a:lstStyle/>
-          <a:p>
-            <a:pPr algn="l">
-              <a:lnSpc>
-                <a:spcPct val="108000"/>
-              </a:lnSpc>
-              <a:spcAft>
-                <a:spcPts val="0"/>
-              </a:spcAft>
-            </a:pPr>
-            <a:r>
-              <a:rPr sz="1400" b="1">
-                <a:solidFill>
-                  <a:srgbClr val="17745A"/>
-                </a:solidFill>
-                <a:latin typeface="Helvetica Neue"/>
-              </a:rPr>
-              <a:t>5 / 5</a:t>
-            </a:r>
-          </a:p>
-        </p:txBody>
-      </p:sp>
-      <p:sp>
-        <p:nvSpPr>
-          <p:cNvPr id="16" name="TextBox 15"/>
-          <p:cNvSpPr txBox="1"/>
-          <p:nvPr/>
-        </p:nvSpPr>
-        <p:spPr>
-          <a:xfrm>
-            <a:off x="6638544" y="2002536"/>
-            <a:ext cx="914400" cy="256032"/>
-          </a:xfrm>
-          <a:prstGeom prst="rect">
-            <a:avLst/>
-          </a:prstGeom>
-          <a:noFill/>
-        </p:spPr>
-        <p:txBody>
-          <a:bodyPr wrap="square" lIns="0" rIns="0" tIns="0" bIns="0" anchor="t">
-            <a:spAutoFit/>
-          </a:bodyPr>
-          <a:lstStyle/>
-          <a:p>
-            <a:pPr algn="l">
-              <a:lnSpc>
-                <a:spcPct val="108000"/>
-              </a:lnSpc>
-              <a:spcAft>
-                <a:spcPts val="0"/>
-              </a:spcAft>
-            </a:pPr>
-            <a:r>
-              <a:rPr sz="860" b="0">
-                <a:solidFill>
-                  <a:srgbClr val="67706B"/>
-                </a:solidFill>
-                <a:latin typeface="PingFang SC"/>
-              </a:rPr>
-              <a:t>同 Case + Manifest</a:t>
-            </a:r>
-          </a:p>
-        </p:txBody>
-      </p:sp>
-      <p:sp>
-        <p:nvSpPr>
-          <p:cNvPr id="17" name="Rectangle 16"/>
+      <p:pic>
+        <p:nvPicPr>
+          <p:cNvPr id="13" name="Picture 12" descr="prod-live-02-regression.png"/>
+          <p:cNvPicPr>
+            <a:picLocks noChangeAspect="1"/>
+          </p:cNvPicPr>
+          <p:nvPr/>
+        </p:nvPicPr>
+        <p:blipFill>
+          <a:blip r:embed="rId3"/>
+          <a:stretch>
+            <a:fillRect/>
+          </a:stretch>
+        </p:blipFill>
+        <p:spPr>
+          <a:xfrm>
+            <a:off x="7424927" y="1828800"/>
+            <a:ext cx="4041648" cy="2240280"/>
+          </a:xfrm>
+          <a:prstGeom prst="rect">
+            <a:avLst/>
+          </a:prstGeom>
+        </p:spPr>
+      </p:pic>
+      <p:sp>
+        <p:nvSpPr>
+          <p:cNvPr id="14" name="Rectangle 13"/>
           <p:cNvSpPr/>
           <p:nvPr/>
         </p:nvSpPr>
         <p:spPr>
           <a:xfrm>
-            <a:off x="8083296" y="1847088"/>
-            <a:ext cx="3364992" cy="841248"/>
+            <a:off x="7406640" y="4187952"/>
+            <a:ext cx="4078224" cy="2276856"/>
           </a:xfrm>
           <a:prstGeom prst="rect">
             <a:avLst/>
@@ -12114,142 +11954,445 @@
           </a:p>
         </p:txBody>
       </p:sp>
-      <p:sp>
-        <p:nvSpPr>
-          <p:cNvPr id="18" name="TextBox 17"/>
-          <p:cNvSpPr txBox="1"/>
-          <p:nvPr/>
-        </p:nvSpPr>
-        <p:spPr>
-          <a:xfrm>
-            <a:off x="8302752" y="1993392"/>
-            <a:ext cx="1234440" cy="201168"/>
-          </a:xfrm>
-          <a:prstGeom prst="rect">
-            <a:avLst/>
-          </a:prstGeom>
-          <a:noFill/>
-        </p:spPr>
-        <p:txBody>
-          <a:bodyPr wrap="square" lIns="0" rIns="0" tIns="0" bIns="0" anchor="t">
-            <a:spAutoFit/>
-          </a:bodyPr>
-          <a:lstStyle/>
-          <a:p>
-            <a:pPr algn="l">
-              <a:lnSpc>
-                <a:spcPct val="108000"/>
-              </a:lnSpc>
-              <a:spcAft>
-                <a:spcPts val="0"/>
-              </a:spcAft>
-            </a:pPr>
-            <a:r>
-              <a:rPr sz="950" b="1">
+      <p:pic>
+        <p:nvPicPr>
+          <p:cNvPr id="15" name="Picture 14" descr="prod-live-03-report.png"/>
+          <p:cNvPicPr>
+            <a:picLocks noChangeAspect="1"/>
+          </p:cNvPicPr>
+          <p:nvPr/>
+        </p:nvPicPr>
+        <p:blipFill>
+          <a:blip r:embed="rId4"/>
+          <a:stretch>
+            <a:fillRect/>
+          </a:stretch>
+        </p:blipFill>
+        <p:spPr>
+          <a:xfrm>
+            <a:off x="7424927" y="4206240"/>
+            <a:ext cx="4041648" cy="2240280"/>
+          </a:xfrm>
+          <a:prstGeom prst="rect">
+            <a:avLst/>
+          </a:prstGeom>
+        </p:spPr>
+      </p:pic>
+      <p:sp>
+        <p:nvSpPr>
+          <p:cNvPr id="16" name="TextBox 15"/>
+          <p:cNvSpPr txBox="1"/>
+          <p:nvPr/>
+        </p:nvSpPr>
+        <p:spPr>
+          <a:xfrm>
+            <a:off x="7424927" y="4078224"/>
+            <a:ext cx="4041648" cy="182880"/>
+          </a:xfrm>
+          <a:prstGeom prst="rect">
+            <a:avLst/>
+          </a:prstGeom>
+          <a:noFill/>
+        </p:spPr>
+        <p:txBody>
+          <a:bodyPr wrap="square" lIns="0" rIns="0" tIns="0" bIns="0" anchor="t">
+            <a:spAutoFit/>
+          </a:bodyPr>
+          <a:lstStyle/>
+          <a:p>
+            <a:pPr algn="l">
+              <a:lnSpc>
+                <a:spcPct val="108000"/>
+              </a:lnSpc>
+              <a:spcAft>
+                <a:spcPts val="0"/>
+              </a:spcAft>
+            </a:pPr>
+            <a:r>
+              <a:rPr sz="819" b="0">
                 <a:solidFill>
                   <a:srgbClr val="67706B"/>
                 </a:solidFill>
                 <a:latin typeface="PingFang SC"/>
               </a:rPr>
-              <a:t>Matrix</a:t>
-            </a:r>
-          </a:p>
-        </p:txBody>
-      </p:sp>
-      <p:sp>
-        <p:nvSpPr>
-          <p:cNvPr id="19" name="TextBox 18"/>
-          <p:cNvSpPr txBox="1"/>
-          <p:nvPr/>
-        </p:nvSpPr>
-        <p:spPr>
-          <a:xfrm>
-            <a:off x="9436608" y="1965960"/>
-            <a:ext cx="960120" cy="274320"/>
-          </a:xfrm>
-          <a:prstGeom prst="rect">
-            <a:avLst/>
-          </a:prstGeom>
-          <a:noFill/>
-        </p:spPr>
-        <p:txBody>
-          <a:bodyPr wrap="square" lIns="0" rIns="0" tIns="0" bIns="0" anchor="t">
-            <a:spAutoFit/>
-          </a:bodyPr>
-          <a:lstStyle/>
-          <a:p>
-            <a:pPr algn="l">
-              <a:lnSpc>
-                <a:spcPct val="108000"/>
-              </a:lnSpc>
-              <a:spcAft>
-                <a:spcPts val="0"/>
-              </a:spcAft>
-            </a:pPr>
-            <a:r>
-              <a:rPr sz="1400" b="1">
-                <a:solidFill>
-                  <a:srgbClr val="17745A"/>
+              <a:t>哨兵异常 → 归因 → 修用例/修输入</a:t>
+            </a:r>
+          </a:p>
+        </p:txBody>
+      </p:sp>
+      <p:sp>
+        <p:nvSpPr>
+          <p:cNvPr id="17" name="TextBox 16"/>
+          <p:cNvSpPr txBox="1"/>
+          <p:nvPr/>
+        </p:nvSpPr>
+        <p:spPr>
+          <a:xfrm>
+            <a:off x="7424927" y="6483096"/>
+            <a:ext cx="4041648" cy="182880"/>
+          </a:xfrm>
+          <a:prstGeom prst="rect">
+            <a:avLst/>
+          </a:prstGeom>
+          <a:noFill/>
+        </p:spPr>
+        <p:txBody>
+          <a:bodyPr wrap="square" lIns="0" rIns="0" tIns="0" bIns="0" anchor="t">
+            <a:spAutoFit/>
+          </a:bodyPr>
+          <a:lstStyle/>
+          <a:p>
+            <a:pPr algn="l">
+              <a:lnSpc>
+                <a:spcPct val="108000"/>
+              </a:lnSpc>
+              <a:spcAft>
+                <a:spcPts val="0"/>
+              </a:spcAft>
+            </a:pPr>
+            <a:r>
+              <a:rPr sz="819" b="0">
+                <a:solidFill>
+                  <a:srgbClr val="67706B"/>
+                </a:solidFill>
+                <a:latin typeface="PingFang SC"/>
+              </a:rPr>
+              <a:t>v4 终态:四表面 −16%,硬例 20/20</a:t>
+            </a:r>
+          </a:p>
+        </p:txBody>
+      </p:sp>
+    </p:spTree>
+  </p:cSld>
+  <p:clrMapOvr>
+    <a:masterClrMapping/>
+  </p:clrMapOvr>
+</p:sld>
+</file>
+
+<file path=ppt/slides/slide17.xml><?xml version="1.0" encoding="utf-8"?>
+<p:sld xmlns:a="http://schemas.openxmlformats.org/drawingml/2006/main" xmlns:p="http://schemas.openxmlformats.org/presentationml/2006/main" xmlns:r="http://schemas.openxmlformats.org/officeDocument/2006/relationships">
+  <p:cSld>
+    <p:bg>
+      <p:bgPr>
+        <a:solidFill>
+          <a:srgbClr val="F7F6F2"/>
+        </a:solidFill>
+        <a:effectLst/>
+      </p:bgPr>
+    </p:bg>
+    <p:spTree>
+      <p:nvGrpSpPr>
+        <p:cNvPr id="1" name=""/>
+        <p:cNvGrpSpPr/>
+        <p:nvPr/>
+      </p:nvGrpSpPr>
+      <p:grpSpPr/>
+      <p:sp>
+        <p:nvSpPr>
+          <p:cNvPr id="2" name="TextBox 1"/>
+          <p:cNvSpPr txBox="1"/>
+          <p:nvPr/>
+        </p:nvSpPr>
+        <p:spPr>
+          <a:xfrm>
+            <a:off x="658368" y="310896"/>
+            <a:ext cx="4754880" cy="182880"/>
+          </a:xfrm>
+          <a:prstGeom prst="rect">
+            <a:avLst/>
+          </a:prstGeom>
+          <a:noFill/>
+        </p:spPr>
+        <p:txBody>
+          <a:bodyPr wrap="square" lIns="0" rIns="0" tIns="0" bIns="0" anchor="t">
+            <a:spAutoFit/>
+          </a:bodyPr>
+          <a:lstStyle/>
+          <a:p>
+            <a:pPr algn="l">
+              <a:lnSpc>
+                <a:spcPct val="108000"/>
+              </a:lnSpc>
+              <a:spcAft>
+                <a:spcPts val="0"/>
+              </a:spcAft>
+            </a:pPr>
+            <a:r>
+              <a:rPr sz="850" b="1">
+                <a:solidFill>
+                  <a:srgbClr val="285CF5"/>
+                </a:solidFill>
+                <a:latin typeface="PingFang SC"/>
+              </a:rPr>
+              <a:t>生产级验收</a:t>
+            </a:r>
+          </a:p>
+        </p:txBody>
+      </p:sp>
+      <p:sp>
+        <p:nvSpPr>
+          <p:cNvPr id="3" name="TextBox 2"/>
+          <p:cNvSpPr txBox="1"/>
+          <p:nvPr/>
+        </p:nvSpPr>
+        <p:spPr>
+          <a:xfrm>
+            <a:off x="658368" y="649224"/>
+            <a:ext cx="10424160" cy="457200"/>
+          </a:xfrm>
+          <a:prstGeom prst="rect">
+            <a:avLst/>
+          </a:prstGeom>
+          <a:noFill/>
+        </p:spPr>
+        <p:txBody>
+          <a:bodyPr wrap="square" lIns="0" rIns="0" tIns="0" bIns="0" anchor="t">
+            <a:spAutoFit/>
+          </a:bodyPr>
+          <a:lstStyle/>
+          <a:p>
+            <a:pPr algn="l">
+              <a:lnSpc>
+                <a:spcPct val="108000"/>
+              </a:lnSpc>
+              <a:spcAft>
+                <a:spcPts val="0"/>
+              </a:spcAft>
+            </a:pPr>
+            <a:r>
+              <a:rPr sz="2700" b="1">
+                <a:solidFill>
+                  <a:srgbClr val="121617"/>
+                </a:solidFill>
+                <a:latin typeface="PingFang SC"/>
+              </a:rPr>
+              <a:t>生产项目的 PI 验收报告：实证迭代、如实披露</a:t>
+            </a:r>
+          </a:p>
+        </p:txBody>
+      </p:sp>
+      <p:sp>
+        <p:nvSpPr>
+          <p:cNvPr id="4" name="TextBox 3"/>
+          <p:cNvSpPr txBox="1"/>
+          <p:nvPr/>
+        </p:nvSpPr>
+        <p:spPr>
+          <a:xfrm>
+            <a:off x="676656" y="1161288"/>
+            <a:ext cx="10515600" cy="228600"/>
+          </a:xfrm>
+          <a:prstGeom prst="rect">
+            <a:avLst/>
+          </a:prstGeom>
+          <a:noFill/>
+        </p:spPr>
+        <p:txBody>
+          <a:bodyPr wrap="square" lIns="0" rIns="0" tIns="0" bIns="0" anchor="t">
+            <a:spAutoFit/>
+          </a:bodyPr>
+          <a:lstStyle/>
+          <a:p>
+            <a:pPr algn="l">
+              <a:lnSpc>
+                <a:spcPct val="108000"/>
+              </a:lnSpc>
+              <a:spcAft>
+                <a:spcPts val="0"/>
+              </a:spcAft>
+            </a:pPr>
+            <a:r>
+              <a:rPr sz="1019" b="0">
+                <a:solidFill>
+                  <a:srgbClr val="67706B"/>
+                </a:solidFill>
+                <a:latin typeface="PingFang SC"/>
+              </a:rPr>
+              <a:t>55 Cell 矩阵、2064 项单测基线、v1→v4 四轮输入修正与 before 归因闭环。</a:t>
+            </a:r>
+          </a:p>
+        </p:txBody>
+      </p:sp>
+      <p:sp>
+        <p:nvSpPr>
+          <p:cNvPr id="5" name="TextBox 4"/>
+          <p:cNvSpPr txBox="1"/>
+          <p:nvPr/>
+        </p:nvSpPr>
+        <p:spPr>
+          <a:xfrm>
+            <a:off x="11018520" y="338328"/>
+            <a:ext cx="502920" cy="182880"/>
+          </a:xfrm>
+          <a:prstGeom prst="rect">
+            <a:avLst/>
+          </a:prstGeom>
+          <a:noFill/>
+        </p:spPr>
+        <p:txBody>
+          <a:bodyPr wrap="square" lIns="0" rIns="0" tIns="0" bIns="0" anchor="t">
+            <a:spAutoFit/>
+          </a:bodyPr>
+          <a:lstStyle/>
+          <a:p>
+            <a:pPr algn="r">
+              <a:lnSpc>
+                <a:spcPct val="108000"/>
+              </a:lnSpc>
+              <a:spcAft>
+                <a:spcPts val="0"/>
+              </a:spcAft>
+            </a:pPr>
+            <a:r>
+              <a:rPr sz="900" b="1">
+                <a:solidFill>
+                  <a:srgbClr val="929A95"/>
                 </a:solidFill>
                 <a:latin typeface="Helvetica Neue"/>
               </a:rPr>
-              <a:t>30 / 30</a:t>
-            </a:r>
-          </a:p>
-        </p:txBody>
-      </p:sp>
-      <p:sp>
-        <p:nvSpPr>
-          <p:cNvPr id="20" name="TextBox 19"/>
-          <p:cNvSpPr txBox="1"/>
-          <p:nvPr/>
-        </p:nvSpPr>
-        <p:spPr>
-          <a:xfrm>
-            <a:off x="10323576" y="2002536"/>
-            <a:ext cx="914400" cy="256032"/>
-          </a:xfrm>
-          <a:prstGeom prst="rect">
-            <a:avLst/>
-          </a:prstGeom>
-          <a:noFill/>
-        </p:spPr>
-        <p:txBody>
-          <a:bodyPr wrap="square" lIns="0" rIns="0" tIns="0" bIns="0" anchor="t">
-            <a:spAutoFit/>
-          </a:bodyPr>
-          <a:lstStyle/>
-          <a:p>
-            <a:pPr algn="l">
-              <a:lnSpc>
-                <a:spcPct val="108000"/>
-              </a:lnSpc>
-              <a:spcAft>
-                <a:spcPts val="0"/>
-              </a:spcAft>
-            </a:pPr>
-            <a:r>
-              <a:rPr sz="860" b="0">
-                <a:solidFill>
-                  <a:srgbClr val="67706B"/>
-                </a:solidFill>
-                <a:latin typeface="PingFang SC"/>
-              </a:rPr>
-              <a:t>6 Cells</a:t>
-            </a:r>
-          </a:p>
-        </p:txBody>
-      </p:sp>
-      <p:sp>
-        <p:nvSpPr>
-          <p:cNvPr id="21" name="Rectangle 20"/>
+              <a:t>17</a:t>
+            </a:r>
+          </a:p>
+        </p:txBody>
+      </p:sp>
+      <p:sp>
+        <p:nvSpPr>
+          <p:cNvPr id="6" name="Rectangle 5"/>
           <p:cNvSpPr/>
           <p:nvPr/>
         </p:nvSpPr>
         <p:spPr>
           <a:xfrm>
-            <a:off x="713232" y="2898648"/>
-            <a:ext cx="3364992" cy="841248"/>
+            <a:off x="658368" y="1527048"/>
+            <a:ext cx="10881360" cy="10972"/>
+          </a:xfrm>
+          <a:prstGeom prst="rect">
+            <a:avLst/>
+          </a:prstGeom>
+          <a:solidFill>
+            <a:srgbClr val="D8DDD9"/>
+          </a:solidFill>
+          <a:ln>
+            <a:noFill/>
+          </a:ln>
+        </p:spPr>
+        <p:style>
+          <a:lnRef idx="1">
+            <a:schemeClr val="accent1"/>
+          </a:lnRef>
+          <a:fillRef idx="3">
+            <a:schemeClr val="accent1"/>
+          </a:fillRef>
+          <a:effectRef idx="2">
+            <a:schemeClr val="accent1"/>
+          </a:effectRef>
+          <a:fontRef idx="minor">
+            <a:schemeClr val="lt1"/>
+          </a:fontRef>
+        </p:style>
+        <p:txBody>
+          <a:bodyPr rtlCol="0" anchor="ctr"/>
+          <a:lstStyle/>
+          <a:p>
+            <a:pPr algn="ctr"/>
+          </a:p>
+        </p:txBody>
+      </p:sp>
+      <p:sp>
+        <p:nvSpPr>
+          <p:cNvPr id="7" name="TextBox 6"/>
+          <p:cNvSpPr txBox="1"/>
+          <p:nvPr/>
+        </p:nvSpPr>
+        <p:spPr>
+          <a:xfrm>
+            <a:off x="658368" y="6556248"/>
+            <a:ext cx="3200400" cy="137160"/>
+          </a:xfrm>
+          <a:prstGeom prst="rect">
+            <a:avLst/>
+          </a:prstGeom>
+          <a:noFill/>
+        </p:spPr>
+        <p:txBody>
+          <a:bodyPr wrap="square" lIns="0" rIns="0" tIns="0" bIns="0" anchor="t">
+            <a:spAutoFit/>
+          </a:bodyPr>
+          <a:lstStyle/>
+          <a:p>
+            <a:pPr algn="l">
+              <a:lnSpc>
+                <a:spcPct val="108000"/>
+              </a:lnSpc>
+              <a:spcAft>
+                <a:spcPts val="0"/>
+              </a:spcAft>
+            </a:pPr>
+            <a:r>
+              <a:rPr sz="700" b="0">
+                <a:solidFill>
+                  <a:srgbClr val="929A95"/>
+                </a:solidFill>
+                <a:latin typeface="PingFang SC"/>
+              </a:rPr>
+              <a:t>AgentRig · GOAI 2026 · REVIEW</a:t>
+            </a:r>
+          </a:p>
+        </p:txBody>
+      </p:sp>
+      <p:sp>
+        <p:nvSpPr>
+          <p:cNvPr id="8" name="TextBox 7"/>
+          <p:cNvSpPr txBox="1"/>
+          <p:nvPr/>
+        </p:nvSpPr>
+        <p:spPr>
+          <a:xfrm>
+            <a:off x="10652760" y="6556248"/>
+            <a:ext cx="877824" cy="137160"/>
+          </a:xfrm>
+          <a:prstGeom prst="rect">
+            <a:avLst/>
+          </a:prstGeom>
+          <a:noFill/>
+        </p:spPr>
+        <p:txBody>
+          <a:bodyPr wrap="square" lIns="0" rIns="0" tIns="0" bIns="0" anchor="t">
+            <a:spAutoFit/>
+          </a:bodyPr>
+          <a:lstStyle/>
+          <a:p>
+            <a:pPr algn="r">
+              <a:lnSpc>
+                <a:spcPct val="108000"/>
+              </a:lnSpc>
+              <a:spcAft>
+                <a:spcPts val="0"/>
+              </a:spcAft>
+            </a:pPr>
+            <a:r>
+              <a:rPr sz="700" b="0">
+                <a:solidFill>
+                  <a:srgbClr val="929A95"/>
+                </a:solidFill>
+                <a:latin typeface="Helvetica Neue"/>
+              </a:rPr>
+              <a:t>17 / 18</a:t>
+            </a:r>
+          </a:p>
+        </p:txBody>
+      </p:sp>
+      <p:sp>
+        <p:nvSpPr>
+          <p:cNvPr id="9" name="Rectangle 8"/>
+          <p:cNvSpPr/>
+          <p:nvPr/>
+        </p:nvSpPr>
+        <p:spPr>
+          <a:xfrm>
+            <a:off x="1335024" y="1828800"/>
+            <a:ext cx="9500615" cy="4261104"/>
           </a:xfrm>
           <a:prstGeom prst="rect">
             <a:avLst/>
@@ -12285,141 +12428,402 @@
           </a:p>
         </p:txBody>
       </p:sp>
-      <p:sp>
-        <p:nvSpPr>
-          <p:cNvPr id="22" name="TextBox 21"/>
-          <p:cNvSpPr txBox="1"/>
-          <p:nvPr/>
-        </p:nvSpPr>
-        <p:spPr>
-          <a:xfrm>
-            <a:off x="932688" y="3044952"/>
-            <a:ext cx="1234440" cy="201168"/>
-          </a:xfrm>
-          <a:prstGeom prst="rect">
-            <a:avLst/>
-          </a:prstGeom>
-          <a:noFill/>
-        </p:spPr>
-        <p:txBody>
-          <a:bodyPr wrap="square" lIns="0" rIns="0" tIns="0" bIns="0" anchor="t">
-            <a:spAutoFit/>
-          </a:bodyPr>
-          <a:lstStyle/>
-          <a:p>
-            <a:pPr algn="l">
-              <a:lnSpc>
-                <a:spcPct val="108000"/>
-              </a:lnSpc>
-              <a:spcAft>
-                <a:spcPts val="0"/>
-              </a:spcAft>
-            </a:pPr>
-            <a:r>
-              <a:rPr sz="950" b="1">
+      <p:pic>
+        <p:nvPicPr>
+          <p:cNvPr id="10" name="Picture 9" descr="prod-pi-report.png"/>
+          <p:cNvPicPr>
+            <a:picLocks noChangeAspect="1"/>
+          </p:cNvPicPr>
+          <p:nvPr/>
+        </p:nvPicPr>
+        <p:blipFill>
+          <a:blip r:embed="rId2"/>
+          <a:stretch>
+            <a:fillRect/>
+          </a:stretch>
+        </p:blipFill>
+        <p:spPr>
+          <a:xfrm>
+            <a:off x="1353312" y="1847088"/>
+            <a:ext cx="9464040" cy="4224528"/>
+          </a:xfrm>
+          <a:prstGeom prst="rect">
+            <a:avLst/>
+          </a:prstGeom>
+        </p:spPr>
+      </p:pic>
+      <p:sp>
+        <p:nvSpPr>
+          <p:cNvPr id="11" name="TextBox 10"/>
+          <p:cNvSpPr txBox="1"/>
+          <p:nvPr/>
+        </p:nvSpPr>
+        <p:spPr>
+          <a:xfrm>
+            <a:off x="1353312" y="6236208"/>
+            <a:ext cx="9464040" cy="219456"/>
+          </a:xfrm>
+          <a:prstGeom prst="rect">
+            <a:avLst/>
+          </a:prstGeom>
+          <a:noFill/>
+        </p:spPr>
+        <p:txBody>
+          <a:bodyPr wrap="square" lIns="0" rIns="0" tIns="0" bIns="0" anchor="t">
+            <a:spAutoFit/>
+          </a:bodyPr>
+          <a:lstStyle/>
+          <a:p>
+            <a:pPr algn="ctr">
+              <a:lnSpc>
+                <a:spcPct val="108000"/>
+              </a:lnSpc>
+              <a:spcAft>
+                <a:spcPts val="0"/>
+              </a:spcAft>
+            </a:pPr>
+            <a:r>
+              <a:rPr sz="919" b="0">
                 <a:solidFill>
                   <a:srgbClr val="67706B"/>
                 </a:solidFill>
-                <a:latin typeface="PingFang SC"/>
-              </a:rPr>
-              <a:t>Sample replay</a:t>
-            </a:r>
-          </a:p>
-        </p:txBody>
-      </p:sp>
-      <p:sp>
-        <p:nvSpPr>
-          <p:cNvPr id="23" name="TextBox 22"/>
-          <p:cNvSpPr txBox="1"/>
-          <p:nvPr/>
-        </p:nvSpPr>
-        <p:spPr>
-          <a:xfrm>
-            <a:off x="2066543" y="3017520"/>
-            <a:ext cx="960120" cy="274320"/>
-          </a:xfrm>
-          <a:prstGeom prst="rect">
-            <a:avLst/>
-          </a:prstGeom>
-          <a:noFill/>
-        </p:spPr>
-        <p:txBody>
-          <a:bodyPr wrap="square" lIns="0" rIns="0" tIns="0" bIns="0" anchor="t">
-            <a:spAutoFit/>
-          </a:bodyPr>
-          <a:lstStyle/>
-          <a:p>
-            <a:pPr algn="l">
-              <a:lnSpc>
-                <a:spcPct val="108000"/>
-              </a:lnSpc>
-              <a:spcAft>
-                <a:spcPts val="0"/>
-              </a:spcAft>
-            </a:pPr>
-            <a:r>
-              <a:rPr sz="1400" b="1">
-                <a:solidFill>
-                  <a:srgbClr val="17745A"/>
+                <a:latin typeface="Menlo"/>
+              </a:rPr>
+              <a:t>docs/prompt-iterations/…/PI-20260815-01 · decision: ACCEPT（带披露） · 硬性规则 20/20 · 语义 43 Cell 干净 + 1 Cell 4/5 披露</a:t>
+            </a:r>
+          </a:p>
+        </p:txBody>
+      </p:sp>
+    </p:spTree>
+  </p:cSld>
+  <p:clrMapOvr>
+    <a:masterClrMapping/>
+  </p:clrMapOvr>
+</p:sld>
+</file>
+
+<file path=ppt/slides/slide18.xml><?xml version="1.0" encoding="utf-8"?>
+<p:sld xmlns:a="http://schemas.openxmlformats.org/drawingml/2006/main" xmlns:p="http://schemas.openxmlformats.org/presentationml/2006/main" xmlns:r="http://schemas.openxmlformats.org/officeDocument/2006/relationships">
+  <p:cSld>
+    <p:bg>
+      <p:bgPr>
+        <a:solidFill>
+          <a:srgbClr val="F7F6F2"/>
+        </a:solidFill>
+        <a:effectLst/>
+      </p:bgPr>
+    </p:bg>
+    <p:spTree>
+      <p:nvGrpSpPr>
+        <p:cNvPr id="1" name=""/>
+        <p:cNvGrpSpPr/>
+        <p:nvPr/>
+      </p:nvGrpSpPr>
+      <p:grpSpPr/>
+      <p:sp>
+        <p:nvSpPr>
+          <p:cNvPr id="2" name="TextBox 1"/>
+          <p:cNvSpPr txBox="1"/>
+          <p:nvPr/>
+        </p:nvSpPr>
+        <p:spPr>
+          <a:xfrm>
+            <a:off x="658368" y="310896"/>
+            <a:ext cx="4754880" cy="182880"/>
+          </a:xfrm>
+          <a:prstGeom prst="rect">
+            <a:avLst/>
+          </a:prstGeom>
+          <a:noFill/>
+        </p:spPr>
+        <p:txBody>
+          <a:bodyPr wrap="square" lIns="0" rIns="0" tIns="0" bIns="0" anchor="t">
+            <a:spAutoFit/>
+          </a:bodyPr>
+          <a:lstStyle/>
+          <a:p>
+            <a:pPr algn="l">
+              <a:lnSpc>
+                <a:spcPct val="108000"/>
+              </a:lnSpc>
+              <a:spcAft>
+                <a:spcPts val="0"/>
+              </a:spcAft>
+            </a:pPr>
+            <a:r>
+              <a:rPr sz="850" b="1">
+                <a:solidFill>
+                  <a:srgbClr val="285CF5"/>
+                </a:solidFill>
+                <a:latin typeface="PingFang SC"/>
+              </a:rPr>
+              <a:t>证据台账</a:t>
+            </a:r>
+          </a:p>
+        </p:txBody>
+      </p:sp>
+      <p:sp>
+        <p:nvSpPr>
+          <p:cNvPr id="3" name="TextBox 2"/>
+          <p:cNvSpPr txBox="1"/>
+          <p:nvPr/>
+        </p:nvSpPr>
+        <p:spPr>
+          <a:xfrm>
+            <a:off x="658368" y="649224"/>
+            <a:ext cx="10424160" cy="457200"/>
+          </a:xfrm>
+          <a:prstGeom prst="rect">
+            <a:avLst/>
+          </a:prstGeom>
+          <a:noFill/>
+        </p:spPr>
+        <p:txBody>
+          <a:bodyPr wrap="square" lIns="0" rIns="0" tIns="0" bIns="0" anchor="t">
+            <a:spAutoFit/>
+          </a:bodyPr>
+          <a:lstStyle/>
+          <a:p>
+            <a:pPr algn="l">
+              <a:lnSpc>
+                <a:spcPct val="108000"/>
+              </a:lnSpc>
+              <a:spcAft>
+                <a:spcPts val="0"/>
+              </a:spcAft>
+            </a:pPr>
+            <a:r>
+              <a:rPr sz="2700" b="1">
+                <a:solidFill>
+                  <a:srgbClr val="121617"/>
+                </a:solidFill>
+                <a:latin typeface="PingFang SC"/>
+              </a:rPr>
+              <a:t>正式录制已闭环；全部证据来自干净录制库</a:t>
+            </a:r>
+          </a:p>
+        </p:txBody>
+      </p:sp>
+      <p:sp>
+        <p:nvSpPr>
+          <p:cNvPr id="4" name="TextBox 3"/>
+          <p:cNvSpPr txBox="1"/>
+          <p:nvPr/>
+        </p:nvSpPr>
+        <p:spPr>
+          <a:xfrm>
+            <a:off x="676656" y="1161288"/>
+            <a:ext cx="10515600" cy="228600"/>
+          </a:xfrm>
+          <a:prstGeom prst="rect">
+            <a:avLst/>
+          </a:prstGeom>
+          <a:noFill/>
+        </p:spPr>
+        <p:txBody>
+          <a:bodyPr wrap="square" lIns="0" rIns="0" tIns="0" bIns="0" anchor="t">
+            <a:spAutoFit/>
+          </a:bodyPr>
+          <a:lstStyle/>
+          <a:p>
+            <a:pPr algn="l">
+              <a:lnSpc>
+                <a:spcPct val="108000"/>
+              </a:lnSpc>
+              <a:spcAft>
+                <a:spcPts val="0"/>
+              </a:spcAft>
+            </a:pPr>
+            <a:r>
+              <a:rPr sz="1019" b="0">
+                <a:solidFill>
+                  <a:srgbClr val="67706B"/>
+                </a:solidFill>
+                <a:latin typeface="PingFang SC"/>
+              </a:rPr>
+              <a:t>已证明的事实与尚未证明的边界必须同时出现在结论里。</a:t>
+            </a:r>
+          </a:p>
+        </p:txBody>
+      </p:sp>
+      <p:sp>
+        <p:nvSpPr>
+          <p:cNvPr id="5" name="TextBox 4"/>
+          <p:cNvSpPr txBox="1"/>
+          <p:nvPr/>
+        </p:nvSpPr>
+        <p:spPr>
+          <a:xfrm>
+            <a:off x="11018520" y="338328"/>
+            <a:ext cx="502920" cy="182880"/>
+          </a:xfrm>
+          <a:prstGeom prst="rect">
+            <a:avLst/>
+          </a:prstGeom>
+          <a:noFill/>
+        </p:spPr>
+        <p:txBody>
+          <a:bodyPr wrap="square" lIns="0" rIns="0" tIns="0" bIns="0" anchor="t">
+            <a:spAutoFit/>
+          </a:bodyPr>
+          <a:lstStyle/>
+          <a:p>
+            <a:pPr algn="r">
+              <a:lnSpc>
+                <a:spcPct val="108000"/>
+              </a:lnSpc>
+              <a:spcAft>
+                <a:spcPts val="0"/>
+              </a:spcAft>
+            </a:pPr>
+            <a:r>
+              <a:rPr sz="900" b="1">
+                <a:solidFill>
+                  <a:srgbClr val="929A95"/>
                 </a:solidFill>
                 <a:latin typeface="Helvetica Neue"/>
               </a:rPr>
-              <a:t>5 / 5</a:t>
-            </a:r>
-          </a:p>
-        </p:txBody>
-      </p:sp>
-      <p:sp>
-        <p:nvSpPr>
-          <p:cNvPr id="24" name="TextBox 23"/>
-          <p:cNvSpPr txBox="1"/>
-          <p:nvPr/>
-        </p:nvSpPr>
-        <p:spPr>
-          <a:xfrm>
-            <a:off x="2953512" y="3054096"/>
-            <a:ext cx="914400" cy="256032"/>
-          </a:xfrm>
-          <a:prstGeom prst="rect">
-            <a:avLst/>
-          </a:prstGeom>
-          <a:noFill/>
-        </p:spPr>
-        <p:txBody>
-          <a:bodyPr wrap="square" lIns="0" rIns="0" tIns="0" bIns="0" anchor="t">
-            <a:spAutoFit/>
-          </a:bodyPr>
-          <a:lstStyle/>
-          <a:p>
-            <a:pPr algn="l">
-              <a:lnSpc>
-                <a:spcPct val="108000"/>
-              </a:lnSpc>
-              <a:spcAft>
-                <a:spcPts val="0"/>
-              </a:spcAft>
-            </a:pPr>
-            <a:r>
-              <a:rPr sz="860" b="0">
-                <a:solidFill>
-                  <a:srgbClr val="67706B"/>
-                </a:solidFill>
-                <a:latin typeface="PingFang SC"/>
-              </a:rPr>
-              <a:t>0 real_tool</a:t>
-            </a:r>
-          </a:p>
-        </p:txBody>
-      </p:sp>
-      <p:sp>
-        <p:nvSpPr>
-          <p:cNvPr id="25" name="Rectangle 24"/>
+              <a:t>18</a:t>
+            </a:r>
+          </a:p>
+        </p:txBody>
+      </p:sp>
+      <p:sp>
+        <p:nvSpPr>
+          <p:cNvPr id="6" name="Rectangle 5"/>
           <p:cNvSpPr/>
           <p:nvPr/>
         </p:nvSpPr>
         <p:spPr>
           <a:xfrm>
-            <a:off x="4398264" y="2898648"/>
+            <a:off x="658368" y="1527048"/>
+            <a:ext cx="10881360" cy="10972"/>
+          </a:xfrm>
+          <a:prstGeom prst="rect">
+            <a:avLst/>
+          </a:prstGeom>
+          <a:solidFill>
+            <a:srgbClr val="D8DDD9"/>
+          </a:solidFill>
+          <a:ln>
+            <a:noFill/>
+          </a:ln>
+        </p:spPr>
+        <p:style>
+          <a:lnRef idx="1">
+            <a:schemeClr val="accent1"/>
+          </a:lnRef>
+          <a:fillRef idx="3">
+            <a:schemeClr val="accent1"/>
+          </a:fillRef>
+          <a:effectRef idx="2">
+            <a:schemeClr val="accent1"/>
+          </a:effectRef>
+          <a:fontRef idx="minor">
+            <a:schemeClr val="lt1"/>
+          </a:fontRef>
+        </p:style>
+        <p:txBody>
+          <a:bodyPr rtlCol="0" anchor="ctr"/>
+          <a:lstStyle/>
+          <a:p>
+            <a:pPr algn="ctr"/>
+          </a:p>
+        </p:txBody>
+      </p:sp>
+      <p:sp>
+        <p:nvSpPr>
+          <p:cNvPr id="7" name="TextBox 6"/>
+          <p:cNvSpPr txBox="1"/>
+          <p:nvPr/>
+        </p:nvSpPr>
+        <p:spPr>
+          <a:xfrm>
+            <a:off x="658368" y="6556248"/>
+            <a:ext cx="3200400" cy="137160"/>
+          </a:xfrm>
+          <a:prstGeom prst="rect">
+            <a:avLst/>
+          </a:prstGeom>
+          <a:noFill/>
+        </p:spPr>
+        <p:txBody>
+          <a:bodyPr wrap="square" lIns="0" rIns="0" tIns="0" bIns="0" anchor="t">
+            <a:spAutoFit/>
+          </a:bodyPr>
+          <a:lstStyle/>
+          <a:p>
+            <a:pPr algn="l">
+              <a:lnSpc>
+                <a:spcPct val="108000"/>
+              </a:lnSpc>
+              <a:spcAft>
+                <a:spcPts val="0"/>
+              </a:spcAft>
+            </a:pPr>
+            <a:r>
+              <a:rPr sz="700" b="0">
+                <a:solidFill>
+                  <a:srgbClr val="929A95"/>
+                </a:solidFill>
+                <a:latin typeface="PingFang SC"/>
+              </a:rPr>
+              <a:t>AgentRig · GOAI 2026 · REVIEW</a:t>
+            </a:r>
+          </a:p>
+        </p:txBody>
+      </p:sp>
+      <p:sp>
+        <p:nvSpPr>
+          <p:cNvPr id="8" name="TextBox 7"/>
+          <p:cNvSpPr txBox="1"/>
+          <p:nvPr/>
+        </p:nvSpPr>
+        <p:spPr>
+          <a:xfrm>
+            <a:off x="10652760" y="6556248"/>
+            <a:ext cx="877824" cy="137160"/>
+          </a:xfrm>
+          <a:prstGeom prst="rect">
+            <a:avLst/>
+          </a:prstGeom>
+          <a:noFill/>
+        </p:spPr>
+        <p:txBody>
+          <a:bodyPr wrap="square" lIns="0" rIns="0" tIns="0" bIns="0" anchor="t">
+            <a:spAutoFit/>
+          </a:bodyPr>
+          <a:lstStyle/>
+          <a:p>
+            <a:pPr algn="r">
+              <a:lnSpc>
+                <a:spcPct val="108000"/>
+              </a:lnSpc>
+              <a:spcAft>
+                <a:spcPts val="0"/>
+              </a:spcAft>
+            </a:pPr>
+            <a:r>
+              <a:rPr sz="700" b="0">
+                <a:solidFill>
+                  <a:srgbClr val="929A95"/>
+                </a:solidFill>
+                <a:latin typeface="Helvetica Neue"/>
+              </a:rPr>
+              <a:t>18 / 18</a:t>
+            </a:r>
+          </a:p>
+        </p:txBody>
+      </p:sp>
+      <p:sp>
+        <p:nvSpPr>
+          <p:cNvPr id="9" name="Rectangle 8"/>
+          <p:cNvSpPr/>
+          <p:nvPr/>
+        </p:nvSpPr>
+        <p:spPr>
+          <a:xfrm>
+            <a:off x="713232" y="1847088"/>
             <a:ext cx="3364992" cy="841248"/>
           </a:xfrm>
           <a:prstGeom prst="rect">
@@ -12458,13 +12862,13 @@
       </p:sp>
       <p:sp>
         <p:nvSpPr>
-          <p:cNvPr id="26" name="TextBox 25"/>
-          <p:cNvSpPr txBox="1"/>
-          <p:nvPr/>
-        </p:nvSpPr>
-        <p:spPr>
-          <a:xfrm>
-            <a:off x="4617720" y="3044952"/>
+          <p:cNvPr id="10" name="TextBox 9"/>
+          <p:cNvSpPr txBox="1"/>
+          <p:nvPr/>
+        </p:nvSpPr>
+        <p:spPr>
+          <a:xfrm>
+            <a:off x="932688" y="1993392"/>
             <a:ext cx="1234440" cy="201168"/>
           </a:xfrm>
           <a:prstGeom prst="rect">
@@ -12493,20 +12897,20 @@
                 </a:solidFill>
                 <a:latin typeface="PingFang SC"/>
               </a:rPr>
-              <a:t>Web Assistant</a:t>
-            </a:r>
-          </a:p>
-        </p:txBody>
-      </p:sp>
-      <p:sp>
-        <p:nvSpPr>
-          <p:cNvPr id="27" name="TextBox 26"/>
-          <p:cNvSpPr txBox="1"/>
-          <p:nvPr/>
-        </p:nvSpPr>
-        <p:spPr>
-          <a:xfrm>
-            <a:off x="5751576" y="3017520"/>
+              <a:t>Before</a:t>
+            </a:r>
+          </a:p>
+        </p:txBody>
+      </p:sp>
+      <p:sp>
+        <p:nvSpPr>
+          <p:cNvPr id="11" name="TextBox 10"/>
+          <p:cNvSpPr txBox="1"/>
+          <p:nvPr/>
+        </p:nvSpPr>
+        <p:spPr>
+          <a:xfrm>
+            <a:off x="2066543" y="1965960"/>
             <a:ext cx="960120" cy="274320"/>
           </a:xfrm>
           <a:prstGeom prst="rect">
@@ -12531,24 +12935,24 @@
             <a:r>
               <a:rPr sz="1400" b="1">
                 <a:solidFill>
-                  <a:srgbClr val="17745A"/>
+                  <a:srgbClr val="C84438"/>
                 </a:solidFill>
                 <a:latin typeface="Helvetica Neue"/>
               </a:rPr>
-              <a:t>3 / 3</a:t>
-            </a:r>
-          </a:p>
-        </p:txBody>
-      </p:sp>
-      <p:sp>
-        <p:nvSpPr>
-          <p:cNvPr id="28" name="TextBox 27"/>
-          <p:cNvSpPr txBox="1"/>
-          <p:nvPr/>
-        </p:nvSpPr>
-        <p:spPr>
-          <a:xfrm>
-            <a:off x="6638544" y="3054096"/>
+              <a:t>2 / 5</a:t>
+            </a:r>
+          </a:p>
+        </p:txBody>
+      </p:sp>
+      <p:sp>
+        <p:nvSpPr>
+          <p:cNvPr id="12" name="TextBox 11"/>
+          <p:cNvSpPr txBox="1"/>
+          <p:nvPr/>
+        </p:nvSpPr>
+        <p:spPr>
+          <a:xfrm>
+            <a:off x="2953512" y="2002536"/>
             <a:ext cx="914400" cy="256032"/>
           </a:xfrm>
           <a:prstGeom prst="rect">
@@ -12577,20 +12981,20 @@
                 </a:solidFill>
                 <a:latin typeface="PingFang SC"/>
               </a:rPr>
-              <a:t>确认与提交分离</a:t>
-            </a:r>
-          </a:p>
-        </p:txBody>
-      </p:sp>
-      <p:sp>
-        <p:nvSpPr>
-          <p:cNvPr id="29" name="Rectangle 28"/>
+              <a:t>3 次行为失败</a:t>
+            </a:r>
+          </a:p>
+        </p:txBody>
+      </p:sp>
+      <p:sp>
+        <p:nvSpPr>
+          <p:cNvPr id="13" name="Rectangle 12"/>
           <p:cNvSpPr/>
           <p:nvPr/>
         </p:nvSpPr>
         <p:spPr>
           <a:xfrm>
-            <a:off x="8083296" y="2898648"/>
+            <a:off x="4398264" y="1847088"/>
             <a:ext cx="3364992" cy="841248"/>
           </a:xfrm>
           <a:prstGeom prst="rect">
@@ -12629,6 +13033,690 @@
       </p:sp>
       <p:sp>
         <p:nvSpPr>
+          <p:cNvPr id="14" name="TextBox 13"/>
+          <p:cNvSpPr txBox="1"/>
+          <p:nvPr/>
+        </p:nvSpPr>
+        <p:spPr>
+          <a:xfrm>
+            <a:off x="4617720" y="1993392"/>
+            <a:ext cx="1234440" cy="201168"/>
+          </a:xfrm>
+          <a:prstGeom prst="rect">
+            <a:avLst/>
+          </a:prstGeom>
+          <a:noFill/>
+        </p:spPr>
+        <p:txBody>
+          <a:bodyPr wrap="square" lIns="0" rIns="0" tIns="0" bIns="0" anchor="t">
+            <a:spAutoFit/>
+          </a:bodyPr>
+          <a:lstStyle/>
+          <a:p>
+            <a:pPr algn="l">
+              <a:lnSpc>
+                <a:spcPct val="108000"/>
+              </a:lnSpc>
+              <a:spcAft>
+                <a:spcPts val="0"/>
+              </a:spcAft>
+            </a:pPr>
+            <a:r>
+              <a:rPr sz="950" b="1">
+                <a:solidFill>
+                  <a:srgbClr val="67706B"/>
+                </a:solidFill>
+                <a:latin typeface="PingFang SC"/>
+              </a:rPr>
+              <a:t>Headline</a:t>
+            </a:r>
+          </a:p>
+        </p:txBody>
+      </p:sp>
+      <p:sp>
+        <p:nvSpPr>
+          <p:cNvPr id="15" name="TextBox 14"/>
+          <p:cNvSpPr txBox="1"/>
+          <p:nvPr/>
+        </p:nvSpPr>
+        <p:spPr>
+          <a:xfrm>
+            <a:off x="5751576" y="1965960"/>
+            <a:ext cx="960120" cy="274320"/>
+          </a:xfrm>
+          <a:prstGeom prst="rect">
+            <a:avLst/>
+          </a:prstGeom>
+          <a:noFill/>
+        </p:spPr>
+        <p:txBody>
+          <a:bodyPr wrap="square" lIns="0" rIns="0" tIns="0" bIns="0" anchor="t">
+            <a:spAutoFit/>
+          </a:bodyPr>
+          <a:lstStyle/>
+          <a:p>
+            <a:pPr algn="l">
+              <a:lnSpc>
+                <a:spcPct val="108000"/>
+              </a:lnSpc>
+              <a:spcAft>
+                <a:spcPts val="0"/>
+              </a:spcAft>
+            </a:pPr>
+            <a:r>
+              <a:rPr sz="1400" b="1">
+                <a:solidFill>
+                  <a:srgbClr val="17745A"/>
+                </a:solidFill>
+                <a:latin typeface="Helvetica Neue"/>
+              </a:rPr>
+              <a:t>5 / 5</a:t>
+            </a:r>
+          </a:p>
+        </p:txBody>
+      </p:sp>
+      <p:sp>
+        <p:nvSpPr>
+          <p:cNvPr id="16" name="TextBox 15"/>
+          <p:cNvSpPr txBox="1"/>
+          <p:nvPr/>
+        </p:nvSpPr>
+        <p:spPr>
+          <a:xfrm>
+            <a:off x="6638544" y="2002536"/>
+            <a:ext cx="914400" cy="256032"/>
+          </a:xfrm>
+          <a:prstGeom prst="rect">
+            <a:avLst/>
+          </a:prstGeom>
+          <a:noFill/>
+        </p:spPr>
+        <p:txBody>
+          <a:bodyPr wrap="square" lIns="0" rIns="0" tIns="0" bIns="0" anchor="t">
+            <a:spAutoFit/>
+          </a:bodyPr>
+          <a:lstStyle/>
+          <a:p>
+            <a:pPr algn="l">
+              <a:lnSpc>
+                <a:spcPct val="108000"/>
+              </a:lnSpc>
+              <a:spcAft>
+                <a:spcPts val="0"/>
+              </a:spcAft>
+            </a:pPr>
+            <a:r>
+              <a:rPr sz="860" b="0">
+                <a:solidFill>
+                  <a:srgbClr val="67706B"/>
+                </a:solidFill>
+                <a:latin typeface="PingFang SC"/>
+              </a:rPr>
+              <a:t>同 Case + Manifest</a:t>
+            </a:r>
+          </a:p>
+        </p:txBody>
+      </p:sp>
+      <p:sp>
+        <p:nvSpPr>
+          <p:cNvPr id="17" name="Rectangle 16"/>
+          <p:cNvSpPr/>
+          <p:nvPr/>
+        </p:nvSpPr>
+        <p:spPr>
+          <a:xfrm>
+            <a:off x="8083296" y="1847088"/>
+            <a:ext cx="3364992" cy="841248"/>
+          </a:xfrm>
+          <a:prstGeom prst="rect">
+            <a:avLst/>
+          </a:prstGeom>
+          <a:solidFill>
+            <a:srgbClr val="FFFFFF"/>
+          </a:solidFill>
+          <a:ln w="8890">
+            <a:solidFill>
+              <a:srgbClr val="D8DDD9"/>
+            </a:solidFill>
+          </a:ln>
+        </p:spPr>
+        <p:style>
+          <a:lnRef idx="1">
+            <a:schemeClr val="accent1"/>
+          </a:lnRef>
+          <a:fillRef idx="3">
+            <a:schemeClr val="accent1"/>
+          </a:fillRef>
+          <a:effectRef idx="2">
+            <a:schemeClr val="accent1"/>
+          </a:effectRef>
+          <a:fontRef idx="minor">
+            <a:schemeClr val="lt1"/>
+          </a:fontRef>
+        </p:style>
+        <p:txBody>
+          <a:bodyPr rtlCol="0" anchor="ctr"/>
+          <a:lstStyle/>
+          <a:p>
+            <a:pPr algn="ctr"/>
+          </a:p>
+        </p:txBody>
+      </p:sp>
+      <p:sp>
+        <p:nvSpPr>
+          <p:cNvPr id="18" name="TextBox 17"/>
+          <p:cNvSpPr txBox="1"/>
+          <p:nvPr/>
+        </p:nvSpPr>
+        <p:spPr>
+          <a:xfrm>
+            <a:off x="8302752" y="1993392"/>
+            <a:ext cx="1234440" cy="201168"/>
+          </a:xfrm>
+          <a:prstGeom prst="rect">
+            <a:avLst/>
+          </a:prstGeom>
+          <a:noFill/>
+        </p:spPr>
+        <p:txBody>
+          <a:bodyPr wrap="square" lIns="0" rIns="0" tIns="0" bIns="0" anchor="t">
+            <a:spAutoFit/>
+          </a:bodyPr>
+          <a:lstStyle/>
+          <a:p>
+            <a:pPr algn="l">
+              <a:lnSpc>
+                <a:spcPct val="108000"/>
+              </a:lnSpc>
+              <a:spcAft>
+                <a:spcPts val="0"/>
+              </a:spcAft>
+            </a:pPr>
+            <a:r>
+              <a:rPr sz="950" b="1">
+                <a:solidFill>
+                  <a:srgbClr val="67706B"/>
+                </a:solidFill>
+                <a:latin typeface="PingFang SC"/>
+              </a:rPr>
+              <a:t>Matrix</a:t>
+            </a:r>
+          </a:p>
+        </p:txBody>
+      </p:sp>
+      <p:sp>
+        <p:nvSpPr>
+          <p:cNvPr id="19" name="TextBox 18"/>
+          <p:cNvSpPr txBox="1"/>
+          <p:nvPr/>
+        </p:nvSpPr>
+        <p:spPr>
+          <a:xfrm>
+            <a:off x="9436608" y="1965960"/>
+            <a:ext cx="960120" cy="274320"/>
+          </a:xfrm>
+          <a:prstGeom prst="rect">
+            <a:avLst/>
+          </a:prstGeom>
+          <a:noFill/>
+        </p:spPr>
+        <p:txBody>
+          <a:bodyPr wrap="square" lIns="0" rIns="0" tIns="0" bIns="0" anchor="t">
+            <a:spAutoFit/>
+          </a:bodyPr>
+          <a:lstStyle/>
+          <a:p>
+            <a:pPr algn="l">
+              <a:lnSpc>
+                <a:spcPct val="108000"/>
+              </a:lnSpc>
+              <a:spcAft>
+                <a:spcPts val="0"/>
+              </a:spcAft>
+            </a:pPr>
+            <a:r>
+              <a:rPr sz="1400" b="1">
+                <a:solidFill>
+                  <a:srgbClr val="17745A"/>
+                </a:solidFill>
+                <a:latin typeface="Helvetica Neue"/>
+              </a:rPr>
+              <a:t>30 / 30</a:t>
+            </a:r>
+          </a:p>
+        </p:txBody>
+      </p:sp>
+      <p:sp>
+        <p:nvSpPr>
+          <p:cNvPr id="20" name="TextBox 19"/>
+          <p:cNvSpPr txBox="1"/>
+          <p:nvPr/>
+        </p:nvSpPr>
+        <p:spPr>
+          <a:xfrm>
+            <a:off x="10323576" y="2002536"/>
+            <a:ext cx="914400" cy="256032"/>
+          </a:xfrm>
+          <a:prstGeom prst="rect">
+            <a:avLst/>
+          </a:prstGeom>
+          <a:noFill/>
+        </p:spPr>
+        <p:txBody>
+          <a:bodyPr wrap="square" lIns="0" rIns="0" tIns="0" bIns="0" anchor="t">
+            <a:spAutoFit/>
+          </a:bodyPr>
+          <a:lstStyle/>
+          <a:p>
+            <a:pPr algn="l">
+              <a:lnSpc>
+                <a:spcPct val="108000"/>
+              </a:lnSpc>
+              <a:spcAft>
+                <a:spcPts val="0"/>
+              </a:spcAft>
+            </a:pPr>
+            <a:r>
+              <a:rPr sz="860" b="0">
+                <a:solidFill>
+                  <a:srgbClr val="67706B"/>
+                </a:solidFill>
+                <a:latin typeface="PingFang SC"/>
+              </a:rPr>
+              <a:t>6 Cells</a:t>
+            </a:r>
+          </a:p>
+        </p:txBody>
+      </p:sp>
+      <p:sp>
+        <p:nvSpPr>
+          <p:cNvPr id="21" name="Rectangle 20"/>
+          <p:cNvSpPr/>
+          <p:nvPr/>
+        </p:nvSpPr>
+        <p:spPr>
+          <a:xfrm>
+            <a:off x="713232" y="2898648"/>
+            <a:ext cx="3364992" cy="841248"/>
+          </a:xfrm>
+          <a:prstGeom prst="rect">
+            <a:avLst/>
+          </a:prstGeom>
+          <a:solidFill>
+            <a:srgbClr val="FFFFFF"/>
+          </a:solidFill>
+          <a:ln w="8890">
+            <a:solidFill>
+              <a:srgbClr val="D8DDD9"/>
+            </a:solidFill>
+          </a:ln>
+        </p:spPr>
+        <p:style>
+          <a:lnRef idx="1">
+            <a:schemeClr val="accent1"/>
+          </a:lnRef>
+          <a:fillRef idx="3">
+            <a:schemeClr val="accent1"/>
+          </a:fillRef>
+          <a:effectRef idx="2">
+            <a:schemeClr val="accent1"/>
+          </a:effectRef>
+          <a:fontRef idx="minor">
+            <a:schemeClr val="lt1"/>
+          </a:fontRef>
+        </p:style>
+        <p:txBody>
+          <a:bodyPr rtlCol="0" anchor="ctr"/>
+          <a:lstStyle/>
+          <a:p>
+            <a:pPr algn="ctr"/>
+          </a:p>
+        </p:txBody>
+      </p:sp>
+      <p:sp>
+        <p:nvSpPr>
+          <p:cNvPr id="22" name="TextBox 21"/>
+          <p:cNvSpPr txBox="1"/>
+          <p:nvPr/>
+        </p:nvSpPr>
+        <p:spPr>
+          <a:xfrm>
+            <a:off x="932688" y="3044952"/>
+            <a:ext cx="1234440" cy="201168"/>
+          </a:xfrm>
+          <a:prstGeom prst="rect">
+            <a:avLst/>
+          </a:prstGeom>
+          <a:noFill/>
+        </p:spPr>
+        <p:txBody>
+          <a:bodyPr wrap="square" lIns="0" rIns="0" tIns="0" bIns="0" anchor="t">
+            <a:spAutoFit/>
+          </a:bodyPr>
+          <a:lstStyle/>
+          <a:p>
+            <a:pPr algn="l">
+              <a:lnSpc>
+                <a:spcPct val="108000"/>
+              </a:lnSpc>
+              <a:spcAft>
+                <a:spcPts val="0"/>
+              </a:spcAft>
+            </a:pPr>
+            <a:r>
+              <a:rPr sz="950" b="1">
+                <a:solidFill>
+                  <a:srgbClr val="67706B"/>
+                </a:solidFill>
+                <a:latin typeface="PingFang SC"/>
+              </a:rPr>
+              <a:t>Sample replay</a:t>
+            </a:r>
+          </a:p>
+        </p:txBody>
+      </p:sp>
+      <p:sp>
+        <p:nvSpPr>
+          <p:cNvPr id="23" name="TextBox 22"/>
+          <p:cNvSpPr txBox="1"/>
+          <p:nvPr/>
+        </p:nvSpPr>
+        <p:spPr>
+          <a:xfrm>
+            <a:off x="2066543" y="3017520"/>
+            <a:ext cx="960120" cy="274320"/>
+          </a:xfrm>
+          <a:prstGeom prst="rect">
+            <a:avLst/>
+          </a:prstGeom>
+          <a:noFill/>
+        </p:spPr>
+        <p:txBody>
+          <a:bodyPr wrap="square" lIns="0" rIns="0" tIns="0" bIns="0" anchor="t">
+            <a:spAutoFit/>
+          </a:bodyPr>
+          <a:lstStyle/>
+          <a:p>
+            <a:pPr algn="l">
+              <a:lnSpc>
+                <a:spcPct val="108000"/>
+              </a:lnSpc>
+              <a:spcAft>
+                <a:spcPts val="0"/>
+              </a:spcAft>
+            </a:pPr>
+            <a:r>
+              <a:rPr sz="1400" b="1">
+                <a:solidFill>
+                  <a:srgbClr val="17745A"/>
+                </a:solidFill>
+                <a:latin typeface="Helvetica Neue"/>
+              </a:rPr>
+              <a:t>5 / 5</a:t>
+            </a:r>
+          </a:p>
+        </p:txBody>
+      </p:sp>
+      <p:sp>
+        <p:nvSpPr>
+          <p:cNvPr id="24" name="TextBox 23"/>
+          <p:cNvSpPr txBox="1"/>
+          <p:nvPr/>
+        </p:nvSpPr>
+        <p:spPr>
+          <a:xfrm>
+            <a:off x="2953512" y="3054096"/>
+            <a:ext cx="914400" cy="256032"/>
+          </a:xfrm>
+          <a:prstGeom prst="rect">
+            <a:avLst/>
+          </a:prstGeom>
+          <a:noFill/>
+        </p:spPr>
+        <p:txBody>
+          <a:bodyPr wrap="square" lIns="0" rIns="0" tIns="0" bIns="0" anchor="t">
+            <a:spAutoFit/>
+          </a:bodyPr>
+          <a:lstStyle/>
+          <a:p>
+            <a:pPr algn="l">
+              <a:lnSpc>
+                <a:spcPct val="108000"/>
+              </a:lnSpc>
+              <a:spcAft>
+                <a:spcPts val="0"/>
+              </a:spcAft>
+            </a:pPr>
+            <a:r>
+              <a:rPr sz="860" b="0">
+                <a:solidFill>
+                  <a:srgbClr val="67706B"/>
+                </a:solidFill>
+                <a:latin typeface="PingFang SC"/>
+              </a:rPr>
+              <a:t>0 real_tool</a:t>
+            </a:r>
+          </a:p>
+        </p:txBody>
+      </p:sp>
+      <p:sp>
+        <p:nvSpPr>
+          <p:cNvPr id="25" name="Rectangle 24"/>
+          <p:cNvSpPr/>
+          <p:nvPr/>
+        </p:nvSpPr>
+        <p:spPr>
+          <a:xfrm>
+            <a:off x="4398264" y="2898648"/>
+            <a:ext cx="3364992" cy="841248"/>
+          </a:xfrm>
+          <a:prstGeom prst="rect">
+            <a:avLst/>
+          </a:prstGeom>
+          <a:solidFill>
+            <a:srgbClr val="FFFFFF"/>
+          </a:solidFill>
+          <a:ln w="8890">
+            <a:solidFill>
+              <a:srgbClr val="D8DDD9"/>
+            </a:solidFill>
+          </a:ln>
+        </p:spPr>
+        <p:style>
+          <a:lnRef idx="1">
+            <a:schemeClr val="accent1"/>
+          </a:lnRef>
+          <a:fillRef idx="3">
+            <a:schemeClr val="accent1"/>
+          </a:fillRef>
+          <a:effectRef idx="2">
+            <a:schemeClr val="accent1"/>
+          </a:effectRef>
+          <a:fontRef idx="minor">
+            <a:schemeClr val="lt1"/>
+          </a:fontRef>
+        </p:style>
+        <p:txBody>
+          <a:bodyPr rtlCol="0" anchor="ctr"/>
+          <a:lstStyle/>
+          <a:p>
+            <a:pPr algn="ctr"/>
+          </a:p>
+        </p:txBody>
+      </p:sp>
+      <p:sp>
+        <p:nvSpPr>
+          <p:cNvPr id="26" name="TextBox 25"/>
+          <p:cNvSpPr txBox="1"/>
+          <p:nvPr/>
+        </p:nvSpPr>
+        <p:spPr>
+          <a:xfrm>
+            <a:off x="4617720" y="3044952"/>
+            <a:ext cx="1234440" cy="201168"/>
+          </a:xfrm>
+          <a:prstGeom prst="rect">
+            <a:avLst/>
+          </a:prstGeom>
+          <a:noFill/>
+        </p:spPr>
+        <p:txBody>
+          <a:bodyPr wrap="square" lIns="0" rIns="0" tIns="0" bIns="0" anchor="t">
+            <a:spAutoFit/>
+          </a:bodyPr>
+          <a:lstStyle/>
+          <a:p>
+            <a:pPr algn="l">
+              <a:lnSpc>
+                <a:spcPct val="108000"/>
+              </a:lnSpc>
+              <a:spcAft>
+                <a:spcPts val="0"/>
+              </a:spcAft>
+            </a:pPr>
+            <a:r>
+              <a:rPr sz="950" b="1">
+                <a:solidFill>
+                  <a:srgbClr val="67706B"/>
+                </a:solidFill>
+                <a:latin typeface="PingFang SC"/>
+              </a:rPr>
+              <a:t>Web Assistant</a:t>
+            </a:r>
+          </a:p>
+        </p:txBody>
+      </p:sp>
+      <p:sp>
+        <p:nvSpPr>
+          <p:cNvPr id="27" name="TextBox 26"/>
+          <p:cNvSpPr txBox="1"/>
+          <p:nvPr/>
+        </p:nvSpPr>
+        <p:spPr>
+          <a:xfrm>
+            <a:off x="5751576" y="3017520"/>
+            <a:ext cx="960120" cy="274320"/>
+          </a:xfrm>
+          <a:prstGeom prst="rect">
+            <a:avLst/>
+          </a:prstGeom>
+          <a:noFill/>
+        </p:spPr>
+        <p:txBody>
+          <a:bodyPr wrap="square" lIns="0" rIns="0" tIns="0" bIns="0" anchor="t">
+            <a:spAutoFit/>
+          </a:bodyPr>
+          <a:lstStyle/>
+          <a:p>
+            <a:pPr algn="l">
+              <a:lnSpc>
+                <a:spcPct val="108000"/>
+              </a:lnSpc>
+              <a:spcAft>
+                <a:spcPts val="0"/>
+              </a:spcAft>
+            </a:pPr>
+            <a:r>
+              <a:rPr sz="1400" b="1">
+                <a:solidFill>
+                  <a:srgbClr val="17745A"/>
+                </a:solidFill>
+                <a:latin typeface="Helvetica Neue"/>
+              </a:rPr>
+              <a:t>3 / 3</a:t>
+            </a:r>
+          </a:p>
+        </p:txBody>
+      </p:sp>
+      <p:sp>
+        <p:nvSpPr>
+          <p:cNvPr id="28" name="TextBox 27"/>
+          <p:cNvSpPr txBox="1"/>
+          <p:nvPr/>
+        </p:nvSpPr>
+        <p:spPr>
+          <a:xfrm>
+            <a:off x="6638544" y="3054096"/>
+            <a:ext cx="914400" cy="256032"/>
+          </a:xfrm>
+          <a:prstGeom prst="rect">
+            <a:avLst/>
+          </a:prstGeom>
+          <a:noFill/>
+        </p:spPr>
+        <p:txBody>
+          <a:bodyPr wrap="square" lIns="0" rIns="0" tIns="0" bIns="0" anchor="t">
+            <a:spAutoFit/>
+          </a:bodyPr>
+          <a:lstStyle/>
+          <a:p>
+            <a:pPr algn="l">
+              <a:lnSpc>
+                <a:spcPct val="108000"/>
+              </a:lnSpc>
+              <a:spcAft>
+                <a:spcPts val="0"/>
+              </a:spcAft>
+            </a:pPr>
+            <a:r>
+              <a:rPr sz="860" b="0">
+                <a:solidFill>
+                  <a:srgbClr val="67706B"/>
+                </a:solidFill>
+                <a:latin typeface="PingFang SC"/>
+              </a:rPr>
+              <a:t>确认与提交分离</a:t>
+            </a:r>
+          </a:p>
+        </p:txBody>
+      </p:sp>
+      <p:sp>
+        <p:nvSpPr>
+          <p:cNvPr id="29" name="Rectangle 28"/>
+          <p:cNvSpPr/>
+          <p:nvPr/>
+        </p:nvSpPr>
+        <p:spPr>
+          <a:xfrm>
+            <a:off x="8083296" y="2898648"/>
+            <a:ext cx="3364992" cy="841248"/>
+          </a:xfrm>
+          <a:prstGeom prst="rect">
+            <a:avLst/>
+          </a:prstGeom>
+          <a:solidFill>
+            <a:srgbClr val="FFFFFF"/>
+          </a:solidFill>
+          <a:ln w="8890">
+            <a:solidFill>
+              <a:srgbClr val="D8DDD9"/>
+            </a:solidFill>
+          </a:ln>
+        </p:spPr>
+        <p:style>
+          <a:lnRef idx="1">
+            <a:schemeClr val="accent1"/>
+          </a:lnRef>
+          <a:fillRef idx="3">
+            <a:schemeClr val="accent1"/>
+          </a:fillRef>
+          <a:effectRef idx="2">
+            <a:schemeClr val="accent1"/>
+          </a:effectRef>
+          <a:fontRef idx="minor">
+            <a:schemeClr val="lt1"/>
+          </a:fontRef>
+        </p:style>
+        <p:txBody>
+          <a:bodyPr rtlCol="0" anchor="ctr"/>
+          <a:lstStyle/>
+          <a:p>
+            <a:pPr algn="ctr"/>
+          </a:p>
+        </p:txBody>
+      </p:sp>
+      <p:sp>
+        <p:nvSpPr>
           <p:cNvPr id="30" name="TextBox 29"/>
           <p:cNvSpPr txBox="1"/>
           <p:nvPr/>
@@ -12875,7 +13963,7 @@
                 </a:solidFill>
                 <a:latin typeface="PingFang SC"/>
               </a:rPr>
-              <a:t>Sample 仅覆盖 inspect_image；动态引用等值以 Timeline 展示；正式录制必须生成新 ID；</a:t>
+              <a:t>Sample 仅覆盖 inspect_image；动态引用等值以 Timeline 展示；全部 ID 来自干净录制库；</a:t>
             </a:r>
           </a:p>
           <a:p>
@@ -13300,7 +14388,7 @@
                 </a:solidFill>
                 <a:latin typeface="Helvetica Neue"/>
               </a:rPr>
-              <a:t>02 / 16</a:t>
+              <a:t>02 / 18</a:t>
             </a:r>
           </a:p>
         </p:txBody>
@@ -14657,7 +15745,7 @@
                 </a:solidFill>
                 <a:latin typeface="Helvetica Neue"/>
               </a:rPr>
-              <a:t>03 / 16</a:t>
+              <a:t>03 / 18</a:t>
             </a:r>
           </a:p>
         </p:txBody>
@@ -15903,7 +16991,7 @@
                 </a:solidFill>
                 <a:latin typeface="Helvetica Neue"/>
               </a:rPr>
-              <a:t>04 / 16</a:t>
+              <a:t>04 / 18</a:t>
             </a:r>
           </a:p>
         </p:txBody>
@@ -18030,7 +19118,7 @@
                 </a:solidFill>
                 <a:latin typeface="Helvetica Neue"/>
               </a:rPr>
-              <a:t>05 / 16</a:t>
+              <a:t>05 / 18</a:t>
             </a:r>
           </a:p>
         </p:txBody>
@@ -18944,7 +20032,7 @@
                 </a:solidFill>
                 <a:latin typeface="Helvetica Neue"/>
               </a:rPr>
-              <a:t>06 / 16</a:t>
+              <a:t>06 / 18</a:t>
             </a:r>
           </a:p>
         </p:txBody>
@@ -20721,7 +21809,7 @@
                 </a:solidFill>
                 <a:latin typeface="Helvetica Neue"/>
               </a:rPr>
-              <a:t>07 / 16</a:t>
+              <a:t>07 / 18</a:t>
             </a:r>
           </a:p>
         </p:txBody>
@@ -21839,7 +22927,7 @@
                 </a:solidFill>
                 <a:latin typeface="Helvetica Neue"/>
               </a:rPr>
-              <a:t>08 / 16</a:t>
+              <a:t>08 / 18</a:t>
             </a:r>
           </a:p>
         </p:txBody>
@@ -23609,7 +24697,7 @@
                 </a:solidFill>
                 <a:latin typeface="Helvetica Neue"/>
               </a:rPr>
-              <a:t>09 / 16</a:t>
+              <a:t>09 / 18</a:t>
             </a:r>
           </a:p>
         </p:txBody>

--- a/docs/competition/AgentRig-GOAI-2026-初赛方案.pptx
+++ b/docs/competition/AgentRig-GOAI-2026-初赛方案.pptx
@@ -11849,7 +11849,7 @@
         <p:spPr>
           <a:xfrm>
             <a:off x="7406640" y="1810512"/>
-            <a:ext cx="4078224" cy="2276856"/>
+            <a:ext cx="4078224" cy="2130552"/>
           </a:xfrm>
           <a:prstGeom prst="rect">
             <a:avLst/>
@@ -11887,7 +11887,7 @@
       </p:sp>
       <p:pic>
         <p:nvPicPr>
-          <p:cNvPr id="13" name="Picture 12" descr="prod-live-02-regression.png"/>
+          <p:cNvPr id="13" name="Picture 12" descr="prod-platform-batches.png"/>
           <p:cNvPicPr>
             <a:picLocks noChangeAspect="1"/>
           </p:cNvPicPr>
@@ -11902,7 +11902,7 @@
         <p:spPr>
           <a:xfrm>
             <a:off x="7424927" y="1828800"/>
-            <a:ext cx="4041648" cy="2240280"/>
+            <a:ext cx="4041648" cy="2093976"/>
           </a:xfrm>
           <a:prstGeom prst="rect">
             <a:avLst/>
@@ -11986,7 +11986,7 @@
         </p:nvSpPr>
         <p:spPr>
           <a:xfrm>
-            <a:off x="7424927" y="4078224"/>
+            <a:off x="7424927" y="4005072"/>
             <a:ext cx="4041648" cy="182880"/>
           </a:xfrm>
           <a:prstGeom prst="rect">
@@ -12015,7 +12015,7 @@
                 </a:solidFill>
                 <a:latin typeface="PingFang SC"/>
               </a:rPr>
-              <a:t>哨兵异常 → 归因 → 修用例/修输入</a:t>
+              <a:t>内部评测平台:30 个批次任务,LIVE API 常态运行</a:t>
             </a:r>
           </a:p>
         </p:txBody>
